--- a/skh-pt/pptx/deck10.pptx
+++ b/skh-pt/pptx/deck10.pptx
@@ -3433,9 +3433,6 @@
               </a:rPr>
               <a:t>어떤 문제를, 어떻게 해결했고, </a:t>
             </a:r>
-            <a:pPr algn="l" indent="0" marL="0">
-              <a:buNone/>
-            </a:pPr>
             <a:r>
               <a:rPr lang="ko-KR" altLang="en-US" sz="2300" spc="-92" kern="0" dirty="0">
                 <a:solidFill>
@@ -3593,7 +3590,7 @@
               <a:buNone/>
             </a:pPr>
             <a:r>
-              <a:rPr lang="ko-KR" altLang="en-US" sz="3200" spc="-96" kern="0" dirty="0">
+              <a:rPr lang="ko-KR" altLang="en-US" sz="3200" spc="185" kern="0" dirty="0">
                 <a:solidFill>
                   <a:srgbClr val="102A4C"/>
                 </a:solidFill>
@@ -3645,8 +3642,120 @@
               </a:rPr>
               <a:t>연구 배경 및</a:t>
             </a:r>
+            <a:br/>
+            <a:r>
+              <a:rPr lang="ko-KR" altLang="en-US" sz="1500" spc="-53" kern="0" dirty="0">
+                <a:solidFill>
+                  <a:srgbClr val="102A4C"/>
+                </a:solidFill>
+                <a:latin typeface="Pretendard ExtraBold" pitchFamily="34" charset="0"/>
+                <a:ea typeface="Pretendard ExtraBold" pitchFamily="34" charset="-127"/>
+                <a:cs typeface="Pretendard ExtraBold" pitchFamily="34" charset="-120"/>
+              </a:rPr>
+              <a:t>문제 정의</a:t>
+            </a:r>
             <a:endParaRPr lang="en-US" sz="1500" dirty="0"/>
           </a:p>
+        </p:txBody>
+      </p:sp>
+      <p:sp>
+        <p:nvSpPr>
+          <p:cNvPr id="50" name="왜 이 연구가 필요한가"/>
+          <p:cNvSpPr txBox="1"/>
+          <p:nvPr/>
+        </p:nvSpPr>
+        <p:spPr>
+          <a:xfrm>
+            <a:off x="812800" y="4626074"/>
+            <a:ext cx="1221782" cy="165100"/>
+          </a:xfrm>
+          <a:prstGeom prst="rect">
+            <a:avLst/>
+          </a:prstGeom>
+          <a:noFill/>
+          <a:ln/>
+        </p:spPr>
+        <p:txBody>
+          <a:bodyPr wrap="none" lIns="0" tIns="0" rIns="0" bIns="0" rtlCol="0" anchor="ctr"/>
+          <a:lstStyle/>
+          <a:p>
+            <a:pPr algn="l" indent="0" marL="0">
+              <a:buNone/>
+            </a:pPr>
+            <a:r>
+              <a:rPr lang="ko-KR" altLang="en-US" sz="1100" spc="-22" kern="0" dirty="0">
+                <a:solidFill>
+                  <a:srgbClr val="3F4654"/>
+                </a:solidFill>
+                <a:latin typeface="Pretendard SemiBold" pitchFamily="34" charset="0"/>
+                <a:ea typeface="Pretendard SemiBold" pitchFamily="34" charset="-127"/>
+                <a:cs typeface="Pretendard SemiBold" pitchFamily="34" charset="-120"/>
+              </a:rPr>
+              <a:t>왜 이 연구가 필요한가</a:t>
+            </a:r>
+            <a:endParaRPr lang="en-US" sz="1100" dirty="0"/>
+          </a:p>
+        </p:txBody>
+      </p:sp>
+      <p:sp>
+        <p:nvSpPr>
+          <p:cNvPr id="51" name="02"/>
+          <p:cNvSpPr txBox="1"/>
+          <p:nvPr/>
+        </p:nvSpPr>
+        <p:spPr>
+          <a:xfrm>
+            <a:off x="2921000" y="2619474"/>
+            <a:ext cx="569416" cy="482600"/>
+          </a:xfrm>
+          <a:prstGeom prst="rect">
+            <a:avLst/>
+          </a:prstGeom>
+          <a:noFill/>
+          <a:ln/>
+        </p:spPr>
+        <p:txBody>
+          <a:bodyPr wrap="none" lIns="0" tIns="0" rIns="0" bIns="0" rtlCol="0" anchor="ctr"/>
+          <a:lstStyle/>
+          <a:p>
+            <a:pPr algn="l" indent="0" marL="0">
+              <a:buNone/>
+            </a:pPr>
+            <a:r>
+              <a:rPr lang="ko-KR" altLang="en-US" sz="3200" spc="-38" kern="0" dirty="0">
+                <a:solidFill>
+                  <a:srgbClr val="102A4C"/>
+                </a:solidFill>
+                <a:latin typeface="Pretendard ExtraBold" pitchFamily="34" charset="0"/>
+                <a:ea typeface="Pretendard ExtraBold" pitchFamily="34" charset="-127"/>
+                <a:cs typeface="Pretendard ExtraBold" pitchFamily="34" charset="-120"/>
+              </a:rPr>
+              <a:t>02</a:t>
+            </a:r>
+            <a:endParaRPr lang="en-US" sz="3200" dirty="0"/>
+          </a:p>
+        </p:txBody>
+      </p:sp>
+      <p:sp>
+        <p:nvSpPr>
+          <p:cNvPr id="52" name="기존 연구 한계 및연구 목표"/>
+          <p:cNvSpPr txBox="1"/>
+          <p:nvPr/>
+        </p:nvSpPr>
+        <p:spPr>
+          <a:xfrm>
+            <a:off x="2921000" y="3422154"/>
+            <a:ext cx="1286462" cy="502841"/>
+          </a:xfrm>
+          <a:prstGeom prst="rect">
+            <a:avLst/>
+          </a:prstGeom>
+          <a:noFill/>
+          <a:ln/>
+        </p:spPr>
+        <p:txBody>
+          <a:bodyPr wrap="none" lIns="0" tIns="0" rIns="0" bIns="0" rtlCol="0" anchor="t"/>
+          <a:lstStyle/>
           <a:p>
             <a:pPr algn="l" indent="0" marL="0">
               <a:lnSpc>
@@ -3663,7 +3772,19 @@
                 <a:ea typeface="Pretendard ExtraBold" pitchFamily="34" charset="-127"/>
                 <a:cs typeface="Pretendard ExtraBold" pitchFamily="34" charset="-120"/>
               </a:rPr>
-              <a:t>문제 정의</a:t>
+              <a:t>기존 연구 한계 및</a:t>
+            </a:r>
+            <a:br/>
+            <a:r>
+              <a:rPr lang="ko-KR" altLang="en-US" sz="1500" spc="-53" kern="0" dirty="0">
+                <a:solidFill>
+                  <a:srgbClr val="102A4C"/>
+                </a:solidFill>
+                <a:latin typeface="Pretendard ExtraBold" pitchFamily="34" charset="0"/>
+                <a:ea typeface="Pretendard ExtraBold" pitchFamily="34" charset="-127"/>
+                <a:cs typeface="Pretendard ExtraBold" pitchFamily="34" charset="-120"/>
+              </a:rPr>
+              <a:t>연구 목표</a:t>
             </a:r>
             <a:endParaRPr lang="en-US" sz="1500" dirty="0"/>
           </a:p>
@@ -3671,26 +3792,29 @@
       </p:sp>
       <p:sp>
         <p:nvSpPr>
-          <p:cNvPr id="50" name="왜 이 연구가 필요한가"/>
-          <p:cNvSpPr txBox="1"/>
-          <p:nvPr/>
-        </p:nvSpPr>
-        <p:spPr>
-          <a:xfrm>
-            <a:off x="812800" y="4626074"/>
-            <a:ext cx="1221782" cy="165100"/>
-          </a:xfrm>
-          <a:prstGeom prst="rect">
-            <a:avLst/>
-          </a:prstGeom>
-          <a:noFill/>
-          <a:ln/>
-        </p:spPr>
-        <p:txBody>
-          <a:bodyPr wrap="none" lIns="0" tIns="0" rIns="0" bIns="0" rtlCol="0" anchor="ctr"/>
+          <p:cNvPr id="53" name="기존 연구로는 왜 안 되는가,그래서 무엇을 목표로 했는가"/>
+          <p:cNvSpPr txBox="1"/>
+          <p:nvPr/>
+        </p:nvSpPr>
+        <p:spPr>
+          <a:xfrm>
+            <a:off x="2921000" y="4588669"/>
+            <a:ext cx="1596825" cy="405011"/>
+          </a:xfrm>
+          <a:prstGeom prst="rect">
+            <a:avLst/>
+          </a:prstGeom>
+          <a:noFill/>
+          <a:ln/>
+        </p:spPr>
+        <p:txBody>
+          <a:bodyPr wrap="none" lIns="0" tIns="0" rIns="0" bIns="0" rtlCol="0" anchor="t"/>
           <a:lstStyle/>
           <a:p>
             <a:pPr algn="l" indent="0" marL="0">
+              <a:lnSpc>
+                <a:spcPts val="1595"/>
+              </a:lnSpc>
               <a:buNone/>
             </a:pPr>
             <a:r>
@@ -3702,7 +3826,19 @@
                 <a:ea typeface="Pretendard SemiBold" pitchFamily="34" charset="-127"/>
                 <a:cs typeface="Pretendard SemiBold" pitchFamily="34" charset="-120"/>
               </a:rPr>
-              <a:t>왜 이 연구가 필요한가</a:t>
+              <a:t>기존 연구로는 왜 안 되는가,</a:t>
+            </a:r>
+            <a:br/>
+            <a:r>
+              <a:rPr lang="ko-KR" altLang="en-US" sz="1100" spc="-22" kern="0" dirty="0">
+                <a:solidFill>
+                  <a:srgbClr val="3F4654"/>
+                </a:solidFill>
+                <a:latin typeface="Pretendard SemiBold" pitchFamily="34" charset="0"/>
+                <a:ea typeface="Pretendard SemiBold" pitchFamily="34" charset="-127"/>
+                <a:cs typeface="Pretendard SemiBold" pitchFamily="34" charset="-120"/>
+              </a:rPr>
+              <a:t>그래서 무엇을 목표로 했는가</a:t>
             </a:r>
             <a:endParaRPr lang="en-US" sz="1100" dirty="0"/>
           </a:p>
@@ -3710,13 +3846,13 @@
       </p:sp>
       <p:sp>
         <p:nvSpPr>
-          <p:cNvPr id="51" name="02"/>
-          <p:cNvSpPr txBox="1"/>
-          <p:nvPr/>
-        </p:nvSpPr>
-        <p:spPr>
-          <a:xfrm>
-            <a:off x="2921000" y="2619474"/>
+          <p:cNvPr id="54" name="03"/>
+          <p:cNvSpPr txBox="1"/>
+          <p:nvPr/>
+        </p:nvSpPr>
+        <p:spPr>
+          <a:xfrm>
+            <a:off x="5308600" y="2619474"/>
             <a:ext cx="569416" cy="482600"/>
           </a:xfrm>
           <a:prstGeom prst="rect">
@@ -3733,7 +3869,7 @@
               <a:buNone/>
             </a:pPr>
             <a:r>
-              <a:rPr lang="ko-KR" altLang="en-US" sz="3200" spc="-96" kern="0" dirty="0">
+              <a:rPr lang="ko-KR" altLang="en-US" sz="3200" spc="-83" kern="0" dirty="0">
                 <a:solidFill>
                   <a:srgbClr val="102A4C"/>
                 </a:solidFill>
@@ -3741,7 +3877,7 @@
                 <a:ea typeface="Pretendard ExtraBold" pitchFamily="34" charset="-127"/>
                 <a:cs typeface="Pretendard ExtraBold" pitchFamily="34" charset="-120"/>
               </a:rPr>
-              <a:t>02</a:t>
+              <a:t>03</a:t>
             </a:r>
             <a:endParaRPr lang="en-US" sz="3200" dirty="0"/>
           </a:p>
@@ -3749,14 +3885,263 @@
       </p:sp>
       <p:sp>
         <p:nvSpPr>
-          <p:cNvPr id="52" name="기존 연구 한계 및연구 목표"/>
-          <p:cNvSpPr txBox="1"/>
-          <p:nvPr/>
-        </p:nvSpPr>
-        <p:spPr>
-          <a:xfrm>
-            <a:off x="2921000" y="3422154"/>
-            <a:ext cx="1286462" cy="502841"/>
+          <p:cNvPr id="55" name="연구 방법"/>
+          <p:cNvSpPr txBox="1"/>
+          <p:nvPr/>
+        </p:nvSpPr>
+        <p:spPr>
+          <a:xfrm>
+            <a:off x="5308600" y="3444974"/>
+            <a:ext cx="718641" cy="228600"/>
+          </a:xfrm>
+          <a:prstGeom prst="rect">
+            <a:avLst/>
+          </a:prstGeom>
+          <a:noFill/>
+          <a:ln/>
+        </p:spPr>
+        <p:txBody>
+          <a:bodyPr wrap="none" lIns="0" tIns="0" rIns="0" bIns="0" rtlCol="0" anchor="ctr"/>
+          <a:lstStyle/>
+          <a:p>
+            <a:pPr algn="l" indent="0" marL="0">
+              <a:buNone/>
+            </a:pPr>
+            <a:r>
+              <a:rPr lang="ko-KR" altLang="en-US" sz="1500" spc="-53" kern="0" dirty="0">
+                <a:solidFill>
+                  <a:srgbClr val="102A4C"/>
+                </a:solidFill>
+                <a:latin typeface="Pretendard ExtraBold" pitchFamily="34" charset="0"/>
+                <a:ea typeface="Pretendard ExtraBold" pitchFamily="34" charset="-127"/>
+                <a:cs typeface="Pretendard ExtraBold" pitchFamily="34" charset="-120"/>
+              </a:rPr>
+              <a:t>연구 방법</a:t>
+            </a:r>
+            <a:endParaRPr lang="en-US" sz="1500" dirty="0"/>
+          </a:p>
+        </p:txBody>
+      </p:sp>
+      <p:sp>
+        <p:nvSpPr>
+          <p:cNvPr id="56" name="어떻게 해결했는가"/>
+          <p:cNvSpPr txBox="1"/>
+          <p:nvPr/>
+        </p:nvSpPr>
+        <p:spPr>
+          <a:xfrm>
+            <a:off x="5308600" y="4626074"/>
+            <a:ext cx="1032367" cy="165100"/>
+          </a:xfrm>
+          <a:prstGeom prst="rect">
+            <a:avLst/>
+          </a:prstGeom>
+          <a:noFill/>
+          <a:ln/>
+        </p:spPr>
+        <p:txBody>
+          <a:bodyPr wrap="none" lIns="0" tIns="0" rIns="0" bIns="0" rtlCol="0" anchor="ctr"/>
+          <a:lstStyle/>
+          <a:p>
+            <a:pPr algn="l" indent="0" marL="0">
+              <a:buNone/>
+            </a:pPr>
+            <a:r>
+              <a:rPr lang="ko-KR" altLang="en-US" sz="1100" spc="-22" kern="0" dirty="0">
+                <a:solidFill>
+                  <a:srgbClr val="3F4654"/>
+                </a:solidFill>
+                <a:latin typeface="Pretendard SemiBold" pitchFamily="34" charset="0"/>
+                <a:ea typeface="Pretendard SemiBold" pitchFamily="34" charset="-127"/>
+                <a:cs typeface="Pretendard SemiBold" pitchFamily="34" charset="-120"/>
+              </a:rPr>
+              <a:t>어떻게 해결했는가</a:t>
+            </a:r>
+            <a:endParaRPr lang="en-US" sz="1100" dirty="0"/>
+          </a:p>
+        </p:txBody>
+      </p:sp>
+      <p:sp>
+        <p:nvSpPr>
+          <p:cNvPr id="57" name="04"/>
+          <p:cNvSpPr txBox="1"/>
+          <p:nvPr/>
+        </p:nvSpPr>
+        <p:spPr>
+          <a:xfrm>
+            <a:off x="7416800" y="2619474"/>
+            <a:ext cx="569416" cy="482600"/>
+          </a:xfrm>
+          <a:prstGeom prst="rect">
+            <a:avLst/>
+          </a:prstGeom>
+          <a:noFill/>
+          <a:ln/>
+        </p:spPr>
+        <p:txBody>
+          <a:bodyPr wrap="none" lIns="0" tIns="0" rIns="0" bIns="0" rtlCol="0" anchor="ctr"/>
+          <a:lstStyle/>
+          <a:p>
+            <a:pPr algn="l" indent="0" marL="0">
+              <a:buNone/>
+            </a:pPr>
+            <a:r>
+              <a:rPr lang="ko-KR" altLang="en-US" sz="3200" spc="-118" kern="0" dirty="0">
+                <a:solidFill>
+                  <a:srgbClr val="102A4C"/>
+                </a:solidFill>
+                <a:latin typeface="Pretendard ExtraBold" pitchFamily="34" charset="0"/>
+                <a:ea typeface="Pretendard ExtraBold" pitchFamily="34" charset="-127"/>
+                <a:cs typeface="Pretendard ExtraBold" pitchFamily="34" charset="-120"/>
+              </a:rPr>
+              <a:t>04</a:t>
+            </a:r>
+            <a:endParaRPr lang="en-US" sz="3200" dirty="0"/>
+          </a:p>
+        </p:txBody>
+      </p:sp>
+      <p:sp>
+        <p:nvSpPr>
+          <p:cNvPr id="58" name="연구 결과 및 기여"/>
+          <p:cNvSpPr txBox="1"/>
+          <p:nvPr/>
+        </p:nvSpPr>
+        <p:spPr>
+          <a:xfrm>
+            <a:off x="7416800" y="3444974"/>
+            <a:ext cx="1286462" cy="228600"/>
+          </a:xfrm>
+          <a:prstGeom prst="rect">
+            <a:avLst/>
+          </a:prstGeom>
+          <a:noFill/>
+          <a:ln/>
+        </p:spPr>
+        <p:txBody>
+          <a:bodyPr wrap="none" lIns="0" tIns="0" rIns="0" bIns="0" rtlCol="0" anchor="ctr"/>
+          <a:lstStyle/>
+          <a:p>
+            <a:pPr algn="l" indent="0" marL="0">
+              <a:buNone/>
+            </a:pPr>
+            <a:r>
+              <a:rPr lang="ko-KR" altLang="en-US" sz="1500" spc="-53" kern="0" dirty="0">
+                <a:solidFill>
+                  <a:srgbClr val="102A4C"/>
+                </a:solidFill>
+                <a:latin typeface="Pretendard ExtraBold" pitchFamily="34" charset="0"/>
+                <a:ea typeface="Pretendard ExtraBold" pitchFamily="34" charset="-127"/>
+                <a:cs typeface="Pretendard ExtraBold" pitchFamily="34" charset="-120"/>
+              </a:rPr>
+              <a:t>연구 결과 및 기여</a:t>
+            </a:r>
+            <a:endParaRPr lang="en-US" sz="1500" dirty="0"/>
+          </a:p>
+        </p:txBody>
+      </p:sp>
+      <p:sp>
+        <p:nvSpPr>
+          <p:cNvPr id="59" name="얼마나 잘 됐고,어떤 의미가 있는가"/>
+          <p:cNvSpPr txBox="1"/>
+          <p:nvPr/>
+        </p:nvSpPr>
+        <p:spPr>
+          <a:xfrm>
+            <a:off x="7416800" y="4588669"/>
+            <a:ext cx="1064550" cy="405011"/>
+          </a:xfrm>
+          <a:prstGeom prst="rect">
+            <a:avLst/>
+          </a:prstGeom>
+          <a:noFill/>
+          <a:ln/>
+        </p:spPr>
+        <p:txBody>
+          <a:bodyPr wrap="none" lIns="0" tIns="0" rIns="0" bIns="0" rtlCol="0" anchor="t"/>
+          <a:lstStyle/>
+          <a:p>
+            <a:pPr algn="l" indent="0" marL="0">
+              <a:lnSpc>
+                <a:spcPts val="1595"/>
+              </a:lnSpc>
+              <a:buNone/>
+            </a:pPr>
+            <a:r>
+              <a:rPr lang="ko-KR" altLang="en-US" sz="1100" spc="-22" kern="0" dirty="0">
+                <a:solidFill>
+                  <a:srgbClr val="3F4654"/>
+                </a:solidFill>
+                <a:latin typeface="Pretendard SemiBold" pitchFamily="34" charset="0"/>
+                <a:ea typeface="Pretendard SemiBold" pitchFamily="34" charset="-127"/>
+                <a:cs typeface="Pretendard SemiBold" pitchFamily="34" charset="-120"/>
+              </a:rPr>
+              <a:t>얼마나 잘 됐고,</a:t>
+            </a:r>
+            <a:br/>
+            <a:r>
+              <a:rPr lang="ko-KR" altLang="en-US" sz="1100" spc="-22" kern="0" dirty="0">
+                <a:solidFill>
+                  <a:srgbClr val="3F4654"/>
+                </a:solidFill>
+                <a:latin typeface="Pretendard SemiBold" pitchFamily="34" charset="0"/>
+                <a:ea typeface="Pretendard SemiBold" pitchFamily="34" charset="-127"/>
+                <a:cs typeface="Pretendard SemiBold" pitchFamily="34" charset="-120"/>
+              </a:rPr>
+              <a:t>어떤 의미가 있는가</a:t>
+            </a:r>
+            <a:endParaRPr lang="en-US" sz="1100" dirty="0"/>
+          </a:p>
+        </p:txBody>
+      </p:sp>
+      <p:sp>
+        <p:nvSpPr>
+          <p:cNvPr id="60" name="05"/>
+          <p:cNvSpPr txBox="1"/>
+          <p:nvPr/>
+        </p:nvSpPr>
+        <p:spPr>
+          <a:xfrm>
+            <a:off x="9804400" y="2619474"/>
+            <a:ext cx="569416" cy="482600"/>
+          </a:xfrm>
+          <a:prstGeom prst="rect">
+            <a:avLst/>
+          </a:prstGeom>
+          <a:noFill/>
+          <a:ln/>
+        </p:spPr>
+        <p:txBody>
+          <a:bodyPr wrap="none" lIns="0" tIns="0" rIns="0" bIns="0" rtlCol="0" anchor="ctr"/>
+          <a:lstStyle/>
+          <a:p>
+            <a:pPr algn="l" indent="0" marL="0">
+              <a:buNone/>
+            </a:pPr>
+            <a:r>
+              <a:rPr lang="ko-KR" altLang="en-US" sz="3200" spc="-69" kern="0" dirty="0">
+                <a:solidFill>
+                  <a:srgbClr val="FFFFFF"/>
+                </a:solidFill>
+                <a:latin typeface="Pretendard ExtraBold" pitchFamily="34" charset="0"/>
+                <a:ea typeface="Pretendard ExtraBold" pitchFamily="34" charset="-127"/>
+                <a:cs typeface="Pretendard ExtraBold" pitchFamily="34" charset="-120"/>
+              </a:rPr>
+              <a:t>05</a:t>
+            </a:r>
+            <a:endParaRPr lang="en-US" sz="3200" dirty="0"/>
+          </a:p>
+        </p:txBody>
+      </p:sp>
+      <p:sp>
+        <p:nvSpPr>
+          <p:cNvPr id="61" name="Utility 기술(건축, BIM/5D)직무와의 연관성"/>
+          <p:cNvSpPr txBox="1"/>
+          <p:nvPr/>
+        </p:nvSpPr>
+        <p:spPr>
+          <a:xfrm>
+            <a:off x="9804400" y="3422154"/>
+            <a:ext cx="1238820" cy="754261"/>
           </a:xfrm>
           <a:prstGeom prst="rect">
             <a:avLst/>
@@ -3777,33 +4162,37 @@
             <a:r>
               <a:rPr lang="ko-KR" altLang="en-US" sz="1500" spc="-53" kern="0" dirty="0">
                 <a:solidFill>
-                  <a:srgbClr val="102A4C"/>
+                  <a:srgbClr val="FFFFFF"/>
                 </a:solidFill>
                 <a:latin typeface="Pretendard ExtraBold" pitchFamily="34" charset="0"/>
                 <a:ea typeface="Pretendard ExtraBold" pitchFamily="34" charset="-127"/>
                 <a:cs typeface="Pretendard ExtraBold" pitchFamily="34" charset="-120"/>
               </a:rPr>
-              <a:t>기존 연구 한계 및</a:t>
-            </a:r>
-            <a:endParaRPr lang="en-US" sz="1500" dirty="0"/>
-          </a:p>
-          <a:p>
-            <a:pPr algn="l" indent="0" marL="0">
-              <a:lnSpc>
-                <a:spcPts val="1980"/>
-              </a:lnSpc>
-              <a:buNone/>
-            </a:pPr>
+              <a:t>Utility 기술</a:t>
+            </a:r>
+            <a:br/>
             <a:r>
               <a:rPr lang="ko-KR" altLang="en-US" sz="1500" spc="-53" kern="0" dirty="0">
                 <a:solidFill>
-                  <a:srgbClr val="102A4C"/>
+                  <a:srgbClr val="FFFFFF"/>
                 </a:solidFill>
                 <a:latin typeface="Pretendard ExtraBold" pitchFamily="34" charset="0"/>
                 <a:ea typeface="Pretendard ExtraBold" pitchFamily="34" charset="-127"/>
                 <a:cs typeface="Pretendard ExtraBold" pitchFamily="34" charset="-120"/>
               </a:rPr>
-              <a:t>연구 목표</a:t>
+              <a:t>(건축, BIM/5D)</a:t>
+            </a:r>
+            <a:br/>
+            <a:r>
+              <a:rPr lang="ko-KR" altLang="en-US" sz="1500" spc="-53" kern="0" dirty="0">
+                <a:solidFill>
+                  <a:srgbClr val="FFFFFF"/>
+                </a:solidFill>
+                <a:latin typeface="Pretendard ExtraBold" pitchFamily="34" charset="0"/>
+                <a:ea typeface="Pretendard ExtraBold" pitchFamily="34" charset="-127"/>
+                <a:cs typeface="Pretendard ExtraBold" pitchFamily="34" charset="-120"/>
+              </a:rPr>
+              <a:t>직무와의 연관성</a:t>
             </a:r>
             <a:endParaRPr lang="en-US" sz="1500" dirty="0"/>
           </a:p>
@@ -3811,14 +4200,14 @@
       </p:sp>
       <p:sp>
         <p:nvSpPr>
-          <p:cNvPr id="53" name="기존 연구로는 왜 안 되는가,그래서 무엇을 목표로 했는가"/>
-          <p:cNvSpPr txBox="1"/>
-          <p:nvPr/>
-        </p:nvSpPr>
-        <p:spPr>
-          <a:xfrm>
-            <a:off x="2921000" y="4588669"/>
-            <a:ext cx="1596825" cy="405011"/>
+          <p:cNvPr id="62" name="SK하이닉스 직무에서왜 중요한가"/>
+          <p:cNvSpPr txBox="1"/>
+          <p:nvPr/>
+        </p:nvSpPr>
+        <p:spPr>
+          <a:xfrm>
+            <a:off x="9804400" y="4588669"/>
+            <a:ext cx="1214735" cy="405011"/>
           </a:xfrm>
           <a:prstGeom prst="rect">
             <a:avLst/>
@@ -3839,33 +4228,25 @@
             <a:r>
               <a:rPr lang="ko-KR" altLang="en-US" sz="1100" spc="-22" kern="0" dirty="0">
                 <a:solidFill>
-                  <a:srgbClr val="3F4654"/>
+                  <a:srgbClr val="E3E9F2"/>
                 </a:solidFill>
                 <a:latin typeface="Pretendard SemiBold" pitchFamily="34" charset="0"/>
                 <a:ea typeface="Pretendard SemiBold" pitchFamily="34" charset="-127"/>
                 <a:cs typeface="Pretendard SemiBold" pitchFamily="34" charset="-120"/>
               </a:rPr>
-              <a:t>기존 연구로는 왜 안 되는가,</a:t>
-            </a:r>
-            <a:endParaRPr lang="en-US" sz="1100" dirty="0"/>
-          </a:p>
-          <a:p>
-            <a:pPr algn="l" indent="0" marL="0">
-              <a:lnSpc>
-                <a:spcPts val="1595"/>
-              </a:lnSpc>
-              <a:buNone/>
-            </a:pPr>
+              <a:t>SK하이닉스 직무에서</a:t>
+            </a:r>
+            <a:br/>
             <a:r>
               <a:rPr lang="ko-KR" altLang="en-US" sz="1100" spc="-22" kern="0" dirty="0">
                 <a:solidFill>
-                  <a:srgbClr val="3F4654"/>
+                  <a:srgbClr val="E3E9F2"/>
                 </a:solidFill>
                 <a:latin typeface="Pretendard SemiBold" pitchFamily="34" charset="0"/>
                 <a:ea typeface="Pretendard SemiBold" pitchFamily="34" charset="-127"/>
                 <a:cs typeface="Pretendard SemiBold" pitchFamily="34" charset="-120"/>
               </a:rPr>
-              <a:t>그래서 무엇을 목표로 했는가</a:t>
+              <a:t>왜 중요한가</a:t>
             </a:r>
             <a:endParaRPr lang="en-US" sz="1100" dirty="0"/>
           </a:p>
@@ -3873,14 +4254,14 @@
       </p:sp>
       <p:sp>
         <p:nvSpPr>
-          <p:cNvPr id="54" name="03"/>
-          <p:cNvSpPr txBox="1"/>
-          <p:nvPr/>
-        </p:nvSpPr>
-        <p:spPr>
-          <a:xfrm>
-            <a:off x="5308600" y="2619474"/>
-            <a:ext cx="569416" cy="482600"/>
+          <p:cNvPr id="63" name="석사 연구 발표  ·  평면도와 입면도 객체 인식 및 정보 통합을 통한 "/>
+          <p:cNvSpPr txBox="1"/>
+          <p:nvPr/>
+        </p:nvSpPr>
+        <p:spPr>
+          <a:xfrm>
+            <a:off x="609600" y="6472238"/>
+            <a:ext cx="5145113" cy="114300"/>
           </a:xfrm>
           <a:prstGeom prst="rect">
             <a:avLst/>
@@ -3896,7 +4277,46 @@
               <a:buNone/>
             </a:pPr>
             <a:r>
-              <a:rPr lang="ko-KR" altLang="en-US" sz="3200" spc="-96" kern="0" dirty="0">
+              <a:rPr lang="ko-KR" altLang="en-US" sz="750" spc="-12" kern="0" dirty="0">
+                <a:solidFill>
+                  <a:srgbClr val="737C8B"/>
+                </a:solidFill>
+                <a:latin typeface="Pretendard Medium" pitchFamily="34" charset="0"/>
+                <a:ea typeface="Pretendard Medium" pitchFamily="34" charset="-127"/>
+                <a:cs typeface="Pretendard Medium" pitchFamily="34" charset="-120"/>
+              </a:rPr>
+              <a:t>석사 연구 발표  ·  평면도와 입면도 객체 인식 및 정보 통합을 통한 3D BIM 자동 생성 연구  ·  Utility 기술(건축, BIM/5D) 지원자 ○○○</a:t>
+            </a:r>
+            <a:endParaRPr lang="en-US" sz="750" dirty="0"/>
+          </a:p>
+        </p:txBody>
+      </p:sp>
+      <p:sp>
+        <p:nvSpPr>
+          <p:cNvPr id="64" name="01 / 10"/>
+          <p:cNvSpPr txBox="1"/>
+          <p:nvPr/>
+        </p:nvSpPr>
+        <p:spPr>
+          <a:xfrm>
+            <a:off x="11247934" y="6472238"/>
+            <a:ext cx="385266" cy="114300"/>
+          </a:xfrm>
+          <a:prstGeom prst="rect">
+            <a:avLst/>
+          </a:prstGeom>
+          <a:noFill/>
+          <a:ln/>
+        </p:spPr>
+        <p:txBody>
+          <a:bodyPr wrap="none" lIns="0" tIns="0" rIns="0" bIns="0" rtlCol="0" anchor="ctr"/>
+          <a:lstStyle/>
+          <a:p>
+            <a:pPr algn="l" indent="0" marL="0">
+              <a:buNone/>
+            </a:pPr>
+            <a:r>
+              <a:rPr lang="ko-KR" altLang="en-US" sz="750" spc="45" kern="0" dirty="0">
                 <a:solidFill>
                   <a:srgbClr val="102A4C"/>
                 </a:solidFill>
@@ -3904,490 +4324,8 @@
                 <a:ea typeface="Pretendard ExtraBold" pitchFamily="34" charset="-127"/>
                 <a:cs typeface="Pretendard ExtraBold" pitchFamily="34" charset="-120"/>
               </a:rPr>
-              <a:t>03</a:t>
-            </a:r>
-            <a:endParaRPr lang="en-US" sz="3200" dirty="0"/>
-          </a:p>
-        </p:txBody>
-      </p:sp>
-      <p:sp>
-        <p:nvSpPr>
-          <p:cNvPr id="55" name="연구 방법"/>
-          <p:cNvSpPr txBox="1"/>
-          <p:nvPr/>
-        </p:nvSpPr>
-        <p:spPr>
-          <a:xfrm>
-            <a:off x="5308600" y="3444974"/>
-            <a:ext cx="718641" cy="228600"/>
-          </a:xfrm>
-          <a:prstGeom prst="rect">
-            <a:avLst/>
-          </a:prstGeom>
-          <a:noFill/>
-          <a:ln/>
-        </p:spPr>
-        <p:txBody>
-          <a:bodyPr wrap="none" lIns="0" tIns="0" rIns="0" bIns="0" rtlCol="0" anchor="ctr"/>
-          <a:lstStyle/>
-          <a:p>
-            <a:pPr algn="l" indent="0" marL="0">
-              <a:buNone/>
-            </a:pPr>
-            <a:r>
-              <a:rPr lang="ko-KR" altLang="en-US" sz="1500" spc="-53" kern="0" dirty="0">
-                <a:solidFill>
-                  <a:srgbClr val="102A4C"/>
-                </a:solidFill>
-                <a:latin typeface="Pretendard ExtraBold" pitchFamily="34" charset="0"/>
-                <a:ea typeface="Pretendard ExtraBold" pitchFamily="34" charset="-127"/>
-                <a:cs typeface="Pretendard ExtraBold" pitchFamily="34" charset="-120"/>
-              </a:rPr>
-              <a:t>연구 방법</a:t>
-            </a:r>
-            <a:endParaRPr lang="en-US" sz="1500" dirty="0"/>
-          </a:p>
-        </p:txBody>
-      </p:sp>
-      <p:sp>
-        <p:nvSpPr>
-          <p:cNvPr id="56" name="어떻게 해결했는가"/>
-          <p:cNvSpPr txBox="1"/>
-          <p:nvPr/>
-        </p:nvSpPr>
-        <p:spPr>
-          <a:xfrm>
-            <a:off x="5308600" y="4626074"/>
-            <a:ext cx="1032367" cy="165100"/>
-          </a:xfrm>
-          <a:prstGeom prst="rect">
-            <a:avLst/>
-          </a:prstGeom>
-          <a:noFill/>
-          <a:ln/>
-        </p:spPr>
-        <p:txBody>
-          <a:bodyPr wrap="none" lIns="0" tIns="0" rIns="0" bIns="0" rtlCol="0" anchor="ctr"/>
-          <a:lstStyle/>
-          <a:p>
-            <a:pPr algn="l" indent="0" marL="0">
-              <a:buNone/>
-            </a:pPr>
-            <a:r>
-              <a:rPr lang="ko-KR" altLang="en-US" sz="1100" spc="-22" kern="0" dirty="0">
-                <a:solidFill>
-                  <a:srgbClr val="3F4654"/>
-                </a:solidFill>
-                <a:latin typeface="Pretendard SemiBold" pitchFamily="34" charset="0"/>
-                <a:ea typeface="Pretendard SemiBold" pitchFamily="34" charset="-127"/>
-                <a:cs typeface="Pretendard SemiBold" pitchFamily="34" charset="-120"/>
-              </a:rPr>
-              <a:t>어떻게 해결했는가</a:t>
-            </a:r>
-            <a:endParaRPr lang="en-US" sz="1100" dirty="0"/>
-          </a:p>
-        </p:txBody>
-      </p:sp>
-      <p:sp>
-        <p:nvSpPr>
-          <p:cNvPr id="57" name="04"/>
-          <p:cNvSpPr txBox="1"/>
-          <p:nvPr/>
-        </p:nvSpPr>
-        <p:spPr>
-          <a:xfrm>
-            <a:off x="7416800" y="2619474"/>
-            <a:ext cx="569416" cy="482600"/>
-          </a:xfrm>
-          <a:prstGeom prst="rect">
-            <a:avLst/>
-          </a:prstGeom>
-          <a:noFill/>
-          <a:ln/>
-        </p:spPr>
-        <p:txBody>
-          <a:bodyPr wrap="none" lIns="0" tIns="0" rIns="0" bIns="0" rtlCol="0" anchor="ctr"/>
-          <a:lstStyle/>
-          <a:p>
-            <a:pPr algn="l" indent="0" marL="0">
-              <a:buNone/>
-            </a:pPr>
-            <a:r>
-              <a:rPr lang="ko-KR" altLang="en-US" sz="3200" spc="-96" kern="0" dirty="0">
-                <a:solidFill>
-                  <a:srgbClr val="102A4C"/>
-                </a:solidFill>
-                <a:latin typeface="Pretendard ExtraBold" pitchFamily="34" charset="0"/>
-                <a:ea typeface="Pretendard ExtraBold" pitchFamily="34" charset="-127"/>
-                <a:cs typeface="Pretendard ExtraBold" pitchFamily="34" charset="-120"/>
-              </a:rPr>
-              <a:t>04</a:t>
-            </a:r>
-            <a:endParaRPr lang="en-US" sz="3200" dirty="0"/>
-          </a:p>
-        </p:txBody>
-      </p:sp>
-      <p:sp>
-        <p:nvSpPr>
-          <p:cNvPr id="58" name="연구 결과 및 기여"/>
-          <p:cNvSpPr txBox="1"/>
-          <p:nvPr/>
-        </p:nvSpPr>
-        <p:spPr>
-          <a:xfrm>
-            <a:off x="7416800" y="3444974"/>
-            <a:ext cx="1286462" cy="228600"/>
-          </a:xfrm>
-          <a:prstGeom prst="rect">
-            <a:avLst/>
-          </a:prstGeom>
-          <a:noFill/>
-          <a:ln/>
-        </p:spPr>
-        <p:txBody>
-          <a:bodyPr wrap="none" lIns="0" tIns="0" rIns="0" bIns="0" rtlCol="0" anchor="ctr"/>
-          <a:lstStyle/>
-          <a:p>
-            <a:pPr algn="l" indent="0" marL="0">
-              <a:buNone/>
-            </a:pPr>
-            <a:r>
-              <a:rPr lang="ko-KR" altLang="en-US" sz="1500" spc="-53" kern="0" dirty="0">
-                <a:solidFill>
-                  <a:srgbClr val="102A4C"/>
-                </a:solidFill>
-                <a:latin typeface="Pretendard ExtraBold" pitchFamily="34" charset="0"/>
-                <a:ea typeface="Pretendard ExtraBold" pitchFamily="34" charset="-127"/>
-                <a:cs typeface="Pretendard ExtraBold" pitchFamily="34" charset="-120"/>
-              </a:rPr>
-              <a:t>연구 결과 및 기여</a:t>
-            </a:r>
-            <a:endParaRPr lang="en-US" sz="1500" dirty="0"/>
-          </a:p>
-        </p:txBody>
-      </p:sp>
-      <p:sp>
-        <p:nvSpPr>
-          <p:cNvPr id="59" name="얼마나 잘 됐고,어떤 의미가 있는가"/>
-          <p:cNvSpPr txBox="1"/>
-          <p:nvPr/>
-        </p:nvSpPr>
-        <p:spPr>
-          <a:xfrm>
-            <a:off x="7416800" y="4588669"/>
-            <a:ext cx="1064550" cy="405011"/>
-          </a:xfrm>
-          <a:prstGeom prst="rect">
-            <a:avLst/>
-          </a:prstGeom>
-          <a:noFill/>
-          <a:ln/>
-        </p:spPr>
-        <p:txBody>
-          <a:bodyPr wrap="none" lIns="0" tIns="0" rIns="0" bIns="0" rtlCol="0" anchor="t"/>
-          <a:lstStyle/>
-          <a:p>
-            <a:pPr algn="l" indent="0" marL="0">
-              <a:lnSpc>
-                <a:spcPts val="1595"/>
-              </a:lnSpc>
-              <a:buNone/>
-            </a:pPr>
-            <a:r>
-              <a:rPr lang="ko-KR" altLang="en-US" sz="1100" spc="-22" kern="0" dirty="0">
-                <a:solidFill>
-                  <a:srgbClr val="3F4654"/>
-                </a:solidFill>
-                <a:latin typeface="Pretendard SemiBold" pitchFamily="34" charset="0"/>
-                <a:ea typeface="Pretendard SemiBold" pitchFamily="34" charset="-127"/>
-                <a:cs typeface="Pretendard SemiBold" pitchFamily="34" charset="-120"/>
-              </a:rPr>
-              <a:t>얼마나 잘 됐고,</a:t>
-            </a:r>
-            <a:endParaRPr lang="en-US" sz="1100" dirty="0"/>
-          </a:p>
-          <a:p>
-            <a:pPr algn="l" indent="0" marL="0">
-              <a:lnSpc>
-                <a:spcPts val="1595"/>
-              </a:lnSpc>
-              <a:buNone/>
-            </a:pPr>
-            <a:r>
-              <a:rPr lang="ko-KR" altLang="en-US" sz="1100" spc="-22" kern="0" dirty="0">
-                <a:solidFill>
-                  <a:srgbClr val="3F4654"/>
-                </a:solidFill>
-                <a:latin typeface="Pretendard SemiBold" pitchFamily="34" charset="0"/>
-                <a:ea typeface="Pretendard SemiBold" pitchFamily="34" charset="-127"/>
-                <a:cs typeface="Pretendard SemiBold" pitchFamily="34" charset="-120"/>
-              </a:rPr>
-              <a:t>어떤 의미가 있는가</a:t>
-            </a:r>
-            <a:endParaRPr lang="en-US" sz="1100" dirty="0"/>
-          </a:p>
-        </p:txBody>
-      </p:sp>
-      <p:sp>
-        <p:nvSpPr>
-          <p:cNvPr id="60" name="05"/>
-          <p:cNvSpPr txBox="1"/>
-          <p:nvPr/>
-        </p:nvSpPr>
-        <p:spPr>
-          <a:xfrm>
-            <a:off x="9804400" y="2619474"/>
-            <a:ext cx="569416" cy="482600"/>
-          </a:xfrm>
-          <a:prstGeom prst="rect">
-            <a:avLst/>
-          </a:prstGeom>
-          <a:noFill/>
-          <a:ln/>
-        </p:spPr>
-        <p:txBody>
-          <a:bodyPr wrap="none" lIns="0" tIns="0" rIns="0" bIns="0" rtlCol="0" anchor="ctr"/>
-          <a:lstStyle/>
-          <a:p>
-            <a:pPr algn="l" indent="0" marL="0">
-              <a:buNone/>
-            </a:pPr>
-            <a:r>
-              <a:rPr lang="ko-KR" altLang="en-US" sz="3200" spc="-96" kern="0" dirty="0">
-                <a:solidFill>
-                  <a:srgbClr val="FFFFFF"/>
-                </a:solidFill>
-                <a:latin typeface="Pretendard ExtraBold" pitchFamily="34" charset="0"/>
-                <a:ea typeface="Pretendard ExtraBold" pitchFamily="34" charset="-127"/>
-                <a:cs typeface="Pretendard ExtraBold" pitchFamily="34" charset="-120"/>
-              </a:rPr>
-              <a:t>05</a:t>
-            </a:r>
-            <a:endParaRPr lang="en-US" sz="3200" dirty="0"/>
-          </a:p>
-        </p:txBody>
-      </p:sp>
-      <p:sp>
-        <p:nvSpPr>
-          <p:cNvPr id="61" name="Utility 기술(건축, BIM/5D)직무와의 연관성"/>
-          <p:cNvSpPr txBox="1"/>
-          <p:nvPr/>
-        </p:nvSpPr>
-        <p:spPr>
-          <a:xfrm>
-            <a:off x="9804400" y="3422154"/>
-            <a:ext cx="1238820" cy="754261"/>
-          </a:xfrm>
-          <a:prstGeom prst="rect">
-            <a:avLst/>
-          </a:prstGeom>
-          <a:noFill/>
-          <a:ln/>
-        </p:spPr>
-        <p:txBody>
-          <a:bodyPr wrap="none" lIns="0" tIns="0" rIns="0" bIns="0" rtlCol="0" anchor="t"/>
-          <a:lstStyle/>
-          <a:p>
-            <a:pPr algn="l" indent="0" marL="0">
-              <a:lnSpc>
-                <a:spcPts val="1980"/>
-              </a:lnSpc>
-              <a:buNone/>
-            </a:pPr>
-            <a:r>
-              <a:rPr lang="ko-KR" altLang="en-US" sz="1500" spc="-53" kern="0" dirty="0">
-                <a:solidFill>
-                  <a:srgbClr val="FFFFFF"/>
-                </a:solidFill>
-                <a:latin typeface="Pretendard ExtraBold" pitchFamily="34" charset="0"/>
-                <a:ea typeface="Pretendard ExtraBold" pitchFamily="34" charset="-127"/>
-                <a:cs typeface="Pretendard ExtraBold" pitchFamily="34" charset="-120"/>
-              </a:rPr>
-              <a:t>Utility 기술</a:t>
-            </a:r>
-            <a:endParaRPr lang="en-US" sz="1500" dirty="0"/>
-          </a:p>
-          <a:p>
-            <a:pPr algn="l" indent="0" marL="0">
-              <a:lnSpc>
-                <a:spcPts val="1980"/>
-              </a:lnSpc>
-              <a:buNone/>
-            </a:pPr>
-            <a:r>
-              <a:rPr lang="ko-KR" altLang="en-US" sz="1500" spc="-53" kern="0" dirty="0">
-                <a:solidFill>
-                  <a:srgbClr val="FFFFFF"/>
-                </a:solidFill>
-                <a:latin typeface="Pretendard ExtraBold" pitchFamily="34" charset="0"/>
-                <a:ea typeface="Pretendard ExtraBold" pitchFamily="34" charset="-127"/>
-                <a:cs typeface="Pretendard ExtraBold" pitchFamily="34" charset="-120"/>
-              </a:rPr>
-              <a:t>(건축, BIM/5D)</a:t>
-            </a:r>
-            <a:endParaRPr lang="en-US" sz="1500" dirty="0"/>
-          </a:p>
-          <a:p>
-            <a:pPr algn="l" indent="0" marL="0">
-              <a:lnSpc>
-                <a:spcPts val="1980"/>
-              </a:lnSpc>
-              <a:buNone/>
-            </a:pPr>
-            <a:r>
-              <a:rPr lang="ko-KR" altLang="en-US" sz="1500" spc="-53" kern="0" dirty="0">
-                <a:solidFill>
-                  <a:srgbClr val="FFFFFF"/>
-                </a:solidFill>
-                <a:latin typeface="Pretendard ExtraBold" pitchFamily="34" charset="0"/>
-                <a:ea typeface="Pretendard ExtraBold" pitchFamily="34" charset="-127"/>
-                <a:cs typeface="Pretendard ExtraBold" pitchFamily="34" charset="-120"/>
-              </a:rPr>
-              <a:t>직무와의 연관성</a:t>
-            </a:r>
-            <a:endParaRPr lang="en-US" sz="1500" dirty="0"/>
-          </a:p>
-        </p:txBody>
-      </p:sp>
-      <p:sp>
-        <p:nvSpPr>
-          <p:cNvPr id="62" name="SK하이닉스 직무에서왜 중요한가"/>
-          <p:cNvSpPr txBox="1"/>
-          <p:nvPr/>
-        </p:nvSpPr>
-        <p:spPr>
-          <a:xfrm>
-            <a:off x="9804400" y="4588669"/>
-            <a:ext cx="1214735" cy="405011"/>
-          </a:xfrm>
-          <a:prstGeom prst="rect">
-            <a:avLst/>
-          </a:prstGeom>
-          <a:noFill/>
-          <a:ln/>
-        </p:spPr>
-        <p:txBody>
-          <a:bodyPr wrap="none" lIns="0" tIns="0" rIns="0" bIns="0" rtlCol="0" anchor="t"/>
-          <a:lstStyle/>
-          <a:p>
-            <a:pPr algn="l" indent="0" marL="0">
-              <a:lnSpc>
-                <a:spcPts val="1595"/>
-              </a:lnSpc>
-              <a:buNone/>
-            </a:pPr>
-            <a:r>
-              <a:rPr lang="ko-KR" altLang="en-US" sz="1100" spc="-22" kern="0" dirty="0">
-                <a:solidFill>
-                  <a:srgbClr val="E3E9F2"/>
-                </a:solidFill>
-                <a:latin typeface="Pretendard SemiBold" pitchFamily="34" charset="0"/>
-                <a:ea typeface="Pretendard SemiBold" pitchFamily="34" charset="-127"/>
-                <a:cs typeface="Pretendard SemiBold" pitchFamily="34" charset="-120"/>
-              </a:rPr>
-              <a:t>SK하이닉스 직무에서</a:t>
-            </a:r>
-            <a:endParaRPr lang="en-US" sz="1100" dirty="0"/>
-          </a:p>
-          <a:p>
-            <a:pPr algn="l" indent="0" marL="0">
-              <a:lnSpc>
-                <a:spcPts val="1595"/>
-              </a:lnSpc>
-              <a:buNone/>
-            </a:pPr>
-            <a:r>
-              <a:rPr lang="ko-KR" altLang="en-US" sz="1100" spc="-22" kern="0" dirty="0">
-                <a:solidFill>
-                  <a:srgbClr val="E3E9F2"/>
-                </a:solidFill>
-                <a:latin typeface="Pretendard SemiBold" pitchFamily="34" charset="0"/>
-                <a:ea typeface="Pretendard SemiBold" pitchFamily="34" charset="-127"/>
-                <a:cs typeface="Pretendard SemiBold" pitchFamily="34" charset="-120"/>
-              </a:rPr>
-              <a:t>왜 중요한가</a:t>
-            </a:r>
-            <a:endParaRPr lang="en-US" sz="1100" dirty="0"/>
-          </a:p>
-        </p:txBody>
-      </p:sp>
-      <p:sp>
-        <p:nvSpPr>
-          <p:cNvPr id="63" name="석사 연구 발표  ·  평면도와 입면도 객체 인식 및 정보 통합을 통한 "/>
-          <p:cNvSpPr txBox="1"/>
-          <p:nvPr/>
-        </p:nvSpPr>
-        <p:spPr>
-          <a:xfrm>
-            <a:off x="609600" y="6472238"/>
-            <a:ext cx="5145113" cy="114300"/>
-          </a:xfrm>
-          <a:prstGeom prst="rect">
-            <a:avLst/>
-          </a:prstGeom>
-          <a:noFill/>
-          <a:ln/>
-        </p:spPr>
-        <p:txBody>
-          <a:bodyPr wrap="none" lIns="0" tIns="0" rIns="0" bIns="0" rtlCol="0" anchor="ctr"/>
-          <a:lstStyle/>
-          <a:p>
-            <a:pPr algn="l" indent="0" marL="0">
-              <a:buNone/>
-            </a:pPr>
-            <a:r>
-              <a:rPr lang="ko-KR" altLang="en-US" sz="750" spc="-12" kern="0" dirty="0">
-                <a:solidFill>
-                  <a:srgbClr val="737C8B"/>
-                </a:solidFill>
-                <a:latin typeface="Pretendard Medium" pitchFamily="34" charset="0"/>
-                <a:ea typeface="Pretendard Medium" pitchFamily="34" charset="-127"/>
-                <a:cs typeface="Pretendard Medium" pitchFamily="34" charset="-120"/>
-              </a:rPr>
-              <a:t>석사 연구 발표  ·  평면도와 입면도 객체 인식 및 정보 통합을 통한 3D BIM 자동 생성 연구  ·  Utility 기술(건축, BIM/5D) 지원자 ○○○</a:t>
-            </a:r>
-            <a:endParaRPr lang="en-US" sz="750" dirty="0"/>
-          </a:p>
-        </p:txBody>
-      </p:sp>
-      <p:sp>
-        <p:nvSpPr>
-          <p:cNvPr id="64" name="01 / 10"/>
-          <p:cNvSpPr txBox="1"/>
-          <p:nvPr/>
-        </p:nvSpPr>
-        <p:spPr>
-          <a:xfrm>
-            <a:off x="11247934" y="6472238"/>
-            <a:ext cx="385266" cy="114300"/>
-          </a:xfrm>
-          <a:prstGeom prst="rect">
-            <a:avLst/>
-          </a:prstGeom>
-          <a:noFill/>
-          <a:ln/>
-        </p:spPr>
-        <p:txBody>
-          <a:bodyPr wrap="none" lIns="0" tIns="0" rIns="0" bIns="0" rtlCol="0" anchor="ctr"/>
-          <a:lstStyle/>
-          <a:p>
-            <a:pPr algn="l" indent="0" marL="0">
-              <a:buNone/>
-            </a:pPr>
-            <a:r>
-              <a:rPr lang="ko-KR" altLang="en-US" sz="750" spc="45" kern="0" dirty="0">
-                <a:solidFill>
-                  <a:srgbClr val="102A4C"/>
-                </a:solidFill>
-                <a:latin typeface="Pretendard ExtraBold" pitchFamily="34" charset="0"/>
-                <a:ea typeface="Pretendard ExtraBold" pitchFamily="34" charset="-127"/>
-                <a:cs typeface="Pretendard ExtraBold" pitchFamily="34" charset="-120"/>
-              </a:rPr>
               <a:t>01</a:t>
             </a:r>
-            <a:pPr algn="l" indent="0" marL="0">
-              <a:buNone/>
-            </a:pPr>
             <a:r>
               <a:rPr lang="ko-KR" altLang="en-US" sz="750" spc="45" kern="0" dirty="0">
                 <a:solidFill>
@@ -7451,15 +7389,7 @@
               </a:rPr>
               <a:t>직무에서 마주할 세 가지 과제가</a:t>
             </a:r>
-            <a:endParaRPr lang="en-US" sz="2300" dirty="0"/>
-          </a:p>
-          <a:p>
-            <a:pPr algn="l" indent="0" marL="0">
-              <a:lnSpc>
-                <a:spcPts val="2852"/>
-              </a:lnSpc>
-              <a:buNone/>
-            </a:pPr>
+            <a:br/>
             <a:r>
               <a:rPr lang="ko-KR" altLang="en-US" sz="2300" spc="-92" kern="0" dirty="0">
                 <a:solidFill>
@@ -7471,12 +7401,6 @@
               </a:rPr>
               <a:t>제 연구와 맞닿아</a:t>
             </a:r>
-            <a:pPr algn="l" indent="0" marL="0">
-              <a:lnSpc>
-                <a:spcPts val="2852"/>
-              </a:lnSpc>
-              <a:buNone/>
-            </a:pPr>
             <a:r>
               <a:rPr lang="ko-KR" altLang="en-US" sz="2300" spc="-92" kern="0" dirty="0">
                 <a:solidFill>
@@ -7881,8 +7805,213 @@
               </a:rPr>
               <a:t>여러 출처의 도면·모델 데이터를</a:t>
             </a:r>
+            <a:br/>
+            <a:r>
+              <a:rPr lang="ko-KR" altLang="en-US" sz="1100" spc="-28" kern="0" dirty="0">
+                <a:solidFill>
+                  <a:srgbClr val="3F4654"/>
+                </a:solidFill>
+                <a:latin typeface="Pretendard Medium" pitchFamily="34" charset="0"/>
+                <a:ea typeface="Pretendard Medium" pitchFamily="34" charset="-127"/>
+                <a:cs typeface="Pretendard Medium" pitchFamily="34" charset="-120"/>
+              </a:rPr>
+              <a:t>하나로 통합</a:t>
+            </a:r>
             <a:endParaRPr lang="en-US" sz="1100" dirty="0"/>
           </a:p>
+        </p:txBody>
+      </p:sp>
+      <p:sp>
+        <p:nvSpPr>
+          <p:cNvPr id="78" name="서로 다른 도면의불완전한 정보를 짝지어"/>
+          <p:cNvSpPr txBox="1"/>
+          <p:nvPr/>
+        </p:nvSpPr>
+        <p:spPr>
+          <a:xfrm>
+            <a:off x="6604000" y="2269331"/>
+            <a:ext cx="1344412" cy="423466"/>
+          </a:xfrm>
+          <a:prstGeom prst="rect">
+            <a:avLst/>
+          </a:prstGeom>
+          <a:noFill/>
+          <a:ln/>
+        </p:spPr>
+        <p:txBody>
+          <a:bodyPr wrap="none" lIns="0" tIns="0" rIns="0" bIns="0" rtlCol="0" anchor="t"/>
+          <a:lstStyle/>
+          <a:p>
+            <a:pPr algn="l" indent="0" marL="0">
+              <a:lnSpc>
+                <a:spcPts val="1667"/>
+              </a:lnSpc>
+              <a:buNone/>
+            </a:pPr>
+            <a:r>
+              <a:rPr lang="ko-KR" altLang="en-US" sz="1150" b="1" spc="-40" kern="0" dirty="0">
+                <a:solidFill>
+                  <a:srgbClr val="141820"/>
+                </a:solidFill>
+                <a:latin typeface="Pretendard" pitchFamily="34" charset="0"/>
+                <a:ea typeface="Pretendard" pitchFamily="34" charset="-127"/>
+                <a:cs typeface="Pretendard" pitchFamily="34" charset="-120"/>
+              </a:rPr>
+              <a:t>서로 다른 도면의</a:t>
+            </a:r>
+            <a:br/>
+            <a:r>
+              <a:rPr lang="ko-KR" altLang="en-US" sz="1150" b="1" spc="-40" kern="0" dirty="0">
+                <a:solidFill>
+                  <a:srgbClr val="141820"/>
+                </a:solidFill>
+                <a:latin typeface="Pretendard" pitchFamily="34" charset="0"/>
+                <a:ea typeface="Pretendard" pitchFamily="34" charset="-127"/>
+                <a:cs typeface="Pretendard" pitchFamily="34" charset="-120"/>
+              </a:rPr>
+              <a:t>불완전한 정보를 짝지어</a:t>
+            </a:r>
+            <a:endParaRPr lang="en-US" sz="1150" dirty="0"/>
+          </a:p>
+        </p:txBody>
+      </p:sp>
+      <p:sp>
+        <p:nvSpPr>
+          <p:cNvPr id="79" name="하나의 3D 모델로 통합"/>
+          <p:cNvSpPr txBox="1"/>
+          <p:nvPr/>
+        </p:nvSpPr>
+        <p:spPr>
+          <a:xfrm>
+            <a:off x="8978900" y="2399407"/>
+            <a:ext cx="1473142" cy="196850"/>
+          </a:xfrm>
+          <a:prstGeom prst="rect">
+            <a:avLst/>
+          </a:prstGeom>
+          <a:noFill/>
+          <a:ln/>
+        </p:spPr>
+        <p:txBody>
+          <a:bodyPr wrap="none" lIns="0" tIns="0" rIns="0" bIns="0" rtlCol="0" anchor="ctr"/>
+          <a:lstStyle/>
+          <a:p>
+            <a:pPr algn="l" indent="0" marL="0">
+              <a:buNone/>
+            </a:pPr>
+            <a:r>
+              <a:rPr lang="ko-KR" altLang="en-US" sz="1300" spc="-52" kern="0" dirty="0">
+                <a:solidFill>
+                  <a:srgbClr val="102A4C"/>
+                </a:solidFill>
+                <a:latin typeface="Pretendard ExtraBold" pitchFamily="34" charset="0"/>
+                <a:ea typeface="Pretendard ExtraBold" pitchFamily="34" charset="-127"/>
+                <a:cs typeface="Pretendard ExtraBold" pitchFamily="34" charset="-120"/>
+              </a:rPr>
+              <a:t>하나의 3D 모델로 통합</a:t>
+            </a:r>
+            <a:endParaRPr lang="en-US" sz="1300" dirty="0"/>
+          </a:p>
+        </p:txBody>
+      </p:sp>
+      <p:sp>
+        <p:nvSpPr>
+          <p:cNvPr id="80" name="과제 2"/>
+          <p:cNvSpPr txBox="1"/>
+          <p:nvPr/>
+        </p:nvSpPr>
+        <p:spPr>
+          <a:xfrm>
+            <a:off x="1549400" y="3453507"/>
+            <a:ext cx="360759" cy="120650"/>
+          </a:xfrm>
+          <a:prstGeom prst="rect">
+            <a:avLst/>
+          </a:prstGeom>
+          <a:noFill/>
+          <a:ln/>
+        </p:spPr>
+        <p:txBody>
+          <a:bodyPr wrap="none" lIns="0" tIns="0" rIns="0" bIns="0" rtlCol="0" anchor="ctr"/>
+          <a:lstStyle/>
+          <a:p>
+            <a:pPr algn="l" indent="0" marL="0">
+              <a:buNone/>
+            </a:pPr>
+            <a:r>
+              <a:rPr lang="ko-KR" altLang="en-US" sz="800" spc="96" kern="0" dirty="0">
+                <a:solidFill>
+                  <a:srgbClr val="737C8B"/>
+                </a:solidFill>
+                <a:latin typeface="Pretendard ExtraBold" pitchFamily="34" charset="0"/>
+                <a:ea typeface="Pretendard ExtraBold" pitchFamily="34" charset="-127"/>
+                <a:cs typeface="Pretendard ExtraBold" pitchFamily="34" charset="-120"/>
+              </a:rPr>
+              <a:t>과제 2</a:t>
+            </a:r>
+            <a:endParaRPr lang="en-US" sz="800" dirty="0"/>
+          </a:p>
+        </p:txBody>
+      </p:sp>
+      <p:sp>
+        <p:nvSpPr>
+          <p:cNvPr id="81" name="기존 시설의 디지털 전환"/>
+          <p:cNvSpPr txBox="1"/>
+          <p:nvPr/>
+        </p:nvSpPr>
+        <p:spPr>
+          <a:xfrm>
+            <a:off x="1549400" y="3650357"/>
+            <a:ext cx="1657298" cy="215900"/>
+          </a:xfrm>
+          <a:prstGeom prst="rect">
+            <a:avLst/>
+          </a:prstGeom>
+          <a:noFill/>
+          <a:ln/>
+        </p:spPr>
+        <p:txBody>
+          <a:bodyPr wrap="none" lIns="0" tIns="0" rIns="0" bIns="0" rtlCol="0" anchor="ctr"/>
+          <a:lstStyle/>
+          <a:p>
+            <a:pPr algn="l" indent="0" marL="0">
+              <a:buNone/>
+            </a:pPr>
+            <a:r>
+              <a:rPr lang="ko-KR" altLang="en-US" sz="1400" spc="-56" kern="0" dirty="0">
+                <a:solidFill>
+                  <a:srgbClr val="102A4C"/>
+                </a:solidFill>
+                <a:latin typeface="Pretendard ExtraBold" pitchFamily="34" charset="0"/>
+                <a:ea typeface="Pretendard ExtraBold" pitchFamily="34" charset="-127"/>
+                <a:cs typeface="Pretendard ExtraBold" pitchFamily="34" charset="-120"/>
+              </a:rPr>
+              <a:t>기존 시설의 디지털 전환</a:t>
+            </a:r>
+            <a:endParaRPr lang="en-US" sz="1400" dirty="0"/>
+          </a:p>
+        </p:txBody>
+      </p:sp>
+      <p:sp>
+        <p:nvSpPr>
+          <p:cNvPr id="82" name="이미지 도면만 남은기존 시설이 많음"/>
+          <p:cNvSpPr txBox="1"/>
+          <p:nvPr/>
+        </p:nvSpPr>
+        <p:spPr>
+          <a:xfrm>
+            <a:off x="3841750" y="3435747"/>
+            <a:ext cx="1059186" cy="419100"/>
+          </a:xfrm>
+          <a:prstGeom prst="rect">
+            <a:avLst/>
+          </a:prstGeom>
+          <a:noFill/>
+          <a:ln/>
+        </p:spPr>
+        <p:txBody>
+          <a:bodyPr wrap="none" lIns="0" tIns="0" rIns="0" bIns="0" rtlCol="0" anchor="t"/>
+          <a:lstStyle/>
           <a:p>
             <a:pPr algn="l" indent="0" marL="0">
               <a:lnSpc>
@@ -7899,7 +8028,19 @@
                 <a:ea typeface="Pretendard Medium" pitchFamily="34" charset="-127"/>
                 <a:cs typeface="Pretendard Medium" pitchFamily="34" charset="-120"/>
               </a:rPr>
-              <a:t>하나로 통합</a:t>
+              <a:t>이미지 도면만 남은</a:t>
+            </a:r>
+            <a:br/>
+            <a:r>
+              <a:rPr lang="ko-KR" altLang="en-US" sz="1100" spc="-28" kern="0" dirty="0">
+                <a:solidFill>
+                  <a:srgbClr val="3F4654"/>
+                </a:solidFill>
+                <a:latin typeface="Pretendard Medium" pitchFamily="34" charset="0"/>
+                <a:ea typeface="Pretendard Medium" pitchFamily="34" charset="-127"/>
+                <a:cs typeface="Pretendard Medium" pitchFamily="34" charset="-120"/>
+              </a:rPr>
+              <a:t>기존 시설이 많음</a:t>
             </a:r>
             <a:endParaRPr lang="en-US" sz="1100" dirty="0"/>
           </a:p>
@@ -7907,14 +8048,14 @@
       </p:sp>
       <p:sp>
         <p:nvSpPr>
-          <p:cNvPr id="78" name="서로 다른 도면의불완전한 정보를 짝지어"/>
-          <p:cNvSpPr txBox="1"/>
-          <p:nvPr/>
-        </p:nvSpPr>
-        <p:spPr>
-          <a:xfrm>
-            <a:off x="6604000" y="2269331"/>
-            <a:ext cx="1344412" cy="423466"/>
+          <p:cNvPr id="83" name="CAD 정보 없이이미지 도면에서 BIM 생성"/>
+          <p:cNvSpPr txBox="1"/>
+          <p:nvPr/>
+        </p:nvSpPr>
+        <p:spPr>
+          <a:xfrm>
+            <a:off x="6604000" y="3437731"/>
+            <a:ext cx="1506377" cy="423466"/>
           </a:xfrm>
           <a:prstGeom prst="rect">
             <a:avLst/>
@@ -7941,10 +8082,215 @@
                 <a:ea typeface="Pretendard" pitchFamily="34" charset="-127"/>
                 <a:cs typeface="Pretendard" pitchFamily="34" charset="-120"/>
               </a:rPr>
-              <a:t>서로 다른 도면의</a:t>
+              <a:t>CAD 정보 없이</a:t>
+            </a:r>
+            <a:br/>
+            <a:r>
+              <a:rPr lang="ko-KR" altLang="en-US" sz="1150" b="1" spc="-40" kern="0" dirty="0">
+                <a:solidFill>
+                  <a:srgbClr val="141820"/>
+                </a:solidFill>
+                <a:latin typeface="Pretendard" pitchFamily="34" charset="0"/>
+                <a:ea typeface="Pretendard" pitchFamily="34" charset="-127"/>
+                <a:cs typeface="Pretendard" pitchFamily="34" charset="-120"/>
+              </a:rPr>
+              <a:t>이미지 도면에서 BIM 생성</a:t>
             </a:r>
             <a:endParaRPr lang="en-US" sz="1150" dirty="0"/>
           </a:p>
+        </p:txBody>
+      </p:sp>
+      <p:sp>
+        <p:nvSpPr>
+          <p:cNvPr id="84" name="디지털 전환 기간 단축"/>
+          <p:cNvSpPr txBox="1"/>
+          <p:nvPr/>
+        </p:nvSpPr>
+        <p:spPr>
+          <a:xfrm>
+            <a:off x="8978900" y="3567807"/>
+            <a:ext cx="1394684" cy="196850"/>
+          </a:xfrm>
+          <a:prstGeom prst="rect">
+            <a:avLst/>
+          </a:prstGeom>
+          <a:noFill/>
+          <a:ln/>
+        </p:spPr>
+        <p:txBody>
+          <a:bodyPr wrap="none" lIns="0" tIns="0" rIns="0" bIns="0" rtlCol="0" anchor="ctr"/>
+          <a:lstStyle/>
+          <a:p>
+            <a:pPr algn="l" indent="0" marL="0">
+              <a:buNone/>
+            </a:pPr>
+            <a:r>
+              <a:rPr lang="ko-KR" altLang="en-US" sz="1300" spc="-52" kern="0" dirty="0">
+                <a:solidFill>
+                  <a:srgbClr val="102A4C"/>
+                </a:solidFill>
+                <a:latin typeface="Pretendard ExtraBold" pitchFamily="34" charset="0"/>
+                <a:ea typeface="Pretendard ExtraBold" pitchFamily="34" charset="-127"/>
+                <a:cs typeface="Pretendard ExtraBold" pitchFamily="34" charset="-120"/>
+              </a:rPr>
+              <a:t>디지털 전환 기간 단축</a:t>
+            </a:r>
+            <a:endParaRPr lang="en-US" sz="1300" dirty="0"/>
+          </a:p>
+        </p:txBody>
+      </p:sp>
+      <p:sp>
+        <p:nvSpPr>
+          <p:cNvPr id="85" name="과제 3"/>
+          <p:cNvSpPr txBox="1"/>
+          <p:nvPr/>
+        </p:nvSpPr>
+        <p:spPr>
+          <a:xfrm>
+            <a:off x="1549400" y="4621907"/>
+            <a:ext cx="363637" cy="120650"/>
+          </a:xfrm>
+          <a:prstGeom prst="rect">
+            <a:avLst/>
+          </a:prstGeom>
+          <a:noFill/>
+          <a:ln/>
+        </p:spPr>
+        <p:txBody>
+          <a:bodyPr wrap="none" lIns="0" tIns="0" rIns="0" bIns="0" rtlCol="0" anchor="ctr"/>
+          <a:lstStyle/>
+          <a:p>
+            <a:pPr algn="l" indent="0" marL="0">
+              <a:buNone/>
+            </a:pPr>
+            <a:r>
+              <a:rPr lang="ko-KR" altLang="en-US" sz="800" spc="96" kern="0" dirty="0">
+                <a:solidFill>
+                  <a:srgbClr val="737C8B"/>
+                </a:solidFill>
+                <a:latin typeface="Pretendard ExtraBold" pitchFamily="34" charset="0"/>
+                <a:ea typeface="Pretendard ExtraBold" pitchFamily="34" charset="-127"/>
+                <a:cs typeface="Pretendard ExtraBold" pitchFamily="34" charset="-120"/>
+              </a:rPr>
+              <a:t>과제 3</a:t>
+            </a:r>
+            <a:endParaRPr lang="en-US" sz="800" dirty="0"/>
+          </a:p>
+        </p:txBody>
+      </p:sp>
+      <p:sp>
+        <p:nvSpPr>
+          <p:cNvPr id="86" name="5D(물량·원가) 관리"/>
+          <p:cNvSpPr txBox="1"/>
+          <p:nvPr/>
+        </p:nvSpPr>
+        <p:spPr>
+          <a:xfrm>
+            <a:off x="1549400" y="4818757"/>
+            <a:ext cx="1390477" cy="215900"/>
+          </a:xfrm>
+          <a:prstGeom prst="rect">
+            <a:avLst/>
+          </a:prstGeom>
+          <a:noFill/>
+          <a:ln/>
+        </p:spPr>
+        <p:txBody>
+          <a:bodyPr wrap="none" lIns="0" tIns="0" rIns="0" bIns="0" rtlCol="0" anchor="ctr"/>
+          <a:lstStyle/>
+          <a:p>
+            <a:pPr algn="l" indent="0" marL="0">
+              <a:buNone/>
+            </a:pPr>
+            <a:r>
+              <a:rPr lang="ko-KR" altLang="en-US" sz="1400" spc="-56" kern="0" dirty="0">
+                <a:solidFill>
+                  <a:srgbClr val="102A4C"/>
+                </a:solidFill>
+                <a:latin typeface="Pretendard ExtraBold" pitchFamily="34" charset="0"/>
+                <a:ea typeface="Pretendard ExtraBold" pitchFamily="34" charset="-127"/>
+                <a:cs typeface="Pretendard ExtraBold" pitchFamily="34" charset="-120"/>
+              </a:rPr>
+              <a:t>5D(물량·원가) 관리</a:t>
+            </a:r>
+            <a:endParaRPr lang="en-US" sz="1400" dirty="0"/>
+          </a:p>
+        </p:txBody>
+      </p:sp>
+      <p:sp>
+        <p:nvSpPr>
+          <p:cNvPr id="87" name="BIM 데이터가 정확해야물량·원가 관리가 의미 있음"/>
+          <p:cNvSpPr txBox="1"/>
+          <p:nvPr/>
+        </p:nvSpPr>
+        <p:spPr>
+          <a:xfrm>
+            <a:off x="3841750" y="4604147"/>
+            <a:ext cx="1499856" cy="419100"/>
+          </a:xfrm>
+          <a:prstGeom prst="rect">
+            <a:avLst/>
+          </a:prstGeom>
+          <a:noFill/>
+          <a:ln/>
+        </p:spPr>
+        <p:txBody>
+          <a:bodyPr wrap="none" lIns="0" tIns="0" rIns="0" bIns="0" rtlCol="0" anchor="t"/>
+          <a:lstStyle/>
+          <a:p>
+            <a:pPr algn="l" indent="0" marL="0">
+              <a:lnSpc>
+                <a:spcPts val="1650"/>
+              </a:lnSpc>
+              <a:buNone/>
+            </a:pPr>
+            <a:r>
+              <a:rPr lang="ko-KR" altLang="en-US" sz="1100" spc="-28" kern="0" dirty="0">
+                <a:solidFill>
+                  <a:srgbClr val="3F4654"/>
+                </a:solidFill>
+                <a:latin typeface="Pretendard Medium" pitchFamily="34" charset="0"/>
+                <a:ea typeface="Pretendard Medium" pitchFamily="34" charset="-127"/>
+                <a:cs typeface="Pretendard Medium" pitchFamily="34" charset="-120"/>
+              </a:rPr>
+              <a:t>BIM 데이터가 정확해야</a:t>
+            </a:r>
+            <a:br/>
+            <a:r>
+              <a:rPr lang="ko-KR" altLang="en-US" sz="1100" spc="-28" kern="0" dirty="0">
+                <a:solidFill>
+                  <a:srgbClr val="3F4654"/>
+                </a:solidFill>
+                <a:latin typeface="Pretendard Medium" pitchFamily="34" charset="0"/>
+                <a:ea typeface="Pretendard Medium" pitchFamily="34" charset="-127"/>
+                <a:cs typeface="Pretendard Medium" pitchFamily="34" charset="-120"/>
+              </a:rPr>
+              <a:t>물량·원가 관리가 의미 있음</a:t>
+            </a:r>
+            <a:endParaRPr lang="en-US" sz="1100" dirty="0"/>
+          </a:p>
+        </p:txBody>
+      </p:sp>
+      <p:sp>
+        <p:nvSpPr>
+          <p:cNvPr id="88" name="축척 보정·생성 완성도검증 경험"/>
+          <p:cNvSpPr txBox="1"/>
+          <p:nvPr/>
+        </p:nvSpPr>
+        <p:spPr>
+          <a:xfrm>
+            <a:off x="6604000" y="4606131"/>
+            <a:ext cx="1254280" cy="423466"/>
+          </a:xfrm>
+          <a:prstGeom prst="rect">
+            <a:avLst/>
+          </a:prstGeom>
+          <a:noFill/>
+          <a:ln/>
+        </p:spPr>
+        <p:txBody>
+          <a:bodyPr wrap="none" lIns="0" tIns="0" rIns="0" bIns="0" rtlCol="0" anchor="t"/>
+          <a:lstStyle/>
           <a:p>
             <a:pPr algn="l" indent="0" marL="0">
               <a:lnSpc>
@@ -7961,479 +8307,9 @@
                 <a:ea typeface="Pretendard" pitchFamily="34" charset="-127"/>
                 <a:cs typeface="Pretendard" pitchFamily="34" charset="-120"/>
               </a:rPr>
-              <a:t>불완전한 정보를 짝지어</a:t>
-            </a:r>
-            <a:endParaRPr lang="en-US" sz="1150" dirty="0"/>
-          </a:p>
-        </p:txBody>
-      </p:sp>
-      <p:sp>
-        <p:nvSpPr>
-          <p:cNvPr id="79" name="하나의 3D 모델로 통합"/>
-          <p:cNvSpPr txBox="1"/>
-          <p:nvPr/>
-        </p:nvSpPr>
-        <p:spPr>
-          <a:xfrm>
-            <a:off x="8978900" y="2399407"/>
-            <a:ext cx="1473142" cy="196850"/>
-          </a:xfrm>
-          <a:prstGeom prst="rect">
-            <a:avLst/>
-          </a:prstGeom>
-          <a:noFill/>
-          <a:ln/>
-        </p:spPr>
-        <p:txBody>
-          <a:bodyPr wrap="none" lIns="0" tIns="0" rIns="0" bIns="0" rtlCol="0" anchor="ctr"/>
-          <a:lstStyle/>
-          <a:p>
-            <a:pPr algn="l" indent="0" marL="0">
-              <a:buNone/>
-            </a:pPr>
-            <a:r>
-              <a:rPr lang="ko-KR" altLang="en-US" sz="1300" spc="-52" kern="0" dirty="0">
-                <a:solidFill>
-                  <a:srgbClr val="102A4C"/>
-                </a:solidFill>
-                <a:latin typeface="Pretendard ExtraBold" pitchFamily="34" charset="0"/>
-                <a:ea typeface="Pretendard ExtraBold" pitchFamily="34" charset="-127"/>
-                <a:cs typeface="Pretendard ExtraBold" pitchFamily="34" charset="-120"/>
-              </a:rPr>
-              <a:t>하나의 3D 모델로 통합</a:t>
-            </a:r>
-            <a:endParaRPr lang="en-US" sz="1300" dirty="0"/>
-          </a:p>
-        </p:txBody>
-      </p:sp>
-      <p:sp>
-        <p:nvSpPr>
-          <p:cNvPr id="80" name="과제 2"/>
-          <p:cNvSpPr txBox="1"/>
-          <p:nvPr/>
-        </p:nvSpPr>
-        <p:spPr>
-          <a:xfrm>
-            <a:off x="1549400" y="3453507"/>
-            <a:ext cx="360759" cy="120650"/>
-          </a:xfrm>
-          <a:prstGeom prst="rect">
-            <a:avLst/>
-          </a:prstGeom>
-          <a:noFill/>
-          <a:ln/>
-        </p:spPr>
-        <p:txBody>
-          <a:bodyPr wrap="none" lIns="0" tIns="0" rIns="0" bIns="0" rtlCol="0" anchor="ctr"/>
-          <a:lstStyle/>
-          <a:p>
-            <a:pPr algn="l" indent="0" marL="0">
-              <a:buNone/>
-            </a:pPr>
-            <a:r>
-              <a:rPr lang="ko-KR" altLang="en-US" sz="800" spc="96" kern="0" dirty="0">
-                <a:solidFill>
-                  <a:srgbClr val="737C8B"/>
-                </a:solidFill>
-                <a:latin typeface="Pretendard ExtraBold" pitchFamily="34" charset="0"/>
-                <a:ea typeface="Pretendard ExtraBold" pitchFamily="34" charset="-127"/>
-                <a:cs typeface="Pretendard ExtraBold" pitchFamily="34" charset="-120"/>
-              </a:rPr>
-              <a:t>과제 2</a:t>
-            </a:r>
-            <a:endParaRPr lang="en-US" sz="800" dirty="0"/>
-          </a:p>
-        </p:txBody>
-      </p:sp>
-      <p:sp>
-        <p:nvSpPr>
-          <p:cNvPr id="81" name="기존 시설의 디지털 전환"/>
-          <p:cNvSpPr txBox="1"/>
-          <p:nvPr/>
-        </p:nvSpPr>
-        <p:spPr>
-          <a:xfrm>
-            <a:off x="1549400" y="3650357"/>
-            <a:ext cx="1657298" cy="215900"/>
-          </a:xfrm>
-          <a:prstGeom prst="rect">
-            <a:avLst/>
-          </a:prstGeom>
-          <a:noFill/>
-          <a:ln/>
-        </p:spPr>
-        <p:txBody>
-          <a:bodyPr wrap="none" lIns="0" tIns="0" rIns="0" bIns="0" rtlCol="0" anchor="ctr"/>
-          <a:lstStyle/>
-          <a:p>
-            <a:pPr algn="l" indent="0" marL="0">
-              <a:buNone/>
-            </a:pPr>
-            <a:r>
-              <a:rPr lang="ko-KR" altLang="en-US" sz="1400" spc="-56" kern="0" dirty="0">
-                <a:solidFill>
-                  <a:srgbClr val="102A4C"/>
-                </a:solidFill>
-                <a:latin typeface="Pretendard ExtraBold" pitchFamily="34" charset="0"/>
-                <a:ea typeface="Pretendard ExtraBold" pitchFamily="34" charset="-127"/>
-                <a:cs typeface="Pretendard ExtraBold" pitchFamily="34" charset="-120"/>
-              </a:rPr>
-              <a:t>기존 시설의 디지털 전환</a:t>
-            </a:r>
-            <a:endParaRPr lang="en-US" sz="1400" dirty="0"/>
-          </a:p>
-        </p:txBody>
-      </p:sp>
-      <p:sp>
-        <p:nvSpPr>
-          <p:cNvPr id="82" name="이미지 도면만 남은기존 시설이 많음"/>
-          <p:cNvSpPr txBox="1"/>
-          <p:nvPr/>
-        </p:nvSpPr>
-        <p:spPr>
-          <a:xfrm>
-            <a:off x="3841750" y="3435747"/>
-            <a:ext cx="1059186" cy="419100"/>
-          </a:xfrm>
-          <a:prstGeom prst="rect">
-            <a:avLst/>
-          </a:prstGeom>
-          <a:noFill/>
-          <a:ln/>
-        </p:spPr>
-        <p:txBody>
-          <a:bodyPr wrap="none" lIns="0" tIns="0" rIns="0" bIns="0" rtlCol="0" anchor="t"/>
-          <a:lstStyle/>
-          <a:p>
-            <a:pPr algn="l" indent="0" marL="0">
-              <a:lnSpc>
-                <a:spcPts val="1650"/>
-              </a:lnSpc>
-              <a:buNone/>
-            </a:pPr>
-            <a:r>
-              <a:rPr lang="ko-KR" altLang="en-US" sz="1100" spc="-28" kern="0" dirty="0">
-                <a:solidFill>
-                  <a:srgbClr val="3F4654"/>
-                </a:solidFill>
-                <a:latin typeface="Pretendard Medium" pitchFamily="34" charset="0"/>
-                <a:ea typeface="Pretendard Medium" pitchFamily="34" charset="-127"/>
-                <a:cs typeface="Pretendard Medium" pitchFamily="34" charset="-120"/>
-              </a:rPr>
-              <a:t>이미지 도면만 남은</a:t>
-            </a:r>
-            <a:endParaRPr lang="en-US" sz="1100" dirty="0"/>
-          </a:p>
-          <a:p>
-            <a:pPr algn="l" indent="0" marL="0">
-              <a:lnSpc>
-                <a:spcPts val="1650"/>
-              </a:lnSpc>
-              <a:buNone/>
-            </a:pPr>
-            <a:r>
-              <a:rPr lang="ko-KR" altLang="en-US" sz="1100" spc="-28" kern="0" dirty="0">
-                <a:solidFill>
-                  <a:srgbClr val="3F4654"/>
-                </a:solidFill>
-                <a:latin typeface="Pretendard Medium" pitchFamily="34" charset="0"/>
-                <a:ea typeface="Pretendard Medium" pitchFamily="34" charset="-127"/>
-                <a:cs typeface="Pretendard Medium" pitchFamily="34" charset="-120"/>
-              </a:rPr>
-              <a:t>기존 시설이 많음</a:t>
-            </a:r>
-            <a:endParaRPr lang="en-US" sz="1100" dirty="0"/>
-          </a:p>
-        </p:txBody>
-      </p:sp>
-      <p:sp>
-        <p:nvSpPr>
-          <p:cNvPr id="83" name="CAD 정보 없이이미지 도면에서 BIM 생성"/>
-          <p:cNvSpPr txBox="1"/>
-          <p:nvPr/>
-        </p:nvSpPr>
-        <p:spPr>
-          <a:xfrm>
-            <a:off x="6604000" y="3437731"/>
-            <a:ext cx="1506377" cy="423466"/>
-          </a:xfrm>
-          <a:prstGeom prst="rect">
-            <a:avLst/>
-          </a:prstGeom>
-          <a:noFill/>
-          <a:ln/>
-        </p:spPr>
-        <p:txBody>
-          <a:bodyPr wrap="none" lIns="0" tIns="0" rIns="0" bIns="0" rtlCol="0" anchor="t"/>
-          <a:lstStyle/>
-          <a:p>
-            <a:pPr algn="l" indent="0" marL="0">
-              <a:lnSpc>
-                <a:spcPts val="1667"/>
-              </a:lnSpc>
-              <a:buNone/>
-            </a:pPr>
-            <a:r>
-              <a:rPr lang="ko-KR" altLang="en-US" sz="1150" b="1" spc="-40" kern="0" dirty="0">
-                <a:solidFill>
-                  <a:srgbClr val="141820"/>
-                </a:solidFill>
-                <a:latin typeface="Pretendard" pitchFamily="34" charset="0"/>
-                <a:ea typeface="Pretendard" pitchFamily="34" charset="-127"/>
-                <a:cs typeface="Pretendard" pitchFamily="34" charset="-120"/>
-              </a:rPr>
-              <a:t>CAD 정보 없이</a:t>
-            </a:r>
-            <a:endParaRPr lang="en-US" sz="1150" dirty="0"/>
-          </a:p>
-          <a:p>
-            <a:pPr algn="l" indent="0" marL="0">
-              <a:lnSpc>
-                <a:spcPts val="1667"/>
-              </a:lnSpc>
-              <a:buNone/>
-            </a:pPr>
-            <a:r>
-              <a:rPr lang="ko-KR" altLang="en-US" sz="1150" b="1" spc="-40" kern="0" dirty="0">
-                <a:solidFill>
-                  <a:srgbClr val="141820"/>
-                </a:solidFill>
-                <a:latin typeface="Pretendard" pitchFamily="34" charset="0"/>
-                <a:ea typeface="Pretendard" pitchFamily="34" charset="-127"/>
-                <a:cs typeface="Pretendard" pitchFamily="34" charset="-120"/>
-              </a:rPr>
-              <a:t>이미지 도면에서 BIM 생성</a:t>
-            </a:r>
-            <a:endParaRPr lang="en-US" sz="1150" dirty="0"/>
-          </a:p>
-        </p:txBody>
-      </p:sp>
-      <p:sp>
-        <p:nvSpPr>
-          <p:cNvPr id="84" name="디지털 전환 기간 단축"/>
-          <p:cNvSpPr txBox="1"/>
-          <p:nvPr/>
-        </p:nvSpPr>
-        <p:spPr>
-          <a:xfrm>
-            <a:off x="8978900" y="3567807"/>
-            <a:ext cx="1394684" cy="196850"/>
-          </a:xfrm>
-          <a:prstGeom prst="rect">
-            <a:avLst/>
-          </a:prstGeom>
-          <a:noFill/>
-          <a:ln/>
-        </p:spPr>
-        <p:txBody>
-          <a:bodyPr wrap="none" lIns="0" tIns="0" rIns="0" bIns="0" rtlCol="0" anchor="ctr"/>
-          <a:lstStyle/>
-          <a:p>
-            <a:pPr algn="l" indent="0" marL="0">
-              <a:buNone/>
-            </a:pPr>
-            <a:r>
-              <a:rPr lang="ko-KR" altLang="en-US" sz="1300" spc="-52" kern="0" dirty="0">
-                <a:solidFill>
-                  <a:srgbClr val="102A4C"/>
-                </a:solidFill>
-                <a:latin typeface="Pretendard ExtraBold" pitchFamily="34" charset="0"/>
-                <a:ea typeface="Pretendard ExtraBold" pitchFamily="34" charset="-127"/>
-                <a:cs typeface="Pretendard ExtraBold" pitchFamily="34" charset="-120"/>
-              </a:rPr>
-              <a:t>디지털 전환 기간 단축</a:t>
-            </a:r>
-            <a:endParaRPr lang="en-US" sz="1300" dirty="0"/>
-          </a:p>
-        </p:txBody>
-      </p:sp>
-      <p:sp>
-        <p:nvSpPr>
-          <p:cNvPr id="85" name="과제 3"/>
-          <p:cNvSpPr txBox="1"/>
-          <p:nvPr/>
-        </p:nvSpPr>
-        <p:spPr>
-          <a:xfrm>
-            <a:off x="1549400" y="4621907"/>
-            <a:ext cx="363637" cy="120650"/>
-          </a:xfrm>
-          <a:prstGeom prst="rect">
-            <a:avLst/>
-          </a:prstGeom>
-          <a:noFill/>
-          <a:ln/>
-        </p:spPr>
-        <p:txBody>
-          <a:bodyPr wrap="none" lIns="0" tIns="0" rIns="0" bIns="0" rtlCol="0" anchor="ctr"/>
-          <a:lstStyle/>
-          <a:p>
-            <a:pPr algn="l" indent="0" marL="0">
-              <a:buNone/>
-            </a:pPr>
-            <a:r>
-              <a:rPr lang="ko-KR" altLang="en-US" sz="800" spc="96" kern="0" dirty="0">
-                <a:solidFill>
-                  <a:srgbClr val="737C8B"/>
-                </a:solidFill>
-                <a:latin typeface="Pretendard ExtraBold" pitchFamily="34" charset="0"/>
-                <a:ea typeface="Pretendard ExtraBold" pitchFamily="34" charset="-127"/>
-                <a:cs typeface="Pretendard ExtraBold" pitchFamily="34" charset="-120"/>
-              </a:rPr>
-              <a:t>과제 3</a:t>
-            </a:r>
-            <a:endParaRPr lang="en-US" sz="800" dirty="0"/>
-          </a:p>
-        </p:txBody>
-      </p:sp>
-      <p:sp>
-        <p:nvSpPr>
-          <p:cNvPr id="86" name="5D(물량·원가) 관리"/>
-          <p:cNvSpPr txBox="1"/>
-          <p:nvPr/>
-        </p:nvSpPr>
-        <p:spPr>
-          <a:xfrm>
-            <a:off x="1549400" y="4818757"/>
-            <a:ext cx="1390477" cy="215900"/>
-          </a:xfrm>
-          <a:prstGeom prst="rect">
-            <a:avLst/>
-          </a:prstGeom>
-          <a:noFill/>
-          <a:ln/>
-        </p:spPr>
-        <p:txBody>
-          <a:bodyPr wrap="none" lIns="0" tIns="0" rIns="0" bIns="0" rtlCol="0" anchor="ctr"/>
-          <a:lstStyle/>
-          <a:p>
-            <a:pPr algn="l" indent="0" marL="0">
-              <a:buNone/>
-            </a:pPr>
-            <a:r>
-              <a:rPr lang="ko-KR" altLang="en-US" sz="1400" spc="-56" kern="0" dirty="0">
-                <a:solidFill>
-                  <a:srgbClr val="102A4C"/>
-                </a:solidFill>
-                <a:latin typeface="Pretendard ExtraBold" pitchFamily="34" charset="0"/>
-                <a:ea typeface="Pretendard ExtraBold" pitchFamily="34" charset="-127"/>
-                <a:cs typeface="Pretendard ExtraBold" pitchFamily="34" charset="-120"/>
-              </a:rPr>
-              <a:t>5D(물량·원가) 관리</a:t>
-            </a:r>
-            <a:endParaRPr lang="en-US" sz="1400" dirty="0"/>
-          </a:p>
-        </p:txBody>
-      </p:sp>
-      <p:sp>
-        <p:nvSpPr>
-          <p:cNvPr id="87" name="BIM 데이터가 정확해야물량·원가 관리가 의미 있음"/>
-          <p:cNvSpPr txBox="1"/>
-          <p:nvPr/>
-        </p:nvSpPr>
-        <p:spPr>
-          <a:xfrm>
-            <a:off x="3841750" y="4604147"/>
-            <a:ext cx="1499856" cy="419100"/>
-          </a:xfrm>
-          <a:prstGeom prst="rect">
-            <a:avLst/>
-          </a:prstGeom>
-          <a:noFill/>
-          <a:ln/>
-        </p:spPr>
-        <p:txBody>
-          <a:bodyPr wrap="none" lIns="0" tIns="0" rIns="0" bIns="0" rtlCol="0" anchor="t"/>
-          <a:lstStyle/>
-          <a:p>
-            <a:pPr algn="l" indent="0" marL="0">
-              <a:lnSpc>
-                <a:spcPts val="1650"/>
-              </a:lnSpc>
-              <a:buNone/>
-            </a:pPr>
-            <a:r>
-              <a:rPr lang="ko-KR" altLang="en-US" sz="1100" spc="-28" kern="0" dirty="0">
-                <a:solidFill>
-                  <a:srgbClr val="3F4654"/>
-                </a:solidFill>
-                <a:latin typeface="Pretendard Medium" pitchFamily="34" charset="0"/>
-                <a:ea typeface="Pretendard Medium" pitchFamily="34" charset="-127"/>
-                <a:cs typeface="Pretendard Medium" pitchFamily="34" charset="-120"/>
-              </a:rPr>
-              <a:t>BIM 데이터가 정확해야</a:t>
-            </a:r>
-            <a:endParaRPr lang="en-US" sz="1100" dirty="0"/>
-          </a:p>
-          <a:p>
-            <a:pPr algn="l" indent="0" marL="0">
-              <a:lnSpc>
-                <a:spcPts val="1650"/>
-              </a:lnSpc>
-              <a:buNone/>
-            </a:pPr>
-            <a:r>
-              <a:rPr lang="ko-KR" altLang="en-US" sz="1100" spc="-28" kern="0" dirty="0">
-                <a:solidFill>
-                  <a:srgbClr val="3F4654"/>
-                </a:solidFill>
-                <a:latin typeface="Pretendard Medium" pitchFamily="34" charset="0"/>
-                <a:ea typeface="Pretendard Medium" pitchFamily="34" charset="-127"/>
-                <a:cs typeface="Pretendard Medium" pitchFamily="34" charset="-120"/>
-              </a:rPr>
-              <a:t>물량·원가 관리가 의미 있음</a:t>
-            </a:r>
-            <a:endParaRPr lang="en-US" sz="1100" dirty="0"/>
-          </a:p>
-        </p:txBody>
-      </p:sp>
-      <p:sp>
-        <p:nvSpPr>
-          <p:cNvPr id="88" name="축척 보정·생성 완성도검증 경험"/>
-          <p:cNvSpPr txBox="1"/>
-          <p:nvPr/>
-        </p:nvSpPr>
-        <p:spPr>
-          <a:xfrm>
-            <a:off x="6604000" y="4606131"/>
-            <a:ext cx="1254280" cy="423466"/>
-          </a:xfrm>
-          <a:prstGeom prst="rect">
-            <a:avLst/>
-          </a:prstGeom>
-          <a:noFill/>
-          <a:ln/>
-        </p:spPr>
-        <p:txBody>
-          <a:bodyPr wrap="none" lIns="0" tIns="0" rIns="0" bIns="0" rtlCol="0" anchor="t"/>
-          <a:lstStyle/>
-          <a:p>
-            <a:pPr algn="l" indent="0" marL="0">
-              <a:lnSpc>
-                <a:spcPts val="1667"/>
-              </a:lnSpc>
-              <a:buNone/>
-            </a:pPr>
-            <a:r>
-              <a:rPr lang="ko-KR" altLang="en-US" sz="1150" b="1" spc="-40" kern="0" dirty="0">
-                <a:solidFill>
-                  <a:srgbClr val="141820"/>
-                </a:solidFill>
-                <a:latin typeface="Pretendard" pitchFamily="34" charset="0"/>
-                <a:ea typeface="Pretendard" pitchFamily="34" charset="-127"/>
-                <a:cs typeface="Pretendard" pitchFamily="34" charset="-120"/>
-              </a:rPr>
               <a:t>축척 보정·생성 완성도</a:t>
             </a:r>
-            <a:endParaRPr lang="en-US" sz="1150" dirty="0"/>
-          </a:p>
-          <a:p>
-            <a:pPr algn="l" indent="0" marL="0">
-              <a:lnSpc>
-                <a:spcPts val="1667"/>
-              </a:lnSpc>
-              <a:buNone/>
-            </a:pPr>
+            <a:br/>
             <a:r>
               <a:rPr lang="ko-KR" altLang="en-US" sz="1150" b="1" spc="-40" kern="0" dirty="0">
                 <a:solidFill>
@@ -8487,15 +8363,7 @@
               </a:rPr>
               <a:t>모델 데이터 품질 검증에</a:t>
             </a:r>
-            <a:endParaRPr lang="en-US" sz="1300" dirty="0"/>
-          </a:p>
-          <a:p>
-            <a:pPr algn="l" indent="0" marL="0">
-              <a:lnSpc>
-                <a:spcPts val="1820"/>
-              </a:lnSpc>
-              <a:buNone/>
-            </a:pPr>
+            <a:br/>
             <a:r>
               <a:rPr lang="ko-KR" altLang="en-US" sz="1300" spc="-52" kern="0" dirty="0">
                 <a:solidFill>
@@ -8588,12 +8456,6 @@
               </a:rPr>
               <a:t>도면 속 불완전한 정보를 </a:t>
             </a:r>
-            <a:pPr algn="l" indent="0" marL="0">
-              <a:lnSpc>
-                <a:spcPts val="1890"/>
-              </a:lnSpc>
-              <a:buNone/>
-            </a:pPr>
             <a:r>
               <a:rPr lang="ko-KR" altLang="en-US" sz="1350" b="1" spc="-47" kern="0" dirty="0">
                 <a:solidFill>
@@ -8605,12 +8467,6 @@
               </a:rPr>
               <a:t>정확한 3D 데이터</a:t>
             </a:r>
-            <a:pPr algn="l" indent="0" marL="0">
-              <a:lnSpc>
-                <a:spcPts val="1890"/>
-              </a:lnSpc>
-              <a:buNone/>
-            </a:pPr>
             <a:r>
               <a:rPr lang="ko-KR" altLang="en-US" sz="1350" b="1" spc="-47" kern="0" dirty="0">
                 <a:solidFill>
@@ -8622,15 +8478,7 @@
               </a:rPr>
               <a:t>로 잇는 경험으로,</a:t>
             </a:r>
-            <a:endParaRPr lang="en-US" sz="1350" dirty="0"/>
-          </a:p>
-          <a:p>
-            <a:pPr algn="l" indent="0" marL="0">
-              <a:lnSpc>
-                <a:spcPts val="1890"/>
-              </a:lnSpc>
-              <a:buNone/>
-            </a:pPr>
+            <a:br/>
             <a:r>
               <a:rPr lang="ko-KR" altLang="en-US" sz="1350" b="1" spc="-47" kern="0" dirty="0">
                 <a:solidFill>
@@ -8759,9 +8607,6 @@
               </a:rPr>
               <a:t>Automation in Construction</a:t>
             </a:r>
-            <a:pPr algn="l" indent="0" marL="0">
-              <a:buNone/>
-            </a:pPr>
             <a:r>
               <a:rPr lang="ko-KR" altLang="en-US" sz="800" spc="-8" kern="0" dirty="0">
                 <a:solidFill>
@@ -8851,9 +8696,6 @@
               </a:rPr>
               <a:t>10</a:t>
             </a:r>
-            <a:pPr algn="l" indent="0" marL="0">
-              <a:buNone/>
-            </a:pPr>
             <a:r>
               <a:rPr lang="ko-KR" altLang="en-US" sz="750" spc="45" kern="0" dirty="0">
                 <a:solidFill>
@@ -11837,15 +11679,7 @@
               </a:rPr>
               <a:t>BIM 전면 도입이 추진되고 있지만,</a:t>
             </a:r>
-            <a:endParaRPr lang="en-US" sz="2300" dirty="0"/>
-          </a:p>
-          <a:p>
-            <a:pPr algn="l" indent="0" marL="0">
-              <a:lnSpc>
-                <a:spcPts val="2852"/>
-              </a:lnSpc>
-              <a:buNone/>
-            </a:pPr>
+            <a:br/>
             <a:r>
               <a:rPr lang="ko-KR" altLang="en-US" sz="2300" spc="-92" kern="0" dirty="0">
                 <a:solidFill>
@@ -11857,12 +11691,6 @@
               </a:rPr>
               <a:t>대부분의 BIM은 여전히 </a:t>
             </a:r>
-            <a:pPr algn="l" indent="0" marL="0">
-              <a:lnSpc>
-                <a:spcPts val="2852"/>
-              </a:lnSpc>
-              <a:buNone/>
-            </a:pPr>
             <a:r>
               <a:rPr lang="ko-KR" altLang="en-US" sz="2300" spc="-92" kern="0" dirty="0">
                 <a:solidFill>
@@ -11874,12 +11702,6 @@
               </a:rPr>
               <a:t>2D 도면</a:t>
             </a:r>
-            <a:pPr algn="l" indent="0" marL="0">
-              <a:lnSpc>
-                <a:spcPts val="2852"/>
-              </a:lnSpc>
-              <a:buNone/>
-            </a:pPr>
             <a:r>
               <a:rPr lang="ko-KR" altLang="en-US" sz="2300" spc="-92" kern="0" dirty="0">
                 <a:solidFill>
@@ -12287,14 +12109,14 @@
       </p:sp>
       <p:sp>
         <p:nvSpPr>
-          <p:cNvPr id="81" name="'22"/>
+          <p:cNvPr id="81" name="'22 하반기"/>
           <p:cNvSpPr txBox="1"/>
           <p:nvPr/>
         </p:nvSpPr>
         <p:spPr>
           <a:xfrm>
             <a:off x="812800" y="2692797"/>
-            <a:ext cx="242590" cy="165100"/>
+            <a:ext cx="531713" cy="165100"/>
           </a:xfrm>
           <a:prstGeom prst="rect">
             <a:avLst/>
@@ -12318,36 +12140,8 @@
                 <a:ea typeface="Pretendard ExtraBold" pitchFamily="34" charset="-127"/>
                 <a:cs typeface="Pretendard ExtraBold" pitchFamily="34" charset="-120"/>
               </a:rPr>
-              <a:t>'22</a:t>
-            </a:r>
-            <a:endParaRPr lang="en-US" sz="1100" dirty="0"/>
-          </a:p>
-        </p:txBody>
-      </p:sp>
-      <p:sp>
-        <p:nvSpPr>
-          <p:cNvPr id="82" name="하반기"/>
-          <p:cNvSpPr txBox="1"/>
-          <p:nvPr/>
-        </p:nvSpPr>
-        <p:spPr>
-          <a:xfrm>
-            <a:off x="1036340" y="2730897"/>
-            <a:ext cx="308173" cy="120650"/>
-          </a:xfrm>
-          <a:prstGeom prst="rect">
-            <a:avLst/>
-          </a:prstGeom>
-          <a:noFill/>
-          <a:ln/>
-        </p:spPr>
-        <p:txBody>
-          <a:bodyPr wrap="none" lIns="0" tIns="0" rIns="0" bIns="0" rtlCol="0" anchor="ctr"/>
-          <a:lstStyle/>
-          <a:p>
-            <a:pPr algn="l" indent="0" marL="0">
-              <a:buNone/>
-            </a:pPr>
+              <a:t>'22 </a:t>
+            </a:r>
             <a:r>
               <a:rPr lang="ko-KR" altLang="en-US" sz="800" b="1" spc="-16" kern="0" dirty="0">
                 <a:solidFill>
@@ -12359,13 +12153,13 @@
               </a:rPr>
               <a:t>하반기</a:t>
             </a:r>
-            <a:endParaRPr lang="en-US" sz="800" dirty="0"/>
-          </a:p>
-        </p:txBody>
-      </p:sp>
-      <p:sp>
-        <p:nvSpPr>
-          <p:cNvPr id="83" name="도로"/>
+            <a:endParaRPr lang="en-US" sz="1100" dirty="0"/>
+          </a:p>
+        </p:txBody>
+      </p:sp>
+      <p:sp>
+        <p:nvSpPr>
+          <p:cNvPr id="82" name="도로"/>
           <p:cNvSpPr txBox="1"/>
           <p:nvPr/>
         </p:nvSpPr>
@@ -12404,7 +12198,7 @@
       </p:sp>
       <p:sp>
         <p:nvSpPr>
-          <p:cNvPr id="84" name="'23"/>
+          <p:cNvPr id="83" name="'23"/>
           <p:cNvSpPr txBox="1"/>
           <p:nvPr/>
         </p:nvSpPr>
@@ -12443,7 +12237,7 @@
       </p:sp>
       <p:sp>
         <p:nvSpPr>
-          <p:cNvPr id="85" name="철도·건축"/>
+          <p:cNvPr id="84" name="철도·건축"/>
           <p:cNvSpPr txBox="1"/>
           <p:nvPr/>
         </p:nvSpPr>
@@ -12482,7 +12276,7 @@
       </p:sp>
       <p:sp>
         <p:nvSpPr>
-          <p:cNvPr id="86" name="'24"/>
+          <p:cNvPr id="85" name="'24"/>
           <p:cNvSpPr txBox="1"/>
           <p:nvPr/>
         </p:nvSpPr>
@@ -12521,7 +12315,7 @@
       </p:sp>
       <p:sp>
         <p:nvSpPr>
-          <p:cNvPr id="87" name="하천·항만"/>
+          <p:cNvPr id="86" name="하천·항만"/>
           <p:cNvSpPr txBox="1"/>
           <p:nvPr/>
         </p:nvSpPr>
@@ -12560,7 +12354,7 @@
       </p:sp>
       <p:sp>
         <p:nvSpPr>
-          <p:cNvPr id="88" name="'26"/>
+          <p:cNvPr id="87" name="'26"/>
           <p:cNvSpPr txBox="1"/>
           <p:nvPr/>
         </p:nvSpPr>
@@ -12599,7 +12393,7 @@
       </p:sp>
       <p:sp>
         <p:nvSpPr>
-          <p:cNvPr id="89" name="'28"/>
+          <p:cNvPr id="88" name="'28"/>
           <p:cNvSpPr txBox="1"/>
           <p:nvPr/>
         </p:nvSpPr>
@@ -12638,7 +12432,7 @@
       </p:sp>
       <p:sp>
         <p:nvSpPr>
-          <p:cNvPr id="90" name="1,000억원 이상 신규 사업"/>
+          <p:cNvPr id="89" name="1,000억원 이상 신규 사업"/>
           <p:cNvSpPr txBox="1"/>
           <p:nvPr/>
         </p:nvSpPr>
@@ -12677,7 +12471,7 @@
       </p:sp>
       <p:sp>
         <p:nvSpPr>
-          <p:cNvPr id="91" name="500억원 이상"/>
+          <p:cNvPr id="90" name="500억원 이상"/>
           <p:cNvSpPr txBox="1"/>
           <p:nvPr/>
         </p:nvSpPr>
@@ -12716,7 +12510,7 @@
       </p:sp>
       <p:sp>
         <p:nvSpPr>
-          <p:cNvPr id="92" name="300억원 이상"/>
+          <p:cNvPr id="91" name="300억원 이상"/>
           <p:cNvSpPr txBox="1"/>
           <p:nvPr/>
         </p:nvSpPr>
@@ -12755,7 +12549,7 @@
       </p:sp>
       <p:sp>
         <p:nvSpPr>
-          <p:cNvPr id="93" name="1"/>
+          <p:cNvPr id="92" name="1"/>
           <p:cNvSpPr txBox="1"/>
           <p:nvPr/>
         </p:nvSpPr>
@@ -12794,7 +12588,7 @@
       </p:sp>
       <p:sp>
         <p:nvSpPr>
-          <p:cNvPr id="94" name="신규 건설 프로젝트"/>
+          <p:cNvPr id="93" name="신규 건설 프로젝트"/>
           <p:cNvSpPr txBox="1"/>
           <p:nvPr/>
         </p:nvSpPr>
@@ -12833,7 +12627,7 @@
       </p:sp>
       <p:sp>
         <p:nvSpPr>
-          <p:cNvPr id="95" name="2D 도면을 먼저 그린 뒤 BIM으로옮기는 'BIM 전환설계'가 대부분"/>
+          <p:cNvPr id="94" name="2D 도면을 먼저 그린 뒤 BIM으로옮기는 'BIM 전환설계'가 대부분"/>
           <p:cNvSpPr txBox="1"/>
           <p:nvPr/>
         </p:nvSpPr>
@@ -12869,15 +12663,7 @@
               </a:rPr>
               <a:t>2D 도면을 먼저 그린 뒤 BIM으로</a:t>
             </a:r>
-            <a:endParaRPr lang="en-US" sz="1100" dirty="0"/>
-          </a:p>
-          <a:p>
-            <a:pPr algn="l" indent="0" marL="0">
-              <a:lnSpc>
-                <a:spcPts val="1650"/>
-              </a:lnSpc>
-              <a:buNone/>
-            </a:pPr>
+            <a:br/>
             <a:r>
               <a:rPr lang="ko-KR" altLang="en-US" sz="1100" spc="-28" kern="0" dirty="0">
                 <a:solidFill>
@@ -12889,12 +12675,6 @@
               </a:rPr>
               <a:t>옮기는 </a:t>
             </a:r>
-            <a:pPr algn="l" indent="0" marL="0">
-              <a:lnSpc>
-                <a:spcPts val="1650"/>
-              </a:lnSpc>
-              <a:buNone/>
-            </a:pPr>
             <a:r>
               <a:rPr lang="ko-KR" altLang="en-US" sz="1100" spc="-28" kern="0" dirty="0">
                 <a:solidFill>
@@ -12906,12 +12686,6 @@
               </a:rPr>
               <a:t>'BIM 전환설계'</a:t>
             </a:r>
-            <a:pPr algn="l" indent="0" marL="0">
-              <a:lnSpc>
-                <a:spcPts val="1650"/>
-              </a:lnSpc>
-              <a:buNone/>
-            </a:pPr>
             <a:r>
               <a:rPr lang="ko-KR" altLang="en-US" sz="1100" spc="-28" kern="0" dirty="0">
                 <a:solidFill>
@@ -12929,7 +12703,7 @@
       </p:sp>
       <p:sp>
         <p:nvSpPr>
-          <p:cNvPr id="96" name="설계 후반 투입 인력 증가·추가 비용"/>
+          <p:cNvPr id="95" name="설계 후반 투입 인력 증가·추가 비용"/>
           <p:cNvSpPr txBox="1"/>
           <p:nvPr/>
         </p:nvSpPr>
@@ -12968,7 +12742,7 @@
       </p:sp>
       <p:sp>
         <p:nvSpPr>
-          <p:cNvPr id="97" name="투입 인력"/>
+          <p:cNvPr id="96" name="투입 인력"/>
           <p:cNvSpPr txBox="1"/>
           <p:nvPr/>
         </p:nvSpPr>
@@ -13007,7 +12781,7 @@
       </p:sp>
       <p:sp>
         <p:nvSpPr>
-          <p:cNvPr id="98" name="BIM 전환 설계 + 도면 작업"/>
+          <p:cNvPr id="97" name="BIM 전환 설계 + 도면 작업"/>
           <p:cNvSpPr txBox="1"/>
           <p:nvPr/>
         </p:nvSpPr>
@@ -13046,7 +12820,7 @@
       </p:sp>
       <p:sp>
         <p:nvSpPr>
-          <p:cNvPr id="99" name="추가 비용 발생"/>
+          <p:cNvPr id="98" name="추가 비용 발생"/>
           <p:cNvSpPr txBox="1"/>
           <p:nvPr/>
         </p:nvSpPr>
@@ -13085,7 +12859,7 @@
       </p:sp>
       <p:sp>
         <p:nvSpPr>
-          <p:cNvPr id="100" name="2D 설계"/>
+          <p:cNvPr id="99" name="2D 설계"/>
           <p:cNvSpPr txBox="1"/>
           <p:nvPr/>
         </p:nvSpPr>
@@ -13124,7 +12898,7 @@
       </p:sp>
       <p:sp>
         <p:nvSpPr>
-          <p:cNvPr id="101" name="설계"/>
+          <p:cNvPr id="100" name="설계"/>
           <p:cNvSpPr txBox="1"/>
           <p:nvPr/>
         </p:nvSpPr>
@@ -13163,7 +12937,7 @@
       </p:sp>
       <p:sp>
         <p:nvSpPr>
-          <p:cNvPr id="102" name="인허가"/>
+          <p:cNvPr id="101" name="인허가"/>
           <p:cNvSpPr txBox="1"/>
           <p:nvPr/>
         </p:nvSpPr>
@@ -13202,7 +12976,7 @@
       </p:sp>
       <p:sp>
         <p:nvSpPr>
-          <p:cNvPr id="103" name="시공"/>
+          <p:cNvPr id="102" name="시공"/>
           <p:cNvSpPr txBox="1"/>
           <p:nvPr/>
         </p:nvSpPr>
@@ -13241,7 +13015,7 @@
       </p:sp>
       <p:sp>
         <p:nvSpPr>
-          <p:cNvPr id="104" name="출처: 진상윤, 「BIM은 독일까? 득일까?」, 건축문화신문, 2015"/>
+          <p:cNvPr id="103" name="출처: 진상윤, 「BIM은 독일까? 득일까?」, 건축문화신문, 2015"/>
           <p:cNvSpPr txBox="1"/>
           <p:nvPr/>
         </p:nvSpPr>
@@ -13280,7 +13054,7 @@
       </p:sp>
       <p:sp>
         <p:nvSpPr>
-          <p:cNvPr id="105" name="2030 건축BIM 로드맵"/>
+          <p:cNvPr id="104" name="2030 건축BIM 로드맵"/>
           <p:cNvSpPr txBox="1"/>
           <p:nvPr/>
         </p:nvSpPr>
@@ -13319,7 +13093,7 @@
       </p:sp>
       <p:sp>
         <p:nvSpPr>
-          <p:cNvPr id="106" name="'25"/>
+          <p:cNvPr id="105" name="'25"/>
           <p:cNvSpPr txBox="1"/>
           <p:nvPr/>
         </p:nvSpPr>
@@ -13358,7 +13132,7 @@
       </p:sp>
       <p:sp>
         <p:nvSpPr>
-          <p:cNvPr id="107" name="BIM 설계 기반 구축"/>
+          <p:cNvPr id="106" name="BIM 설계 기반 구축"/>
           <p:cNvSpPr txBox="1"/>
           <p:nvPr/>
         </p:nvSpPr>
@@ -13397,7 +13171,7 @@
       </p:sp>
       <p:sp>
         <p:nvSpPr>
-          <p:cNvPr id="108" name="'30"/>
+          <p:cNvPr id="107" name="'30"/>
           <p:cNvSpPr txBox="1"/>
           <p:nvPr/>
         </p:nvSpPr>
@@ -13436,7 +13210,7 @@
       </p:sp>
       <p:sp>
         <p:nvSpPr>
-          <p:cNvPr id="109" name="디지털 건축서비스완전 구현"/>
+          <p:cNvPr id="108" name="디지털 건축서비스완전 구현"/>
           <p:cNvSpPr txBox="1"/>
           <p:nvPr/>
         </p:nvSpPr>
@@ -13472,15 +13246,7 @@
               </a:rPr>
               <a:t>디지털 건축서비스</a:t>
             </a:r>
-            <a:endParaRPr lang="en-US" sz="950" dirty="0"/>
-          </a:p>
-          <a:p>
-            <a:pPr algn="l" indent="0" marL="0">
-              <a:lnSpc>
-                <a:spcPts val="1282"/>
-              </a:lnSpc>
-              <a:buNone/>
-            </a:pPr>
+            <a:br/>
             <a:r>
               <a:rPr lang="ko-KR" altLang="en-US" sz="950" spc="-12" kern="0" dirty="0">
                 <a:solidFill>
@@ -13498,7 +13264,7 @@
       </p:sp>
       <p:sp>
         <p:nvSpPr>
-          <p:cNvPr id="110" name="공동주택(LH) BIM 의무화"/>
+          <p:cNvPr id="109" name="공동주택(LH) BIM 의무화"/>
           <p:cNvSpPr txBox="1"/>
           <p:nvPr/>
         </p:nvSpPr>
@@ -13537,7 +13303,7 @@
       </p:sp>
       <p:sp>
         <p:nvSpPr>
-          <p:cNvPr id="111" name="'20"/>
+          <p:cNvPr id="110" name="'20"/>
           <p:cNvSpPr txBox="1"/>
           <p:nvPr/>
         </p:nvSpPr>
@@ -13576,7 +13342,7 @@
       </p:sp>
       <p:sp>
         <p:nvSpPr>
-          <p:cNvPr id="112" name="25%"/>
+          <p:cNvPr id="111" name="25%"/>
           <p:cNvSpPr txBox="1"/>
           <p:nvPr/>
         </p:nvSpPr>
@@ -13615,7 +13381,7 @@
       </p:sp>
       <p:sp>
         <p:nvSpPr>
-          <p:cNvPr id="113" name="'22"/>
+          <p:cNvPr id="112" name="'22"/>
           <p:cNvSpPr txBox="1"/>
           <p:nvPr/>
         </p:nvSpPr>
@@ -13654,7 +13420,7 @@
       </p:sp>
       <p:sp>
         <p:nvSpPr>
-          <p:cNvPr id="114" name="50%"/>
+          <p:cNvPr id="113" name="50%"/>
           <p:cNvSpPr txBox="1"/>
           <p:nvPr/>
         </p:nvSpPr>
@@ -13693,7 +13459,7 @@
       </p:sp>
       <p:sp>
         <p:nvSpPr>
-          <p:cNvPr id="115" name="'24"/>
+          <p:cNvPr id="114" name="'24"/>
           <p:cNvSpPr txBox="1"/>
           <p:nvPr/>
         </p:nvSpPr>
@@ -13732,7 +13498,7 @@
       </p:sp>
       <p:sp>
         <p:nvSpPr>
-          <p:cNvPr id="116" name="100%"/>
+          <p:cNvPr id="115" name="100%"/>
           <p:cNvSpPr txBox="1"/>
           <p:nvPr/>
         </p:nvSpPr>
@@ -13771,7 +13537,7 @@
       </p:sp>
       <p:sp>
         <p:nvSpPr>
-          <p:cNvPr id="117" name="2"/>
+          <p:cNvPr id="116" name="2"/>
           <p:cNvSpPr txBox="1"/>
           <p:nvPr/>
         </p:nvSpPr>
@@ -13810,7 +13576,7 @@
       </p:sp>
       <p:sp>
         <p:nvSpPr>
-          <p:cNvPr id="118" name="기존 건축물"/>
+          <p:cNvPr id="117" name="기존 건축물"/>
           <p:cNvSpPr txBox="1"/>
           <p:nvPr/>
         </p:nvSpPr>
@@ -13849,7 +13615,7 @@
       </p:sp>
       <p:sp>
         <p:nvSpPr>
-          <p:cNvPr id="119" name="BIM 없이 2D 도면만 남아 있음"/>
+          <p:cNvPr id="118" name="BIM 없이 2D 도면만 남아 있음"/>
           <p:cNvSpPr txBox="1"/>
           <p:nvPr/>
         </p:nvSpPr>
@@ -13882,9 +13648,6 @@
               </a:rPr>
               <a:t>BIM 없이 </a:t>
             </a:r>
-            <a:pPr algn="l" indent="0" marL="0">
-              <a:buNone/>
-            </a:pPr>
             <a:r>
               <a:rPr lang="ko-KR" altLang="en-US" sz="1100" spc="-28" kern="0" dirty="0">
                 <a:solidFill>
@@ -13896,9 +13659,6 @@
               </a:rPr>
               <a:t>2D 도면만</a:t>
             </a:r>
-            <a:pPr algn="l" indent="0" marL="0">
-              <a:buNone/>
-            </a:pPr>
             <a:r>
               <a:rPr lang="ko-KR" altLang="en-US" sz="1100" spc="-28" kern="0" dirty="0">
                 <a:solidFill>
@@ -13916,7 +13676,7 @@
       </p:sp>
       <p:sp>
         <p:nvSpPr>
-          <p:cNvPr id="120" name="BIM을 쓰려면 2D 도면으로3D BIM을 새로 구축해야 함"/>
+          <p:cNvPr id="119" name="BIM을 쓰려면 2D 도면으로3D BIM을 새로 구축해야 함"/>
           <p:cNvSpPr txBox="1"/>
           <p:nvPr/>
         </p:nvSpPr>
@@ -13952,15 +13712,7 @@
               </a:rPr>
               <a:t>BIM을 쓰려면 2D 도면으로</a:t>
             </a:r>
-            <a:endParaRPr lang="en-US" sz="1000" dirty="0"/>
-          </a:p>
-          <a:p>
-            <a:pPr algn="l" indent="0" marL="0">
-              <a:lnSpc>
-                <a:spcPts val="1450"/>
-              </a:lnSpc>
-              <a:buNone/>
-            </a:pPr>
+            <a:br/>
             <a:r>
               <a:rPr lang="ko-KR" altLang="en-US" sz="1000" b="1" spc="-30" kern="0" dirty="0">
                 <a:solidFill>
@@ -13978,7 +13730,7 @@
       </p:sp>
       <p:sp>
         <p:nvSpPr>
-          <p:cNvPr id="121" name="2D 도면"/>
+          <p:cNvPr id="120" name="2D 도면"/>
           <p:cNvSpPr txBox="1"/>
           <p:nvPr/>
         </p:nvSpPr>
@@ -14017,7 +13769,7 @@
       </p:sp>
       <p:sp>
         <p:nvSpPr>
-          <p:cNvPr id="122" name="새로 구축"/>
+          <p:cNvPr id="121" name="새로 구축"/>
           <p:cNvSpPr txBox="1"/>
           <p:nvPr/>
         </p:nvSpPr>
@@ -14056,7 +13808,7 @@
       </p:sp>
       <p:sp>
         <p:nvSpPr>
-          <p:cNvPr id="123" name="3D BIM"/>
+          <p:cNvPr id="122" name="3D BIM"/>
           <p:cNvSpPr txBox="1"/>
           <p:nvPr/>
         </p:nvSpPr>
@@ -14095,7 +13847,7 @@
       </p:sp>
       <p:sp>
         <p:nvSpPr>
-          <p:cNvPr id="124" name="출처: 국토교통부 「스마트 건설 활성화 방안」, 「2030 건축BIM 로"/>
+          <p:cNvPr id="123" name="출처: 국토교통부 「스마트 건설 활성화 방안」, 「2030 건축BIM 로"/>
           <p:cNvSpPr txBox="1"/>
           <p:nvPr/>
         </p:nvSpPr>
@@ -14134,7 +13886,7 @@
       </p:sp>
       <p:sp>
         <p:nvSpPr>
-          <p:cNvPr id="125" name="결국 BIM을 만들려면, 사람이 도면을 보고 직접 모델링해야 합니다."/>
+          <p:cNvPr id="124" name="결국 BIM을 만들려면, 사람이 도면을 보고 직접 모델링해야 합니다."/>
           <p:cNvSpPr txBox="1"/>
           <p:nvPr/>
         </p:nvSpPr>
@@ -14167,9 +13919,6 @@
               </a:rPr>
               <a:t>결국 BIM을 만들려면, </a:t>
             </a:r>
-            <a:pPr algn="l" indent="0" marL="0">
-              <a:buNone/>
-            </a:pPr>
             <a:r>
               <a:rPr lang="ko-KR" altLang="en-US" sz="1200" spc="-36" kern="0" dirty="0">
                 <a:solidFill>
@@ -14181,9 +13930,6 @@
               </a:rPr>
               <a:t>사람이 도면을 보고 직접 모델링</a:t>
             </a:r>
-            <a:pPr algn="l" indent="0" marL="0">
-              <a:buNone/>
-            </a:pPr>
             <a:r>
               <a:rPr lang="ko-KR" altLang="en-US" sz="1200" b="1" spc="-36" kern="0" dirty="0">
                 <a:solidFill>
@@ -14201,7 +13947,7 @@
       </p:sp>
       <p:sp>
         <p:nvSpPr>
-          <p:cNvPr id="126" name="석사 연구 발표  ·  평면도와 입면도 객체 인식 및 정보 통합을 통한 "/>
+          <p:cNvPr id="125" name="석사 연구 발표  ·  평면도와 입면도 객체 인식 및 정보 통합을 통한 "/>
           <p:cNvSpPr txBox="1"/>
           <p:nvPr/>
         </p:nvSpPr>
@@ -14240,7 +13986,7 @@
       </p:sp>
       <p:sp>
         <p:nvSpPr>
-          <p:cNvPr id="127" name="02 / 10"/>
+          <p:cNvPr id="126" name="02 / 10"/>
           <p:cNvSpPr txBox="1"/>
           <p:nvPr/>
         </p:nvSpPr>
@@ -14273,9 +14019,6 @@
               </a:rPr>
               <a:t>02</a:t>
             </a:r>
-            <a:pPr algn="l" indent="0" marL="0">
-              <a:buNone/>
-            </a:pPr>
             <a:r>
               <a:rPr lang="ko-KR" altLang="en-US" sz="750" spc="45" kern="0" dirty="0">
                 <a:solidFill>
@@ -16465,15 +16208,7 @@
               </a:rPr>
               <a:t>2D 도면을 사람이 직접 BIM으로 옮기는 과정은</a:t>
             </a:r>
-            <a:endParaRPr lang="en-US" sz="2300" dirty="0"/>
-          </a:p>
-          <a:p>
-            <a:pPr algn="l" indent="0" marL="0">
-              <a:lnSpc>
-                <a:spcPts val="2852"/>
-              </a:lnSpc>
-              <a:buNone/>
-            </a:pPr>
+            <a:br/>
             <a:r>
               <a:rPr lang="ko-KR" altLang="en-US" sz="2300" spc="-92" kern="0" dirty="0">
                 <a:solidFill>
@@ -16485,12 +16220,6 @@
               </a:rPr>
               <a:t>느리고, 비싸고, 오류에 취약</a:t>
             </a:r>
-            <a:pPr algn="l" indent="0" marL="0">
-              <a:lnSpc>
-                <a:spcPts val="2852"/>
-              </a:lnSpc>
-              <a:buNone/>
-            </a:pPr>
             <a:r>
               <a:rPr lang="ko-KR" altLang="en-US" sz="2300" spc="-92" kern="0" dirty="0">
                 <a:solidFill>
@@ -16856,15 +16585,7 @@
               </a:rPr>
               <a:t>사람이 도면을 해석해</a:t>
             </a:r>
-            <a:endParaRPr lang="en-US" sz="1150" dirty="0"/>
-          </a:p>
-          <a:p>
-            <a:pPr algn="ctr" indent="0" marL="0">
-              <a:lnSpc>
-                <a:spcPts val="1609"/>
-              </a:lnSpc>
-              <a:buNone/>
-            </a:pPr>
+            <a:br/>
             <a:r>
               <a:rPr lang="ko-KR" altLang="en-US" sz="1150" spc="-40" kern="0" dirty="0">
                 <a:solidFill>
@@ -17383,9 +17104,6 @@
               </a:rPr>
               <a:t>2차원 도면에 기반한 </a:t>
             </a:r>
-            <a:pPr algn="l" indent="0" marL="0">
-              <a:buNone/>
-            </a:pPr>
             <a:r>
               <a:rPr lang="ko-KR" altLang="en-US" sz="1350" b="1" spc="-47" kern="0" dirty="0">
                 <a:solidFill>
@@ -17397,9 +17115,6 @@
               </a:rPr>
               <a:t>3차원 BIM 모델 자동 생성 프로세스</a:t>
             </a:r>
-            <a:pPr algn="l" indent="0" marL="0">
-              <a:buNone/>
-            </a:pPr>
             <a:r>
               <a:rPr lang="ko-KR" altLang="en-US" sz="1350" b="1" spc="-47" kern="0" dirty="0">
                 <a:solidFill>
@@ -17489,9 +17204,6 @@
               </a:rPr>
               <a:t>03</a:t>
             </a:r>
-            <a:pPr algn="l" indent="0" marL="0">
-              <a:buNone/>
-            </a:pPr>
             <a:r>
               <a:rPr lang="ko-KR" altLang="en-US" sz="750" spc="45" kern="0" dirty="0">
                 <a:solidFill>
@@ -19689,15 +19401,7 @@
               </a:rPr>
               <a:t>기존 연구의 세 가지 한계를</a:t>
             </a:r>
-            <a:endParaRPr lang="en-US" sz="2300" dirty="0"/>
-          </a:p>
-          <a:p>
-            <a:pPr algn="l" indent="0" marL="0">
-              <a:lnSpc>
-                <a:spcPts val="2852"/>
-              </a:lnSpc>
-              <a:buNone/>
-            </a:pPr>
+            <a:br/>
             <a:r>
               <a:rPr lang="ko-KR" altLang="en-US" sz="2300" spc="-92" kern="0" dirty="0">
                 <a:solidFill>
@@ -19709,12 +19413,6 @@
               </a:rPr>
               <a:t>세 가지 연구 목표</a:t>
             </a:r>
-            <a:pPr algn="l" indent="0" marL="0">
-              <a:lnSpc>
-                <a:spcPts val="2852"/>
-              </a:lnSpc>
-              <a:buNone/>
-            </a:pPr>
             <a:r>
               <a:rPr lang="ko-KR" altLang="en-US" sz="2300" spc="-92" kern="0" dirty="0">
                 <a:solidFill>
@@ -20938,15 +20636,7 @@
               </a:rPr>
               <a:t>딥러닝 기반 도면 객체 인식과 평면도·입면도 간 직접 매칭으로,</a:t>
             </a:r>
-            <a:endParaRPr lang="en-US" sz="1350" dirty="0"/>
-          </a:p>
-          <a:p>
-            <a:pPr algn="l" indent="0" marL="0">
-              <a:lnSpc>
-                <a:spcPts val="1890"/>
-              </a:lnSpc>
-              <a:buNone/>
-            </a:pPr>
+            <a:br/>
             <a:r>
               <a:rPr lang="ko-KR" altLang="en-US" sz="1350" b="1" spc="-47" kern="0" dirty="0">
                 <a:solidFill>
@@ -20958,12 +20648,6 @@
               </a:rPr>
               <a:t>정확한 3차원 정보를 가진 BIM 자동 생성 방법</a:t>
             </a:r>
-            <a:pPr algn="l" indent="0" marL="0">
-              <a:lnSpc>
-                <a:spcPts val="1890"/>
-              </a:lnSpc>
-              <a:buNone/>
-            </a:pPr>
             <a:r>
               <a:rPr lang="ko-KR" altLang="en-US" sz="1350" b="1" spc="-47" kern="0" dirty="0">
                 <a:solidFill>
@@ -21053,9 +20737,6 @@
               </a:rPr>
               <a:t>04</a:t>
             </a:r>
-            <a:pPr algn="l" indent="0" marL="0">
-              <a:buNone/>
-            </a:pPr>
             <a:r>
               <a:rPr lang="ko-KR" altLang="en-US" sz="750" spc="45" kern="0" dirty="0">
                 <a:solidFill>
@@ -22752,15 +22433,7 @@
               </a:rPr>
               <a:t>도면 이미지만으로 객체 인식부터 BIM 생성까지</a:t>
             </a:r>
-            <a:endParaRPr lang="en-US" sz="2300" dirty="0"/>
-          </a:p>
-          <a:p>
-            <a:pPr algn="l" indent="0" marL="0">
-              <a:lnSpc>
-                <a:spcPts val="2852"/>
-              </a:lnSpc>
-              <a:buNone/>
-            </a:pPr>
+            <a:br/>
             <a:r>
               <a:rPr lang="ko-KR" altLang="en-US" sz="2300" spc="-92" kern="0" dirty="0">
                 <a:solidFill>
@@ -22772,12 +22445,6 @@
               </a:rPr>
               <a:t>전 과정을 자동화</a:t>
             </a:r>
-            <a:pPr algn="l" indent="0" marL="0">
-              <a:lnSpc>
-                <a:spcPts val="2852"/>
-              </a:lnSpc>
-              <a:buNone/>
-            </a:pPr>
             <a:r>
               <a:rPr lang="ko-KR" altLang="en-US" sz="2300" spc="-92" kern="0" dirty="0">
                 <a:solidFill>
@@ -24121,14 +23788,14 @@
       </p:sp>
       <p:sp>
         <p:nvSpPr>
-          <p:cNvPr id="83" name="p.07"/>
-          <p:cNvSpPr txBox="1"/>
-          <p:nvPr/>
-        </p:nvSpPr>
-        <p:spPr>
-          <a:xfrm>
-            <a:off x="4007445" y="6070997"/>
-            <a:ext cx="288925" cy="127000"/>
+          <p:cNvPr id="83" name="p.07  도면 객체 인식 · 축척 보정"/>
+          <p:cNvSpPr txBox="1"/>
+          <p:nvPr/>
+        </p:nvSpPr>
+        <p:spPr>
+          <a:xfrm>
+            <a:off x="3967098" y="6070997"/>
+            <a:ext cx="1425605" cy="127000"/>
           </a:xfrm>
           <a:prstGeom prst="rect">
             <a:avLst/>
@@ -24140,7 +23807,7 @@
           <a:bodyPr wrap="none" lIns="0" tIns="0" rIns="0" bIns="0" rtlCol="0" anchor="ctr"/>
           <a:lstStyle/>
           <a:p>
-            <a:pPr algn="l" indent="0" marL="0">
+            <a:pPr algn="ctr" indent="0" marL="0">
               <a:buNone/>
             </a:pPr>
             <a:r>
@@ -24152,36 +23819,8 @@
                 <a:ea typeface="Pretendard ExtraBold" pitchFamily="34" charset="-127"/>
                 <a:cs typeface="Pretendard ExtraBold" pitchFamily="34" charset="-120"/>
               </a:rPr>
-              <a:t>p.07</a:t>
-            </a:r>
-            <a:endParaRPr lang="en-US" sz="850" dirty="0"/>
-          </a:p>
-        </p:txBody>
-      </p:sp>
-      <p:sp>
-        <p:nvSpPr>
-          <p:cNvPr id="84" name="도면 객체 인식 · 축척 보정"/>
-          <p:cNvSpPr txBox="1"/>
-          <p:nvPr/>
-        </p:nvSpPr>
-        <p:spPr>
-          <a:xfrm>
-            <a:off x="4296370" y="6070997"/>
-            <a:ext cx="1119344" cy="127000"/>
-          </a:xfrm>
-          <a:prstGeom prst="rect">
-            <a:avLst/>
-          </a:prstGeom>
-          <a:noFill/>
-          <a:ln/>
-        </p:spPr>
-        <p:txBody>
-          <a:bodyPr wrap="none" lIns="0" tIns="0" rIns="0" bIns="0" rtlCol="0" anchor="ctr"/>
-          <a:lstStyle/>
-          <a:p>
-            <a:pPr algn="l" indent="0" marL="0">
-              <a:buNone/>
-            </a:pPr>
+              <a:t>p.07  </a:t>
+            </a:r>
             <a:r>
               <a:rPr lang="ko-KR" altLang="en-US" sz="850" spc="-17" kern="0" dirty="0">
                 <a:solidFill>
@@ -24199,14 +23838,14 @@
       </p:sp>
       <p:sp>
         <p:nvSpPr>
-          <p:cNvPr id="85" name="p.08"/>
-          <p:cNvSpPr txBox="1"/>
-          <p:nvPr/>
-        </p:nvSpPr>
-        <p:spPr>
-          <a:xfrm>
-            <a:off x="8250039" y="6070997"/>
-            <a:ext cx="298648" cy="127000"/>
+          <p:cNvPr id="84" name="p.08  대응 객체 매칭 · BIM 생성"/>
+          <p:cNvSpPr txBox="1"/>
+          <p:nvPr/>
+        </p:nvSpPr>
+        <p:spPr>
+          <a:xfrm>
+            <a:off x="8209358" y="6070997"/>
+            <a:ext cx="1437384" cy="127000"/>
           </a:xfrm>
           <a:prstGeom prst="rect">
             <a:avLst/>
@@ -24218,7 +23857,7 @@
           <a:bodyPr wrap="none" lIns="0" tIns="0" rIns="0" bIns="0" rtlCol="0" anchor="ctr"/>
           <a:lstStyle/>
           <a:p>
-            <a:pPr algn="l" indent="0" marL="0">
+            <a:pPr algn="ctr" indent="0" marL="0">
               <a:buNone/>
             </a:pPr>
             <a:r>
@@ -24230,36 +23869,8 @@
                 <a:ea typeface="Pretendard ExtraBold" pitchFamily="34" charset="-127"/>
                 <a:cs typeface="Pretendard ExtraBold" pitchFamily="34" charset="-120"/>
               </a:rPr>
-              <a:t>p.08</a:t>
-            </a:r>
-            <a:endParaRPr lang="en-US" sz="850" dirty="0"/>
-          </a:p>
-        </p:txBody>
-      </p:sp>
-      <p:sp>
-        <p:nvSpPr>
-          <p:cNvPr id="86" name="대응 객체 매칭 · BIM 생성"/>
-          <p:cNvSpPr txBox="1"/>
-          <p:nvPr/>
-        </p:nvSpPr>
-        <p:spPr>
-          <a:xfrm>
-            <a:off x="8548687" y="6070997"/>
-            <a:ext cx="1120817" cy="127000"/>
-          </a:xfrm>
-          <a:prstGeom prst="rect">
-            <a:avLst/>
-          </a:prstGeom>
-          <a:noFill/>
-          <a:ln/>
-        </p:spPr>
-        <p:txBody>
-          <a:bodyPr wrap="none" lIns="0" tIns="0" rIns="0" bIns="0" rtlCol="0" anchor="ctr"/>
-          <a:lstStyle/>
-          <a:p>
-            <a:pPr algn="l" indent="0" marL="0">
-              <a:buNone/>
-            </a:pPr>
+              <a:t>p.08  </a:t>
+            </a:r>
             <a:r>
               <a:rPr lang="ko-KR" altLang="en-US" sz="850" spc="-17" kern="0" dirty="0">
                 <a:solidFill>
@@ -24277,7 +23888,7 @@
       </p:sp>
       <p:sp>
         <p:nvSpPr>
-          <p:cNvPr id="87" name="석사 연구 발표  ·  평면도와 입면도 객체 인식 및 정보 통합을 통한 "/>
+          <p:cNvPr id="85" name="석사 연구 발표  ·  평면도와 입면도 객체 인식 및 정보 통합을 통한 "/>
           <p:cNvSpPr txBox="1"/>
           <p:nvPr/>
         </p:nvSpPr>
@@ -24316,7 +23927,7 @@
       </p:sp>
       <p:sp>
         <p:nvSpPr>
-          <p:cNvPr id="88" name="05 / 10"/>
+          <p:cNvPr id="86" name="05 / 10"/>
           <p:cNvSpPr txBox="1"/>
           <p:nvPr/>
         </p:nvSpPr>
@@ -24349,9 +23960,6 @@
               </a:rPr>
               <a:t>05</a:t>
             </a:r>
-            <a:pPr algn="l" indent="0" marL="0">
-              <a:buNone/>
-            </a:pPr>
             <a:r>
               <a:rPr lang="ko-KR" altLang="en-US" sz="750" spc="45" kern="0" dirty="0">
                 <a:solidFill>
@@ -28117,9 +27725,6 @@
               </a:rPr>
               <a:t>평면도와 입면도에서 </a:t>
             </a:r>
-            <a:pPr algn="l" indent="0" marL="0">
-              <a:buNone/>
-            </a:pPr>
             <a:r>
               <a:rPr lang="ko-KR" altLang="en-US" sz="2300" spc="-92" kern="0" dirty="0">
                 <a:solidFill>
@@ -28131,9 +27736,6 @@
               </a:rPr>
               <a:t>벽 · 창문 · 문</a:t>
             </a:r>
-            <a:pPr algn="l" indent="0" marL="0">
-              <a:buNone/>
-            </a:pPr>
             <a:r>
               <a:rPr lang="ko-KR" altLang="en-US" sz="2300" spc="-92" kern="0" dirty="0">
                 <a:solidFill>
@@ -28613,9 +28215,6 @@
               </a:rPr>
               <a:t>외벽의 창·문을 </a:t>
             </a:r>
-            <a:pPr algn="l" indent="0" marL="0">
-              <a:buNone/>
-            </a:pPr>
             <a:r>
               <a:rPr lang="ko-KR" altLang="en-US" sz="1050" b="1" spc="-26" kern="0" dirty="0">
                 <a:solidFill>
@@ -28627,9 +28226,6 @@
               </a:rPr>
               <a:t>방향별로 정리</a:t>
             </a:r>
-            <a:pPr algn="l" indent="0" marL="0">
-              <a:buNone/>
-            </a:pPr>
             <a:r>
               <a:rPr lang="ko-KR" altLang="en-US" sz="1050" spc="-26" kern="0" dirty="0">
                 <a:solidFill>
@@ -28914,9 +28510,6 @@
               </a:rPr>
               <a:t>같은 층의 창·문끼리 묶어 </a:t>
             </a:r>
-            <a:pPr algn="l" indent="0" marL="0">
-              <a:buNone/>
-            </a:pPr>
             <a:r>
               <a:rPr lang="ko-KR" altLang="en-US" sz="1050" b="1" spc="-26" kern="0" dirty="0">
                 <a:solidFill>
@@ -29051,7 +28644,7 @@
       </p:sp>
       <p:sp>
         <p:nvSpPr>
-          <p:cNvPr id="119" name="STEP 3기법"/>
+          <p:cNvPr id="119" name="STEP 3 기법"/>
           <p:cNvSpPr txBox="1"/>
           <p:nvPr/>
         </p:nvSpPr>
@@ -29082,11 +28675,8 @@
                 <a:ea typeface="Pretendard ExtraBold" pitchFamily="34" charset="-127"/>
                 <a:cs typeface="Pretendard ExtraBold" pitchFamily="34" charset="-120"/>
               </a:rPr>
-              <a:t>STEP 3</a:t>
-            </a:r>
-            <a:pPr algn="l" indent="0" marL="0">
-              <a:buNone/>
-            </a:pPr>
+              <a:t>STEP 3 </a:t>
+            </a:r>
             <a:r>
               <a:rPr lang="ko-KR" altLang="en-US" sz="800" b="1" dirty="0">
                 <a:solidFill>
@@ -29218,15 +28808,7 @@
               </a:rPr>
               <a:t>LMM이 도면의 축척·용지 크기를 읽어</a:t>
             </a:r>
-            <a:endParaRPr lang="en-US" sz="1100" dirty="0"/>
-          </a:p>
-          <a:p>
-            <a:pPr algn="l" indent="0" marL="0">
-              <a:lnSpc>
-                <a:spcPts val="1650"/>
-              </a:lnSpc>
-              <a:buNone/>
-            </a:pPr>
+            <a:br/>
             <a:r>
               <a:rPr lang="ko-KR" altLang="en-US" sz="1100" spc="-28" kern="0" dirty="0">
                 <a:solidFill>
@@ -29322,7 +28904,7 @@
       </p:sp>
       <p:sp>
         <p:nvSpPr>
-          <p:cNvPr id="125" name="4,963px"/>
+          <p:cNvPr id="125" name="4,963 px"/>
           <p:cNvSpPr txBox="1"/>
           <p:nvPr/>
         </p:nvSpPr>
@@ -29345,7 +28927,7 @@
               <a:buNone/>
             </a:pPr>
             <a:r>
-              <a:rPr lang="ko-KR" altLang="en-US" sz="850" b="1" spc="-12" kern="0" dirty="0">
+              <a:rPr lang="ko-KR" altLang="en-US" sz="850" b="1" spc="-2" kern="0" dirty="0">
                 <a:solidFill>
                   <a:srgbClr val="3F4654"/>
                 </a:solidFill>
@@ -29353,11 +28935,8 @@
                 <a:ea typeface="Pretendard" pitchFamily="34" charset="-127"/>
                 <a:cs typeface="Pretendard" pitchFamily="34" charset="-120"/>
               </a:rPr>
-              <a:t>4,963</a:t>
-            </a:r>
-            <a:pPr algn="ctr" indent="0" marL="0">
-              <a:buNone/>
-            </a:pPr>
+              <a:t>4,963 </a:t>
+            </a:r>
             <a:r>
               <a:rPr lang="ko-KR" altLang="en-US" sz="750" spc="-12" kern="0" dirty="0">
                 <a:solidFill>
@@ -29375,7 +28954,7 @@
       </p:sp>
       <p:sp>
         <p:nvSpPr>
-          <p:cNvPr id="126" name="3,509px"/>
+          <p:cNvPr id="126" name="3,509 px"/>
           <p:cNvSpPr txBox="1"/>
           <p:nvPr/>
         </p:nvSpPr>
@@ -29398,7 +28977,7 @@
               <a:buNone/>
             </a:pPr>
             <a:r>
-              <a:rPr lang="ko-KR" altLang="en-US" sz="850" b="1" spc="-12" kern="0" dirty="0">
+              <a:rPr lang="ko-KR" altLang="en-US" sz="850" b="1" dirty="0">
                 <a:solidFill>
                   <a:srgbClr val="3F4654"/>
                 </a:solidFill>
@@ -29406,11 +28985,8 @@
                 <a:ea typeface="Pretendard" pitchFamily="34" charset="-127"/>
                 <a:cs typeface="Pretendard" pitchFamily="34" charset="-120"/>
               </a:rPr>
-              <a:t>3,509</a:t>
-            </a:r>
-            <a:pPr algn="r" indent="0" marL="0">
-              <a:buNone/>
-            </a:pPr>
+              <a:t>3,509 </a:t>
+            </a:r>
             <a:r>
               <a:rPr lang="ko-KR" altLang="en-US" sz="750" spc="-12" kern="0" dirty="0">
                 <a:solidFill>
@@ -29545,14 +29121,14 @@
       </p:sp>
       <p:sp>
         <p:nvSpPr>
-          <p:cNvPr id="130" name="1 px"/>
-          <p:cNvSpPr txBox="1"/>
-          <p:nvPr/>
-        </p:nvSpPr>
-        <p:spPr>
-          <a:xfrm>
-            <a:off x="9391650" y="5626298"/>
-            <a:ext cx="348357" cy="196850"/>
+          <p:cNvPr id="130" name="1 px = 33.88 mm"/>
+          <p:cNvSpPr txBox="1"/>
+          <p:nvPr/>
+        </p:nvSpPr>
+        <p:spPr>
+          <a:xfrm>
+            <a:off x="9391650" y="5505648"/>
+            <a:ext cx="1716615" cy="349250"/>
           </a:xfrm>
           <a:prstGeom prst="rect">
             <a:avLst/>
@@ -29576,36 +29152,8 @@
                 <a:ea typeface="Pretendard" pitchFamily="34" charset="-127"/>
                 <a:cs typeface="Pretendard" pitchFamily="34" charset="-120"/>
               </a:rPr>
-              <a:t>1 px</a:t>
-            </a:r>
-            <a:endParaRPr lang="en-US" sz="1300" dirty="0"/>
-          </a:p>
-        </p:txBody>
-      </p:sp>
-      <p:sp>
-        <p:nvSpPr>
-          <p:cNvPr id="131" name="=33.88mm"/>
-          <p:cNvSpPr txBox="1"/>
-          <p:nvPr/>
-        </p:nvSpPr>
-        <p:spPr>
-          <a:xfrm>
-            <a:off x="9740007" y="5505648"/>
-            <a:ext cx="1347357" cy="349250"/>
-          </a:xfrm>
-          <a:prstGeom prst="rect">
-            <a:avLst/>
-          </a:prstGeom>
-          <a:noFill/>
-          <a:ln/>
-        </p:spPr>
-        <p:txBody>
-          <a:bodyPr wrap="none" lIns="0" tIns="0" rIns="0" bIns="0" rtlCol="0" anchor="ctr"/>
-          <a:lstStyle/>
-          <a:p>
-            <a:pPr algn="l" indent="0" marL="0">
-              <a:buNone/>
-            </a:pPr>
+              <a:t>1 px </a:t>
+            </a:r>
             <a:r>
               <a:rPr lang="ko-KR" altLang="en-US" sz="1300" spc="-12" kern="0" dirty="0">
                 <a:solidFill>
@@ -29615,13 +29163,10 @@
                 <a:ea typeface="Pretendard SemiBold" pitchFamily="34" charset="-127"/>
                 <a:cs typeface="Pretendard SemiBold" pitchFamily="34" charset="-120"/>
               </a:rPr>
-              <a:t>=</a:t>
-            </a:r>
-            <a:pPr algn="l" indent="0" marL="0">
-              <a:buNone/>
-            </a:pPr>
-            <a:r>
-              <a:rPr lang="ko-KR" altLang="en-US" sz="2300" spc="-69" kern="0" dirty="0">
+              <a:t>= </a:t>
+            </a:r>
+            <a:r>
+              <a:rPr lang="ko-KR" altLang="en-US" sz="2300" spc="-14" kern="0" dirty="0">
                 <a:solidFill>
                   <a:srgbClr val="102A4C"/>
                 </a:solidFill>
@@ -29629,11 +29174,8 @@
                 <a:ea typeface="Pretendard ExtraBold" pitchFamily="34" charset="-127"/>
                 <a:cs typeface="Pretendard ExtraBold" pitchFamily="34" charset="-120"/>
               </a:rPr>
-              <a:t>33.88</a:t>
-            </a:r>
-            <a:pPr algn="l" indent="0" marL="0">
-              <a:buNone/>
-            </a:pPr>
+              <a:t>33.88 </a:t>
+            </a:r>
             <a:r>
               <a:rPr lang="ko-KR" altLang="en-US" sz="1200" b="1" dirty="0">
                 <a:solidFill>
@@ -29651,7 +29193,7 @@
       </p:sp>
       <p:sp>
         <p:nvSpPr>
-          <p:cNvPr id="132" name="픽셀 크기를 실제 길이로 환산"/>
+          <p:cNvPr id="131" name="픽셀 크기를 실제 길이로 환산"/>
           <p:cNvSpPr txBox="1"/>
           <p:nvPr/>
         </p:nvSpPr>
@@ -29690,7 +29232,7 @@
       </p:sp>
       <p:sp>
         <p:nvSpPr>
-          <p:cNvPr id="133" name="석사 연구 발표  ·  평면도와 입면도 객체 인식 및 정보 통합을 통한 "/>
+          <p:cNvPr id="132" name="석사 연구 발표  ·  평면도와 입면도 객체 인식 및 정보 통합을 통한 "/>
           <p:cNvSpPr txBox="1"/>
           <p:nvPr/>
         </p:nvSpPr>
@@ -29729,7 +29271,7 @@
       </p:sp>
       <p:sp>
         <p:nvSpPr>
-          <p:cNvPr id="134" name="06 / 10"/>
+          <p:cNvPr id="133" name="06 / 10"/>
           <p:cNvSpPr txBox="1"/>
           <p:nvPr/>
         </p:nvSpPr>
@@ -29762,9 +29304,6 @@
               </a:rPr>
               <a:t>06</a:t>
             </a:r>
-            <a:pPr algn="l" indent="0" marL="0">
-              <a:buNone/>
-            </a:pPr>
             <a:r>
               <a:rPr lang="ko-KR" altLang="en-US" sz="750" spc="45" kern="0" dirty="0">
                 <a:solidFill>
@@ -31131,15 +30670,7 @@
               </a:rPr>
               <a:t>평면도의 X·Y와 입면도의 Z를 짝지어,</a:t>
             </a:r>
-            <a:endParaRPr lang="en-US" sz="2300" dirty="0"/>
-          </a:p>
-          <a:p>
-            <a:pPr algn="l" indent="0" marL="0">
-              <a:lnSpc>
-                <a:spcPts val="2852"/>
-              </a:lnSpc>
-              <a:buNone/>
-            </a:pPr>
+            <a:br/>
             <a:r>
               <a:rPr lang="ko-KR" altLang="en-US" sz="2300" spc="-92" kern="0" dirty="0">
                 <a:solidFill>
@@ -31151,12 +30682,6 @@
               </a:rPr>
               <a:t>높이까지 갖춘 BIM</a:t>
             </a:r>
-            <a:pPr algn="l" indent="0" marL="0">
-              <a:lnSpc>
-                <a:spcPts val="2852"/>
-              </a:lnSpc>
-              <a:buNone/>
-            </a:pPr>
             <a:r>
               <a:rPr lang="ko-KR" altLang="en-US" sz="2300" spc="-92" kern="0" dirty="0">
                 <a:solidFill>
@@ -32224,8 +31749,42 @@
               </a:rPr>
               <a:t>평면도 객체</a:t>
             </a:r>
+            <a:br/>
+            <a:r>
+              <a:rPr lang="ko-KR" altLang="en-US" sz="800" spc="-12" kern="0" dirty="0">
+                <a:solidFill>
+                  <a:srgbClr val="3F4654"/>
+                </a:solidFill>
+                <a:latin typeface="Pretendard SemiBold" pitchFamily="34" charset="0"/>
+                <a:ea typeface="Pretendard SemiBold" pitchFamily="34" charset="-127"/>
+                <a:cs typeface="Pretendard SemiBold" pitchFamily="34" charset="-120"/>
+              </a:rPr>
+              <a:t>인식 결과</a:t>
+            </a:r>
             <a:endParaRPr lang="en-US" sz="800" dirty="0"/>
           </a:p>
+        </p:txBody>
+      </p:sp>
+      <p:sp>
+        <p:nvSpPr>
+          <p:cNvPr id="66" name="Skeletonization(골격선 추출)"/>
+          <p:cNvSpPr txBox="1"/>
+          <p:nvPr/>
+        </p:nvSpPr>
+        <p:spPr>
+          <a:xfrm>
+            <a:off x="7509768" y="3016647"/>
+            <a:ext cx="753864" cy="266700"/>
+          </a:xfrm>
+          <a:prstGeom prst="rect">
+            <a:avLst/>
+          </a:prstGeom>
+          <a:noFill/>
+          <a:ln/>
+        </p:spPr>
+        <p:txBody>
+          <a:bodyPr wrap="none" lIns="0" tIns="0" rIns="0" bIns="0" rtlCol="0" anchor="t"/>
+          <a:lstStyle/>
           <a:p>
             <a:pPr algn="ctr" indent="0" marL="0">
               <a:lnSpc>
@@ -32242,7 +31801,19 @@
                 <a:ea typeface="Pretendard SemiBold" pitchFamily="34" charset="-127"/>
                 <a:cs typeface="Pretendard SemiBold" pitchFamily="34" charset="-120"/>
               </a:rPr>
-              <a:t>인식 결과</a:t>
+              <a:t>Skeletonization</a:t>
+            </a:r>
+            <a:br/>
+            <a:r>
+              <a:rPr lang="ko-KR" altLang="en-US" sz="800" spc="-12" kern="0" dirty="0">
+                <a:solidFill>
+                  <a:srgbClr val="3F4654"/>
+                </a:solidFill>
+                <a:latin typeface="Pretendard SemiBold" pitchFamily="34" charset="0"/>
+                <a:ea typeface="Pretendard SemiBold" pitchFamily="34" charset="-127"/>
+                <a:cs typeface="Pretendard SemiBold" pitchFamily="34" charset="-120"/>
+              </a:rPr>
+              <a:t>(골격선 추출)</a:t>
             </a:r>
             <a:endParaRPr lang="en-US" sz="800" dirty="0"/>
           </a:p>
@@ -32250,14 +31821,14 @@
       </p:sp>
       <p:sp>
         <p:nvSpPr>
-          <p:cNvPr id="66" name="Skeletonization(골격선 추출)"/>
-          <p:cNvSpPr txBox="1"/>
-          <p:nvPr/>
-        </p:nvSpPr>
-        <p:spPr>
-          <a:xfrm>
-            <a:off x="7509768" y="3016647"/>
-            <a:ext cx="753864" cy="266700"/>
+          <p:cNvPr id="67" name="벽체 중심선·코너점 추출"/>
+          <p:cNvSpPr txBox="1"/>
+          <p:nvPr/>
+        </p:nvSpPr>
+        <p:spPr>
+          <a:xfrm>
+            <a:off x="8745141" y="3016647"/>
+            <a:ext cx="531019" cy="266700"/>
           </a:xfrm>
           <a:prstGeom prst="rect">
             <a:avLst/>
@@ -32284,10 +31855,44 @@
                 <a:ea typeface="Pretendard SemiBold" pitchFamily="34" charset="-127"/>
                 <a:cs typeface="Pretendard SemiBold" pitchFamily="34" charset="-120"/>
               </a:rPr>
-              <a:t>Skeletonization</a:t>
+              <a:t>벽체 중심선·</a:t>
+            </a:r>
+            <a:br/>
+            <a:r>
+              <a:rPr lang="ko-KR" altLang="en-US" sz="800" spc="-12" kern="0" dirty="0">
+                <a:solidFill>
+                  <a:srgbClr val="3F4654"/>
+                </a:solidFill>
+                <a:latin typeface="Pretendard SemiBold" pitchFamily="34" charset="0"/>
+                <a:ea typeface="Pretendard SemiBold" pitchFamily="34" charset="-127"/>
+                <a:cs typeface="Pretendard SemiBold" pitchFamily="34" charset="-120"/>
+              </a:rPr>
+              <a:t>코너점 추출</a:t>
             </a:r>
             <a:endParaRPr lang="en-US" sz="800" dirty="0"/>
           </a:p>
+        </p:txBody>
+      </p:sp>
+      <p:sp>
+        <p:nvSpPr>
+          <p:cNvPr id="68" name="창문 호스팅관계 정의"/>
+          <p:cNvSpPr txBox="1"/>
+          <p:nvPr/>
+        </p:nvSpPr>
+        <p:spPr>
+          <a:xfrm>
+            <a:off x="9736807" y="3016647"/>
+            <a:ext cx="503436" cy="266700"/>
+          </a:xfrm>
+          <a:prstGeom prst="rect">
+            <a:avLst/>
+          </a:prstGeom>
+          <a:noFill/>
+          <a:ln/>
+        </p:spPr>
+        <p:txBody>
+          <a:bodyPr wrap="none" lIns="0" tIns="0" rIns="0" bIns="0" rtlCol="0" anchor="t"/>
+          <a:lstStyle/>
           <a:p>
             <a:pPr algn="ctr" indent="0" marL="0">
               <a:lnSpc>
@@ -32298,13 +31903,25 @@
             <a:r>
               <a:rPr lang="ko-KR" altLang="en-US" sz="800" spc="-12" kern="0" dirty="0">
                 <a:solidFill>
+                  <a:srgbClr val="102A4C"/>
+                </a:solidFill>
+                <a:latin typeface="Pretendard ExtraBold" pitchFamily="34" charset="0"/>
+                <a:ea typeface="Pretendard ExtraBold" pitchFamily="34" charset="-127"/>
+                <a:cs typeface="Pretendard ExtraBold" pitchFamily="34" charset="-120"/>
+              </a:rPr>
+              <a:t>창문 호스팅</a:t>
+            </a:r>
+            <a:br/>
+            <a:r>
+              <a:rPr lang="ko-KR" altLang="en-US" sz="800" spc="-12" kern="0" dirty="0">
+                <a:solidFill>
                   <a:srgbClr val="3F4654"/>
                 </a:solidFill>
                 <a:latin typeface="Pretendard SemiBold" pitchFamily="34" charset="0"/>
                 <a:ea typeface="Pretendard SemiBold" pitchFamily="34" charset="-127"/>
                 <a:cs typeface="Pretendard SemiBold" pitchFamily="34" charset="-120"/>
               </a:rPr>
-              <a:t>(골격선 추출)</a:t>
+              <a:t>관계 정의</a:t>
             </a:r>
             <a:endParaRPr lang="en-US" sz="800" dirty="0"/>
           </a:p>
@@ -32312,14 +31929,14 @@
       </p:sp>
       <p:sp>
         <p:nvSpPr>
-          <p:cNvPr id="67" name="벽체 중심선·코너점 추출"/>
-          <p:cNvSpPr txBox="1"/>
-          <p:nvPr/>
-        </p:nvSpPr>
-        <p:spPr>
-          <a:xfrm>
-            <a:off x="8745141" y="3016647"/>
-            <a:ext cx="531019" cy="266700"/>
+          <p:cNvPr id="69" name="문 호스팅관계 정의"/>
+          <p:cNvSpPr txBox="1"/>
+          <p:nvPr/>
+        </p:nvSpPr>
+        <p:spPr>
+          <a:xfrm>
+            <a:off x="10801548" y="3016647"/>
+            <a:ext cx="418604" cy="266700"/>
           </a:xfrm>
           <a:prstGeom prst="rect">
             <a:avLst/>
@@ -32340,147 +31957,15 @@
             <a:r>
               <a:rPr lang="ko-KR" altLang="en-US" sz="800" spc="-12" kern="0" dirty="0">
                 <a:solidFill>
-                  <a:srgbClr val="3F4654"/>
-                </a:solidFill>
-                <a:latin typeface="Pretendard SemiBold" pitchFamily="34" charset="0"/>
-                <a:ea typeface="Pretendard SemiBold" pitchFamily="34" charset="-127"/>
-                <a:cs typeface="Pretendard SemiBold" pitchFamily="34" charset="-120"/>
-              </a:rPr>
-              <a:t>벽체 중심선·</a:t>
-            </a:r>
-            <a:endParaRPr lang="en-US" sz="800" dirty="0"/>
-          </a:p>
-          <a:p>
-            <a:pPr algn="ctr" indent="0" marL="0">
-              <a:lnSpc>
-                <a:spcPts val="1050"/>
-              </a:lnSpc>
-              <a:buNone/>
-            </a:pPr>
-            <a:r>
-              <a:rPr lang="ko-KR" altLang="en-US" sz="800" spc="-12" kern="0" dirty="0">
-                <a:solidFill>
-                  <a:srgbClr val="3F4654"/>
-                </a:solidFill>
-                <a:latin typeface="Pretendard SemiBold" pitchFamily="34" charset="0"/>
-                <a:ea typeface="Pretendard SemiBold" pitchFamily="34" charset="-127"/>
-                <a:cs typeface="Pretendard SemiBold" pitchFamily="34" charset="-120"/>
-              </a:rPr>
-              <a:t>코너점 추출</a:t>
-            </a:r>
-            <a:endParaRPr lang="en-US" sz="800" dirty="0"/>
-          </a:p>
-        </p:txBody>
-      </p:sp>
-      <p:sp>
-        <p:nvSpPr>
-          <p:cNvPr id="68" name="창문 호스팅관계 정의"/>
-          <p:cNvSpPr txBox="1"/>
-          <p:nvPr/>
-        </p:nvSpPr>
-        <p:spPr>
-          <a:xfrm>
-            <a:off x="9736807" y="3016647"/>
-            <a:ext cx="503436" cy="266700"/>
-          </a:xfrm>
-          <a:prstGeom prst="rect">
-            <a:avLst/>
-          </a:prstGeom>
-          <a:noFill/>
-          <a:ln/>
-        </p:spPr>
-        <p:txBody>
-          <a:bodyPr wrap="none" lIns="0" tIns="0" rIns="0" bIns="0" rtlCol="0" anchor="t"/>
-          <a:lstStyle/>
-          <a:p>
-            <a:pPr algn="ctr" indent="0" marL="0">
-              <a:lnSpc>
-                <a:spcPts val="1050"/>
-              </a:lnSpc>
-              <a:buNone/>
-            </a:pPr>
-            <a:r>
-              <a:rPr lang="ko-KR" altLang="en-US" sz="800" spc="-12" kern="0" dirty="0">
-                <a:solidFill>
                   <a:srgbClr val="102A4C"/>
                 </a:solidFill>
                 <a:latin typeface="Pretendard ExtraBold" pitchFamily="34" charset="0"/>
                 <a:ea typeface="Pretendard ExtraBold" pitchFamily="34" charset="-127"/>
                 <a:cs typeface="Pretendard ExtraBold" pitchFamily="34" charset="-120"/>
               </a:rPr>
-              <a:t>창문 호스팅</a:t>
-            </a:r>
-            <a:endParaRPr lang="en-US" sz="800" dirty="0"/>
-          </a:p>
-          <a:p>
-            <a:pPr algn="ctr" indent="0" marL="0">
-              <a:lnSpc>
-                <a:spcPts val="1050"/>
-              </a:lnSpc>
-              <a:buNone/>
-            </a:pPr>
-            <a:r>
-              <a:rPr lang="ko-KR" altLang="en-US" sz="800" spc="-12" kern="0" dirty="0">
-                <a:solidFill>
-                  <a:srgbClr val="3F4654"/>
-                </a:solidFill>
-                <a:latin typeface="Pretendard SemiBold" pitchFamily="34" charset="0"/>
-                <a:ea typeface="Pretendard SemiBold" pitchFamily="34" charset="-127"/>
-                <a:cs typeface="Pretendard SemiBold" pitchFamily="34" charset="-120"/>
-              </a:rPr>
-              <a:t>관계 정의</a:t>
-            </a:r>
-            <a:endParaRPr lang="en-US" sz="800" dirty="0"/>
-          </a:p>
-        </p:txBody>
-      </p:sp>
-      <p:sp>
-        <p:nvSpPr>
-          <p:cNvPr id="69" name="문 호스팅관계 정의"/>
-          <p:cNvSpPr txBox="1"/>
-          <p:nvPr/>
-        </p:nvSpPr>
-        <p:spPr>
-          <a:xfrm>
-            <a:off x="10801548" y="3016647"/>
-            <a:ext cx="418604" cy="266700"/>
-          </a:xfrm>
-          <a:prstGeom prst="rect">
-            <a:avLst/>
-          </a:prstGeom>
-          <a:noFill/>
-          <a:ln/>
-        </p:spPr>
-        <p:txBody>
-          <a:bodyPr wrap="none" lIns="0" tIns="0" rIns="0" bIns="0" rtlCol="0" anchor="t"/>
-          <a:lstStyle/>
-          <a:p>
-            <a:pPr algn="ctr" indent="0" marL="0">
-              <a:lnSpc>
-                <a:spcPts val="1050"/>
-              </a:lnSpc>
-              <a:buNone/>
-            </a:pPr>
-            <a:r>
-              <a:rPr lang="ko-KR" altLang="en-US" sz="800" spc="-12" kern="0" dirty="0">
-                <a:solidFill>
-                  <a:srgbClr val="102A4C"/>
-                </a:solidFill>
-                <a:latin typeface="Pretendard ExtraBold" pitchFamily="34" charset="0"/>
-                <a:ea typeface="Pretendard ExtraBold" pitchFamily="34" charset="-127"/>
-                <a:cs typeface="Pretendard ExtraBold" pitchFamily="34" charset="-120"/>
-              </a:rPr>
               <a:t>문 호스팅</a:t>
             </a:r>
-            <a:endParaRPr lang="en-US" sz="800" dirty="0"/>
-          </a:p>
-          <a:p>
-            <a:pPr algn="ctr" indent="0" marL="0">
-              <a:lnSpc>
-                <a:spcPts val="1050"/>
-              </a:lnSpc>
-              <a:buNone/>
-            </a:pPr>
+            <a:br/>
             <a:r>
               <a:rPr lang="ko-KR" altLang="en-US" sz="800" spc="-12" kern="0" dirty="0">
                 <a:solidFill>
@@ -32612,6 +32097,176 @@
               </a:rPr>
               <a:t>추출한 </a:t>
             </a:r>
+            <a:r>
+              <a:rPr lang="ko-KR" altLang="en-US" sz="1050" b="1" spc="-26" kern="0" dirty="0">
+                <a:solidFill>
+                  <a:srgbClr val="141820"/>
+                </a:solidFill>
+                <a:latin typeface="Pretendard" pitchFamily="34" charset="0"/>
+                <a:ea typeface="Pretendard" pitchFamily="34" charset="-127"/>
+                <a:cs typeface="Pretendard" pitchFamily="34" charset="-120"/>
+              </a:rPr>
+              <a:t>벽체</a:t>
+            </a:r>
+            <a:r>
+              <a:rPr lang="ko-KR" altLang="en-US" sz="1050" spc="-26" kern="0" dirty="0">
+                <a:solidFill>
+                  <a:srgbClr val="3F4654"/>
+                </a:solidFill>
+                <a:latin typeface="Pretendard Medium" pitchFamily="34" charset="0"/>
+                <a:ea typeface="Pretendard Medium" pitchFamily="34" charset="-127"/>
+                <a:cs typeface="Pretendard Medium" pitchFamily="34" charset="-120"/>
+              </a:rPr>
+              <a:t>와 </a:t>
+            </a:r>
+            <a:r>
+              <a:rPr lang="ko-KR" altLang="en-US" sz="1050" b="1" spc="-26" kern="0" dirty="0">
+                <a:solidFill>
+                  <a:srgbClr val="141820"/>
+                </a:solidFill>
+                <a:latin typeface="Pretendard" pitchFamily="34" charset="0"/>
+                <a:ea typeface="Pretendard" pitchFamily="34" charset="-127"/>
+                <a:cs typeface="Pretendard" pitchFamily="34" charset="-120"/>
+              </a:rPr>
+              <a:t>호스팅 관계</a:t>
+            </a:r>
+            <a:r>
+              <a:rPr lang="ko-KR" altLang="en-US" sz="1050" spc="-26" kern="0" dirty="0">
+                <a:solidFill>
+                  <a:srgbClr val="3F4654"/>
+                </a:solidFill>
+                <a:latin typeface="Pretendard Medium" pitchFamily="34" charset="0"/>
+                <a:ea typeface="Pretendard Medium" pitchFamily="34" charset="-127"/>
+                <a:cs typeface="Pretendard Medium" pitchFamily="34" charset="-120"/>
+              </a:rPr>
+              <a:t>로</a:t>
+            </a:r>
+            <a:br/>
+            <a:r>
+              <a:rPr lang="ko-KR" altLang="en-US" sz="1050" spc="-26" kern="0" dirty="0">
+                <a:solidFill>
+                  <a:srgbClr val="3F4654"/>
+                </a:solidFill>
+                <a:latin typeface="Pretendard Medium" pitchFamily="34" charset="0"/>
+                <a:ea typeface="Pretendard Medium" pitchFamily="34" charset="-127"/>
+                <a:cs typeface="Pretendard Medium" pitchFamily="34" charset="-120"/>
+              </a:rPr>
+              <a:t>벽·창문·문 BIM 요소 생성</a:t>
+            </a:r>
+            <a:endParaRPr lang="en-US" sz="1050" dirty="0"/>
+          </a:p>
+        </p:txBody>
+      </p:sp>
+      <p:sp>
+        <p:nvSpPr>
+          <p:cNvPr id="73" name="용어 풀이"/>
+          <p:cNvSpPr txBox="1"/>
+          <p:nvPr/>
+        </p:nvSpPr>
+        <p:spPr>
+          <a:xfrm>
+            <a:off x="6584950" y="5129312"/>
+            <a:ext cx="458589" cy="114300"/>
+          </a:xfrm>
+          <a:prstGeom prst="rect">
+            <a:avLst/>
+          </a:prstGeom>
+          <a:noFill/>
+          <a:ln/>
+        </p:spPr>
+        <p:txBody>
+          <a:bodyPr wrap="none" lIns="0" tIns="0" rIns="0" bIns="0" rtlCol="0" anchor="ctr"/>
+          <a:lstStyle/>
+          <a:p>
+            <a:pPr algn="l" indent="0" marL="0">
+              <a:buNone/>
+            </a:pPr>
+            <a:r>
+              <a:rPr lang="ko-KR" altLang="en-US" sz="750" spc="90" kern="0" dirty="0">
+                <a:solidFill>
+                  <a:srgbClr val="737C8B"/>
+                </a:solidFill>
+                <a:latin typeface="Pretendard ExtraBold" pitchFamily="34" charset="0"/>
+                <a:ea typeface="Pretendard ExtraBold" pitchFamily="34" charset="-127"/>
+                <a:cs typeface="Pretendard ExtraBold" pitchFamily="34" charset="-120"/>
+              </a:rPr>
+              <a:t>용어 풀이</a:t>
+            </a:r>
+            <a:endParaRPr lang="en-US" sz="750" dirty="0"/>
+          </a:p>
+        </p:txBody>
+      </p:sp>
+      <p:sp>
+        <p:nvSpPr>
+          <p:cNvPr id="74" name="호스팅  Hosting"/>
+          <p:cNvSpPr txBox="1"/>
+          <p:nvPr/>
+        </p:nvSpPr>
+        <p:spPr>
+          <a:xfrm>
+            <a:off x="6584950" y="5307112"/>
+            <a:ext cx="831652" cy="177800"/>
+          </a:xfrm>
+          <a:prstGeom prst="rect">
+            <a:avLst/>
+          </a:prstGeom>
+          <a:noFill/>
+          <a:ln/>
+        </p:spPr>
+        <p:txBody>
+          <a:bodyPr wrap="none" lIns="0" tIns="0" rIns="0" bIns="0" rtlCol="0" anchor="ctr"/>
+          <a:lstStyle/>
+          <a:p>
+            <a:pPr algn="l" indent="0" marL="0">
+              <a:buNone/>
+            </a:pPr>
+            <a:r>
+              <a:rPr lang="ko-KR" altLang="en-US" sz="1150" spc="-40" kern="0" dirty="0">
+                <a:solidFill>
+                  <a:srgbClr val="102A4C"/>
+                </a:solidFill>
+                <a:latin typeface="Pretendard ExtraBold" pitchFamily="34" charset="0"/>
+                <a:ea typeface="Pretendard ExtraBold" pitchFamily="34" charset="-127"/>
+                <a:cs typeface="Pretendard ExtraBold" pitchFamily="34" charset="-120"/>
+              </a:rPr>
+              <a:t>호스팅  </a:t>
+            </a:r>
+            <a:r>
+              <a:rPr lang="ko-KR" altLang="en-US" sz="800" dirty="0">
+                <a:solidFill>
+                  <a:srgbClr val="737C8B"/>
+                </a:solidFill>
+                <a:latin typeface="Pretendard SemiBold" pitchFamily="34" charset="0"/>
+                <a:ea typeface="Pretendard SemiBold" pitchFamily="34" charset="-127"/>
+                <a:cs typeface="Pretendard SemiBold" pitchFamily="34" charset="-120"/>
+              </a:rPr>
+              <a:t>Hosting</a:t>
+            </a:r>
+            <a:endParaRPr lang="en-US" sz="1150" dirty="0"/>
+          </a:p>
+        </p:txBody>
+      </p:sp>
+      <p:sp>
+        <p:nvSpPr>
+          <p:cNvPr id="75" name="창·문을 어느 벽에 붙일지정하는 것"/>
+          <p:cNvSpPr txBox="1"/>
+          <p:nvPr/>
+        </p:nvSpPr>
+        <p:spPr>
+          <a:xfrm>
+            <a:off x="6584950" y="5517654"/>
+            <a:ext cx="1309285" cy="386556"/>
+          </a:xfrm>
+          <a:prstGeom prst="rect">
+            <a:avLst/>
+          </a:prstGeom>
+          <a:noFill/>
+          <a:ln/>
+        </p:spPr>
+        <p:txBody>
+          <a:bodyPr wrap="none" lIns="0" tIns="0" rIns="0" bIns="0" rtlCol="0" anchor="t"/>
+          <a:lstStyle/>
+          <a:p>
             <a:pPr algn="l" indent="0" marL="0">
               <a:lnSpc>
                 <a:spcPts val="1522"/>
@@ -32619,6 +32274,17 @@
               <a:buNone/>
             </a:pPr>
             <a:r>
+              <a:rPr lang="ko-KR" altLang="en-US" sz="1050" spc="-26" kern="0" dirty="0">
+                <a:solidFill>
+                  <a:srgbClr val="3F4654"/>
+                </a:solidFill>
+                <a:latin typeface="Pretendard Medium" pitchFamily="34" charset="0"/>
+                <a:ea typeface="Pretendard Medium" pitchFamily="34" charset="-127"/>
+                <a:cs typeface="Pretendard Medium" pitchFamily="34" charset="-120"/>
+              </a:rPr>
+              <a:t>창·문을 </a:t>
+            </a:r>
+            <a:r>
               <a:rPr lang="ko-KR" altLang="en-US" sz="1050" b="1" spc="-26" kern="0" dirty="0">
                 <a:solidFill>
                   <a:srgbClr val="141820"/>
@@ -32627,14 +32293,9 @@
                 <a:ea typeface="Pretendard" pitchFamily="34" charset="-127"/>
                 <a:cs typeface="Pretendard" pitchFamily="34" charset="-120"/>
               </a:rPr>
-              <a:t>벽체</a:t>
-            </a:r>
-            <a:pPr algn="l" indent="0" marL="0">
-              <a:lnSpc>
-                <a:spcPts val="1522"/>
-              </a:lnSpc>
-              <a:buNone/>
-            </a:pPr>
+              <a:t>어느 벽에 붙일지</a:t>
+            </a:r>
+            <a:br/>
             <a:r>
               <a:rPr lang="ko-KR" altLang="en-US" sz="1050" spc="-26" kern="0" dirty="0">
                 <a:solidFill>
@@ -32644,392 +32305,136 @@
                 <a:ea typeface="Pretendard Medium" pitchFamily="34" charset="-127"/>
                 <a:cs typeface="Pretendard Medium" pitchFamily="34" charset="-120"/>
               </a:rPr>
-              <a:t>와 </a:t>
-            </a:r>
-            <a:pPr algn="l" indent="0" marL="0">
-              <a:lnSpc>
-                <a:spcPts val="1522"/>
-              </a:lnSpc>
-              <a:buNone/>
-            </a:pPr>
-            <a:r>
-              <a:rPr lang="ko-KR" altLang="en-US" sz="1050" b="1" spc="-26" kern="0" dirty="0">
-                <a:solidFill>
-                  <a:srgbClr val="141820"/>
+              <a:t>정하는 것</a:t>
+            </a:r>
+            <a:endParaRPr lang="en-US" sz="1050" dirty="0"/>
+          </a:p>
+        </p:txBody>
+      </p:sp>
+      <p:sp>
+        <p:nvSpPr>
+          <p:cNvPr id="76" name="자동 생성된 3D BIM (결과)"/>
+          <p:cNvSpPr txBox="1"/>
+          <p:nvPr/>
+        </p:nvSpPr>
+        <p:spPr>
+          <a:xfrm>
+            <a:off x="9604800" y="6090047"/>
+            <a:ext cx="1212001" cy="127000"/>
+          </a:xfrm>
+          <a:prstGeom prst="rect">
+            <a:avLst/>
+          </a:prstGeom>
+          <a:noFill/>
+          <a:ln/>
+        </p:spPr>
+        <p:txBody>
+          <a:bodyPr wrap="none" lIns="0" tIns="0" rIns="0" bIns="0" rtlCol="0" anchor="ctr"/>
+          <a:lstStyle/>
+          <a:p>
+            <a:pPr algn="ctr" indent="0" marL="0">
+              <a:buNone/>
+            </a:pPr>
+            <a:r>
+              <a:rPr lang="ko-KR" altLang="en-US" sz="850" b="1" spc="-12" kern="0" dirty="0">
+                <a:solidFill>
+                  <a:srgbClr val="102A4C"/>
                 </a:solidFill>
                 <a:latin typeface="Pretendard" pitchFamily="34" charset="0"/>
                 <a:ea typeface="Pretendard" pitchFamily="34" charset="-127"/>
                 <a:cs typeface="Pretendard" pitchFamily="34" charset="-120"/>
               </a:rPr>
-              <a:t>호스팅 관계</a:t>
-            </a:r>
+              <a:t>자동 생성된 3D BIM </a:t>
+            </a:r>
+            <a:r>
+              <a:rPr lang="ko-KR" altLang="en-US" sz="850" spc="-12" kern="0" dirty="0">
+                <a:solidFill>
+                  <a:srgbClr val="737C8B"/>
+                </a:solidFill>
+                <a:latin typeface="Pretendard SemiBold" pitchFamily="34" charset="0"/>
+                <a:ea typeface="Pretendard SemiBold" pitchFamily="34" charset="-127"/>
+                <a:cs typeface="Pretendard SemiBold" pitchFamily="34" charset="-120"/>
+              </a:rPr>
+              <a:t>(결과)</a:t>
+            </a:r>
+            <a:endParaRPr lang="en-US" sz="850" dirty="0"/>
+          </a:p>
+        </p:txBody>
+      </p:sp>
+      <p:sp>
+        <p:nvSpPr>
+          <p:cNvPr id="77" name="석사 연구 발표  ·  평면도와 입면도 객체 인식 및 정보 통합을 통한 "/>
+          <p:cNvSpPr txBox="1"/>
+          <p:nvPr/>
+        </p:nvSpPr>
+        <p:spPr>
+          <a:xfrm>
+            <a:off x="609600" y="6472238"/>
+            <a:ext cx="5145113" cy="114300"/>
+          </a:xfrm>
+          <a:prstGeom prst="rect">
+            <a:avLst/>
+          </a:prstGeom>
+          <a:noFill/>
+          <a:ln/>
+        </p:spPr>
+        <p:txBody>
+          <a:bodyPr wrap="none" lIns="0" tIns="0" rIns="0" bIns="0" rtlCol="0" anchor="ctr"/>
+          <a:lstStyle/>
+          <a:p>
             <a:pPr algn="l" indent="0" marL="0">
-              <a:lnSpc>
-                <a:spcPts val="1522"/>
-              </a:lnSpc>
-              <a:buNone/>
-            </a:pPr>
-            <a:r>
-              <a:rPr lang="ko-KR" altLang="en-US" sz="1050" spc="-26" kern="0" dirty="0">
-                <a:solidFill>
-                  <a:srgbClr val="3F4654"/>
+              <a:buNone/>
+            </a:pPr>
+            <a:r>
+              <a:rPr lang="ko-KR" altLang="en-US" sz="750" spc="-12" kern="0" dirty="0">
+                <a:solidFill>
+                  <a:srgbClr val="737C8B"/>
                 </a:solidFill>
                 <a:latin typeface="Pretendard Medium" pitchFamily="34" charset="0"/>
                 <a:ea typeface="Pretendard Medium" pitchFamily="34" charset="-127"/>
                 <a:cs typeface="Pretendard Medium" pitchFamily="34" charset="-120"/>
               </a:rPr>
-              <a:t>로</a:t>
-            </a:r>
-            <a:endParaRPr lang="en-US" sz="1050" dirty="0"/>
-          </a:p>
+              <a:t>석사 연구 발표  ·  평면도와 입면도 객체 인식 및 정보 통합을 통한 3D BIM 자동 생성 연구  ·  Utility 기술(건축, BIM/5D) 지원자 ○○○</a:t>
+            </a:r>
+            <a:endParaRPr lang="en-US" sz="750" dirty="0"/>
+          </a:p>
+        </p:txBody>
+      </p:sp>
+      <p:sp>
+        <p:nvSpPr>
+          <p:cNvPr id="78" name="07 / 10"/>
+          <p:cNvSpPr txBox="1"/>
+          <p:nvPr/>
+        </p:nvSpPr>
+        <p:spPr>
+          <a:xfrm>
+            <a:off x="11239698" y="6472238"/>
+            <a:ext cx="393502" cy="114300"/>
+          </a:xfrm>
+          <a:prstGeom prst="rect">
+            <a:avLst/>
+          </a:prstGeom>
+          <a:noFill/>
+          <a:ln/>
+        </p:spPr>
+        <p:txBody>
+          <a:bodyPr wrap="none" lIns="0" tIns="0" rIns="0" bIns="0" rtlCol="0" anchor="ctr"/>
+          <a:lstStyle/>
           <a:p>
             <a:pPr algn="l" indent="0" marL="0">
-              <a:lnSpc>
-                <a:spcPts val="1522"/>
-              </a:lnSpc>
-              <a:buNone/>
-            </a:pPr>
-            <a:r>
-              <a:rPr lang="ko-KR" altLang="en-US" sz="1050" spc="-26" kern="0" dirty="0">
-                <a:solidFill>
-                  <a:srgbClr val="3F4654"/>
-                </a:solidFill>
-                <a:latin typeface="Pretendard Medium" pitchFamily="34" charset="0"/>
-                <a:ea typeface="Pretendard Medium" pitchFamily="34" charset="-127"/>
-                <a:cs typeface="Pretendard Medium" pitchFamily="34" charset="-120"/>
-              </a:rPr>
-              <a:t>벽·창문·문 BIM 요소 생성</a:t>
-            </a:r>
-            <a:endParaRPr lang="en-US" sz="1050" dirty="0"/>
-          </a:p>
-        </p:txBody>
-      </p:sp>
-      <p:sp>
-        <p:nvSpPr>
-          <p:cNvPr id="73" name="용어 풀이"/>
-          <p:cNvSpPr txBox="1"/>
-          <p:nvPr/>
-        </p:nvSpPr>
-        <p:spPr>
-          <a:xfrm>
-            <a:off x="6584950" y="5129312"/>
-            <a:ext cx="458589" cy="114300"/>
-          </a:xfrm>
-          <a:prstGeom prst="rect">
-            <a:avLst/>
-          </a:prstGeom>
-          <a:noFill/>
-          <a:ln/>
-        </p:spPr>
-        <p:txBody>
-          <a:bodyPr wrap="none" lIns="0" tIns="0" rIns="0" bIns="0" rtlCol="0" anchor="ctr"/>
-          <a:lstStyle/>
-          <a:p>
-            <a:pPr algn="l" indent="0" marL="0">
-              <a:buNone/>
-            </a:pPr>
-            <a:r>
-              <a:rPr lang="ko-KR" altLang="en-US" sz="750" spc="90" kern="0" dirty="0">
-                <a:solidFill>
-                  <a:srgbClr val="737C8B"/>
+              <a:buNone/>
+            </a:pPr>
+            <a:r>
+              <a:rPr lang="ko-KR" altLang="en-US" sz="750" spc="45" kern="0" dirty="0">
+                <a:solidFill>
+                  <a:srgbClr val="102A4C"/>
                 </a:solidFill>
                 <a:latin typeface="Pretendard ExtraBold" pitchFamily="34" charset="0"/>
                 <a:ea typeface="Pretendard ExtraBold" pitchFamily="34" charset="-127"/>
                 <a:cs typeface="Pretendard ExtraBold" pitchFamily="34" charset="-120"/>
               </a:rPr>
-              <a:t>용어 풀이</a:t>
-            </a:r>
-            <a:endParaRPr lang="en-US" sz="750" dirty="0"/>
-          </a:p>
-        </p:txBody>
-      </p:sp>
-      <p:sp>
-        <p:nvSpPr>
-          <p:cNvPr id="74" name="호스팅"/>
-          <p:cNvSpPr txBox="1"/>
-          <p:nvPr/>
-        </p:nvSpPr>
-        <p:spPr>
-          <a:xfrm>
-            <a:off x="6584950" y="5307112"/>
-            <a:ext cx="414238" cy="177800"/>
-          </a:xfrm>
-          <a:prstGeom prst="rect">
-            <a:avLst/>
-          </a:prstGeom>
-          <a:noFill/>
-          <a:ln/>
-        </p:spPr>
-        <p:txBody>
-          <a:bodyPr wrap="none" lIns="0" tIns="0" rIns="0" bIns="0" rtlCol="0" anchor="ctr"/>
-          <a:lstStyle/>
-          <a:p>
-            <a:pPr algn="l" indent="0" marL="0">
-              <a:buNone/>
-            </a:pPr>
-            <a:r>
-              <a:rPr lang="ko-KR" altLang="en-US" sz="1150" spc="-40" kern="0" dirty="0">
-                <a:solidFill>
-                  <a:srgbClr val="102A4C"/>
-                </a:solidFill>
-                <a:latin typeface="Pretendard ExtraBold" pitchFamily="34" charset="0"/>
-                <a:ea typeface="Pretendard ExtraBold" pitchFamily="34" charset="-127"/>
-                <a:cs typeface="Pretendard ExtraBold" pitchFamily="34" charset="-120"/>
-              </a:rPr>
-              <a:t>호스팅</a:t>
-            </a:r>
-            <a:endParaRPr lang="en-US" sz="1150" dirty="0"/>
-          </a:p>
-        </p:txBody>
-      </p:sp>
-      <p:sp>
-        <p:nvSpPr>
-          <p:cNvPr id="75" name="Hosting"/>
-          <p:cNvSpPr txBox="1"/>
-          <p:nvPr/>
-        </p:nvSpPr>
-        <p:spPr>
-          <a:xfrm>
-            <a:off x="6999188" y="5351562"/>
-            <a:ext cx="417413" cy="120650"/>
-          </a:xfrm>
-          <a:prstGeom prst="rect">
-            <a:avLst/>
-          </a:prstGeom>
-          <a:noFill/>
-          <a:ln/>
-        </p:spPr>
-        <p:txBody>
-          <a:bodyPr wrap="none" lIns="0" tIns="0" rIns="0" bIns="0" rtlCol="0" anchor="ctr"/>
-          <a:lstStyle/>
-          <a:p>
-            <a:pPr algn="l" indent="0" marL="0">
-              <a:buNone/>
-            </a:pPr>
-            <a:r>
-              <a:rPr lang="ko-KR" altLang="en-US" sz="800" dirty="0">
-                <a:solidFill>
-                  <a:srgbClr val="737C8B"/>
-                </a:solidFill>
-                <a:latin typeface="Pretendard SemiBold" pitchFamily="34" charset="0"/>
-                <a:ea typeface="Pretendard SemiBold" pitchFamily="34" charset="-127"/>
-                <a:cs typeface="Pretendard SemiBold" pitchFamily="34" charset="-120"/>
-              </a:rPr>
-              <a:t>Hosting</a:t>
-            </a:r>
-            <a:endParaRPr lang="en-US" sz="800" dirty="0"/>
-          </a:p>
-        </p:txBody>
-      </p:sp>
-      <p:sp>
-        <p:nvSpPr>
-          <p:cNvPr id="76" name="창·문을 어느 벽에 붙일지정하는 것"/>
-          <p:cNvSpPr txBox="1"/>
-          <p:nvPr/>
-        </p:nvSpPr>
-        <p:spPr>
-          <a:xfrm>
-            <a:off x="6584950" y="5517654"/>
-            <a:ext cx="1309285" cy="386556"/>
-          </a:xfrm>
-          <a:prstGeom prst="rect">
-            <a:avLst/>
-          </a:prstGeom>
-          <a:noFill/>
-          <a:ln/>
-        </p:spPr>
-        <p:txBody>
-          <a:bodyPr wrap="none" lIns="0" tIns="0" rIns="0" bIns="0" rtlCol="0" anchor="t"/>
-          <a:lstStyle/>
-          <a:p>
-            <a:pPr algn="l" indent="0" marL="0">
-              <a:lnSpc>
-                <a:spcPts val="1522"/>
-              </a:lnSpc>
-              <a:buNone/>
-            </a:pPr>
-            <a:r>
-              <a:rPr lang="ko-KR" altLang="en-US" sz="1050" spc="-26" kern="0" dirty="0">
-                <a:solidFill>
-                  <a:srgbClr val="3F4654"/>
-                </a:solidFill>
-                <a:latin typeface="Pretendard Medium" pitchFamily="34" charset="0"/>
-                <a:ea typeface="Pretendard Medium" pitchFamily="34" charset="-127"/>
-                <a:cs typeface="Pretendard Medium" pitchFamily="34" charset="-120"/>
-              </a:rPr>
-              <a:t>창·문을 </a:t>
-            </a:r>
-            <a:pPr algn="l" indent="0" marL="0">
-              <a:lnSpc>
-                <a:spcPts val="1522"/>
-              </a:lnSpc>
-              <a:buNone/>
-            </a:pPr>
-            <a:r>
-              <a:rPr lang="ko-KR" altLang="en-US" sz="1050" b="1" spc="-26" kern="0" dirty="0">
-                <a:solidFill>
-                  <a:srgbClr val="141820"/>
-                </a:solidFill>
-                <a:latin typeface="Pretendard" pitchFamily="34" charset="0"/>
-                <a:ea typeface="Pretendard" pitchFamily="34" charset="-127"/>
-                <a:cs typeface="Pretendard" pitchFamily="34" charset="-120"/>
-              </a:rPr>
-              <a:t>어느 벽에 붙일지</a:t>
-            </a:r>
-            <a:endParaRPr lang="en-US" sz="1050" dirty="0"/>
-          </a:p>
-          <a:p>
-            <a:pPr algn="l" indent="0" marL="0">
-              <a:lnSpc>
-                <a:spcPts val="1522"/>
-              </a:lnSpc>
-              <a:buNone/>
-            </a:pPr>
-            <a:r>
-              <a:rPr lang="ko-KR" altLang="en-US" sz="1050" spc="-26" kern="0" dirty="0">
-                <a:solidFill>
-                  <a:srgbClr val="3F4654"/>
-                </a:solidFill>
-                <a:latin typeface="Pretendard Medium" pitchFamily="34" charset="0"/>
-                <a:ea typeface="Pretendard Medium" pitchFamily="34" charset="-127"/>
-                <a:cs typeface="Pretendard Medium" pitchFamily="34" charset="-120"/>
-              </a:rPr>
-              <a:t>정하는 것</a:t>
-            </a:r>
-            <a:endParaRPr lang="en-US" sz="1050" dirty="0"/>
-          </a:p>
-        </p:txBody>
-      </p:sp>
-      <p:sp>
-        <p:nvSpPr>
-          <p:cNvPr id="77" name="자동 생성된 3D BIM (결과)"/>
-          <p:cNvSpPr txBox="1"/>
-          <p:nvPr/>
-        </p:nvSpPr>
-        <p:spPr>
-          <a:xfrm>
-            <a:off x="9604800" y="6090047"/>
-            <a:ext cx="1212001" cy="127000"/>
-          </a:xfrm>
-          <a:prstGeom prst="rect">
-            <a:avLst/>
-          </a:prstGeom>
-          <a:noFill/>
-          <a:ln/>
-        </p:spPr>
-        <p:txBody>
-          <a:bodyPr wrap="none" lIns="0" tIns="0" rIns="0" bIns="0" rtlCol="0" anchor="ctr"/>
-          <a:lstStyle/>
-          <a:p>
-            <a:pPr algn="ctr" indent="0" marL="0">
-              <a:buNone/>
-            </a:pPr>
-            <a:r>
-              <a:rPr lang="ko-KR" altLang="en-US" sz="850" b="1" spc="-12" kern="0" dirty="0">
-                <a:solidFill>
-                  <a:srgbClr val="102A4C"/>
-                </a:solidFill>
-                <a:latin typeface="Pretendard" pitchFamily="34" charset="0"/>
-                <a:ea typeface="Pretendard" pitchFamily="34" charset="-127"/>
-                <a:cs typeface="Pretendard" pitchFamily="34" charset="-120"/>
-              </a:rPr>
-              <a:t>자동 생성된 3D BIM </a:t>
-            </a:r>
-            <a:pPr algn="ctr" indent="0" marL="0">
-              <a:buNone/>
-            </a:pPr>
-            <a:r>
-              <a:rPr lang="ko-KR" altLang="en-US" sz="850" spc="-12" kern="0" dirty="0">
-                <a:solidFill>
-                  <a:srgbClr val="737C8B"/>
-                </a:solidFill>
-                <a:latin typeface="Pretendard SemiBold" pitchFamily="34" charset="0"/>
-                <a:ea typeface="Pretendard SemiBold" pitchFamily="34" charset="-127"/>
-                <a:cs typeface="Pretendard SemiBold" pitchFamily="34" charset="-120"/>
-              </a:rPr>
-              <a:t>(결과)</a:t>
-            </a:r>
-            <a:endParaRPr lang="en-US" sz="850" dirty="0"/>
-          </a:p>
-        </p:txBody>
-      </p:sp>
-      <p:sp>
-        <p:nvSpPr>
-          <p:cNvPr id="78" name="석사 연구 발표  ·  평면도와 입면도 객체 인식 및 정보 통합을 통한 "/>
-          <p:cNvSpPr txBox="1"/>
-          <p:nvPr/>
-        </p:nvSpPr>
-        <p:spPr>
-          <a:xfrm>
-            <a:off x="609600" y="6472238"/>
-            <a:ext cx="5145113" cy="114300"/>
-          </a:xfrm>
-          <a:prstGeom prst="rect">
-            <a:avLst/>
-          </a:prstGeom>
-          <a:noFill/>
-          <a:ln/>
-        </p:spPr>
-        <p:txBody>
-          <a:bodyPr wrap="none" lIns="0" tIns="0" rIns="0" bIns="0" rtlCol="0" anchor="ctr"/>
-          <a:lstStyle/>
-          <a:p>
-            <a:pPr algn="l" indent="0" marL="0">
-              <a:buNone/>
-            </a:pPr>
-            <a:r>
-              <a:rPr lang="ko-KR" altLang="en-US" sz="750" spc="-12" kern="0" dirty="0">
-                <a:solidFill>
-                  <a:srgbClr val="737C8B"/>
-                </a:solidFill>
-                <a:latin typeface="Pretendard Medium" pitchFamily="34" charset="0"/>
-                <a:ea typeface="Pretendard Medium" pitchFamily="34" charset="-127"/>
-                <a:cs typeface="Pretendard Medium" pitchFamily="34" charset="-120"/>
-              </a:rPr>
-              <a:t>석사 연구 발표  ·  평면도와 입면도 객체 인식 및 정보 통합을 통한 3D BIM 자동 생성 연구  ·  Utility 기술(건축, BIM/5D) 지원자 ○○○</a:t>
-            </a:r>
-            <a:endParaRPr lang="en-US" sz="750" dirty="0"/>
-          </a:p>
-        </p:txBody>
-      </p:sp>
-      <p:sp>
-        <p:nvSpPr>
-          <p:cNvPr id="79" name="07 / 10"/>
-          <p:cNvSpPr txBox="1"/>
-          <p:nvPr/>
-        </p:nvSpPr>
-        <p:spPr>
-          <a:xfrm>
-            <a:off x="11239698" y="6472238"/>
-            <a:ext cx="393502" cy="114300"/>
-          </a:xfrm>
-          <a:prstGeom prst="rect">
-            <a:avLst/>
-          </a:prstGeom>
-          <a:noFill/>
-          <a:ln/>
-        </p:spPr>
-        <p:txBody>
-          <a:bodyPr wrap="none" lIns="0" tIns="0" rIns="0" bIns="0" rtlCol="0" anchor="ctr"/>
-          <a:lstStyle/>
-          <a:p>
-            <a:pPr algn="l" indent="0" marL="0">
-              <a:buNone/>
-            </a:pPr>
-            <a:r>
-              <a:rPr lang="ko-KR" altLang="en-US" sz="750" spc="45" kern="0" dirty="0">
-                <a:solidFill>
-                  <a:srgbClr val="102A4C"/>
-                </a:solidFill>
-                <a:latin typeface="Pretendard ExtraBold" pitchFamily="34" charset="0"/>
-                <a:ea typeface="Pretendard ExtraBold" pitchFamily="34" charset="-127"/>
-                <a:cs typeface="Pretendard ExtraBold" pitchFamily="34" charset="-120"/>
-              </a:rPr>
               <a:t>07</a:t>
             </a:r>
-            <a:pPr algn="l" indent="0" marL="0">
-              <a:buNone/>
-            </a:pPr>
             <a:r>
               <a:rPr lang="ko-KR" altLang="en-US" sz="750" spc="45" kern="0" dirty="0">
                 <a:solidFill>
@@ -36141,9 +35546,6 @@
               </a:rPr>
               <a:t>세 가지 기여가 모두 </a:t>
             </a:r>
-            <a:pPr algn="l" indent="0" marL="0">
-              <a:buNone/>
-            </a:pPr>
             <a:r>
               <a:rPr lang="ko-KR" altLang="en-US" sz="2300" spc="-92" kern="0" dirty="0">
                 <a:solidFill>
@@ -36155,9 +35557,6 @@
               </a:rPr>
               <a:t>수치로</a:t>
             </a:r>
-            <a:pPr algn="l" indent="0" marL="0">
-              <a:buNone/>
-            </a:pPr>
             <a:r>
               <a:rPr lang="ko-KR" altLang="en-US" sz="2300" spc="-92" kern="0" dirty="0">
                 <a:solidFill>
@@ -36601,8 +36000,393 @@
               </a:rPr>
               <a:t>도면 종류별 최적</a:t>
             </a:r>
+            <a:br/>
+            <a:r>
+              <a:rPr lang="ko-KR" altLang="en-US" sz="1300" spc="-52" kern="0" dirty="0">
+                <a:solidFill>
+                  <a:srgbClr val="102A4C"/>
+                </a:solidFill>
+                <a:latin typeface="Pretendard ExtraBold" pitchFamily="34" charset="0"/>
+                <a:ea typeface="Pretendard ExtraBold" pitchFamily="34" charset="-127"/>
+                <a:cs typeface="Pretendard ExtraBold" pitchFamily="34" charset="-120"/>
+              </a:rPr>
+              <a:t>학습·인식 전략 제안</a:t>
+            </a:r>
             <a:endParaRPr lang="en-US" sz="1300" dirty="0"/>
           </a:p>
+        </p:txBody>
+      </p:sp>
+      <p:sp>
+        <p:nvSpPr>
+          <p:cNvPr id="88" name="도면 객체 인식 mAP@0.5"/>
+          <p:cNvSpPr txBox="1"/>
+          <p:nvPr/>
+        </p:nvSpPr>
+        <p:spPr>
+          <a:xfrm>
+            <a:off x="4381500" y="1800423"/>
+            <a:ext cx="1311283" cy="146050"/>
+          </a:xfrm>
+          <a:prstGeom prst="rect">
+            <a:avLst/>
+          </a:prstGeom>
+          <a:noFill/>
+          <a:ln/>
+        </p:spPr>
+        <p:txBody>
+          <a:bodyPr wrap="none" lIns="0" tIns="0" rIns="0" bIns="0" rtlCol="0" anchor="ctr"/>
+          <a:lstStyle/>
+          <a:p>
+            <a:pPr algn="l" indent="0" marL="0">
+              <a:buNone/>
+            </a:pPr>
+            <a:r>
+              <a:rPr lang="ko-KR" altLang="en-US" sz="950" spc="-19" kern="0" dirty="0">
+                <a:solidFill>
+                  <a:srgbClr val="102A4C"/>
+                </a:solidFill>
+                <a:latin typeface="Pretendard ExtraBold" pitchFamily="34" charset="0"/>
+                <a:ea typeface="Pretendard ExtraBold" pitchFamily="34" charset="-127"/>
+                <a:cs typeface="Pretendard ExtraBold" pitchFamily="34" charset="-120"/>
+              </a:rPr>
+              <a:t>도면 객체 인식 mAP@0.5</a:t>
+            </a:r>
+            <a:endParaRPr lang="en-US" sz="950" dirty="0"/>
+          </a:p>
+        </p:txBody>
+      </p:sp>
+      <p:sp>
+        <p:nvSpPr>
+          <p:cNvPr id="89" name="·  Baseline 대비"/>
+          <p:cNvSpPr txBox="1"/>
+          <p:nvPr/>
+        </p:nvSpPr>
+        <p:spPr>
+          <a:xfrm>
+            <a:off x="5669359" y="1800423"/>
+            <a:ext cx="816372" cy="146050"/>
+          </a:xfrm>
+          <a:prstGeom prst="rect">
+            <a:avLst/>
+          </a:prstGeom>
+          <a:noFill/>
+          <a:ln/>
+        </p:spPr>
+        <p:txBody>
+          <a:bodyPr wrap="none" lIns="0" tIns="0" rIns="0" bIns="0" rtlCol="0" anchor="ctr"/>
+          <a:lstStyle/>
+          <a:p>
+            <a:pPr algn="l" indent="0" marL="0">
+              <a:buNone/>
+            </a:pPr>
+            <a:r>
+              <a:rPr lang="ko-KR" altLang="en-US" sz="950" spc="-19" kern="0" dirty="0">
+                <a:solidFill>
+                  <a:srgbClr val="737C8B"/>
+                </a:solidFill>
+                <a:latin typeface="Pretendard SemiBold" pitchFamily="34" charset="0"/>
+                <a:ea typeface="Pretendard SemiBold" pitchFamily="34" charset="-127"/>
+                <a:cs typeface="Pretendard SemiBold" pitchFamily="34" charset="-120"/>
+              </a:rPr>
+              <a:t>·  Baseline 대비</a:t>
+            </a:r>
+            <a:endParaRPr lang="en-US" sz="950" dirty="0"/>
+          </a:p>
+        </p:txBody>
+      </p:sp>
+      <p:sp>
+        <p:nvSpPr>
+          <p:cNvPr id="90" name="평면도"/>
+          <p:cNvSpPr txBox="1"/>
+          <p:nvPr/>
+        </p:nvSpPr>
+        <p:spPr>
+          <a:xfrm>
+            <a:off x="4381500" y="2079823"/>
+            <a:ext cx="359073" cy="146050"/>
+          </a:xfrm>
+          <a:prstGeom prst="rect">
+            <a:avLst/>
+          </a:prstGeom>
+          <a:noFill/>
+          <a:ln/>
+        </p:spPr>
+        <p:txBody>
+          <a:bodyPr wrap="none" lIns="0" tIns="0" rIns="0" bIns="0" rtlCol="0" anchor="ctr"/>
+          <a:lstStyle/>
+          <a:p>
+            <a:pPr algn="l" indent="0" marL="0">
+              <a:buNone/>
+            </a:pPr>
+            <a:r>
+              <a:rPr lang="ko-KR" altLang="en-US" sz="950" b="1" spc="-12" kern="0" dirty="0">
+                <a:solidFill>
+                  <a:srgbClr val="3F4654"/>
+                </a:solidFill>
+                <a:latin typeface="Pretendard" pitchFamily="34" charset="0"/>
+                <a:ea typeface="Pretendard" pitchFamily="34" charset="-127"/>
+                <a:cs typeface="Pretendard" pitchFamily="34" charset="-120"/>
+              </a:rPr>
+              <a:t>평면도</a:t>
+            </a:r>
+            <a:endParaRPr lang="en-US" sz="950" dirty="0"/>
+          </a:p>
+        </p:txBody>
+      </p:sp>
+      <p:sp>
+        <p:nvSpPr>
+          <p:cNvPr id="91" name="0.934"/>
+          <p:cNvSpPr txBox="1"/>
+          <p:nvPr/>
+        </p:nvSpPr>
+        <p:spPr>
+          <a:xfrm>
+            <a:off x="4381500" y="2225873"/>
+            <a:ext cx="1116294" cy="450850"/>
+          </a:xfrm>
+          <a:prstGeom prst="rect">
+            <a:avLst/>
+          </a:prstGeom>
+          <a:noFill/>
+          <a:ln/>
+        </p:spPr>
+        <p:txBody>
+          <a:bodyPr wrap="none" lIns="0" tIns="0" rIns="0" bIns="0" rtlCol="0" anchor="ctr"/>
+          <a:lstStyle/>
+          <a:p>
+            <a:pPr algn="l" indent="0" marL="0">
+              <a:buNone/>
+            </a:pPr>
+            <a:r>
+              <a:rPr lang="ko-KR" altLang="en-US" sz="3000" spc="-80" kern="0" dirty="0">
+                <a:solidFill>
+                  <a:srgbClr val="102A4C"/>
+                </a:solidFill>
+                <a:latin typeface="Pretendard ExtraBold" pitchFamily="34" charset="0"/>
+                <a:ea typeface="Pretendard ExtraBold" pitchFamily="34" charset="-127"/>
+                <a:cs typeface="Pretendard ExtraBold" pitchFamily="34" charset="-120"/>
+              </a:rPr>
+              <a:t>0.934</a:t>
+            </a:r>
+            <a:endParaRPr lang="en-US" sz="3000" dirty="0"/>
+          </a:p>
+        </p:txBody>
+      </p:sp>
+      <p:sp>
+        <p:nvSpPr>
+          <p:cNvPr id="92" name="+42.7%p"/>
+          <p:cNvSpPr txBox="1"/>
+          <p:nvPr/>
+        </p:nvSpPr>
+        <p:spPr>
+          <a:xfrm>
+            <a:off x="5561608" y="2384326"/>
+            <a:ext cx="543520" cy="133350"/>
+          </a:xfrm>
+          <a:prstGeom prst="rect">
+            <a:avLst/>
+          </a:prstGeom>
+          <a:noFill/>
+          <a:ln/>
+        </p:spPr>
+        <p:txBody>
+          <a:bodyPr wrap="none" lIns="0" tIns="0" rIns="0" bIns="0" rtlCol="0" anchor="ctr"/>
+          <a:lstStyle/>
+          <a:p>
+            <a:pPr algn="l" indent="0" marL="0">
+              <a:buNone/>
+            </a:pPr>
+            <a:r>
+              <a:rPr lang="ko-KR" altLang="en-US" sz="900" spc="-12" kern="0" dirty="0">
+                <a:solidFill>
+                  <a:srgbClr val="EA002C"/>
+                </a:solidFill>
+                <a:latin typeface="Pretendard ExtraBold" pitchFamily="34" charset="0"/>
+                <a:ea typeface="Pretendard ExtraBold" pitchFamily="34" charset="-127"/>
+                <a:cs typeface="Pretendard ExtraBold" pitchFamily="34" charset="-120"/>
+              </a:rPr>
+              <a:t>+42.7%p</a:t>
+            </a:r>
+            <a:endParaRPr lang="en-US" sz="900" dirty="0"/>
+          </a:p>
+        </p:txBody>
+      </p:sp>
+      <p:sp>
+        <p:nvSpPr>
+          <p:cNvPr id="93" name="입면도"/>
+          <p:cNvSpPr txBox="1"/>
+          <p:nvPr/>
+        </p:nvSpPr>
+        <p:spPr>
+          <a:xfrm>
+            <a:off x="6388100" y="2079823"/>
+            <a:ext cx="359073" cy="146050"/>
+          </a:xfrm>
+          <a:prstGeom prst="rect">
+            <a:avLst/>
+          </a:prstGeom>
+          <a:noFill/>
+          <a:ln/>
+        </p:spPr>
+        <p:txBody>
+          <a:bodyPr wrap="none" lIns="0" tIns="0" rIns="0" bIns="0" rtlCol="0" anchor="ctr"/>
+          <a:lstStyle/>
+          <a:p>
+            <a:pPr algn="l" indent="0" marL="0">
+              <a:buNone/>
+            </a:pPr>
+            <a:r>
+              <a:rPr lang="ko-KR" altLang="en-US" sz="950" b="1" spc="-12" kern="0" dirty="0">
+                <a:solidFill>
+                  <a:srgbClr val="3F4654"/>
+                </a:solidFill>
+                <a:latin typeface="Pretendard" pitchFamily="34" charset="0"/>
+                <a:ea typeface="Pretendard" pitchFamily="34" charset="-127"/>
+                <a:cs typeface="Pretendard" pitchFamily="34" charset="-120"/>
+              </a:rPr>
+              <a:t>입면도</a:t>
+            </a:r>
+            <a:endParaRPr lang="en-US" sz="950" dirty="0"/>
+          </a:p>
+        </p:txBody>
+      </p:sp>
+      <p:sp>
+        <p:nvSpPr>
+          <p:cNvPr id="94" name="0.838"/>
+          <p:cNvSpPr txBox="1"/>
+          <p:nvPr/>
+        </p:nvSpPr>
+        <p:spPr>
+          <a:xfrm>
+            <a:off x="6388100" y="2225873"/>
+            <a:ext cx="1116294" cy="450850"/>
+          </a:xfrm>
+          <a:prstGeom prst="rect">
+            <a:avLst/>
+          </a:prstGeom>
+          <a:noFill/>
+          <a:ln/>
+        </p:spPr>
+        <p:txBody>
+          <a:bodyPr wrap="none" lIns="0" tIns="0" rIns="0" bIns="0" rtlCol="0" anchor="ctr"/>
+          <a:lstStyle/>
+          <a:p>
+            <a:pPr algn="l" indent="0" marL="0">
+              <a:buNone/>
+            </a:pPr>
+            <a:r>
+              <a:rPr lang="ko-KR" altLang="en-US" sz="3000" spc="-64" kern="0" dirty="0">
+                <a:solidFill>
+                  <a:srgbClr val="102A4C"/>
+                </a:solidFill>
+                <a:latin typeface="Pretendard ExtraBold" pitchFamily="34" charset="0"/>
+                <a:ea typeface="Pretendard ExtraBold" pitchFamily="34" charset="-127"/>
+                <a:cs typeface="Pretendard ExtraBold" pitchFamily="34" charset="-120"/>
+              </a:rPr>
+              <a:t>0.838</a:t>
+            </a:r>
+            <a:endParaRPr lang="en-US" sz="3000" dirty="0"/>
+          </a:p>
+        </p:txBody>
+      </p:sp>
+      <p:sp>
+        <p:nvSpPr>
+          <p:cNvPr id="95" name="+48.3%p"/>
+          <p:cNvSpPr txBox="1"/>
+          <p:nvPr/>
+        </p:nvSpPr>
+        <p:spPr>
+          <a:xfrm>
+            <a:off x="7568208" y="2384326"/>
+            <a:ext cx="553641" cy="133350"/>
+          </a:xfrm>
+          <a:prstGeom prst="rect">
+            <a:avLst/>
+          </a:prstGeom>
+          <a:noFill/>
+          <a:ln/>
+        </p:spPr>
+        <p:txBody>
+          <a:bodyPr wrap="none" lIns="0" tIns="0" rIns="0" bIns="0" rtlCol="0" anchor="ctr"/>
+          <a:lstStyle/>
+          <a:p>
+            <a:pPr algn="l" indent="0" marL="0">
+              <a:buNone/>
+            </a:pPr>
+            <a:r>
+              <a:rPr lang="ko-KR" altLang="en-US" sz="900" spc="-12" kern="0" dirty="0">
+                <a:solidFill>
+                  <a:srgbClr val="EA002C"/>
+                </a:solidFill>
+                <a:latin typeface="Pretendard ExtraBold" pitchFamily="34" charset="0"/>
+                <a:ea typeface="Pretendard ExtraBold" pitchFamily="34" charset="-127"/>
+                <a:cs typeface="Pretendard ExtraBold" pitchFamily="34" charset="-120"/>
+              </a:rPr>
+              <a:t>+48.3%p</a:t>
+            </a:r>
+            <a:endParaRPr lang="en-US" sz="900" dirty="0"/>
+          </a:p>
+        </p:txBody>
+      </p:sp>
+      <p:sp>
+        <p:nvSpPr>
+          <p:cNvPr id="96" name="기여 2"/>
+          <p:cNvSpPr txBox="1"/>
+          <p:nvPr/>
+        </p:nvSpPr>
+        <p:spPr>
+          <a:xfrm>
+            <a:off x="1422400" y="3461742"/>
+            <a:ext cx="328216" cy="120650"/>
+          </a:xfrm>
+          <a:prstGeom prst="rect">
+            <a:avLst/>
+          </a:prstGeom>
+          <a:noFill/>
+          <a:ln/>
+        </p:spPr>
+        <p:txBody>
+          <a:bodyPr wrap="none" lIns="0" tIns="0" rIns="0" bIns="0" rtlCol="0" anchor="ctr"/>
+          <a:lstStyle/>
+          <a:p>
+            <a:pPr algn="l" indent="0" marL="0">
+              <a:buNone/>
+            </a:pPr>
+            <a:r>
+              <a:rPr lang="ko-KR" altLang="en-US" sz="800" spc="32" kern="0" dirty="0">
+                <a:solidFill>
+                  <a:srgbClr val="EA002C"/>
+                </a:solidFill>
+                <a:latin typeface="Pretendard ExtraBold" pitchFamily="34" charset="0"/>
+                <a:ea typeface="Pretendard ExtraBold" pitchFamily="34" charset="-127"/>
+                <a:cs typeface="Pretendard ExtraBold" pitchFamily="34" charset="-120"/>
+              </a:rPr>
+              <a:t>기여 2</a:t>
+            </a:r>
+            <a:endParaRPr lang="en-US" sz="800" dirty="0"/>
+          </a:p>
+        </p:txBody>
+      </p:sp>
+      <p:sp>
+        <p:nvSpPr>
+          <p:cNvPr id="97" name="CAD 정보 없이 평면도·입면도 간객체 대응 관계 정의"/>
+          <p:cNvSpPr txBox="1"/>
+          <p:nvPr/>
+        </p:nvSpPr>
+        <p:spPr>
+          <a:xfrm>
+            <a:off x="1422400" y="3659386"/>
+            <a:ext cx="2117425" cy="455612"/>
+          </a:xfrm>
+          <a:prstGeom prst="rect">
+            <a:avLst/>
+          </a:prstGeom>
+          <a:noFill/>
+          <a:ln/>
+        </p:spPr>
+        <p:txBody>
+          <a:bodyPr wrap="none" lIns="0" tIns="0" rIns="0" bIns="0" rtlCol="0" anchor="t"/>
+          <a:lstStyle/>
           <a:p>
             <a:pPr algn="l" indent="0" marL="0">
               <a:lnSpc>
@@ -36619,38 +36403,11 @@
                 <a:ea typeface="Pretendard ExtraBold" pitchFamily="34" charset="-127"/>
                 <a:cs typeface="Pretendard ExtraBold" pitchFamily="34" charset="-120"/>
               </a:rPr>
-              <a:t>학습·인식 전략 제안</a:t>
-            </a:r>
-            <a:endParaRPr lang="en-US" sz="1300" dirty="0"/>
-          </a:p>
-        </p:txBody>
-      </p:sp>
-      <p:sp>
-        <p:nvSpPr>
-          <p:cNvPr id="88" name="도면 객체 인식 mAP@0.5"/>
-          <p:cNvSpPr txBox="1"/>
-          <p:nvPr/>
-        </p:nvSpPr>
-        <p:spPr>
-          <a:xfrm>
-            <a:off x="4381500" y="1800423"/>
-            <a:ext cx="1311283" cy="146050"/>
-          </a:xfrm>
-          <a:prstGeom prst="rect">
-            <a:avLst/>
-          </a:prstGeom>
-          <a:noFill/>
-          <a:ln/>
-        </p:spPr>
-        <p:txBody>
-          <a:bodyPr wrap="none" lIns="0" tIns="0" rIns="0" bIns="0" rtlCol="0" anchor="ctr"/>
-          <a:lstStyle/>
-          <a:p>
-            <a:pPr algn="l" indent="0" marL="0">
-              <a:buNone/>
-            </a:pPr>
-            <a:r>
-              <a:rPr lang="ko-KR" altLang="en-US" sz="950" spc="-19" kern="0" dirty="0">
+              <a:t>CAD 정보 없이 평면도·입면도 간</a:t>
+            </a:r>
+            <a:br/>
+            <a:r>
+              <a:rPr lang="ko-KR" altLang="en-US" sz="1300" spc="-52" kern="0" dirty="0">
                 <a:solidFill>
                   <a:srgbClr val="102A4C"/>
                 </a:solidFill>
@@ -36658,7 +36415,46 @@
                 <a:ea typeface="Pretendard ExtraBold" pitchFamily="34" charset="-127"/>
                 <a:cs typeface="Pretendard ExtraBold" pitchFamily="34" charset="-120"/>
               </a:rPr>
-              <a:t>도면 객체 인식 mAP@0.5</a:t>
+              <a:t>객체 대응 관계 정의</a:t>
+            </a:r>
+            <a:endParaRPr lang="en-US" sz="1300" dirty="0"/>
+          </a:p>
+        </p:txBody>
+      </p:sp>
+      <p:sp>
+        <p:nvSpPr>
+          <p:cNvPr id="98" name="대응 객체 매칭 F1-score"/>
+          <p:cNvSpPr txBox="1"/>
+          <p:nvPr/>
+        </p:nvSpPr>
+        <p:spPr>
+          <a:xfrm>
+            <a:off x="4381500" y="3299023"/>
+            <a:ext cx="1241659" cy="146050"/>
+          </a:xfrm>
+          <a:prstGeom prst="rect">
+            <a:avLst/>
+          </a:prstGeom>
+          <a:noFill/>
+          <a:ln/>
+        </p:spPr>
+        <p:txBody>
+          <a:bodyPr wrap="none" lIns="0" tIns="0" rIns="0" bIns="0" rtlCol="0" anchor="ctr"/>
+          <a:lstStyle/>
+          <a:p>
+            <a:pPr algn="l" indent="0" marL="0">
+              <a:buNone/>
+            </a:pPr>
+            <a:r>
+              <a:rPr lang="ko-KR" altLang="en-US" sz="950" spc="-19" kern="0" dirty="0">
+                <a:solidFill>
+                  <a:srgbClr val="102A4C"/>
+                </a:solidFill>
+                <a:latin typeface="Pretendard ExtraBold" pitchFamily="34" charset="0"/>
+                <a:ea typeface="Pretendard ExtraBold" pitchFamily="34" charset="-127"/>
+                <a:cs typeface="Pretendard ExtraBold" pitchFamily="34" charset="-120"/>
+              </a:rPr>
+              <a:t>대응 객체 매칭 F1-score</a:t>
             </a:r>
             <a:endParaRPr lang="en-US" sz="950" dirty="0"/>
           </a:p>
@@ -36666,53 +36462,14 @@
       </p:sp>
       <p:sp>
         <p:nvSpPr>
-          <p:cNvPr id="89" name="·  Baseline 대비"/>
-          <p:cNvSpPr txBox="1"/>
-          <p:nvPr/>
-        </p:nvSpPr>
-        <p:spPr>
-          <a:xfrm>
-            <a:off x="5669359" y="1800423"/>
-            <a:ext cx="816372" cy="146050"/>
-          </a:xfrm>
-          <a:prstGeom prst="rect">
-            <a:avLst/>
-          </a:prstGeom>
-          <a:noFill/>
-          <a:ln/>
-        </p:spPr>
-        <p:txBody>
-          <a:bodyPr wrap="none" lIns="0" tIns="0" rIns="0" bIns="0" rtlCol="0" anchor="ctr"/>
-          <a:lstStyle/>
-          <a:p>
-            <a:pPr algn="l" indent="0" marL="0">
-              <a:buNone/>
-            </a:pPr>
-            <a:r>
-              <a:rPr lang="ko-KR" altLang="en-US" sz="950" spc="-19" kern="0" dirty="0">
-                <a:solidFill>
-                  <a:srgbClr val="737C8B"/>
-                </a:solidFill>
-                <a:latin typeface="Pretendard SemiBold" pitchFamily="34" charset="0"/>
-                <a:ea typeface="Pretendard SemiBold" pitchFamily="34" charset="-127"/>
-                <a:cs typeface="Pretendard SemiBold" pitchFamily="34" charset="-120"/>
-              </a:rPr>
-              <a:t>·  Baseline 대비</a:t>
-            </a:r>
-            <a:endParaRPr lang="en-US" sz="950" dirty="0"/>
-          </a:p>
-        </p:txBody>
-      </p:sp>
-      <p:sp>
-        <p:nvSpPr>
-          <p:cNvPr id="90" name="평면도"/>
-          <p:cNvSpPr txBox="1"/>
-          <p:nvPr/>
-        </p:nvSpPr>
-        <p:spPr>
-          <a:xfrm>
-            <a:off x="4381500" y="2079823"/>
-            <a:ext cx="359073" cy="146050"/>
+          <p:cNvPr id="99" name="창문"/>
+          <p:cNvSpPr txBox="1"/>
+          <p:nvPr/>
+        </p:nvSpPr>
+        <p:spPr>
+          <a:xfrm>
+            <a:off x="4381500" y="3578423"/>
+            <a:ext cx="256381" cy="146050"/>
           </a:xfrm>
           <a:prstGeom prst="rect">
             <a:avLst/>
@@ -36736,7 +36493,7 @@
                 <a:ea typeface="Pretendard" pitchFamily="34" charset="-127"/>
                 <a:cs typeface="Pretendard" pitchFamily="34" charset="-120"/>
               </a:rPr>
-              <a:t>평면도</a:t>
+              <a:t>창문</a:t>
             </a:r>
             <a:endParaRPr lang="en-US" sz="950" dirty="0"/>
           </a:p>
@@ -36744,14 +36501,14 @@
       </p:sp>
       <p:sp>
         <p:nvSpPr>
-          <p:cNvPr id="91" name="0.934"/>
-          <p:cNvSpPr txBox="1"/>
-          <p:nvPr/>
-        </p:nvSpPr>
-        <p:spPr>
-          <a:xfrm>
-            <a:off x="4381500" y="2225873"/>
-            <a:ext cx="1116294" cy="450850"/>
+          <p:cNvPr id="100" name="0.93"/>
+          <p:cNvSpPr txBox="1"/>
+          <p:nvPr/>
+        </p:nvSpPr>
+        <p:spPr>
+          <a:xfrm>
+            <a:off x="4381500" y="3724473"/>
+            <a:ext cx="864592" cy="450850"/>
           </a:xfrm>
           <a:prstGeom prst="rect">
             <a:avLst/>
@@ -36767,7 +36524,7 @@
               <a:buNone/>
             </a:pPr>
             <a:r>
-              <a:rPr lang="ko-KR" altLang="en-US" sz="3000" spc="-120" kern="0" dirty="0">
+              <a:rPr lang="ko-KR" altLang="en-US" sz="3000" spc="-70" kern="0" dirty="0">
                 <a:solidFill>
                   <a:srgbClr val="102A4C"/>
                 </a:solidFill>
@@ -36775,7 +36532,7 @@
                 <a:ea typeface="Pretendard ExtraBold" pitchFamily="34" charset="-127"/>
                 <a:cs typeface="Pretendard ExtraBold" pitchFamily="34" charset="-120"/>
               </a:rPr>
-              <a:t>0.934</a:t>
+              <a:t>0.93</a:t>
             </a:r>
             <a:endParaRPr lang="en-US" sz="3000" dirty="0"/>
           </a:p>
@@ -36783,14 +36540,14 @@
       </p:sp>
       <p:sp>
         <p:nvSpPr>
-          <p:cNvPr id="92" name="+42.7%p"/>
-          <p:cNvSpPr txBox="1"/>
-          <p:nvPr/>
-        </p:nvSpPr>
-        <p:spPr>
-          <a:xfrm>
-            <a:off x="5561608" y="2384326"/>
-            <a:ext cx="543520" cy="133350"/>
+          <p:cNvPr id="101" name="문"/>
+          <p:cNvSpPr txBox="1"/>
+          <p:nvPr/>
+        </p:nvSpPr>
+        <p:spPr>
+          <a:xfrm>
+            <a:off x="6388100" y="3578423"/>
+            <a:ext cx="153591" cy="146050"/>
           </a:xfrm>
           <a:prstGeom prst="rect">
             <a:avLst/>
@@ -36806,30 +36563,69 @@
               <a:buNone/>
             </a:pPr>
             <a:r>
-              <a:rPr lang="ko-KR" altLang="en-US" sz="900" spc="-12" kern="0" dirty="0">
-                <a:solidFill>
-                  <a:srgbClr val="EA002C"/>
+              <a:rPr lang="ko-KR" altLang="en-US" sz="950" b="1" spc="-12" kern="0" dirty="0">
+                <a:solidFill>
+                  <a:srgbClr val="3F4654"/>
+                </a:solidFill>
+                <a:latin typeface="Pretendard" pitchFamily="34" charset="0"/>
+                <a:ea typeface="Pretendard" pitchFamily="34" charset="-127"/>
+                <a:cs typeface="Pretendard" pitchFamily="34" charset="-120"/>
+              </a:rPr>
+              <a:t>문</a:t>
+            </a:r>
+            <a:endParaRPr lang="en-US" sz="950" dirty="0"/>
+          </a:p>
+        </p:txBody>
+      </p:sp>
+      <p:sp>
+        <p:nvSpPr>
+          <p:cNvPr id="102" name="0.95"/>
+          <p:cNvSpPr txBox="1"/>
+          <p:nvPr/>
+        </p:nvSpPr>
+        <p:spPr>
+          <a:xfrm>
+            <a:off x="6388100" y="3724473"/>
+            <a:ext cx="864592" cy="450850"/>
+          </a:xfrm>
+          <a:prstGeom prst="rect">
+            <a:avLst/>
+          </a:prstGeom>
+          <a:noFill/>
+          <a:ln/>
+        </p:spPr>
+        <p:txBody>
+          <a:bodyPr wrap="none" lIns="0" tIns="0" rIns="0" bIns="0" rtlCol="0" anchor="ctr"/>
+          <a:lstStyle/>
+          <a:p>
+            <a:pPr algn="l" indent="0" marL="0">
+              <a:buNone/>
+            </a:pPr>
+            <a:r>
+              <a:rPr lang="ko-KR" altLang="en-US" sz="3000" spc="-63" kern="0" dirty="0">
+                <a:solidFill>
+                  <a:srgbClr val="102A4C"/>
                 </a:solidFill>
                 <a:latin typeface="Pretendard ExtraBold" pitchFamily="34" charset="0"/>
                 <a:ea typeface="Pretendard ExtraBold" pitchFamily="34" charset="-127"/>
                 <a:cs typeface="Pretendard ExtraBold" pitchFamily="34" charset="-120"/>
               </a:rPr>
-              <a:t>+42.7%p</a:t>
-            </a:r>
-            <a:endParaRPr lang="en-US" sz="900" dirty="0"/>
-          </a:p>
-        </p:txBody>
-      </p:sp>
-      <p:sp>
-        <p:nvSpPr>
-          <p:cNvPr id="93" name="입면도"/>
-          <p:cNvSpPr txBox="1"/>
-          <p:nvPr/>
-        </p:nvSpPr>
-        <p:spPr>
-          <a:xfrm>
-            <a:off x="6388100" y="2079823"/>
-            <a:ext cx="359073" cy="146050"/>
+              <a:t>0.95</a:t>
+            </a:r>
+            <a:endParaRPr lang="en-US" sz="3000" dirty="0"/>
+          </a:p>
+        </p:txBody>
+      </p:sp>
+      <p:sp>
+        <p:nvSpPr>
+          <p:cNvPr id="103" name="기여 3"/>
+          <p:cNvSpPr txBox="1"/>
+          <p:nvPr/>
+        </p:nvSpPr>
+        <p:spPr>
+          <a:xfrm>
+            <a:off x="1422400" y="4960342"/>
+            <a:ext cx="331093" cy="120650"/>
           </a:xfrm>
           <a:prstGeom prst="rect">
             <a:avLst/>
@@ -36845,132 +36641,15 @@
               <a:buNone/>
             </a:pPr>
             <a:r>
-              <a:rPr lang="ko-KR" altLang="en-US" sz="950" b="1" spc="-12" kern="0" dirty="0">
-                <a:solidFill>
-                  <a:srgbClr val="3F4654"/>
-                </a:solidFill>
-                <a:latin typeface="Pretendard" pitchFamily="34" charset="0"/>
-                <a:ea typeface="Pretendard" pitchFamily="34" charset="-127"/>
-                <a:cs typeface="Pretendard" pitchFamily="34" charset="-120"/>
-              </a:rPr>
-              <a:t>입면도</a:t>
-            </a:r>
-            <a:endParaRPr lang="en-US" sz="950" dirty="0"/>
-          </a:p>
-        </p:txBody>
-      </p:sp>
-      <p:sp>
-        <p:nvSpPr>
-          <p:cNvPr id="94" name="0.838"/>
-          <p:cNvSpPr txBox="1"/>
-          <p:nvPr/>
-        </p:nvSpPr>
-        <p:spPr>
-          <a:xfrm>
-            <a:off x="6388100" y="2225873"/>
-            <a:ext cx="1116294" cy="450850"/>
-          </a:xfrm>
-          <a:prstGeom prst="rect">
-            <a:avLst/>
-          </a:prstGeom>
-          <a:noFill/>
-          <a:ln/>
-        </p:spPr>
-        <p:txBody>
-          <a:bodyPr wrap="none" lIns="0" tIns="0" rIns="0" bIns="0" rtlCol="0" anchor="ctr"/>
-          <a:lstStyle/>
-          <a:p>
-            <a:pPr algn="l" indent="0" marL="0">
-              <a:buNone/>
-            </a:pPr>
-            <a:r>
-              <a:rPr lang="ko-KR" altLang="en-US" sz="3000" spc="-120" kern="0" dirty="0">
-                <a:solidFill>
-                  <a:srgbClr val="102A4C"/>
+              <a:rPr lang="ko-KR" altLang="en-US" sz="800" spc="32" kern="0" dirty="0">
+                <a:solidFill>
+                  <a:srgbClr val="EA002C"/>
                 </a:solidFill>
                 <a:latin typeface="Pretendard ExtraBold" pitchFamily="34" charset="0"/>
                 <a:ea typeface="Pretendard ExtraBold" pitchFamily="34" charset="-127"/>
                 <a:cs typeface="Pretendard ExtraBold" pitchFamily="34" charset="-120"/>
               </a:rPr>
-              <a:t>0.838</a:t>
-            </a:r>
-            <a:endParaRPr lang="en-US" sz="3000" dirty="0"/>
-          </a:p>
-        </p:txBody>
-      </p:sp>
-      <p:sp>
-        <p:nvSpPr>
-          <p:cNvPr id="95" name="+48.3%p"/>
-          <p:cNvSpPr txBox="1"/>
-          <p:nvPr/>
-        </p:nvSpPr>
-        <p:spPr>
-          <a:xfrm>
-            <a:off x="7568208" y="2384326"/>
-            <a:ext cx="553641" cy="133350"/>
-          </a:xfrm>
-          <a:prstGeom prst="rect">
-            <a:avLst/>
-          </a:prstGeom>
-          <a:noFill/>
-          <a:ln/>
-        </p:spPr>
-        <p:txBody>
-          <a:bodyPr wrap="none" lIns="0" tIns="0" rIns="0" bIns="0" rtlCol="0" anchor="ctr"/>
-          <a:lstStyle/>
-          <a:p>
-            <a:pPr algn="l" indent="0" marL="0">
-              <a:buNone/>
-            </a:pPr>
-            <a:r>
-              <a:rPr lang="ko-KR" altLang="en-US" sz="900" spc="-12" kern="0" dirty="0">
-                <a:solidFill>
-                  <a:srgbClr val="EA002C"/>
-                </a:solidFill>
-                <a:latin typeface="Pretendard ExtraBold" pitchFamily="34" charset="0"/>
-                <a:ea typeface="Pretendard ExtraBold" pitchFamily="34" charset="-127"/>
-                <a:cs typeface="Pretendard ExtraBold" pitchFamily="34" charset="-120"/>
-              </a:rPr>
-              <a:t>+48.3%p</a:t>
-            </a:r>
-            <a:endParaRPr lang="en-US" sz="900" dirty="0"/>
-          </a:p>
-        </p:txBody>
-      </p:sp>
-      <p:sp>
-        <p:nvSpPr>
-          <p:cNvPr id="96" name="기여 2"/>
-          <p:cNvSpPr txBox="1"/>
-          <p:nvPr/>
-        </p:nvSpPr>
-        <p:spPr>
-          <a:xfrm>
-            <a:off x="1422400" y="3461742"/>
-            <a:ext cx="328216" cy="120650"/>
-          </a:xfrm>
-          <a:prstGeom prst="rect">
-            <a:avLst/>
-          </a:prstGeom>
-          <a:noFill/>
-          <a:ln/>
-        </p:spPr>
-        <p:txBody>
-          <a:bodyPr wrap="none" lIns="0" tIns="0" rIns="0" bIns="0" rtlCol="0" anchor="ctr"/>
-          <a:lstStyle/>
-          <a:p>
-            <a:pPr algn="l" indent="0" marL="0">
-              <a:buNone/>
-            </a:pPr>
-            <a:r>
-              <a:rPr lang="ko-KR" altLang="en-US" sz="800" spc="32" kern="0" dirty="0">
-                <a:solidFill>
-                  <a:srgbClr val="EA002C"/>
-                </a:solidFill>
-                <a:latin typeface="Pretendard ExtraBold" pitchFamily="34" charset="0"/>
-                <a:ea typeface="Pretendard ExtraBold" pitchFamily="34" charset="-127"/>
-                <a:cs typeface="Pretendard ExtraBold" pitchFamily="34" charset="-120"/>
-              </a:rPr>
-              <a:t>기여 2</a:t>
+              <a:t>기여 3</a:t>
             </a:r>
             <a:endParaRPr lang="en-US" sz="800" dirty="0"/>
           </a:p>
@@ -36978,14 +36657,14 @@
       </p:sp>
       <p:sp>
         <p:nvSpPr>
-          <p:cNvPr id="97" name="CAD 정보 없이 평면도·입면도 간객체 대응 관계 정의"/>
-          <p:cNvSpPr txBox="1"/>
-          <p:nvPr/>
-        </p:nvSpPr>
-        <p:spPr>
-          <a:xfrm>
-            <a:off x="1422400" y="3659386"/>
-            <a:ext cx="2117425" cy="455612"/>
+          <p:cNvPr id="104" name="LMM 기반 축척 인식으로 불완전한도면에서도 안정적인 치수 보정"/>
+          <p:cNvSpPr txBox="1"/>
+          <p:nvPr/>
+        </p:nvSpPr>
+        <p:spPr>
+          <a:xfrm>
+            <a:off x="1422400" y="5157986"/>
+            <a:ext cx="2247207" cy="455612"/>
           </a:xfrm>
           <a:prstGeom prst="rect">
             <a:avLst/>
@@ -37012,17 +36691,9 @@
                 <a:ea typeface="Pretendard ExtraBold" pitchFamily="34" charset="-127"/>
                 <a:cs typeface="Pretendard ExtraBold" pitchFamily="34" charset="-120"/>
               </a:rPr>
-              <a:t>CAD 정보 없이 평면도·입면도 간</a:t>
-            </a:r>
-            <a:endParaRPr lang="en-US" sz="1300" dirty="0"/>
-          </a:p>
-          <a:p>
-            <a:pPr algn="l" indent="0" marL="0">
-              <a:lnSpc>
-                <a:spcPts val="1794"/>
-              </a:lnSpc>
-              <a:buNone/>
-            </a:pPr>
+              <a:t>LMM 기반 축척 인식으로 불완전한</a:t>
+            </a:r>
+            <a:br/>
             <a:r>
               <a:rPr lang="ko-KR" altLang="en-US" sz="1300" spc="-52" kern="0" dirty="0">
                 <a:solidFill>
@@ -37032,7 +36703,7 @@
                 <a:ea typeface="Pretendard ExtraBold" pitchFamily="34" charset="-127"/>
                 <a:cs typeface="Pretendard ExtraBold" pitchFamily="34" charset="-120"/>
               </a:rPr>
-              <a:t>객체 대응 관계 정의</a:t>
+              <a:t>도면에서도 안정적인 치수 보정</a:t>
             </a:r>
             <a:endParaRPr lang="en-US" sz="1300" dirty="0"/>
           </a:p>
@@ -37040,14 +36711,14 @@
       </p:sp>
       <p:sp>
         <p:nvSpPr>
-          <p:cNvPr id="98" name="대응 객체 매칭 F1-score"/>
-          <p:cNvSpPr txBox="1"/>
-          <p:nvPr/>
-        </p:nvSpPr>
-        <p:spPr>
-          <a:xfrm>
-            <a:off x="4381500" y="3299023"/>
-            <a:ext cx="1241659" cy="146050"/>
+          <p:cNvPr id="105" name="축척 인식 정확도"/>
+          <p:cNvSpPr txBox="1"/>
+          <p:nvPr/>
+        </p:nvSpPr>
+        <p:spPr>
+          <a:xfrm>
+            <a:off x="4381500" y="4797623"/>
+            <a:ext cx="812998" cy="146050"/>
           </a:xfrm>
           <a:prstGeom prst="rect">
             <a:avLst/>
@@ -37071,7 +36742,7 @@
                 <a:ea typeface="Pretendard ExtraBold" pitchFamily="34" charset="-127"/>
                 <a:cs typeface="Pretendard ExtraBold" pitchFamily="34" charset="-120"/>
               </a:rPr>
-              <a:t>대응 객체 매칭 F1-score</a:t>
+              <a:t>축척 인식 정확도</a:t>
             </a:r>
             <a:endParaRPr lang="en-US" sz="950" dirty="0"/>
           </a:p>
@@ -37079,14 +36750,53 @@
       </p:sp>
       <p:sp>
         <p:nvSpPr>
-          <p:cNvPr id="99" name="창문"/>
-          <p:cNvSpPr txBox="1"/>
-          <p:nvPr/>
-        </p:nvSpPr>
-        <p:spPr>
-          <a:xfrm>
-            <a:off x="4381500" y="3578423"/>
-            <a:ext cx="256381" cy="146050"/>
+          <p:cNvPr id="106" name="·  Tesseract OCR 대비"/>
+          <p:cNvSpPr txBox="1"/>
+          <p:nvPr/>
+        </p:nvSpPr>
+        <p:spPr>
+          <a:xfrm>
+            <a:off x="5194498" y="4797623"/>
+            <a:ext cx="1179292" cy="146050"/>
+          </a:xfrm>
+          <a:prstGeom prst="rect">
+            <a:avLst/>
+          </a:prstGeom>
+          <a:noFill/>
+          <a:ln/>
+        </p:spPr>
+        <p:txBody>
+          <a:bodyPr wrap="none" lIns="0" tIns="0" rIns="0" bIns="0" rtlCol="0" anchor="ctr"/>
+          <a:lstStyle/>
+          <a:p>
+            <a:pPr algn="l" indent="0" marL="0">
+              <a:buNone/>
+            </a:pPr>
+            <a:r>
+              <a:rPr lang="ko-KR" altLang="en-US" sz="950" spc="-19" kern="0" dirty="0">
+                <a:solidFill>
+                  <a:srgbClr val="737C8B"/>
+                </a:solidFill>
+                <a:latin typeface="Pretendard SemiBold" pitchFamily="34" charset="0"/>
+                <a:ea typeface="Pretendard SemiBold" pitchFamily="34" charset="-127"/>
+                <a:cs typeface="Pretendard SemiBold" pitchFamily="34" charset="-120"/>
+              </a:rPr>
+              <a:t>·  Tesseract OCR 대비</a:t>
+            </a:r>
+            <a:endParaRPr lang="en-US" sz="950" dirty="0"/>
+          </a:p>
+        </p:txBody>
+      </p:sp>
+      <p:sp>
+        <p:nvSpPr>
+          <p:cNvPr id="107" name="LMM(GPT-4o)"/>
+          <p:cNvSpPr txBox="1"/>
+          <p:nvPr/>
+        </p:nvSpPr>
+        <p:spPr>
+          <a:xfrm>
+            <a:off x="4381500" y="5077023"/>
+            <a:ext cx="845245" cy="146050"/>
           </a:xfrm>
           <a:prstGeom prst="rect">
             <a:avLst/>
@@ -37110,7 +36820,7 @@
                 <a:ea typeface="Pretendard" pitchFamily="34" charset="-127"/>
                 <a:cs typeface="Pretendard" pitchFamily="34" charset="-120"/>
               </a:rPr>
-              <a:t>창문</a:t>
+              <a:t>LMM(GPT-4o)</a:t>
             </a:r>
             <a:endParaRPr lang="en-US" sz="950" dirty="0"/>
           </a:p>
@@ -37118,14 +36828,14 @@
       </p:sp>
       <p:sp>
         <p:nvSpPr>
-          <p:cNvPr id="100" name="0.93"/>
-          <p:cNvSpPr txBox="1"/>
-          <p:nvPr/>
-        </p:nvSpPr>
-        <p:spPr>
-          <a:xfrm>
-            <a:off x="4381500" y="3724473"/>
-            <a:ext cx="864592" cy="450850"/>
+          <p:cNvPr id="108" name="0.707"/>
+          <p:cNvSpPr txBox="1"/>
+          <p:nvPr/>
+        </p:nvSpPr>
+        <p:spPr>
+          <a:xfrm>
+            <a:off x="4381500" y="5223073"/>
+            <a:ext cx="1116294" cy="450850"/>
           </a:xfrm>
           <a:prstGeom prst="rect">
             <a:avLst/>
@@ -37141,7 +36851,7 @@
               <a:buNone/>
             </a:pPr>
             <a:r>
-              <a:rPr lang="ko-KR" altLang="en-US" sz="3000" spc="-120" kern="0" dirty="0">
+              <a:rPr lang="ko-KR" altLang="en-US" sz="3000" spc="21" kern="0" dirty="0">
                 <a:solidFill>
                   <a:srgbClr val="102A4C"/>
                 </a:solidFill>
@@ -37149,7 +36859,7 @@
                 <a:ea typeface="Pretendard ExtraBold" pitchFamily="34" charset="-127"/>
                 <a:cs typeface="Pretendard ExtraBold" pitchFamily="34" charset="-120"/>
               </a:rPr>
-              <a:t>0.93</a:t>
+              <a:t>0.707</a:t>
             </a:r>
             <a:endParaRPr lang="en-US" sz="3000" dirty="0"/>
           </a:p>
@@ -37157,14 +36867,14 @@
       </p:sp>
       <p:sp>
         <p:nvSpPr>
-          <p:cNvPr id="101" name="문"/>
-          <p:cNvSpPr txBox="1"/>
-          <p:nvPr/>
-        </p:nvSpPr>
-        <p:spPr>
-          <a:xfrm>
-            <a:off x="6388100" y="3578423"/>
-            <a:ext cx="153591" cy="146050"/>
+          <p:cNvPr id="109" name="+33.8%p"/>
+          <p:cNvSpPr txBox="1"/>
+          <p:nvPr/>
+        </p:nvSpPr>
+        <p:spPr>
+          <a:xfrm>
+            <a:off x="5561608" y="5381526"/>
+            <a:ext cx="549771" cy="133350"/>
           </a:xfrm>
           <a:prstGeom prst="rect">
             <a:avLst/>
@@ -37180,15 +36890,54 @@
               <a:buNone/>
             </a:pPr>
             <a:r>
+              <a:rPr lang="ko-KR" altLang="en-US" sz="900" spc="-12" kern="0" dirty="0">
+                <a:solidFill>
+                  <a:srgbClr val="EA002C"/>
+                </a:solidFill>
+                <a:latin typeface="Pretendard ExtraBold" pitchFamily="34" charset="0"/>
+                <a:ea typeface="Pretendard ExtraBold" pitchFamily="34" charset="-127"/>
+                <a:cs typeface="Pretendard ExtraBold" pitchFamily="34" charset="-120"/>
+              </a:rPr>
+              <a:t>+33.8%p</a:t>
+            </a:r>
+            <a:endParaRPr lang="en-US" sz="900" dirty="0"/>
+          </a:p>
+        </p:txBody>
+      </p:sp>
+      <p:sp>
+        <p:nvSpPr>
+          <p:cNvPr id="110" name="Tesseract OCR"/>
+          <p:cNvSpPr txBox="1"/>
+          <p:nvPr/>
+        </p:nvSpPr>
+        <p:spPr>
+          <a:xfrm>
+            <a:off x="6388100" y="5077023"/>
+            <a:ext cx="875209" cy="146050"/>
+          </a:xfrm>
+          <a:prstGeom prst="rect">
+            <a:avLst/>
+          </a:prstGeom>
+          <a:noFill/>
+          <a:ln/>
+        </p:spPr>
+        <p:txBody>
+          <a:bodyPr wrap="none" lIns="0" tIns="0" rIns="0" bIns="0" rtlCol="0" anchor="ctr"/>
+          <a:lstStyle/>
+          <a:p>
+            <a:pPr algn="l" indent="0" marL="0">
+              <a:buNone/>
+            </a:pPr>
+            <a:r>
               <a:rPr lang="ko-KR" altLang="en-US" sz="950" b="1" spc="-12" kern="0" dirty="0">
                 <a:solidFill>
-                  <a:srgbClr val="3F4654"/>
+                  <a:srgbClr val="737C8B"/>
                 </a:solidFill>
                 <a:latin typeface="Pretendard" pitchFamily="34" charset="0"/>
                 <a:ea typeface="Pretendard" pitchFamily="34" charset="-127"/>
                 <a:cs typeface="Pretendard" pitchFamily="34" charset="-120"/>
               </a:rPr>
-              <a:t>문</a:t>
+              <a:t>Tesseract OCR</a:t>
             </a:r>
             <a:endParaRPr lang="en-US" sz="950" dirty="0"/>
           </a:p>
@@ -37196,14 +36945,14 @@
       </p:sp>
       <p:sp>
         <p:nvSpPr>
-          <p:cNvPr id="102" name="0.95"/>
-          <p:cNvSpPr txBox="1"/>
-          <p:nvPr/>
-        </p:nvSpPr>
-        <p:spPr>
-          <a:xfrm>
-            <a:off x="6388100" y="3724473"/>
-            <a:ext cx="864592" cy="450850"/>
+          <p:cNvPr id="111" name="0.369"/>
+          <p:cNvSpPr txBox="1"/>
+          <p:nvPr/>
+        </p:nvSpPr>
+        <p:spPr>
+          <a:xfrm>
+            <a:off x="6388100" y="5292923"/>
+            <a:ext cx="893266" cy="368300"/>
           </a:xfrm>
           <a:prstGeom prst="rect">
             <a:avLst/>
@@ -37219,30 +36968,30 @@
               <a:buNone/>
             </a:pPr>
             <a:r>
-              <a:rPr lang="ko-KR" altLang="en-US" sz="3000" spc="-120" kern="0" dirty="0">
-                <a:solidFill>
-                  <a:srgbClr val="102A4C"/>
+              <a:rPr lang="ko-KR" altLang="en-US" sz="2400" spc="-54" kern="0" dirty="0">
+                <a:solidFill>
+                  <a:srgbClr val="737C8B"/>
                 </a:solidFill>
                 <a:latin typeface="Pretendard ExtraBold" pitchFamily="34" charset="0"/>
                 <a:ea typeface="Pretendard ExtraBold" pitchFamily="34" charset="-127"/>
                 <a:cs typeface="Pretendard ExtraBold" pitchFamily="34" charset="-120"/>
               </a:rPr>
-              <a:t>0.95</a:t>
-            </a:r>
-            <a:endParaRPr lang="en-US" sz="3000" dirty="0"/>
-          </a:p>
-        </p:txBody>
-      </p:sp>
-      <p:sp>
-        <p:nvSpPr>
-          <p:cNvPr id="103" name="기여 3"/>
-          <p:cNvSpPr txBox="1"/>
-          <p:nvPr/>
-        </p:nvSpPr>
-        <p:spPr>
-          <a:xfrm>
-            <a:off x="1422400" y="4960342"/>
-            <a:ext cx="331093" cy="120650"/>
+              <a:t>0.369</a:t>
+            </a:r>
+            <a:endParaRPr lang="en-US" sz="2400" dirty="0"/>
+          </a:p>
+        </p:txBody>
+      </p:sp>
+      <p:sp>
+        <p:nvSpPr>
+          <p:cNvPr id="112" name="mAP@0.5 객체를 맞게 찾아낸 정도  ·  F1-score 정밀도·재"/>
+          <p:cNvSpPr txBox="1"/>
+          <p:nvPr/>
+        </p:nvSpPr>
+        <p:spPr>
+          <a:xfrm>
+            <a:off x="609600" y="6197798"/>
+            <a:ext cx="5440541" cy="120650"/>
           </a:xfrm>
           <a:prstGeom prst="rect">
             <a:avLst/>
@@ -37258,92 +37007,202 @@
               <a:buNone/>
             </a:pPr>
             <a:r>
-              <a:rPr lang="ko-KR" altLang="en-US" sz="800" spc="32" kern="0" dirty="0">
-                <a:solidFill>
-                  <a:srgbClr val="EA002C"/>
+              <a:rPr lang="ko-KR" altLang="en-US" sz="800" b="1" spc="-12" kern="0" dirty="0">
+                <a:solidFill>
+                  <a:srgbClr val="3F4654"/>
+                </a:solidFill>
+                <a:latin typeface="Pretendard" pitchFamily="34" charset="0"/>
+                <a:ea typeface="Pretendard" pitchFamily="34" charset="-127"/>
+                <a:cs typeface="Pretendard" pitchFamily="34" charset="-120"/>
+              </a:rPr>
+              <a:t>mAP@0.5</a:t>
+            </a:r>
+            <a:r>
+              <a:rPr lang="ko-KR" altLang="en-US" sz="800" spc="-12" kern="0" dirty="0">
+                <a:solidFill>
+                  <a:srgbClr val="737C8B"/>
+                </a:solidFill>
+                <a:latin typeface="Pretendard SemiBold" pitchFamily="34" charset="0"/>
+                <a:ea typeface="Pretendard SemiBold" pitchFamily="34" charset="-127"/>
+                <a:cs typeface="Pretendard SemiBold" pitchFamily="34" charset="-120"/>
+              </a:rPr>
+              <a:t> 객체를 맞게 찾아낸 정도  ·  </a:t>
+            </a:r>
+            <a:r>
+              <a:rPr lang="ko-KR" altLang="en-US" sz="800" b="1" spc="-12" kern="0" dirty="0">
+                <a:solidFill>
+                  <a:srgbClr val="3F4654"/>
+                </a:solidFill>
+                <a:latin typeface="Pretendard" pitchFamily="34" charset="0"/>
+                <a:ea typeface="Pretendard" pitchFamily="34" charset="-127"/>
+                <a:cs typeface="Pretendard" pitchFamily="34" charset="-120"/>
+              </a:rPr>
+              <a:t>F1-score</a:t>
+            </a:r>
+            <a:r>
+              <a:rPr lang="ko-KR" altLang="en-US" sz="800" spc="-12" kern="0" dirty="0">
+                <a:solidFill>
+                  <a:srgbClr val="737C8B"/>
+                </a:solidFill>
+                <a:latin typeface="Pretendard SemiBold" pitchFamily="34" charset="0"/>
+                <a:ea typeface="Pretendard SemiBold" pitchFamily="34" charset="-127"/>
+                <a:cs typeface="Pretendard SemiBold" pitchFamily="34" charset="-120"/>
+              </a:rPr>
+              <a:t> 정밀도·재현율의 조화평균 (모두 1에 가까울수록 좋음)  ·  </a:t>
+            </a:r>
+            <a:r>
+              <a:rPr lang="ko-KR" altLang="en-US" sz="800" b="1" spc="-12" kern="0" dirty="0">
+                <a:solidFill>
+                  <a:srgbClr val="3F4654"/>
+                </a:solidFill>
+                <a:latin typeface="Pretendard" pitchFamily="34" charset="0"/>
+                <a:ea typeface="Pretendard" pitchFamily="34" charset="-127"/>
+                <a:cs typeface="Pretendard" pitchFamily="34" charset="-120"/>
+              </a:rPr>
+              <a:t>LMM</a:t>
+            </a:r>
+            <a:r>
+              <a:rPr lang="ko-KR" altLang="en-US" sz="800" spc="-12" kern="0" dirty="0">
+                <a:solidFill>
+                  <a:srgbClr val="737C8B"/>
+                </a:solidFill>
+                <a:latin typeface="Pretendard SemiBold" pitchFamily="34" charset="0"/>
+                <a:ea typeface="Pretendard SemiBold" pitchFamily="34" charset="-127"/>
+                <a:cs typeface="Pretendard SemiBold" pitchFamily="34" charset="-120"/>
+              </a:rPr>
+              <a:t> 대형 멀티모달 모델</a:t>
+            </a:r>
+            <a:endParaRPr lang="en-US" sz="800" dirty="0"/>
+          </a:p>
+        </p:txBody>
+      </p:sp>
+      <p:sp>
+        <p:nvSpPr>
+          <p:cNvPr id="113" name="최종 결과"/>
+          <p:cNvSpPr txBox="1"/>
+          <p:nvPr/>
+        </p:nvSpPr>
+        <p:spPr>
+          <a:xfrm>
+            <a:off x="8902700" y="1282898"/>
+            <a:ext cx="588963" cy="184150"/>
+          </a:xfrm>
+          <a:prstGeom prst="rect">
+            <a:avLst/>
+          </a:prstGeom>
+          <a:noFill/>
+          <a:ln/>
+        </p:spPr>
+        <p:txBody>
+          <a:bodyPr wrap="none" lIns="0" tIns="0" rIns="0" bIns="0" rtlCol="0" anchor="ctr"/>
+          <a:lstStyle/>
+          <a:p>
+            <a:pPr algn="l" indent="0" marL="0">
+              <a:buNone/>
+            </a:pPr>
+            <a:r>
+              <a:rPr lang="ko-KR" altLang="en-US" sz="1200" spc="-36" kern="0" dirty="0">
+                <a:solidFill>
+                  <a:srgbClr val="102A4C"/>
                 </a:solidFill>
                 <a:latin typeface="Pretendard ExtraBold" pitchFamily="34" charset="0"/>
                 <a:ea typeface="Pretendard ExtraBold" pitchFamily="34" charset="-127"/>
                 <a:cs typeface="Pretendard ExtraBold" pitchFamily="34" charset="-120"/>
               </a:rPr>
-              <a:t>기여 3</a:t>
-            </a:r>
-            <a:endParaRPr lang="en-US" sz="800" dirty="0"/>
-          </a:p>
-        </p:txBody>
-      </p:sp>
-      <p:sp>
-        <p:nvSpPr>
-          <p:cNvPr id="104" name="LMM 기반 축척 인식으로 불완전한도면에서도 안정적인 치수 보정"/>
-          <p:cNvSpPr txBox="1"/>
-          <p:nvPr/>
-        </p:nvSpPr>
-        <p:spPr>
-          <a:xfrm>
-            <a:off x="1422400" y="5157986"/>
-            <a:ext cx="2247207" cy="455612"/>
-          </a:xfrm>
-          <a:prstGeom prst="rect">
-            <a:avLst/>
-          </a:prstGeom>
-          <a:noFill/>
-          <a:ln/>
-        </p:spPr>
-        <p:txBody>
-          <a:bodyPr wrap="none" lIns="0" tIns="0" rIns="0" bIns="0" rtlCol="0" anchor="t"/>
+              <a:t>최종 결과</a:t>
+            </a:r>
+            <a:endParaRPr lang="en-US" sz="1200" dirty="0"/>
+          </a:p>
+        </p:txBody>
+      </p:sp>
+      <p:sp>
+        <p:nvSpPr>
+          <p:cNvPr id="114" name="최종 BIM 생성"/>
+          <p:cNvSpPr txBox="1"/>
+          <p:nvPr/>
+        </p:nvSpPr>
+        <p:spPr>
+          <a:xfrm>
+            <a:off x="8890000" y="1809948"/>
+            <a:ext cx="1080746" cy="228600"/>
+          </a:xfrm>
+          <a:prstGeom prst="rect">
+            <a:avLst/>
+          </a:prstGeom>
+          <a:noFill/>
+          <a:ln/>
+        </p:spPr>
+        <p:txBody>
+          <a:bodyPr wrap="none" lIns="0" tIns="0" rIns="0" bIns="0" rtlCol="0" anchor="ctr"/>
           <a:lstStyle/>
           <a:p>
             <a:pPr algn="l" indent="0" marL="0">
-              <a:lnSpc>
-                <a:spcPts val="1794"/>
-              </a:lnSpc>
-              <a:buNone/>
-            </a:pPr>
-            <a:r>
-              <a:rPr lang="ko-KR" altLang="en-US" sz="1300" spc="-52" kern="0" dirty="0">
-                <a:solidFill>
-                  <a:srgbClr val="102A4C"/>
+              <a:buNone/>
+            </a:pPr>
+            <a:r>
+              <a:rPr lang="ko-KR" altLang="en-US" sz="1500" spc="-60" kern="0" dirty="0">
+                <a:solidFill>
+                  <a:srgbClr val="FFFFFF"/>
                 </a:solidFill>
                 <a:latin typeface="Pretendard ExtraBold" pitchFamily="34" charset="0"/>
                 <a:ea typeface="Pretendard ExtraBold" pitchFamily="34" charset="-127"/>
                 <a:cs typeface="Pretendard ExtraBold" pitchFamily="34" charset="-120"/>
               </a:rPr>
-              <a:t>LMM 기반 축척 인식으로 불완전한</a:t>
-            </a:r>
-            <a:endParaRPr lang="en-US" sz="1300" dirty="0"/>
-          </a:p>
+              <a:t>최종 BIM 생성</a:t>
+            </a:r>
+            <a:endParaRPr lang="en-US" sz="1500" dirty="0"/>
+          </a:p>
+        </p:txBody>
+      </p:sp>
+      <p:sp>
+        <p:nvSpPr>
+          <p:cNvPr id="115" name="379"/>
+          <p:cNvSpPr txBox="1"/>
+          <p:nvPr/>
+        </p:nvSpPr>
+        <p:spPr>
+          <a:xfrm>
+            <a:off x="8890000" y="2006798"/>
+            <a:ext cx="1597350" cy="971550"/>
+          </a:xfrm>
+          <a:prstGeom prst="rect">
+            <a:avLst/>
+          </a:prstGeom>
+          <a:noFill/>
+          <a:ln/>
+        </p:spPr>
+        <p:txBody>
+          <a:bodyPr wrap="none" lIns="0" tIns="0" rIns="0" bIns="0" rtlCol="0" anchor="ctr"/>
+          <a:lstStyle/>
           <a:p>
             <a:pPr algn="l" indent="0" marL="0">
-              <a:lnSpc>
-                <a:spcPts val="1794"/>
-              </a:lnSpc>
-              <a:buNone/>
-            </a:pPr>
-            <a:r>
-              <a:rPr lang="ko-KR" altLang="en-US" sz="1300" spc="-52" kern="0" dirty="0">
-                <a:solidFill>
-                  <a:srgbClr val="102A4C"/>
+              <a:buNone/>
+            </a:pPr>
+            <a:r>
+              <a:rPr lang="ko-KR" altLang="en-US" sz="6400" spc="-43" kern="0" dirty="0">
+                <a:solidFill>
+                  <a:srgbClr val="FFFFFF"/>
                 </a:solidFill>
                 <a:latin typeface="Pretendard ExtraBold" pitchFamily="34" charset="0"/>
                 <a:ea typeface="Pretendard ExtraBold" pitchFamily="34" charset="-127"/>
                 <a:cs typeface="Pretendard ExtraBold" pitchFamily="34" charset="-120"/>
               </a:rPr>
-              <a:t>도면에서도 안정적인 치수 보정</a:t>
-            </a:r>
-            <a:endParaRPr lang="en-US" sz="1300" dirty="0"/>
-          </a:p>
-        </p:txBody>
-      </p:sp>
-      <p:sp>
-        <p:nvSpPr>
-          <p:cNvPr id="105" name="축척 인식 정확도"/>
-          <p:cNvSpPr txBox="1"/>
-          <p:nvPr/>
-        </p:nvSpPr>
-        <p:spPr>
-          <a:xfrm>
-            <a:off x="4381500" y="4797623"/>
-            <a:ext cx="812998" cy="146050"/>
+              <a:t>379</a:t>
+            </a:r>
+            <a:endParaRPr lang="en-US" sz="6400" dirty="0"/>
+          </a:p>
+        </p:txBody>
+      </p:sp>
+      <p:sp>
+        <p:nvSpPr>
+          <p:cNvPr id="116" name="/ 406"/>
+          <p:cNvSpPr txBox="1"/>
+          <p:nvPr/>
+        </p:nvSpPr>
+        <p:spPr>
+          <a:xfrm>
+            <a:off x="10498534" y="2540198"/>
+            <a:ext cx="664170" cy="304800"/>
           </a:xfrm>
           <a:prstGeom prst="rect">
             <a:avLst/>
@@ -37359,30 +37218,153 @@
               <a:buNone/>
             </a:pPr>
             <a:r>
-              <a:rPr lang="ko-KR" altLang="en-US" sz="950" spc="-19" kern="0" dirty="0">
-                <a:solidFill>
-                  <a:srgbClr val="102A4C"/>
+              <a:rPr lang="ko-KR" altLang="en-US" sz="2000" b="1" spc="-59" kern="0" dirty="0">
+                <a:solidFill>
+                  <a:srgbClr val="FFFFFF">
+                    <a:alpha val="55000"/>
+                  </a:srgbClr>
+                </a:solidFill>
+                <a:latin typeface="Pretendard" pitchFamily="34" charset="0"/>
+                <a:ea typeface="Pretendard" pitchFamily="34" charset="-127"/>
+                <a:cs typeface="Pretendard" pitchFamily="34" charset="-120"/>
+              </a:rPr>
+              <a:t>/ 406</a:t>
+            </a:r>
+            <a:endParaRPr lang="en-US" sz="2000" dirty="0"/>
+          </a:p>
+        </p:txBody>
+      </p:sp>
+      <p:sp>
+        <p:nvSpPr>
+          <p:cNvPr id="117" name="406개 객체 중 379개 자동 생성"/>
+          <p:cNvSpPr txBox="1"/>
+          <p:nvPr/>
+        </p:nvSpPr>
+        <p:spPr>
+          <a:xfrm>
+            <a:off x="8890000" y="2965648"/>
+            <a:ext cx="1763522" cy="158750"/>
+          </a:xfrm>
+          <a:prstGeom prst="rect">
+            <a:avLst/>
+          </a:prstGeom>
+          <a:noFill/>
+          <a:ln/>
+        </p:spPr>
+        <p:txBody>
+          <a:bodyPr wrap="none" lIns="0" tIns="0" rIns="0" bIns="0" rtlCol="0" anchor="ctr"/>
+          <a:lstStyle/>
+          <a:p>
+            <a:pPr algn="l" indent="0" marL="0">
+              <a:buNone/>
+            </a:pPr>
+            <a:r>
+              <a:rPr lang="ko-KR" altLang="en-US" sz="1050" spc="-12" kern="0" dirty="0">
+                <a:solidFill>
+                  <a:srgbClr val="FFFFFF">
+                    <a:alpha val="82000"/>
+                  </a:srgbClr>
+                </a:solidFill>
+                <a:latin typeface="Pretendard SemiBold" pitchFamily="34" charset="0"/>
+                <a:ea typeface="Pretendard SemiBold" pitchFamily="34" charset="-127"/>
+                <a:cs typeface="Pretendard SemiBold" pitchFamily="34" charset="-120"/>
+              </a:rPr>
+              <a:t>406개 객체 중 379개 자동 생성</a:t>
+            </a:r>
+            <a:endParaRPr lang="en-US" sz="1050" dirty="0"/>
+          </a:p>
+        </p:txBody>
+      </p:sp>
+      <p:sp>
+        <p:nvSpPr>
+          <p:cNvPr id="118" name="생성 완성도"/>
+          <p:cNvSpPr txBox="1"/>
+          <p:nvPr/>
+        </p:nvSpPr>
+        <p:spPr>
+          <a:xfrm>
+            <a:off x="8890000" y="3526929"/>
+            <a:ext cx="590848" cy="146050"/>
+          </a:xfrm>
+          <a:prstGeom prst="rect">
+            <a:avLst/>
+          </a:prstGeom>
+          <a:noFill/>
+          <a:ln/>
+        </p:spPr>
+        <p:txBody>
+          <a:bodyPr wrap="none" lIns="0" tIns="0" rIns="0" bIns="0" rtlCol="0" anchor="ctr"/>
+          <a:lstStyle/>
+          <a:p>
+            <a:pPr algn="l" indent="0" marL="0">
+              <a:buNone/>
+            </a:pPr>
+            <a:r>
+              <a:rPr lang="ko-KR" altLang="en-US" sz="950" b="1" spc="-12" kern="0" dirty="0">
+                <a:solidFill>
+                  <a:srgbClr val="FFFFFF">
+                    <a:alpha val="75000"/>
+                  </a:srgbClr>
+                </a:solidFill>
+                <a:latin typeface="Pretendard" pitchFamily="34" charset="0"/>
+                <a:ea typeface="Pretendard" pitchFamily="34" charset="-127"/>
+                <a:cs typeface="Pretendard" pitchFamily="34" charset="-120"/>
+              </a:rPr>
+              <a:t>생성 완성도</a:t>
+            </a:r>
+            <a:endParaRPr lang="en-US" sz="950" dirty="0"/>
+          </a:p>
+        </p:txBody>
+      </p:sp>
+      <p:sp>
+        <p:nvSpPr>
+          <p:cNvPr id="119" name="93.3%"/>
+          <p:cNvSpPr txBox="1"/>
+          <p:nvPr/>
+        </p:nvSpPr>
+        <p:spPr>
+          <a:xfrm>
+            <a:off x="10690721" y="3450729"/>
+            <a:ext cx="688479" cy="241300"/>
+          </a:xfrm>
+          <a:prstGeom prst="rect">
+            <a:avLst/>
+          </a:prstGeom>
+          <a:noFill/>
+          <a:ln/>
+        </p:spPr>
+        <p:txBody>
+          <a:bodyPr wrap="none" lIns="0" tIns="0" rIns="0" bIns="0" rtlCol="0" anchor="ctr"/>
+          <a:lstStyle/>
+          <a:p>
+            <a:pPr algn="l" indent="0" marL="0">
+              <a:buNone/>
+            </a:pPr>
+            <a:r>
+              <a:rPr lang="ko-KR" altLang="en-US" sz="1600" spc="-16" kern="0" dirty="0">
+                <a:solidFill>
+                  <a:srgbClr val="FFFFFF"/>
                 </a:solidFill>
                 <a:latin typeface="Pretendard ExtraBold" pitchFamily="34" charset="0"/>
                 <a:ea typeface="Pretendard ExtraBold" pitchFamily="34" charset="-127"/>
                 <a:cs typeface="Pretendard ExtraBold" pitchFamily="34" charset="-120"/>
               </a:rPr>
-              <a:t>축척 인식 정확도</a:t>
-            </a:r>
-            <a:endParaRPr lang="en-US" sz="950" dirty="0"/>
-          </a:p>
-        </p:txBody>
-      </p:sp>
-      <p:sp>
-        <p:nvSpPr>
-          <p:cNvPr id="106" name="·  Tesseract OCR 대비"/>
-          <p:cNvSpPr txBox="1"/>
-          <p:nvPr/>
-        </p:nvSpPr>
-        <p:spPr>
-          <a:xfrm>
-            <a:off x="5194498" y="4797623"/>
-            <a:ext cx="1179292" cy="146050"/>
+              <a:t>93.3%</a:t>
+            </a:r>
+            <a:endParaRPr lang="en-US" sz="1600" dirty="0"/>
+          </a:p>
+        </p:txBody>
+      </p:sp>
+      <p:sp>
+        <p:nvSpPr>
+          <p:cNvPr id="120" name="자동 생성된 3D BIM"/>
+          <p:cNvSpPr txBox="1"/>
+          <p:nvPr/>
+        </p:nvSpPr>
+        <p:spPr>
+          <a:xfrm>
+            <a:off x="8890000" y="6019998"/>
+            <a:ext cx="856258" cy="120650"/>
           </a:xfrm>
           <a:prstGeom prst="rect">
             <a:avLst/>
@@ -37398,30 +37380,32 @@
               <a:buNone/>
             </a:pPr>
             <a:r>
-              <a:rPr lang="ko-KR" altLang="en-US" sz="950" spc="-19" kern="0" dirty="0">
-                <a:solidFill>
-                  <a:srgbClr val="737C8B"/>
+              <a:rPr lang="ko-KR" altLang="en-US" sz="800" spc="-12" kern="0" dirty="0">
+                <a:solidFill>
+                  <a:srgbClr val="FFFFFF">
+                    <a:alpha val="62000"/>
+                  </a:srgbClr>
                 </a:solidFill>
                 <a:latin typeface="Pretendard SemiBold" pitchFamily="34" charset="0"/>
                 <a:ea typeface="Pretendard SemiBold" pitchFamily="34" charset="-127"/>
                 <a:cs typeface="Pretendard SemiBold" pitchFamily="34" charset="-120"/>
               </a:rPr>
-              <a:t>·  Tesseract OCR 대비</a:t>
-            </a:r>
-            <a:endParaRPr lang="en-US" sz="950" dirty="0"/>
-          </a:p>
-        </p:txBody>
-      </p:sp>
-      <p:sp>
-        <p:nvSpPr>
-          <p:cNvPr id="107" name="LMM(GPT-4o)"/>
-          <p:cNvSpPr txBox="1"/>
-          <p:nvPr/>
-        </p:nvSpPr>
-        <p:spPr>
-          <a:xfrm>
-            <a:off x="4381500" y="5077023"/>
-            <a:ext cx="845245" cy="146050"/>
+              <a:t>자동 생성된 3D BIM</a:t>
+            </a:r>
+            <a:endParaRPr lang="en-US" sz="800" dirty="0"/>
+          </a:p>
+        </p:txBody>
+      </p:sp>
+      <p:sp>
+        <p:nvSpPr>
+          <p:cNvPr id="121" name="석사 연구 발표  ·  평면도와 입면도 객체 인식 및 정보 통합을 통한 "/>
+          <p:cNvSpPr txBox="1"/>
+          <p:nvPr/>
+        </p:nvSpPr>
+        <p:spPr>
+          <a:xfrm>
+            <a:off x="609600" y="6472238"/>
+            <a:ext cx="5145113" cy="114300"/>
           </a:xfrm>
           <a:prstGeom prst="rect">
             <a:avLst/>
@@ -37437,30 +37421,30 @@
               <a:buNone/>
             </a:pPr>
             <a:r>
-              <a:rPr lang="ko-KR" altLang="en-US" sz="950" b="1" spc="-12" kern="0" dirty="0">
-                <a:solidFill>
-                  <a:srgbClr val="3F4654"/>
-                </a:solidFill>
-                <a:latin typeface="Pretendard" pitchFamily="34" charset="0"/>
-                <a:ea typeface="Pretendard" pitchFamily="34" charset="-127"/>
-                <a:cs typeface="Pretendard" pitchFamily="34" charset="-120"/>
-              </a:rPr>
-              <a:t>LMM(GPT-4o)</a:t>
-            </a:r>
-            <a:endParaRPr lang="en-US" sz="950" dirty="0"/>
-          </a:p>
-        </p:txBody>
-      </p:sp>
-      <p:sp>
-        <p:nvSpPr>
-          <p:cNvPr id="108" name="0.707"/>
-          <p:cNvSpPr txBox="1"/>
-          <p:nvPr/>
-        </p:nvSpPr>
-        <p:spPr>
-          <a:xfrm>
-            <a:off x="4381500" y="5223073"/>
-            <a:ext cx="1116294" cy="450850"/>
+              <a:rPr lang="ko-KR" altLang="en-US" sz="750" spc="-12" kern="0" dirty="0">
+                <a:solidFill>
+                  <a:srgbClr val="737C8B"/>
+                </a:solidFill>
+                <a:latin typeface="Pretendard Medium" pitchFamily="34" charset="0"/>
+                <a:ea typeface="Pretendard Medium" pitchFamily="34" charset="-127"/>
+                <a:cs typeface="Pretendard Medium" pitchFamily="34" charset="-120"/>
+              </a:rPr>
+              <a:t>석사 연구 발표  ·  평면도와 입면도 객체 인식 및 정보 통합을 통한 3D BIM 자동 생성 연구  ·  Utility 기술(건축, BIM/5D) 지원자 ○○○</a:t>
+            </a:r>
+            <a:endParaRPr lang="en-US" sz="750" dirty="0"/>
+          </a:p>
+        </p:txBody>
+      </p:sp>
+      <p:sp>
+        <p:nvSpPr>
+          <p:cNvPr id="122" name="08 / 10"/>
+          <p:cNvSpPr txBox="1"/>
+          <p:nvPr/>
+        </p:nvSpPr>
+        <p:spPr>
+          <a:xfrm>
+            <a:off x="11231066" y="6472238"/>
+            <a:ext cx="402134" cy="114300"/>
           </a:xfrm>
           <a:prstGeom prst="rect">
             <a:avLst/>
@@ -37476,7 +37460,7 @@
               <a:buNone/>
             </a:pPr>
             <a:r>
-              <a:rPr lang="ko-KR" altLang="en-US" sz="3000" spc="-120" kern="0" dirty="0">
+              <a:rPr lang="ko-KR" altLang="en-US" sz="750" spc="45" kern="0" dirty="0">
                 <a:solidFill>
                   <a:srgbClr val="102A4C"/>
                 </a:solidFill>
@@ -37484,635 +37468,8 @@
                 <a:ea typeface="Pretendard ExtraBold" pitchFamily="34" charset="-127"/>
                 <a:cs typeface="Pretendard ExtraBold" pitchFamily="34" charset="-120"/>
               </a:rPr>
-              <a:t>0.707</a:t>
-            </a:r>
-            <a:endParaRPr lang="en-US" sz="3000" dirty="0"/>
-          </a:p>
-        </p:txBody>
-      </p:sp>
-      <p:sp>
-        <p:nvSpPr>
-          <p:cNvPr id="109" name="+33.8%p"/>
-          <p:cNvSpPr txBox="1"/>
-          <p:nvPr/>
-        </p:nvSpPr>
-        <p:spPr>
-          <a:xfrm>
-            <a:off x="5561608" y="5381526"/>
-            <a:ext cx="549771" cy="133350"/>
-          </a:xfrm>
-          <a:prstGeom prst="rect">
-            <a:avLst/>
-          </a:prstGeom>
-          <a:noFill/>
-          <a:ln/>
-        </p:spPr>
-        <p:txBody>
-          <a:bodyPr wrap="none" lIns="0" tIns="0" rIns="0" bIns="0" rtlCol="0" anchor="ctr"/>
-          <a:lstStyle/>
-          <a:p>
-            <a:pPr algn="l" indent="0" marL="0">
-              <a:buNone/>
-            </a:pPr>
-            <a:r>
-              <a:rPr lang="ko-KR" altLang="en-US" sz="900" spc="-12" kern="0" dirty="0">
-                <a:solidFill>
-                  <a:srgbClr val="EA002C"/>
-                </a:solidFill>
-                <a:latin typeface="Pretendard ExtraBold" pitchFamily="34" charset="0"/>
-                <a:ea typeface="Pretendard ExtraBold" pitchFamily="34" charset="-127"/>
-                <a:cs typeface="Pretendard ExtraBold" pitchFamily="34" charset="-120"/>
-              </a:rPr>
-              <a:t>+33.8%p</a:t>
-            </a:r>
-            <a:endParaRPr lang="en-US" sz="900" dirty="0"/>
-          </a:p>
-        </p:txBody>
-      </p:sp>
-      <p:sp>
-        <p:nvSpPr>
-          <p:cNvPr id="110" name="Tesseract OCR"/>
-          <p:cNvSpPr txBox="1"/>
-          <p:nvPr/>
-        </p:nvSpPr>
-        <p:spPr>
-          <a:xfrm>
-            <a:off x="6388100" y="5077023"/>
-            <a:ext cx="875209" cy="146050"/>
-          </a:xfrm>
-          <a:prstGeom prst="rect">
-            <a:avLst/>
-          </a:prstGeom>
-          <a:noFill/>
-          <a:ln/>
-        </p:spPr>
-        <p:txBody>
-          <a:bodyPr wrap="none" lIns="0" tIns="0" rIns="0" bIns="0" rtlCol="0" anchor="ctr"/>
-          <a:lstStyle/>
-          <a:p>
-            <a:pPr algn="l" indent="0" marL="0">
-              <a:buNone/>
-            </a:pPr>
-            <a:r>
-              <a:rPr lang="ko-KR" altLang="en-US" sz="950" b="1" spc="-12" kern="0" dirty="0">
-                <a:solidFill>
-                  <a:srgbClr val="737C8B"/>
-                </a:solidFill>
-                <a:latin typeface="Pretendard" pitchFamily="34" charset="0"/>
-                <a:ea typeface="Pretendard" pitchFamily="34" charset="-127"/>
-                <a:cs typeface="Pretendard" pitchFamily="34" charset="-120"/>
-              </a:rPr>
-              <a:t>Tesseract OCR</a:t>
-            </a:r>
-            <a:endParaRPr lang="en-US" sz="950" dirty="0"/>
-          </a:p>
-        </p:txBody>
-      </p:sp>
-      <p:sp>
-        <p:nvSpPr>
-          <p:cNvPr id="111" name="0.369"/>
-          <p:cNvSpPr txBox="1"/>
-          <p:nvPr/>
-        </p:nvSpPr>
-        <p:spPr>
-          <a:xfrm>
-            <a:off x="6388100" y="5292923"/>
-            <a:ext cx="893266" cy="368300"/>
-          </a:xfrm>
-          <a:prstGeom prst="rect">
-            <a:avLst/>
-          </a:prstGeom>
-          <a:noFill/>
-          <a:ln/>
-        </p:spPr>
-        <p:txBody>
-          <a:bodyPr wrap="none" lIns="0" tIns="0" rIns="0" bIns="0" rtlCol="0" anchor="ctr"/>
-          <a:lstStyle/>
-          <a:p>
-            <a:pPr algn="l" indent="0" marL="0">
-              <a:buNone/>
-            </a:pPr>
-            <a:r>
-              <a:rPr lang="ko-KR" altLang="en-US" sz="2400" spc="-96" kern="0" dirty="0">
-                <a:solidFill>
-                  <a:srgbClr val="737C8B"/>
-                </a:solidFill>
-                <a:latin typeface="Pretendard ExtraBold" pitchFamily="34" charset="0"/>
-                <a:ea typeface="Pretendard ExtraBold" pitchFamily="34" charset="-127"/>
-                <a:cs typeface="Pretendard ExtraBold" pitchFamily="34" charset="-120"/>
-              </a:rPr>
-              <a:t>0.369</a:t>
-            </a:r>
-            <a:endParaRPr lang="en-US" sz="2400" dirty="0"/>
-          </a:p>
-        </p:txBody>
-      </p:sp>
-      <p:sp>
-        <p:nvSpPr>
-          <p:cNvPr id="112" name="mAP@0.5 객체를 맞게 찾아낸 정도  ·  F1-score 정밀도·재"/>
-          <p:cNvSpPr txBox="1"/>
-          <p:nvPr/>
-        </p:nvSpPr>
-        <p:spPr>
-          <a:xfrm>
-            <a:off x="609600" y="6197798"/>
-            <a:ext cx="5440541" cy="120650"/>
-          </a:xfrm>
-          <a:prstGeom prst="rect">
-            <a:avLst/>
-          </a:prstGeom>
-          <a:noFill/>
-          <a:ln/>
-        </p:spPr>
-        <p:txBody>
-          <a:bodyPr wrap="none" lIns="0" tIns="0" rIns="0" bIns="0" rtlCol="0" anchor="ctr"/>
-          <a:lstStyle/>
-          <a:p>
-            <a:pPr algn="l" indent="0" marL="0">
-              <a:buNone/>
-            </a:pPr>
-            <a:r>
-              <a:rPr lang="ko-KR" altLang="en-US" sz="800" b="1" spc="-12" kern="0" dirty="0">
-                <a:solidFill>
-                  <a:srgbClr val="3F4654"/>
-                </a:solidFill>
-                <a:latin typeface="Pretendard" pitchFamily="34" charset="0"/>
-                <a:ea typeface="Pretendard" pitchFamily="34" charset="-127"/>
-                <a:cs typeface="Pretendard" pitchFamily="34" charset="-120"/>
-              </a:rPr>
-              <a:t>mAP@0.5</a:t>
-            </a:r>
-            <a:pPr algn="l" indent="0" marL="0">
-              <a:buNone/>
-            </a:pPr>
-            <a:r>
-              <a:rPr lang="ko-KR" altLang="en-US" sz="800" spc="-12" kern="0" dirty="0">
-                <a:solidFill>
-                  <a:srgbClr val="737C8B"/>
-                </a:solidFill>
-                <a:latin typeface="Pretendard SemiBold" pitchFamily="34" charset="0"/>
-                <a:ea typeface="Pretendard SemiBold" pitchFamily="34" charset="-127"/>
-                <a:cs typeface="Pretendard SemiBold" pitchFamily="34" charset="-120"/>
-              </a:rPr>
-              <a:t> 객체를 맞게 찾아낸 정도  ·  </a:t>
-            </a:r>
-            <a:pPr algn="l" indent="0" marL="0">
-              <a:buNone/>
-            </a:pPr>
-            <a:r>
-              <a:rPr lang="ko-KR" altLang="en-US" sz="800" b="1" spc="-12" kern="0" dirty="0">
-                <a:solidFill>
-                  <a:srgbClr val="3F4654"/>
-                </a:solidFill>
-                <a:latin typeface="Pretendard" pitchFamily="34" charset="0"/>
-                <a:ea typeface="Pretendard" pitchFamily="34" charset="-127"/>
-                <a:cs typeface="Pretendard" pitchFamily="34" charset="-120"/>
-              </a:rPr>
-              <a:t>F1-score</a:t>
-            </a:r>
-            <a:pPr algn="l" indent="0" marL="0">
-              <a:buNone/>
-            </a:pPr>
-            <a:r>
-              <a:rPr lang="ko-KR" altLang="en-US" sz="800" spc="-12" kern="0" dirty="0">
-                <a:solidFill>
-                  <a:srgbClr val="737C8B"/>
-                </a:solidFill>
-                <a:latin typeface="Pretendard SemiBold" pitchFamily="34" charset="0"/>
-                <a:ea typeface="Pretendard SemiBold" pitchFamily="34" charset="-127"/>
-                <a:cs typeface="Pretendard SemiBold" pitchFamily="34" charset="-120"/>
-              </a:rPr>
-              <a:t> 정밀도·재현율의 조화평균 (모두 1에 가까울수록 좋음)  ·  </a:t>
-            </a:r>
-            <a:pPr algn="l" indent="0" marL="0">
-              <a:buNone/>
-            </a:pPr>
-            <a:r>
-              <a:rPr lang="ko-KR" altLang="en-US" sz="800" b="1" spc="-12" kern="0" dirty="0">
-                <a:solidFill>
-                  <a:srgbClr val="3F4654"/>
-                </a:solidFill>
-                <a:latin typeface="Pretendard" pitchFamily="34" charset="0"/>
-                <a:ea typeface="Pretendard" pitchFamily="34" charset="-127"/>
-                <a:cs typeface="Pretendard" pitchFamily="34" charset="-120"/>
-              </a:rPr>
-              <a:t>LMM</a:t>
-            </a:r>
-            <a:pPr algn="l" indent="0" marL="0">
-              <a:buNone/>
-            </a:pPr>
-            <a:r>
-              <a:rPr lang="ko-KR" altLang="en-US" sz="800" spc="-12" kern="0" dirty="0">
-                <a:solidFill>
-                  <a:srgbClr val="737C8B"/>
-                </a:solidFill>
-                <a:latin typeface="Pretendard SemiBold" pitchFamily="34" charset="0"/>
-                <a:ea typeface="Pretendard SemiBold" pitchFamily="34" charset="-127"/>
-                <a:cs typeface="Pretendard SemiBold" pitchFamily="34" charset="-120"/>
-              </a:rPr>
-              <a:t> 대형 멀티모달 모델</a:t>
-            </a:r>
-            <a:endParaRPr lang="en-US" sz="800" dirty="0"/>
-          </a:p>
-        </p:txBody>
-      </p:sp>
-      <p:sp>
-        <p:nvSpPr>
-          <p:cNvPr id="113" name="최종 결과"/>
-          <p:cNvSpPr txBox="1"/>
-          <p:nvPr/>
-        </p:nvSpPr>
-        <p:spPr>
-          <a:xfrm>
-            <a:off x="8902700" y="1282898"/>
-            <a:ext cx="588963" cy="184150"/>
-          </a:xfrm>
-          <a:prstGeom prst="rect">
-            <a:avLst/>
-          </a:prstGeom>
-          <a:noFill/>
-          <a:ln/>
-        </p:spPr>
-        <p:txBody>
-          <a:bodyPr wrap="none" lIns="0" tIns="0" rIns="0" bIns="0" rtlCol="0" anchor="ctr"/>
-          <a:lstStyle/>
-          <a:p>
-            <a:pPr algn="l" indent="0" marL="0">
-              <a:buNone/>
-            </a:pPr>
-            <a:r>
-              <a:rPr lang="ko-KR" altLang="en-US" sz="1200" spc="-36" kern="0" dirty="0">
-                <a:solidFill>
-                  <a:srgbClr val="102A4C"/>
-                </a:solidFill>
-                <a:latin typeface="Pretendard ExtraBold" pitchFamily="34" charset="0"/>
-                <a:ea typeface="Pretendard ExtraBold" pitchFamily="34" charset="-127"/>
-                <a:cs typeface="Pretendard ExtraBold" pitchFamily="34" charset="-120"/>
-              </a:rPr>
-              <a:t>최종 결과</a:t>
-            </a:r>
-            <a:endParaRPr lang="en-US" sz="1200" dirty="0"/>
-          </a:p>
-        </p:txBody>
-      </p:sp>
-      <p:sp>
-        <p:nvSpPr>
-          <p:cNvPr id="114" name="최종 BIM 생성"/>
-          <p:cNvSpPr txBox="1"/>
-          <p:nvPr/>
-        </p:nvSpPr>
-        <p:spPr>
-          <a:xfrm>
-            <a:off x="8890000" y="1809948"/>
-            <a:ext cx="1080746" cy="228600"/>
-          </a:xfrm>
-          <a:prstGeom prst="rect">
-            <a:avLst/>
-          </a:prstGeom>
-          <a:noFill/>
-          <a:ln/>
-        </p:spPr>
-        <p:txBody>
-          <a:bodyPr wrap="none" lIns="0" tIns="0" rIns="0" bIns="0" rtlCol="0" anchor="ctr"/>
-          <a:lstStyle/>
-          <a:p>
-            <a:pPr algn="l" indent="0" marL="0">
-              <a:buNone/>
-            </a:pPr>
-            <a:r>
-              <a:rPr lang="ko-KR" altLang="en-US" sz="1500" spc="-60" kern="0" dirty="0">
-                <a:solidFill>
-                  <a:srgbClr val="FFFFFF"/>
-                </a:solidFill>
-                <a:latin typeface="Pretendard ExtraBold" pitchFamily="34" charset="0"/>
-                <a:ea typeface="Pretendard ExtraBold" pitchFamily="34" charset="-127"/>
-                <a:cs typeface="Pretendard ExtraBold" pitchFamily="34" charset="-120"/>
-              </a:rPr>
-              <a:t>최종 BIM 생성</a:t>
-            </a:r>
-            <a:endParaRPr lang="en-US" sz="1500" dirty="0"/>
-          </a:p>
-        </p:txBody>
-      </p:sp>
-      <p:sp>
-        <p:nvSpPr>
-          <p:cNvPr id="115" name="379"/>
-          <p:cNvSpPr txBox="1"/>
-          <p:nvPr/>
-        </p:nvSpPr>
-        <p:spPr>
-          <a:xfrm>
-            <a:off x="8890000" y="2006798"/>
-            <a:ext cx="1597350" cy="971550"/>
-          </a:xfrm>
-          <a:prstGeom prst="rect">
-            <a:avLst/>
-          </a:prstGeom>
-          <a:noFill/>
-          <a:ln/>
-        </p:spPr>
-        <p:txBody>
-          <a:bodyPr wrap="none" lIns="0" tIns="0" rIns="0" bIns="0" rtlCol="0" anchor="ctr"/>
-          <a:lstStyle/>
-          <a:p>
-            <a:pPr algn="l" indent="0" marL="0">
-              <a:buNone/>
-            </a:pPr>
-            <a:r>
-              <a:rPr lang="ko-KR" altLang="en-US" sz="6400" spc="-320" kern="0" dirty="0">
-                <a:solidFill>
-                  <a:srgbClr val="FFFFFF"/>
-                </a:solidFill>
-                <a:latin typeface="Pretendard ExtraBold" pitchFamily="34" charset="0"/>
-                <a:ea typeface="Pretendard ExtraBold" pitchFamily="34" charset="-127"/>
-                <a:cs typeface="Pretendard ExtraBold" pitchFamily="34" charset="-120"/>
-              </a:rPr>
-              <a:t>379</a:t>
-            </a:r>
-            <a:endParaRPr lang="en-US" sz="6400" dirty="0"/>
-          </a:p>
-        </p:txBody>
-      </p:sp>
-      <p:sp>
-        <p:nvSpPr>
-          <p:cNvPr id="116" name="/ 406"/>
-          <p:cNvSpPr txBox="1"/>
-          <p:nvPr/>
-        </p:nvSpPr>
-        <p:spPr>
-          <a:xfrm>
-            <a:off x="10498534" y="2540198"/>
-            <a:ext cx="664170" cy="304800"/>
-          </a:xfrm>
-          <a:prstGeom prst="rect">
-            <a:avLst/>
-          </a:prstGeom>
-          <a:noFill/>
-          <a:ln/>
-        </p:spPr>
-        <p:txBody>
-          <a:bodyPr wrap="none" lIns="0" tIns="0" rIns="0" bIns="0" rtlCol="0" anchor="ctr"/>
-          <a:lstStyle/>
-          <a:p>
-            <a:pPr algn="l" indent="0" marL="0">
-              <a:buNone/>
-            </a:pPr>
-            <a:r>
-              <a:rPr lang="ko-KR" altLang="en-US" sz="2000" b="1" spc="-60" kern="0" dirty="0">
-                <a:solidFill>
-                  <a:srgbClr val="FFFFFF">
-                    <a:alpha val="55000"/>
-                  </a:srgbClr>
-                </a:solidFill>
-                <a:latin typeface="Pretendard" pitchFamily="34" charset="0"/>
-                <a:ea typeface="Pretendard" pitchFamily="34" charset="-127"/>
-                <a:cs typeface="Pretendard" pitchFamily="34" charset="-120"/>
-              </a:rPr>
-              <a:t>/ 406</a:t>
-            </a:r>
-            <a:endParaRPr lang="en-US" sz="2000" dirty="0"/>
-          </a:p>
-        </p:txBody>
-      </p:sp>
-      <p:sp>
-        <p:nvSpPr>
-          <p:cNvPr id="117" name="406개 객체 중 379개 자동 생성"/>
-          <p:cNvSpPr txBox="1"/>
-          <p:nvPr/>
-        </p:nvSpPr>
-        <p:spPr>
-          <a:xfrm>
-            <a:off x="8890000" y="2965648"/>
-            <a:ext cx="1763522" cy="158750"/>
-          </a:xfrm>
-          <a:prstGeom prst="rect">
-            <a:avLst/>
-          </a:prstGeom>
-          <a:noFill/>
-          <a:ln/>
-        </p:spPr>
-        <p:txBody>
-          <a:bodyPr wrap="none" lIns="0" tIns="0" rIns="0" bIns="0" rtlCol="0" anchor="ctr"/>
-          <a:lstStyle/>
-          <a:p>
-            <a:pPr algn="l" indent="0" marL="0">
-              <a:buNone/>
-            </a:pPr>
-            <a:r>
-              <a:rPr lang="ko-KR" altLang="en-US" sz="1050" spc="-12" kern="0" dirty="0">
-                <a:solidFill>
-                  <a:srgbClr val="FFFFFF">
-                    <a:alpha val="82000"/>
-                  </a:srgbClr>
-                </a:solidFill>
-                <a:latin typeface="Pretendard SemiBold" pitchFamily="34" charset="0"/>
-                <a:ea typeface="Pretendard SemiBold" pitchFamily="34" charset="-127"/>
-                <a:cs typeface="Pretendard SemiBold" pitchFamily="34" charset="-120"/>
-              </a:rPr>
-              <a:t>406개 객체 중 379개 자동 생성</a:t>
-            </a:r>
-            <a:endParaRPr lang="en-US" sz="1050" dirty="0"/>
-          </a:p>
-        </p:txBody>
-      </p:sp>
-      <p:sp>
-        <p:nvSpPr>
-          <p:cNvPr id="118" name="생성 완성도"/>
-          <p:cNvSpPr txBox="1"/>
-          <p:nvPr/>
-        </p:nvSpPr>
-        <p:spPr>
-          <a:xfrm>
-            <a:off x="8890000" y="3526929"/>
-            <a:ext cx="590848" cy="146050"/>
-          </a:xfrm>
-          <a:prstGeom prst="rect">
-            <a:avLst/>
-          </a:prstGeom>
-          <a:noFill/>
-          <a:ln/>
-        </p:spPr>
-        <p:txBody>
-          <a:bodyPr wrap="none" lIns="0" tIns="0" rIns="0" bIns="0" rtlCol="0" anchor="ctr"/>
-          <a:lstStyle/>
-          <a:p>
-            <a:pPr algn="l" indent="0" marL="0">
-              <a:buNone/>
-            </a:pPr>
-            <a:r>
-              <a:rPr lang="ko-KR" altLang="en-US" sz="950" b="1" spc="-12" kern="0" dirty="0">
-                <a:solidFill>
-                  <a:srgbClr val="FFFFFF">
-                    <a:alpha val="75000"/>
-                  </a:srgbClr>
-                </a:solidFill>
-                <a:latin typeface="Pretendard" pitchFamily="34" charset="0"/>
-                <a:ea typeface="Pretendard" pitchFamily="34" charset="-127"/>
-                <a:cs typeface="Pretendard" pitchFamily="34" charset="-120"/>
-              </a:rPr>
-              <a:t>생성 완성도</a:t>
-            </a:r>
-            <a:endParaRPr lang="en-US" sz="950" dirty="0"/>
-          </a:p>
-        </p:txBody>
-      </p:sp>
-      <p:sp>
-        <p:nvSpPr>
-          <p:cNvPr id="119" name="93.3%"/>
-          <p:cNvSpPr txBox="1"/>
-          <p:nvPr/>
-        </p:nvSpPr>
-        <p:spPr>
-          <a:xfrm>
-            <a:off x="10690721" y="3450729"/>
-            <a:ext cx="688479" cy="241300"/>
-          </a:xfrm>
-          <a:prstGeom prst="rect">
-            <a:avLst/>
-          </a:prstGeom>
-          <a:noFill/>
-          <a:ln/>
-        </p:spPr>
-        <p:txBody>
-          <a:bodyPr wrap="none" lIns="0" tIns="0" rIns="0" bIns="0" rtlCol="0" anchor="ctr"/>
-          <a:lstStyle/>
-          <a:p>
-            <a:pPr algn="l" indent="0" marL="0">
-              <a:buNone/>
-            </a:pPr>
-            <a:r>
-              <a:rPr lang="ko-KR" altLang="en-US" sz="1600" spc="-48" kern="0" dirty="0">
-                <a:solidFill>
-                  <a:srgbClr val="FFFFFF"/>
-                </a:solidFill>
-                <a:latin typeface="Pretendard ExtraBold" pitchFamily="34" charset="0"/>
-                <a:ea typeface="Pretendard ExtraBold" pitchFamily="34" charset="-127"/>
-                <a:cs typeface="Pretendard ExtraBold" pitchFamily="34" charset="-120"/>
-              </a:rPr>
-              <a:t>93.3%</a:t>
-            </a:r>
-            <a:endParaRPr lang="en-US" sz="1600" dirty="0"/>
-          </a:p>
-        </p:txBody>
-      </p:sp>
-      <p:sp>
-        <p:nvSpPr>
-          <p:cNvPr id="120" name="자동 생성된 3D BIM"/>
-          <p:cNvSpPr txBox="1"/>
-          <p:nvPr/>
-        </p:nvSpPr>
-        <p:spPr>
-          <a:xfrm>
-            <a:off x="8890000" y="6019998"/>
-            <a:ext cx="856258" cy="120650"/>
-          </a:xfrm>
-          <a:prstGeom prst="rect">
-            <a:avLst/>
-          </a:prstGeom>
-          <a:noFill/>
-          <a:ln/>
-        </p:spPr>
-        <p:txBody>
-          <a:bodyPr wrap="none" lIns="0" tIns="0" rIns="0" bIns="0" rtlCol="0" anchor="ctr"/>
-          <a:lstStyle/>
-          <a:p>
-            <a:pPr algn="l" indent="0" marL="0">
-              <a:buNone/>
-            </a:pPr>
-            <a:r>
-              <a:rPr lang="ko-KR" altLang="en-US" sz="800" spc="-12" kern="0" dirty="0">
-                <a:solidFill>
-                  <a:srgbClr val="FFFFFF">
-                    <a:alpha val="62000"/>
-                  </a:srgbClr>
-                </a:solidFill>
-                <a:latin typeface="Pretendard SemiBold" pitchFamily="34" charset="0"/>
-                <a:ea typeface="Pretendard SemiBold" pitchFamily="34" charset="-127"/>
-                <a:cs typeface="Pretendard SemiBold" pitchFamily="34" charset="-120"/>
-              </a:rPr>
-              <a:t>자동 생성된 3D BIM</a:t>
-            </a:r>
-            <a:endParaRPr lang="en-US" sz="800" dirty="0"/>
-          </a:p>
-        </p:txBody>
-      </p:sp>
-      <p:sp>
-        <p:nvSpPr>
-          <p:cNvPr id="121" name="석사 연구 발표  ·  평면도와 입면도 객체 인식 및 정보 통합을 통한 "/>
-          <p:cNvSpPr txBox="1"/>
-          <p:nvPr/>
-        </p:nvSpPr>
-        <p:spPr>
-          <a:xfrm>
-            <a:off x="609600" y="6472238"/>
-            <a:ext cx="5145113" cy="114300"/>
-          </a:xfrm>
-          <a:prstGeom prst="rect">
-            <a:avLst/>
-          </a:prstGeom>
-          <a:noFill/>
-          <a:ln/>
-        </p:spPr>
-        <p:txBody>
-          <a:bodyPr wrap="none" lIns="0" tIns="0" rIns="0" bIns="0" rtlCol="0" anchor="ctr"/>
-          <a:lstStyle/>
-          <a:p>
-            <a:pPr algn="l" indent="0" marL="0">
-              <a:buNone/>
-            </a:pPr>
-            <a:r>
-              <a:rPr lang="ko-KR" altLang="en-US" sz="750" spc="-12" kern="0" dirty="0">
-                <a:solidFill>
-                  <a:srgbClr val="737C8B"/>
-                </a:solidFill>
-                <a:latin typeface="Pretendard Medium" pitchFamily="34" charset="0"/>
-                <a:ea typeface="Pretendard Medium" pitchFamily="34" charset="-127"/>
-                <a:cs typeface="Pretendard Medium" pitchFamily="34" charset="-120"/>
-              </a:rPr>
-              <a:t>석사 연구 발표  ·  평면도와 입면도 객체 인식 및 정보 통합을 통한 3D BIM 자동 생성 연구  ·  Utility 기술(건축, BIM/5D) 지원자 ○○○</a:t>
-            </a:r>
-            <a:endParaRPr lang="en-US" sz="750" dirty="0"/>
-          </a:p>
-        </p:txBody>
-      </p:sp>
-      <p:sp>
-        <p:nvSpPr>
-          <p:cNvPr id="122" name="08 / 10"/>
-          <p:cNvSpPr txBox="1"/>
-          <p:nvPr/>
-        </p:nvSpPr>
-        <p:spPr>
-          <a:xfrm>
-            <a:off x="11231066" y="6472238"/>
-            <a:ext cx="402134" cy="114300"/>
-          </a:xfrm>
-          <a:prstGeom prst="rect">
-            <a:avLst/>
-          </a:prstGeom>
-          <a:noFill/>
-          <a:ln/>
-        </p:spPr>
-        <p:txBody>
-          <a:bodyPr wrap="none" lIns="0" tIns="0" rIns="0" bIns="0" rtlCol="0" anchor="ctr"/>
-          <a:lstStyle/>
-          <a:p>
-            <a:pPr algn="l" indent="0" marL="0">
-              <a:buNone/>
-            </a:pPr>
-            <a:r>
-              <a:rPr lang="ko-KR" altLang="en-US" sz="750" spc="45" kern="0" dirty="0">
-                <a:solidFill>
-                  <a:srgbClr val="102A4C"/>
-                </a:solidFill>
-                <a:latin typeface="Pretendard ExtraBold" pitchFamily="34" charset="0"/>
-                <a:ea typeface="Pretendard ExtraBold" pitchFamily="34" charset="-127"/>
-                <a:cs typeface="Pretendard ExtraBold" pitchFamily="34" charset="-120"/>
-              </a:rPr>
               <a:t>08</a:t>
             </a:r>
-            <a:pPr algn="l" indent="0" marL="0">
-              <a:buNone/>
-            </a:pPr>
             <a:r>
               <a:rPr lang="ko-KR" altLang="en-US" sz="750" spc="45" kern="0" dirty="0">
                 <a:solidFill>
@@ -41465,9 +40822,6 @@
               </a:rPr>
               <a:t>도면 인식 · 객체 매칭 · BIM 생성, </a:t>
             </a:r>
-            <a:pPr algn="l" indent="0" marL="0">
-              <a:buNone/>
-            </a:pPr>
             <a:r>
               <a:rPr lang="ko-KR" altLang="en-US" sz="2300" spc="-92" kern="0" dirty="0">
                 <a:solidFill>
@@ -41479,9 +40833,6 @@
               </a:rPr>
               <a:t>단계마다</a:t>
             </a:r>
-            <a:pPr algn="l" indent="0" marL="0">
-              <a:buNone/>
-            </a:pPr>
             <a:r>
               <a:rPr lang="ko-KR" altLang="en-US" sz="2300" spc="-92" kern="0" dirty="0">
                 <a:solidFill>
@@ -42146,7 +41497,7 @@
               <a:buNone/>
             </a:pPr>
             <a:r>
-              <a:rPr lang="ko-KR" altLang="en-US" sz="800" spc="-12" kern="0" dirty="0">
+              <a:rPr lang="ko-KR" altLang="en-US" sz="800" spc="55" kern="0" dirty="0">
                 <a:solidFill>
                   <a:srgbClr val="737C8B"/>
                 </a:solidFill>
@@ -42185,7 +41536,7 @@
               <a:buNone/>
             </a:pPr>
             <a:r>
-              <a:rPr lang="ko-KR" altLang="en-US" sz="800" spc="-12" kern="0" dirty="0">
+              <a:rPr lang="ko-KR" altLang="en-US" sz="800" spc="-10" kern="0" dirty="0">
                 <a:solidFill>
                   <a:srgbClr val="737C8B"/>
                 </a:solidFill>
@@ -42224,7 +41575,7 @@
               <a:buNone/>
             </a:pPr>
             <a:r>
-              <a:rPr lang="ko-KR" altLang="en-US" sz="950" b="1" spc="-12" kern="0" dirty="0">
+              <a:rPr lang="ko-KR" altLang="en-US" sz="950" b="1" spc="16" kern="0" dirty="0">
                 <a:solidFill>
                   <a:srgbClr val="737C8B"/>
                 </a:solidFill>
@@ -42263,7 +41614,7 @@
               <a:buNone/>
             </a:pPr>
             <a:r>
-              <a:rPr lang="ko-KR" altLang="en-US" sz="1300" spc="-39" kern="0" dirty="0">
+              <a:rPr lang="ko-KR" altLang="en-US" sz="1300" spc="-22" kern="0" dirty="0">
                 <a:solidFill>
                   <a:srgbClr val="102A4C"/>
                 </a:solidFill>
@@ -42419,7 +41770,7 @@
               <a:buNone/>
             </a:pPr>
             <a:r>
-              <a:rPr lang="ko-KR" altLang="en-US" sz="950" b="1" spc="-12" kern="0" dirty="0">
+              <a:rPr lang="ko-KR" altLang="en-US" sz="950" b="1" spc="10" kern="0" dirty="0">
                 <a:solidFill>
                   <a:srgbClr val="737C8B"/>
                 </a:solidFill>
@@ -42458,7 +41809,7 @@
               <a:buNone/>
             </a:pPr>
             <a:r>
-              <a:rPr lang="ko-KR" altLang="en-US" sz="1300" spc="-39" kern="0" dirty="0">
+              <a:rPr lang="ko-KR" altLang="en-US" sz="1300" spc="-15" kern="0" dirty="0">
                 <a:solidFill>
                   <a:srgbClr val="102A4C"/>
                 </a:solidFill>
@@ -42770,7 +42121,7 @@
               <a:buNone/>
             </a:pPr>
             <a:r>
-              <a:rPr lang="ko-KR" altLang="en-US" sz="1300" spc="-46" kern="0" dirty="0">
+              <a:rPr lang="ko-KR" altLang="en-US" sz="1300" spc="-13" kern="0" dirty="0">
                 <a:solidFill>
                   <a:srgbClr val="102A4C"/>
                 </a:solidFill>
@@ -42848,7 +42199,7 @@
               <a:buNone/>
             </a:pPr>
             <a:r>
-              <a:rPr lang="ko-KR" altLang="en-US" sz="1300" spc="-46" kern="0" dirty="0">
+              <a:rPr lang="ko-KR" altLang="en-US" sz="1300" spc="-26" kern="0" dirty="0">
                 <a:solidFill>
                   <a:srgbClr val="102A4C"/>
                 </a:solidFill>
@@ -42926,7 +42277,7 @@
               <a:buNone/>
             </a:pPr>
             <a:r>
-              <a:rPr lang="ko-KR" altLang="en-US" sz="1300" spc="-46" kern="0" dirty="0">
+              <a:rPr lang="ko-KR" altLang="en-US" sz="1300" spc="-22" kern="0" dirty="0">
                 <a:solidFill>
                   <a:srgbClr val="102A4C"/>
                 </a:solidFill>
@@ -43199,7 +42550,7 @@
               <a:buNone/>
             </a:pPr>
             <a:r>
-              <a:rPr lang="ko-KR" altLang="en-US" sz="800" spc="-12" kern="0" dirty="0">
+              <a:rPr lang="ko-KR" altLang="en-US" sz="800" spc="55" kern="0" dirty="0">
                 <a:solidFill>
                   <a:srgbClr val="737C8B"/>
                 </a:solidFill>
@@ -43238,7 +42589,7 @@
               <a:buNone/>
             </a:pPr>
             <a:r>
-              <a:rPr lang="ko-KR" altLang="en-US" sz="800" spc="-12" kern="0" dirty="0">
+              <a:rPr lang="ko-KR" altLang="en-US" sz="800" spc="-10" kern="0" dirty="0">
                 <a:solidFill>
                   <a:srgbClr val="737C8B"/>
                 </a:solidFill>
@@ -43277,7 +42628,7 @@
               <a:buNone/>
             </a:pPr>
             <a:r>
-              <a:rPr lang="ko-KR" altLang="en-US" sz="950" b="1" spc="-12" kern="0" dirty="0">
+              <a:rPr lang="ko-KR" altLang="en-US" sz="950" b="1" spc="48" kern="0" dirty="0">
                 <a:solidFill>
                   <a:srgbClr val="737C8B"/>
                 </a:solidFill>
@@ -43316,7 +42667,7 @@
               <a:buNone/>
             </a:pPr>
             <a:r>
-              <a:rPr lang="ko-KR" altLang="en-US" sz="950" b="1" spc="-12" kern="0" dirty="0">
+              <a:rPr lang="ko-KR" altLang="en-US" sz="950" b="1" spc="4" kern="0" dirty="0">
                 <a:solidFill>
                   <a:srgbClr val="737C8B"/>
                 </a:solidFill>
@@ -43355,7 +42706,7 @@
               <a:buNone/>
             </a:pPr>
             <a:r>
-              <a:rPr lang="ko-KR" altLang="en-US" sz="1300" spc="-39" kern="0" dirty="0">
+              <a:rPr lang="ko-KR" altLang="en-US" sz="1300" spc="22" kern="0" dirty="0">
                 <a:solidFill>
                   <a:srgbClr val="102A4C"/>
                 </a:solidFill>
@@ -43784,7 +43135,7 @@
               <a:buNone/>
             </a:pPr>
             <a:r>
-              <a:rPr lang="ko-KR" altLang="en-US" sz="1300" spc="-46" kern="0" dirty="0">
+              <a:rPr lang="ko-KR" altLang="en-US" sz="1300" spc="-24" kern="0" dirty="0">
                 <a:solidFill>
                   <a:srgbClr val="102A4C"/>
                 </a:solidFill>
@@ -43862,7 +43213,7 @@
               <a:buNone/>
             </a:pPr>
             <a:r>
-              <a:rPr lang="ko-KR" altLang="en-US" sz="1300" spc="-46" kern="0" dirty="0">
+              <a:rPr lang="ko-KR" altLang="en-US" sz="1300" spc="-21" kern="0" dirty="0">
                 <a:solidFill>
                   <a:srgbClr val="102A4C"/>
                 </a:solidFill>
@@ -44073,7 +43424,7 @@
       </p:sp>
       <p:sp>
         <p:nvSpPr>
-          <p:cNvPr id="144" name="93.3%"/>
+          <p:cNvPr id="144" name="93.3 %"/>
           <p:cNvSpPr txBox="1"/>
           <p:nvPr/>
         </p:nvSpPr>
@@ -44096,7 +43447,7 @@
               <a:buNone/>
             </a:pPr>
             <a:r>
-              <a:rPr lang="ko-KR" altLang="en-US" sz="3600" spc="-144" kern="0" dirty="0">
+              <a:rPr lang="ko-KR" altLang="en-US" sz="3600" spc="-55" kern="0" dirty="0">
                 <a:solidFill>
                   <a:srgbClr val="EA002C"/>
                 </a:solidFill>
@@ -44104,11 +43455,8 @@
                 <a:ea typeface="Pretendard ExtraBold" pitchFamily="34" charset="-127"/>
                 <a:cs typeface="Pretendard ExtraBold" pitchFamily="34" charset="-120"/>
               </a:rPr>
-              <a:t>93.3</a:t>
-            </a:r>
-            <a:pPr algn="l" indent="0" marL="0">
-              <a:buNone/>
-            </a:pPr>
+              <a:t>93.3 </a:t>
+            </a:r>
             <a:r>
               <a:rPr lang="ko-KR" altLang="en-US" sz="1512" b="1" spc="-30" kern="0" dirty="0">
                 <a:solidFill>
@@ -44188,7 +43536,7 @@
               <a:buNone/>
             </a:pPr>
             <a:r>
-              <a:rPr lang="ko-KR" altLang="en-US" sz="1300" spc="-39" kern="0" dirty="0">
+              <a:rPr lang="ko-KR" altLang="en-US" sz="1300" spc="17" kern="0" dirty="0">
                 <a:solidFill>
                   <a:srgbClr val="102A4C"/>
                 </a:solidFill>
@@ -44422,7 +43770,7 @@
               <a:buNone/>
             </a:pPr>
             <a:r>
-              <a:rPr lang="ko-KR" altLang="en-US" sz="950" spc="-12" kern="0" dirty="0">
+              <a:rPr lang="ko-KR" altLang="en-US" sz="950" spc="64" kern="0" dirty="0">
                 <a:solidFill>
                   <a:srgbClr val="102A4C"/>
                 </a:solidFill>
@@ -44432,11 +43780,8 @@
               </a:rPr>
               <a:t>135</a:t>
             </a:r>
-            <a:pPr algn="l" indent="0" marL="0">
-              <a:buNone/>
-            </a:pPr>
-            <a:r>
-              <a:rPr lang="ko-KR" altLang="en-US" sz="950" spc="-12" kern="0" dirty="0">
+            <a:r>
+              <a:rPr lang="ko-KR" altLang="en-US" sz="950" spc="29" kern="0" dirty="0">
                 <a:solidFill>
                   <a:srgbClr val="737C8B"/>
                 </a:solidFill>
@@ -44514,7 +43859,7 @@
               <a:buNone/>
             </a:pPr>
             <a:r>
-              <a:rPr lang="ko-KR" altLang="en-US" sz="950" spc="-12" kern="0" dirty="0">
+              <a:rPr lang="ko-KR" altLang="en-US" sz="950" spc="-5" kern="0" dirty="0">
                 <a:solidFill>
                   <a:srgbClr val="102A4C"/>
                 </a:solidFill>
@@ -44524,11 +43869,8 @@
               </a:rPr>
               <a:t>64</a:t>
             </a:r>
-            <a:pPr algn="l" indent="0" marL="0">
-              <a:buNone/>
-            </a:pPr>
-            <a:r>
-              <a:rPr lang="ko-KR" altLang="en-US" sz="950" spc="-12" kern="0" dirty="0">
+            <a:r>
+              <a:rPr lang="ko-KR" altLang="en-US" sz="950" spc="-11" kern="0" dirty="0">
                 <a:solidFill>
                   <a:srgbClr val="737C8B"/>
                 </a:solidFill>
@@ -44606,7 +43948,7 @@
               <a:buNone/>
             </a:pPr>
             <a:r>
-              <a:rPr lang="ko-KR" altLang="en-US" sz="950" spc="-12" kern="0" dirty="0">
+              <a:rPr lang="ko-KR" altLang="en-US" sz="950" spc="48" kern="0" dirty="0">
                 <a:solidFill>
                   <a:srgbClr val="102A4C"/>
                 </a:solidFill>
@@ -44616,11 +43958,8 @@
               </a:rPr>
               <a:t>180</a:t>
             </a:r>
-            <a:pPr algn="l" indent="0" marL="0">
-              <a:buNone/>
-            </a:pPr>
-            <a:r>
-              <a:rPr lang="ko-KR" altLang="en-US" sz="950" spc="-12" kern="0" dirty="0">
+            <a:r>
+              <a:rPr lang="ko-KR" altLang="en-US" sz="950" spc="26" kern="0" dirty="0">
                 <a:solidFill>
                   <a:srgbClr val="737C8B"/>
                 </a:solidFill>
@@ -44737,7 +44076,7 @@
               <a:buNone/>
             </a:pPr>
             <a:r>
-              <a:rPr lang="ko-KR" altLang="en-US" sz="1300" spc="-39" kern="0" dirty="0">
+              <a:rPr lang="ko-KR" altLang="en-US" sz="1300" spc="-14" kern="0" dirty="0">
                 <a:solidFill>
                   <a:srgbClr val="2B4A78"/>
                 </a:solidFill>
@@ -44825,9 +44164,6 @@
               </a:rPr>
               <a:t>09</a:t>
             </a:r>
-            <a:pPr algn="l" indent="0" marL="0">
-              <a:buNone/>
-            </a:pPr>
             <a:r>
               <a:rPr lang="ko-KR" altLang="en-US" sz="750" spc="45" kern="0" dirty="0">
                 <a:solidFill>

--- a/skh-pt/pptx/deck10.pptx
+++ b/skh-pt/pptx/deck10.pptx
@@ -511,7 +511,7 @@
           <a:p>
             <a:r>
               <a:rPr lang="en-US" dirty="0"/>
-              <a:t>안녕하세요, 오늘 발표할 연구는 「평면도와 입면도 객체 인식 및 정보 통합을 통한 3D BIM 자동 생성 연구」입니다. 평면도와 입면도 이미지만으로 높이까지 갖춘 3D BIM 모델을 자동으로 만드는 연구이고, Automation in Construction 187권에 2026년 게재되었습니다. 발표는 다섯 장으로 구성했습니다. 1장과 2장은 '문제' 부분으로, 왜 이 연구가 필요한지, 그리고 기존 연구로는 왜 안 되는지와 그래서 무엇을 목표로 했는지 말씀드립니다. 3장과 4장은 '해결' 부분으로, 어떻게 해결했는지와 얼마나 잘 됐고 어떤 의미가 있는지를 보여 드립니다. 마지막 5장에서는 이 연구가 SK하이닉스 Utility 기술(건축, BIM/5D) 직무에서 왜 중요한지, 그 의미를 말씀드리겠습니다.</a:t>
+              <a:t>안녕하세요, 오늘 발표할 연구는 「평면도와 입면도 객체 인식 및 정보 통합을 통한 3D BIM 자동 생성 연구」입니다. 평면도와 입면도 이미지만으로 높이까지 갖춘 3D BIM 모델을 자동으로 만드는 연구이고, Automation in Construction 187권에 2026년 게재되었습니다. 오른쪽 그림처럼 2D 도면 묶음을 넣으면 3D BIM 모델이 자동으로 생성되는 흐름입니다. Utility 기술(건축, BIM/5D) 직무에 지원한 ○○○입니다. 발표는 다섯 장으로 구성했습니다. 1장과 2장에서 문제를, 3장과 4장에서 해결 방법과 결과를, 5장에서 SK하이닉스 직무에서의 의미를 말씀드리겠습니다.</a:t>
             </a:r>
             <a:endParaRPr lang="en-US" dirty="0"/>
           </a:p>
@@ -1678,22 +1678,60 @@
       </p:grpSpPr>
       <p:sp>
         <p:nvSpPr>
-          <p:cNvPr id="3" name="sep"/>
-          <p:cNvSpPr/>
-          <p:nvPr/>
-        </p:nvSpPr>
-        <p:spPr>
-          <a:xfrm>
-            <a:off x="1595934" y="425450"/>
-            <a:ext cx="6350" cy="101600"/>
+          <p:cNvPr id="3" name="body::before"/>
+          <p:cNvSpPr/>
+          <p:nvPr/>
+        </p:nvSpPr>
+        <p:spPr>
+          <a:xfrm>
+            <a:off x="7112000" y="0"/>
+            <a:ext cx="5080000" cy="6858000"/>
+          </a:xfrm>
+          <a:prstGeom prst="rect">
+            <a:avLst/>
+          </a:prstGeom>
+          <a:gradFill rotWithShape="1">
+            <a:gsLst>
+              <a:gs pos="0">
+                <a:srgbClr val="F5F7FA"/>
+              </a:gs>
+              <a:gs pos="100000">
+                <a:srgbClr val="E6ECF4"/>
+              </a:gs>
+            </a:gsLst>
+            <a:lin ang="5400000" scaled="0"/>
+          </a:gradFill>
+          <a:ln>
+            <a:noFill/>
+          </a:ln>
+        </p:spPr>
+        <p:txBody>
+          <a:bodyPr rtlCol="0" anchor="ctr"/>
+          <a:lstStyle/>
+          <a:p>
+            <a:pPr algn="ctr"/>
+            <a:endParaRPr lang="ko-KR" dirty="0"/>
+          </a:p>
+        </p:txBody>
+      </p:sp>
+      <p:sp>
+        <p:nvSpPr>
+          <p:cNvPr id="4" name="i"/>
+          <p:cNvSpPr/>
+          <p:nvPr/>
+        </p:nvSpPr>
+        <p:spPr>
+          <a:xfrm>
+            <a:off x="609600" y="615950"/>
+            <a:ext cx="177800" cy="25400"/>
           </a:xfrm>
           <a:prstGeom prst="roundRect">
             <a:avLst>
-              <a:gd name="adj" fmla="val 0"/>
+              <a:gd name="adj" fmla="val 50000"/>
             </a:avLst>
           </a:prstGeom>
           <a:solidFill>
-            <a:srgbClr val="C8CFD8"/>
+            <a:srgbClr val="EA002C"/>
           </a:solidFill>
           <a:ln>
             <a:noFill/>
@@ -1710,18 +1748,519 @@
       </p:sp>
       <p:sp>
         <p:nvSpPr>
-          <p:cNvPr id="4" name="gh c1::after"/>
-          <p:cNvSpPr/>
-          <p:nvPr/>
-        </p:nvSpPr>
-        <p:spPr>
-          <a:xfrm>
-            <a:off x="968573" y="2067024"/>
-            <a:ext cx="3730427" cy="12700"/>
+          <p:cNvPr id="5" name="s1-pub"/>
+          <p:cNvSpPr/>
+          <p:nvPr/>
+        </p:nvSpPr>
+        <p:spPr>
+          <a:xfrm>
+            <a:off x="612775" y="4070152"/>
+            <a:ext cx="3089771" cy="298450"/>
           </a:xfrm>
           <a:prstGeom prst="roundRect">
             <a:avLst>
               <a:gd name="adj" fmla="val 50000"/>
+            </a:avLst>
+          </a:prstGeom>
+          <a:solidFill>
+            <a:srgbClr val="FFFFFF"/>
+          </a:solidFill>
+          <a:ln w="6350">
+            <a:solidFill>
+              <a:srgbClr val="C8CFD8"/>
+            </a:solidFill>
+            <a:miter lim="800000"/>
+          </a:ln>
+        </p:spPr>
+        <p:txBody>
+          <a:bodyPr rtlCol="0" anchor="ctr"/>
+          <a:lstStyle/>
+          <a:p>
+            <a:pPr algn="ctr"/>
+            <a:endParaRPr lang="ko-KR" dirty="0"/>
+          </a:p>
+        </p:txBody>
+      </p:sp>
+      <p:sp>
+        <p:nvSpPr>
+          <p:cNvPr id="6" name="i"/>
+          <p:cNvSpPr/>
+          <p:nvPr/>
+        </p:nvSpPr>
+        <p:spPr>
+          <a:xfrm>
+            <a:off x="742950" y="4187627"/>
+            <a:ext cx="63500" cy="63500"/>
+          </a:xfrm>
+          <a:prstGeom prst="ellipse">
+            <a:avLst/>
+          </a:prstGeom>
+          <a:solidFill>
+            <a:srgbClr val="EA002C"/>
+          </a:solidFill>
+          <a:ln>
+            <a:noFill/>
+          </a:ln>
+        </p:spPr>
+        <p:txBody>
+          <a:bodyPr rtlCol="0" anchor="ctr"/>
+          <a:lstStyle/>
+          <a:p>
+            <a:pPr algn="ctr"/>
+            <a:endParaRPr lang="ko-KR" dirty="0"/>
+          </a:p>
+        </p:txBody>
+      </p:sp>
+      <p:sp>
+        <p:nvSpPr>
+          <p:cNvPr id="7" name="s1-meta 선"/>
+          <p:cNvSpPr/>
+          <p:nvPr/>
+        </p:nvSpPr>
+        <p:spPr>
+          <a:xfrm>
+            <a:off x="612775" y="5781080"/>
+            <a:ext cx="5734050" cy="1"/>
+          </a:xfrm>
+          <a:custGeom>
+            <a:avLst/>
+            <a:gdLst/>
+            <a:ahLst/>
+            <a:cxnLst/>
+            <a:rect l="0" t="0" r="r" b="b"/>
+            <a:pathLst>
+              <a:path w="5734050" h="1" fill="none">
+                <a:moveTo>
+                  <a:pt x="0" y="0"/>
+                </a:moveTo>
+                <a:lnTo>
+                  <a:pt x="5734050" y="0"/>
+                </a:lnTo>
+              </a:path>
+            </a:pathLst>
+          </a:custGeom>
+          <a:noFill/>
+          <a:ln w="6350">
+            <a:solidFill>
+              <a:srgbClr val="E1E5EB"/>
+            </a:solidFill>
+            <a:round/>
+          </a:ln>
+        </p:spPr>
+        <p:txBody>
+          <a:bodyPr rtlCol="0" anchor="ctr"/>
+          <a:lstStyle/>
+          <a:p>
+            <a:pPr algn="ctr"/>
+            <a:endParaRPr lang="ko-KR" dirty="0"/>
+          </a:p>
+        </p:txBody>
+      </p:sp>
+      <p:sp>
+        <p:nvSpPr>
+          <p:cNvPr id="8" name="div 선"/>
+          <p:cNvSpPr/>
+          <p:nvPr/>
+        </p:nvSpPr>
+        <p:spPr>
+          <a:xfrm>
+            <a:off x="2430661" y="5939830"/>
+            <a:ext cx="1" cy="381496"/>
+          </a:xfrm>
+          <a:custGeom>
+            <a:avLst/>
+            <a:gdLst/>
+            <a:ahLst/>
+            <a:cxnLst/>
+            <a:rect l="0" t="0" r="r" b="b"/>
+            <a:pathLst>
+              <a:path w="1" h="381496" fill="none">
+                <a:moveTo>
+                  <a:pt x="0" y="381496"/>
+                </a:moveTo>
+                <a:lnTo>
+                  <a:pt x="0" y="0"/>
+                </a:lnTo>
+              </a:path>
+            </a:pathLst>
+          </a:custGeom>
+          <a:noFill/>
+          <a:ln w="6350">
+            <a:solidFill>
+              <a:srgbClr val="E1E5EB"/>
+            </a:solidFill>
+            <a:round/>
+          </a:ln>
+        </p:spPr>
+        <p:txBody>
+          <a:bodyPr rtlCol="0" anchor="ctr"/>
+          <a:lstStyle/>
+          <a:p>
+            <a:pPr algn="ctr"/>
+            <a:endParaRPr lang="ko-KR" dirty="0"/>
+          </a:p>
+        </p:txBody>
+      </p:sp>
+      <p:sp>
+        <p:nvSpPr>
+          <p:cNvPr id="9" name="div 선"/>
+          <p:cNvSpPr/>
+          <p:nvPr/>
+        </p:nvSpPr>
+        <p:spPr>
+          <a:xfrm>
+            <a:off x="3749278" y="5939830"/>
+            <a:ext cx="1" cy="381496"/>
+          </a:xfrm>
+          <a:custGeom>
+            <a:avLst/>
+            <a:gdLst/>
+            <a:ahLst/>
+            <a:cxnLst/>
+            <a:rect l="0" t="0" r="r" b="b"/>
+            <a:pathLst>
+              <a:path w="1" h="381496" fill="none">
+                <a:moveTo>
+                  <a:pt x="0" y="381496"/>
+                </a:moveTo>
+                <a:lnTo>
+                  <a:pt x="0" y="0"/>
+                </a:lnTo>
+              </a:path>
+            </a:pathLst>
+          </a:custGeom>
+          <a:noFill/>
+          <a:ln w="6350">
+            <a:solidFill>
+              <a:srgbClr val="E1E5EB"/>
+            </a:solidFill>
+            <a:round/>
+          </a:ln>
+        </p:spPr>
+        <p:txBody>
+          <a:bodyPr rtlCol="0" anchor="ctr"/>
+          <a:lstStyle/>
+          <a:p>
+            <a:pPr algn="ctr"/>
+            <a:endParaRPr lang="ko-KR" dirty="0"/>
+          </a:p>
+        </p:txBody>
+      </p:sp>
+      <p:pic>
+        <p:nvPicPr>
+          <p:cNvPr id="10" name="s1-logo" descr="s1-logo">    </p:cNvPr>
+          <p:cNvPicPr>
+            <a:picLocks noChangeAspect="1"/>
+          </p:cNvPicPr>
+          <p:nvPr/>
+        </p:nvPicPr>
+        <p:blipFill>
+          <a:blip r:embed="rId1"/>
+          <a:stretch>
+            <a:fillRect/>
+          </a:stretch>
+        </p:blipFill>
+        <p:spPr>
+          <a:xfrm>
+            <a:off x="10733617" y="412750"/>
+            <a:ext cx="802217" cy="423333"/>
+          </a:xfrm>
+          <a:prstGeom prst="rect">
+            <a:avLst/>
+          </a:prstGeom>
+        </p:spPr>
+      </p:pic>
+      <p:pic>
+        <p:nvPicPr>
+          <p:cNvPr id="11" name="img" descr="img">    </p:cNvPr>
+          <p:cNvPicPr>
+            <a:picLocks noChangeAspect="1"/>
+          </p:cNvPicPr>
+          <p:nvPr/>
+        </p:nvPicPr>
+        <p:blipFill>
+          <a:blip r:embed="rId2"/>
+          <a:stretch>
+            <a:fillRect/>
+          </a:stretch>
+        </p:blipFill>
+        <p:spPr>
+          <a:xfrm>
+            <a:off x="7431617" y="548217"/>
+            <a:ext cx="2207683" cy="2205567"/>
+          </a:xfrm>
+          <a:prstGeom prst="rect">
+            <a:avLst/>
+          </a:prstGeom>
+        </p:spPr>
+      </p:pic>
+      <p:sp>
+        <p:nvSpPr>
+          <p:cNvPr id="12" name="s1-shadow"/>
+          <p:cNvSpPr/>
+          <p:nvPr/>
+        </p:nvSpPr>
+        <p:spPr>
+          <a:xfrm>
+            <a:off x="8229600" y="5791200"/>
+            <a:ext cx="3352800" cy="558800"/>
+          </a:xfrm>
+          <a:prstGeom prst="ellipse">
+            <a:avLst/>
+          </a:prstGeom>
+          <a:gradFill rotWithShape="1">
+            <a:gsLst>
+              <a:gs pos="0">
+                <a:srgbClr val="102A4C">
+                  <a:alpha val="16000"/>
+                </a:srgbClr>
+              </a:gs>
+              <a:gs pos="100000">
+                <a:srgbClr val="102A4C">
+                  <a:alpha val="0"/>
+                </a:srgbClr>
+              </a:gs>
+            </a:gsLst>
+            <a:path path="circle">
+              <a:fillToRect l="50000" t="50000" r="50000" b="50000"/>
+            </a:path>
+          </a:gradFill>
+          <a:ln>
+            <a:noFill/>
+          </a:ln>
+        </p:spPr>
+        <p:txBody>
+          <a:bodyPr rtlCol="0" anchor="ctr"/>
+          <a:lstStyle/>
+          <a:p>
+            <a:pPr algn="ctr"/>
+            <a:endParaRPr lang="ko-KR" dirty="0"/>
+          </a:p>
+        </p:txBody>
+      </p:sp>
+      <p:pic>
+        <p:nvPicPr>
+          <p:cNvPr id="13" name="img" descr="img">    </p:cNvPr>
+          <p:cNvPicPr>
+            <a:picLocks noChangeAspect="1"/>
+          </p:cNvPicPr>
+          <p:nvPr/>
+        </p:nvPicPr>
+        <p:blipFill>
+          <a:blip r:embed="rId3"/>
+          <a:stretch>
+            <a:fillRect/>
+          </a:stretch>
+        </p:blipFill>
+        <p:spPr>
+          <a:xfrm>
+            <a:off x="8123767" y="3007783"/>
+            <a:ext cx="3437467" cy="3308350"/>
+          </a:xfrm>
+          <a:prstGeom prst="rect">
+            <a:avLst/>
+          </a:prstGeom>
+        </p:spPr>
+      </p:pic>
+      <p:sp>
+        <p:nvSpPr>
+          <p:cNvPr id="14" name="s1-link path"/>
+          <p:cNvSpPr/>
+          <p:nvPr/>
+        </p:nvSpPr>
+        <p:spPr>
+          <a:xfrm>
+            <a:off x="9702800" y="571500"/>
+            <a:ext cx="50800" cy="2159000"/>
+          </a:xfrm>
+          <a:custGeom>
+            <a:avLst/>
+            <a:gdLst/>
+            <a:ahLst/>
+            <a:cxnLst/>
+            <a:rect l="0" t="0" r="r" b="b"/>
+            <a:pathLst>
+              <a:path w="50800" h="2159000" fill="none">
+                <a:moveTo>
+                  <a:pt x="0" y="0"/>
+                </a:moveTo>
+                <a:lnTo>
+                  <a:pt x="50800" y="0"/>
+                </a:lnTo>
+                <a:lnTo>
+                  <a:pt x="50800" y="2159000"/>
+                </a:lnTo>
+                <a:lnTo>
+                  <a:pt x="0" y="2159000"/>
+                </a:lnTo>
+              </a:path>
+            </a:pathLst>
+          </a:custGeom>
+          <a:noFill/>
+          <a:ln w="12700" cap="rnd">
+            <a:solidFill>
+              <a:srgbClr val="2B4A78"/>
+            </a:solidFill>
+            <a:round/>
+          </a:ln>
+        </p:spPr>
+        <p:txBody>
+          <a:bodyPr rtlCol="0" anchor="ctr"/>
+          <a:lstStyle/>
+          <a:p>
+            <a:pPr algn="ctr"/>
+            <a:endParaRPr lang="ko-KR" dirty="0"/>
+          </a:p>
+        </p:txBody>
+      </p:sp>
+      <p:sp>
+        <p:nvSpPr>
+          <p:cNvPr id="15" name="s1-link path"/>
+          <p:cNvSpPr/>
+          <p:nvPr/>
+        </p:nvSpPr>
+        <p:spPr>
+          <a:xfrm>
+            <a:off x="9753600" y="1651000"/>
+            <a:ext cx="1168400" cy="1841500"/>
+          </a:xfrm>
+          <a:custGeom>
+            <a:avLst/>
+            <a:gdLst/>
+            <a:ahLst/>
+            <a:cxnLst/>
+            <a:rect l="0" t="0" r="r" b="b"/>
+            <a:pathLst>
+              <a:path w="1168400" h="1841500" fill="none">
+                <a:moveTo>
+                  <a:pt x="0" y="0"/>
+                </a:moveTo>
+                <a:lnTo>
+                  <a:pt x="1168400" y="0"/>
+                </a:lnTo>
+                <a:lnTo>
+                  <a:pt x="1168400" y="1841500"/>
+                </a:lnTo>
+              </a:path>
+            </a:pathLst>
+          </a:custGeom>
+          <a:noFill/>
+          <a:ln w="12700" cap="rnd">
+            <a:solidFill>
+              <a:srgbClr val="2B4A78"/>
+            </a:solidFill>
+            <a:custDash>
+              <a:ds d="300000" sp="300000"/>
+            </a:custDash>
+            <a:miter lim="800000"/>
+          </a:ln>
+        </p:spPr>
+        <p:txBody>
+          <a:bodyPr rtlCol="0" anchor="ctr"/>
+          <a:lstStyle/>
+          <a:p>
+            <a:pPr algn="ctr"/>
+            <a:endParaRPr lang="ko-KR" dirty="0"/>
+          </a:p>
+        </p:txBody>
+      </p:sp>
+      <p:sp>
+        <p:nvSpPr>
+          <p:cNvPr id="16" name="s1-link path"/>
+          <p:cNvSpPr/>
+          <p:nvPr/>
+        </p:nvSpPr>
+        <p:spPr>
+          <a:xfrm>
+            <a:off x="10864850" y="3448050"/>
+            <a:ext cx="114300" cy="69850"/>
+          </a:xfrm>
+          <a:custGeom>
+            <a:avLst/>
+            <a:gdLst/>
+            <a:ahLst/>
+            <a:cxnLst/>
+            <a:rect l="0" t="0" r="r" b="b"/>
+            <a:pathLst>
+              <a:path w="114300" h="69850" fill="none">
+                <a:moveTo>
+                  <a:pt x="0" y="0"/>
+                </a:moveTo>
+                <a:lnTo>
+                  <a:pt x="57150" y="69850"/>
+                </a:lnTo>
+                <a:lnTo>
+                  <a:pt x="114300" y="0"/>
+                </a:lnTo>
+              </a:path>
+            </a:pathLst>
+          </a:custGeom>
+          <a:noFill/>
+          <a:ln w="12700" cap="rnd">
+            <a:solidFill>
+              <a:srgbClr val="2B4A78"/>
+            </a:solidFill>
+            <a:round/>
+          </a:ln>
+        </p:spPr>
+        <p:txBody>
+          <a:bodyPr rtlCol="0" anchor="ctr"/>
+          <a:lstStyle/>
+          <a:p>
+            <a:pPr algn="ctr"/>
+            <a:endParaRPr lang="ko-KR" dirty="0"/>
+          </a:p>
+        </p:txBody>
+      </p:sp>
+      <p:sp>
+        <p:nvSpPr>
+          <p:cNvPr id="17" name="s1-auto"/>
+          <p:cNvSpPr/>
+          <p:nvPr/>
+        </p:nvSpPr>
+        <p:spPr>
+          <a:xfrm>
+            <a:off x="10062170" y="1546225"/>
+            <a:ext cx="551259" cy="209550"/>
+          </a:xfrm>
+          <a:prstGeom prst="roundRect">
+            <a:avLst>
+              <a:gd name="adj" fmla="val 50000"/>
+            </a:avLst>
+          </a:prstGeom>
+          <a:solidFill>
+            <a:srgbClr val="FFFFFF"/>
+          </a:solidFill>
+          <a:ln w="6350">
+            <a:solidFill>
+              <a:srgbClr val="C8CFD8"/>
+            </a:solidFill>
+            <a:miter lim="800000"/>
+          </a:ln>
+        </p:spPr>
+        <p:txBody>
+          <a:bodyPr rtlCol="0" anchor="ctr"/>
+          <a:lstStyle/>
+          <a:p>
+            <a:pPr algn="ctr"/>
+            <a:endParaRPr lang="ko-KR" dirty="0"/>
+          </a:p>
+        </p:txBody>
+      </p:sp>
+      <p:sp>
+        <p:nvSpPr>
+          <p:cNvPr id="18" name="b"/>
+          <p:cNvSpPr/>
+          <p:nvPr/>
+        </p:nvSpPr>
+        <p:spPr>
+          <a:xfrm>
+            <a:off x="7416800" y="2895600"/>
+            <a:ext cx="222945" cy="165100"/>
+          </a:xfrm>
+          <a:prstGeom prst="roundRect">
+            <a:avLst>
+              <a:gd name="adj" fmla="val 23077"/>
             </a:avLst>
           </a:prstGeom>
           <a:solidFill>
@@ -1742,66 +2281,18 @@
       </p:sp>
       <p:sp>
         <p:nvSpPr>
-          <p:cNvPr id="5" name="svg path"/>
-          <p:cNvSpPr/>
-          <p:nvPr/>
-        </p:nvSpPr>
-        <p:spPr>
-          <a:xfrm>
-            <a:off x="4876800" y="2028924"/>
-            <a:ext cx="44450" cy="88900"/>
-          </a:xfrm>
-          <a:custGeom>
-            <a:avLst/>
-            <a:gdLst/>
-            <a:ahLst/>
-            <a:cxnLst/>
-            <a:rect l="0" t="0" r="r" b="b"/>
-            <a:pathLst>
-              <a:path w="44450" h="88900" fill="none">
-                <a:moveTo>
-                  <a:pt x="0" y="0"/>
-                </a:moveTo>
-                <a:lnTo>
-                  <a:pt x="44450" y="44450"/>
-                </a:lnTo>
-                <a:lnTo>
-                  <a:pt x="0" y="88900"/>
-                </a:lnTo>
-              </a:path>
-            </a:pathLst>
-          </a:custGeom>
-          <a:noFill/>
-          <a:ln w="15875" cap="rnd">
-            <a:solidFill>
-              <a:srgbClr val="102A4C"/>
-            </a:solidFill>
-            <a:round/>
-          </a:ln>
-        </p:spPr>
-        <p:txBody>
-          <a:bodyPr rtlCol="0" anchor="ctr"/>
-          <a:lstStyle/>
-          <a:p>
-            <a:pPr algn="ctr"/>
-            <a:endParaRPr lang="ko-KR" dirty="0"/>
-          </a:p>
-        </p:txBody>
-      </p:sp>
-      <p:sp>
-        <p:nvSpPr>
-          <p:cNvPr id="6" name="gh c2::after"/>
-          <p:cNvSpPr/>
-          <p:nvPr/>
-        </p:nvSpPr>
-        <p:spPr>
-          <a:xfrm>
-            <a:off x="5464373" y="2067024"/>
-            <a:ext cx="3730427" cy="12700"/>
+          <p:cNvPr id="19" name="b"/>
+          <p:cNvSpPr/>
+          <p:nvPr/>
+        </p:nvSpPr>
+        <p:spPr>
+          <a:xfrm>
+            <a:off x="7416800" y="6108700"/>
+            <a:ext cx="225425" cy="165100"/>
           </a:xfrm>
           <a:prstGeom prst="roundRect">
             <a:avLst>
-              <a:gd name="adj" fmla="val 50000"/>
+              <a:gd name="adj" fmla="val 23077"/>
             </a:avLst>
           </a:prstGeom>
           <a:solidFill>
@@ -1822,1475 +2313,14 @@
       </p:sp>
       <p:sp>
         <p:nvSpPr>
-          <p:cNvPr id="7" name="svg path"/>
-          <p:cNvSpPr/>
-          <p:nvPr/>
-        </p:nvSpPr>
-        <p:spPr>
-          <a:xfrm>
-            <a:off x="9372600" y="2028924"/>
-            <a:ext cx="44450" cy="88900"/>
-          </a:xfrm>
-          <a:custGeom>
-            <a:avLst/>
-            <a:gdLst/>
-            <a:ahLst/>
-            <a:cxnLst/>
-            <a:rect l="0" t="0" r="r" b="b"/>
-            <a:pathLst>
-              <a:path w="44450" h="88900" fill="none">
-                <a:moveTo>
-                  <a:pt x="0" y="0"/>
-                </a:moveTo>
-                <a:lnTo>
-                  <a:pt x="44450" y="44450"/>
-                </a:lnTo>
-                <a:lnTo>
-                  <a:pt x="0" y="88900"/>
-                </a:lnTo>
-              </a:path>
-            </a:pathLst>
-          </a:custGeom>
-          <a:noFill/>
-          <a:ln w="15875" cap="rnd">
-            <a:solidFill>
-              <a:srgbClr val="102A4C"/>
-            </a:solidFill>
-            <a:round/>
-          </a:ln>
-        </p:spPr>
-        <p:txBody>
-          <a:bodyPr rtlCol="0" anchor="ctr"/>
-          <a:lstStyle/>
-          <a:p>
-            <a:pPr algn="ctr"/>
-            <a:endParaRPr lang="ko-KR" dirty="0"/>
-          </a:p>
-        </p:txBody>
-      </p:sp>
-      <p:sp>
-        <p:nvSpPr>
-          <p:cNvPr id="8" name="gh c3::after"/>
-          <p:cNvSpPr/>
-          <p:nvPr/>
-        </p:nvSpPr>
-        <p:spPr>
-          <a:xfrm>
-            <a:off x="9960173" y="2067024"/>
-            <a:ext cx="1622227" cy="12700"/>
-          </a:xfrm>
-          <a:prstGeom prst="roundRect">
-            <a:avLst>
-              <a:gd name="adj" fmla="val 50000"/>
-            </a:avLst>
-          </a:prstGeom>
-          <a:solidFill>
-            <a:srgbClr val="102A4C"/>
-          </a:solidFill>
-          <a:ln>
-            <a:noFill/>
-          </a:ln>
-        </p:spPr>
-        <p:txBody>
-          <a:bodyPr rtlCol="0" anchor="ctr"/>
-          <a:lstStyle/>
-          <a:p>
-            <a:pPr algn="ctr"/>
-            <a:endParaRPr lang="ko-KR" dirty="0"/>
-          </a:p>
-        </p:txBody>
-      </p:sp>
-      <p:sp>
-        <p:nvSpPr>
-          <p:cNvPr id="9" name="ch k1"/>
-          <p:cNvSpPr/>
-          <p:nvPr/>
-        </p:nvSpPr>
-        <p:spPr>
-          <a:xfrm>
-            <a:off x="609600" y="2378174"/>
-            <a:ext cx="1981200" cy="2946400"/>
-          </a:xfrm>
-          <a:prstGeom prst="roundRect">
-            <a:avLst>
-              <a:gd name="adj" fmla="val 6410"/>
-            </a:avLst>
-          </a:prstGeom>
-          <a:solidFill>
-            <a:srgbClr val="F3F5F8"/>
-          </a:solidFill>
-          <a:ln>
-            <a:noFill/>
-          </a:ln>
-        </p:spPr>
-        <p:txBody>
-          <a:bodyPr rtlCol="0" anchor="ctr"/>
-          <a:lstStyle/>
-          <a:p>
-            <a:pPr algn="ctr"/>
-            <a:endParaRPr lang="ko-KR" dirty="0"/>
-          </a:p>
-        </p:txBody>
-      </p:sp>
-      <p:sp>
-        <p:nvSpPr>
-          <p:cNvPr id="10" name="svg circle"/>
-          <p:cNvSpPr/>
-          <p:nvPr/>
-        </p:nvSpPr>
-        <p:spPr>
-          <a:xfrm>
-            <a:off x="2203450" y="2702024"/>
-            <a:ext cx="127000" cy="127000"/>
-          </a:xfrm>
-          <a:prstGeom prst="ellipse">
-            <a:avLst/>
-          </a:prstGeom>
-          <a:noFill/>
-          <a:ln w="12700" cap="rnd">
-            <a:solidFill>
-              <a:srgbClr val="2B4A78"/>
-            </a:solidFill>
-            <a:round/>
-          </a:ln>
-        </p:spPr>
-        <p:txBody>
-          <a:bodyPr rtlCol="0" anchor="ctr"/>
-          <a:lstStyle/>
-          <a:p>
-            <a:pPr algn="ctr"/>
-            <a:endParaRPr lang="ko-KR" dirty="0"/>
-          </a:p>
-        </p:txBody>
-      </p:sp>
-      <p:sp>
-        <p:nvSpPr>
-          <p:cNvPr id="11" name="svg path"/>
-          <p:cNvSpPr/>
-          <p:nvPr/>
-        </p:nvSpPr>
-        <p:spPr>
-          <a:xfrm>
-            <a:off x="2314575" y="2813149"/>
-            <a:ext cx="60325" cy="60325"/>
-          </a:xfrm>
-          <a:custGeom>
-            <a:avLst/>
-            <a:gdLst/>
-            <a:ahLst/>
-            <a:cxnLst/>
-            <a:rect l="0" t="0" r="r" b="b"/>
-            <a:pathLst>
-              <a:path w="60325" h="60325" fill="none">
-                <a:moveTo>
-                  <a:pt x="0" y="0"/>
-                </a:moveTo>
-                <a:lnTo>
-                  <a:pt x="60325" y="60325"/>
-                </a:lnTo>
-              </a:path>
-            </a:pathLst>
-          </a:custGeom>
-          <a:noFill/>
-          <a:ln w="12700" cap="rnd">
-            <a:solidFill>
-              <a:srgbClr val="2B4A78"/>
-            </a:solidFill>
-            <a:round/>
-          </a:ln>
-        </p:spPr>
-        <p:txBody>
-          <a:bodyPr rtlCol="0" anchor="ctr"/>
-          <a:lstStyle/>
-          <a:p>
-            <a:pPr algn="ctr"/>
-            <a:endParaRPr lang="ko-KR" dirty="0"/>
-          </a:p>
-        </p:txBody>
-      </p:sp>
-      <p:sp>
-        <p:nvSpPr>
-          <p:cNvPr id="12" name="svg path"/>
-          <p:cNvSpPr/>
-          <p:nvPr/>
-        </p:nvSpPr>
-        <p:spPr>
-          <a:xfrm>
-            <a:off x="2241550" y="2740124"/>
-            <a:ext cx="50800" cy="50800"/>
-          </a:xfrm>
-          <a:custGeom>
-            <a:avLst/>
-            <a:gdLst/>
-            <a:ahLst/>
-            <a:cxnLst/>
-            <a:rect l="0" t="0" r="r" b="b"/>
-            <a:pathLst>
-              <a:path w="50800" h="50800" fill="none">
-                <a:moveTo>
-                  <a:pt x="0" y="25400"/>
-                </a:moveTo>
-                <a:lnTo>
-                  <a:pt x="50800" y="25400"/>
-                </a:lnTo>
-                <a:moveTo>
-                  <a:pt x="25400" y="0"/>
-                </a:moveTo>
-                <a:lnTo>
-                  <a:pt x="25400" y="50800"/>
-                </a:lnTo>
-              </a:path>
-            </a:pathLst>
-          </a:custGeom>
-          <a:noFill/>
-          <a:ln w="12700" cap="rnd">
-            <a:solidFill>
-              <a:srgbClr val="2B4A78"/>
-            </a:solidFill>
-            <a:round/>
-          </a:ln>
-        </p:spPr>
-        <p:txBody>
-          <a:bodyPr rtlCol="0" anchor="ctr"/>
-          <a:lstStyle/>
-          <a:p>
-            <a:pPr algn="ctr"/>
-            <a:endParaRPr lang="ko-KR" dirty="0"/>
-          </a:p>
-        </p:txBody>
-      </p:sp>
-      <p:sp>
-        <p:nvSpPr>
-          <p:cNvPr id="13" name="bar"/>
-          <p:cNvSpPr/>
-          <p:nvPr/>
-        </p:nvSpPr>
-        <p:spPr>
-          <a:xfrm>
-            <a:off x="812800" y="3267174"/>
-            <a:ext cx="203200" cy="19050"/>
-          </a:xfrm>
-          <a:prstGeom prst="roundRect">
-            <a:avLst>
-              <a:gd name="adj" fmla="val 50000"/>
-            </a:avLst>
-          </a:prstGeom>
-          <a:solidFill>
-            <a:srgbClr val="102A4C"/>
-          </a:solidFill>
-          <a:ln>
-            <a:noFill/>
-          </a:ln>
-        </p:spPr>
-        <p:txBody>
-          <a:bodyPr rtlCol="0" anchor="ctr"/>
-          <a:lstStyle/>
-          <a:p>
-            <a:pPr algn="ctr"/>
-            <a:endParaRPr lang="ko-KR" dirty="0"/>
-          </a:p>
-        </p:txBody>
-      </p:sp>
-      <p:sp>
-        <p:nvSpPr>
-          <p:cNvPr id="14" name="q"/>
-          <p:cNvSpPr/>
-          <p:nvPr/>
-        </p:nvSpPr>
-        <p:spPr>
-          <a:xfrm>
-            <a:off x="609600" y="4410174"/>
-            <a:ext cx="1981200" cy="914400"/>
-          </a:xfrm>
-          <a:custGeom>
-            <a:avLst/>
-            <a:gdLst/>
-            <a:ahLst/>
-            <a:cxnLst/>
-            <a:rect l="0" t="0" r="r" b="b"/>
-            <a:pathLst>
-              <a:path w="1981200" h="914400" stroke="0">
-                <a:moveTo>
-                  <a:pt x="0" y="0"/>
-                </a:moveTo>
-                <a:lnTo>
-                  <a:pt x="1981200" y="0"/>
-                </a:lnTo>
-                <a:cubicBezTo>
-                  <a:pt x="1981200" y="0"/>
-                  <a:pt x="1981200" y="0"/>
-                  <a:pt x="1981200" y="0"/>
-                </a:cubicBezTo>
-                <a:lnTo>
-                  <a:pt x="1981200" y="787400"/>
-                </a:lnTo>
-                <a:cubicBezTo>
-                  <a:pt x="1981200" y="857542"/>
-                  <a:pt x="1924342" y="914400"/>
-                  <a:pt x="1854200" y="914400"/>
-                </a:cubicBezTo>
-                <a:lnTo>
-                  <a:pt x="127000" y="914400"/>
-                </a:lnTo>
-                <a:cubicBezTo>
-                  <a:pt x="56858" y="914400"/>
-                  <a:pt x="0" y="857542"/>
-                  <a:pt x="0" y="787400"/>
-                </a:cubicBezTo>
-                <a:lnTo>
-                  <a:pt x="0" y="0"/>
-                </a:lnTo>
-                <a:cubicBezTo>
-                  <a:pt x="0" y="0"/>
-                  <a:pt x="0" y="0"/>
-                  <a:pt x="0" y="0"/>
-                </a:cubicBezTo>
-                <a:close/>
-              </a:path>
-            </a:pathLst>
-          </a:custGeom>
-          <a:solidFill>
-            <a:srgbClr val="E8EEF6"/>
-          </a:solidFill>
-          <a:ln>
-            <a:noFill/>
-          </a:ln>
-        </p:spPr>
-        <p:txBody>
-          <a:bodyPr rtlCol="0" anchor="ctr"/>
-          <a:lstStyle/>
-          <a:p>
-            <a:pPr algn="ctr"/>
-            <a:endParaRPr lang="ko-KR" dirty="0"/>
-          </a:p>
-        </p:txBody>
-      </p:sp>
-      <p:sp>
-        <p:nvSpPr>
-          <p:cNvPr id="15" name="ch k2"/>
-          <p:cNvSpPr/>
-          <p:nvPr/>
-        </p:nvSpPr>
-        <p:spPr>
-          <a:xfrm>
-            <a:off x="2717800" y="2378174"/>
-            <a:ext cx="1981200" cy="2946400"/>
-          </a:xfrm>
-          <a:prstGeom prst="roundRect">
-            <a:avLst>
-              <a:gd name="adj" fmla="val 6410"/>
-            </a:avLst>
-          </a:prstGeom>
-          <a:solidFill>
-            <a:srgbClr val="F3F5F8"/>
-          </a:solidFill>
-          <a:ln>
-            <a:noFill/>
-          </a:ln>
-        </p:spPr>
-        <p:txBody>
-          <a:bodyPr rtlCol="0" anchor="ctr"/>
-          <a:lstStyle/>
-          <a:p>
-            <a:pPr algn="ctr"/>
-            <a:endParaRPr lang="ko-KR" dirty="0"/>
-          </a:p>
-        </p:txBody>
-      </p:sp>
-      <p:sp>
-        <p:nvSpPr>
-          <p:cNvPr id="16" name="svg circle"/>
-          <p:cNvSpPr/>
-          <p:nvPr/>
-        </p:nvSpPr>
-        <p:spPr>
-          <a:xfrm>
-            <a:off x="4305300" y="2695674"/>
-            <a:ext cx="177800" cy="177800"/>
-          </a:xfrm>
-          <a:prstGeom prst="ellipse">
-            <a:avLst/>
-          </a:prstGeom>
-          <a:noFill/>
-          <a:ln w="12700" cap="rnd">
-            <a:solidFill>
-              <a:srgbClr val="2B4A78"/>
-            </a:solidFill>
-            <a:round/>
-          </a:ln>
-        </p:spPr>
-        <p:txBody>
-          <a:bodyPr rtlCol="0" anchor="ctr"/>
-          <a:lstStyle/>
-          <a:p>
-            <a:pPr algn="ctr"/>
-            <a:endParaRPr lang="ko-KR" dirty="0"/>
-          </a:p>
-        </p:txBody>
-      </p:sp>
-      <p:sp>
-        <p:nvSpPr>
-          <p:cNvPr id="17" name="svg circle"/>
-          <p:cNvSpPr/>
-          <p:nvPr/>
-        </p:nvSpPr>
-        <p:spPr>
-          <a:xfrm>
-            <a:off x="4343400" y="2733774"/>
-            <a:ext cx="101600" cy="101600"/>
-          </a:xfrm>
-          <a:prstGeom prst="ellipse">
-            <a:avLst/>
-          </a:prstGeom>
-          <a:noFill/>
-          <a:ln w="12700" cap="rnd">
-            <a:solidFill>
-              <a:srgbClr val="2B4A78"/>
-            </a:solidFill>
-            <a:round/>
-          </a:ln>
-        </p:spPr>
-        <p:txBody>
-          <a:bodyPr rtlCol="0" anchor="ctr"/>
-          <a:lstStyle/>
-          <a:p>
-            <a:pPr algn="ctr"/>
-            <a:endParaRPr lang="ko-KR" dirty="0"/>
-          </a:p>
-        </p:txBody>
-      </p:sp>
-      <p:sp>
-        <p:nvSpPr>
-          <p:cNvPr id="18" name="svg circle"/>
-          <p:cNvSpPr/>
-          <p:nvPr/>
-        </p:nvSpPr>
-        <p:spPr>
-          <a:xfrm>
-            <a:off x="4381500" y="2771874"/>
-            <a:ext cx="25400" cy="25400"/>
-          </a:xfrm>
-          <a:prstGeom prst="ellipse">
-            <a:avLst/>
-          </a:prstGeom>
-          <a:noFill/>
-          <a:ln w="12700" cap="rnd">
-            <a:solidFill>
-              <a:srgbClr val="2B4A78"/>
-            </a:solidFill>
-            <a:round/>
-          </a:ln>
-        </p:spPr>
-        <p:txBody>
-          <a:bodyPr rtlCol="0" anchor="ctr"/>
-          <a:lstStyle/>
-          <a:p>
-            <a:pPr algn="ctr"/>
-            <a:endParaRPr lang="ko-KR" dirty="0"/>
-          </a:p>
-        </p:txBody>
-      </p:sp>
-      <p:sp>
-        <p:nvSpPr>
-          <p:cNvPr id="19" name="bar"/>
-          <p:cNvSpPr/>
-          <p:nvPr/>
-        </p:nvSpPr>
-        <p:spPr>
-          <a:xfrm>
-            <a:off x="2921000" y="3267174"/>
-            <a:ext cx="203200" cy="19050"/>
-          </a:xfrm>
-          <a:prstGeom prst="roundRect">
-            <a:avLst>
-              <a:gd name="adj" fmla="val 50000"/>
-            </a:avLst>
-          </a:prstGeom>
-          <a:solidFill>
-            <a:srgbClr val="102A4C"/>
-          </a:solidFill>
-          <a:ln>
-            <a:noFill/>
-          </a:ln>
-        </p:spPr>
-        <p:txBody>
-          <a:bodyPr rtlCol="0" anchor="ctr"/>
-          <a:lstStyle/>
-          <a:p>
-            <a:pPr algn="ctr"/>
-            <a:endParaRPr lang="ko-KR" dirty="0"/>
-          </a:p>
-        </p:txBody>
-      </p:sp>
-      <p:sp>
-        <p:nvSpPr>
-          <p:cNvPr id="20" name="q"/>
-          <p:cNvSpPr/>
-          <p:nvPr/>
-        </p:nvSpPr>
-        <p:spPr>
-          <a:xfrm>
-            <a:off x="2717800" y="4410174"/>
-            <a:ext cx="1981200" cy="914400"/>
-          </a:xfrm>
-          <a:custGeom>
-            <a:avLst/>
-            <a:gdLst/>
-            <a:ahLst/>
-            <a:cxnLst/>
-            <a:rect l="0" t="0" r="r" b="b"/>
-            <a:pathLst>
-              <a:path w="1981200" h="914400" stroke="0">
-                <a:moveTo>
-                  <a:pt x="0" y="0"/>
-                </a:moveTo>
-                <a:lnTo>
-                  <a:pt x="1981200" y="0"/>
-                </a:lnTo>
-                <a:cubicBezTo>
-                  <a:pt x="1981200" y="0"/>
-                  <a:pt x="1981200" y="0"/>
-                  <a:pt x="1981200" y="0"/>
-                </a:cubicBezTo>
-                <a:lnTo>
-                  <a:pt x="1981200" y="787400"/>
-                </a:lnTo>
-                <a:cubicBezTo>
-                  <a:pt x="1981200" y="857542"/>
-                  <a:pt x="1924342" y="914400"/>
-                  <a:pt x="1854200" y="914400"/>
-                </a:cubicBezTo>
-                <a:lnTo>
-                  <a:pt x="127000" y="914400"/>
-                </a:lnTo>
-                <a:cubicBezTo>
-                  <a:pt x="56858" y="914400"/>
-                  <a:pt x="0" y="857542"/>
-                  <a:pt x="0" y="787400"/>
-                </a:cubicBezTo>
-                <a:lnTo>
-                  <a:pt x="0" y="0"/>
-                </a:lnTo>
-                <a:cubicBezTo>
-                  <a:pt x="0" y="0"/>
-                  <a:pt x="0" y="0"/>
-                  <a:pt x="0" y="0"/>
-                </a:cubicBezTo>
-                <a:close/>
-              </a:path>
-            </a:pathLst>
-          </a:custGeom>
-          <a:solidFill>
-            <a:srgbClr val="E8EEF6"/>
-          </a:solidFill>
-          <a:ln>
-            <a:noFill/>
-          </a:ln>
-        </p:spPr>
-        <p:txBody>
-          <a:bodyPr rtlCol="0" anchor="ctr"/>
-          <a:lstStyle/>
-          <a:p>
-            <a:pPr algn="ctr"/>
-            <a:endParaRPr lang="ko-KR" dirty="0"/>
-          </a:p>
-        </p:txBody>
-      </p:sp>
-      <p:sp>
-        <p:nvSpPr>
-          <p:cNvPr id="21" name="ch k3"/>
-          <p:cNvSpPr/>
-          <p:nvPr/>
-        </p:nvSpPr>
-        <p:spPr>
-          <a:xfrm>
-            <a:off x="5105400" y="2378174"/>
-            <a:ext cx="1981200" cy="2946400"/>
-          </a:xfrm>
-          <a:prstGeom prst="roundRect">
-            <a:avLst>
-              <a:gd name="adj" fmla="val 6410"/>
-            </a:avLst>
-          </a:prstGeom>
-          <a:solidFill>
-            <a:srgbClr val="F3F5F8"/>
-          </a:solidFill>
-          <a:ln>
-            <a:noFill/>
-          </a:ln>
-        </p:spPr>
-        <p:txBody>
-          <a:bodyPr rtlCol="0" anchor="ctr"/>
-          <a:lstStyle/>
-          <a:p>
-            <a:pPr algn="ctr"/>
-            <a:endParaRPr lang="ko-KR" dirty="0"/>
-          </a:p>
-        </p:txBody>
-      </p:sp>
-      <p:sp>
-        <p:nvSpPr>
-          <p:cNvPr id="22" name="svg rect"/>
-          <p:cNvSpPr/>
-          <p:nvPr/>
-        </p:nvSpPr>
-        <p:spPr>
-          <a:xfrm>
-            <a:off x="6680200" y="2752824"/>
-            <a:ext cx="63500" cy="63500"/>
-          </a:xfrm>
-          <a:prstGeom prst="roundRect">
-            <a:avLst>
-              <a:gd name="adj" fmla="val 20000"/>
-            </a:avLst>
-          </a:prstGeom>
-          <a:noFill/>
-          <a:ln w="12700" cap="rnd">
-            <a:solidFill>
-              <a:srgbClr val="2B4A78"/>
-            </a:solidFill>
-            <a:round/>
-          </a:ln>
-        </p:spPr>
-        <p:txBody>
-          <a:bodyPr rtlCol="0" anchor="ctr"/>
-          <a:lstStyle/>
-          <a:p>
-            <a:pPr algn="ctr"/>
-            <a:endParaRPr lang="ko-KR" dirty="0"/>
-          </a:p>
-        </p:txBody>
-      </p:sp>
-      <p:sp>
-        <p:nvSpPr>
-          <p:cNvPr id="23" name="svg rect"/>
-          <p:cNvSpPr/>
-          <p:nvPr/>
-        </p:nvSpPr>
-        <p:spPr>
-          <a:xfrm>
-            <a:off x="6819900" y="2689324"/>
-            <a:ext cx="63500" cy="63500"/>
-          </a:xfrm>
-          <a:prstGeom prst="roundRect">
-            <a:avLst>
-              <a:gd name="adj" fmla="val 20000"/>
-            </a:avLst>
-          </a:prstGeom>
-          <a:noFill/>
-          <a:ln w="12700" cap="rnd">
-            <a:solidFill>
-              <a:srgbClr val="2B4A78"/>
-            </a:solidFill>
-            <a:round/>
-          </a:ln>
-        </p:spPr>
-        <p:txBody>
-          <a:bodyPr rtlCol="0" anchor="ctr"/>
-          <a:lstStyle/>
-          <a:p>
-            <a:pPr algn="ctr"/>
-            <a:endParaRPr lang="ko-KR" dirty="0"/>
-          </a:p>
-        </p:txBody>
-      </p:sp>
-      <p:sp>
-        <p:nvSpPr>
-          <p:cNvPr id="24" name="svg rect"/>
-          <p:cNvSpPr/>
-          <p:nvPr/>
-        </p:nvSpPr>
-        <p:spPr>
-          <a:xfrm>
-            <a:off x="6819900" y="2816324"/>
-            <a:ext cx="63500" cy="63500"/>
-          </a:xfrm>
-          <a:prstGeom prst="roundRect">
-            <a:avLst>
-              <a:gd name="adj" fmla="val 20000"/>
-            </a:avLst>
-          </a:prstGeom>
-          <a:noFill/>
-          <a:ln w="12700" cap="rnd">
-            <a:solidFill>
-              <a:srgbClr val="2B4A78"/>
-            </a:solidFill>
-            <a:round/>
-          </a:ln>
-        </p:spPr>
-        <p:txBody>
-          <a:bodyPr rtlCol="0" anchor="ctr"/>
-          <a:lstStyle/>
-          <a:p>
-            <a:pPr algn="ctr"/>
-            <a:endParaRPr lang="ko-KR" dirty="0"/>
-          </a:p>
-        </p:txBody>
-      </p:sp>
-      <p:sp>
-        <p:nvSpPr>
-          <p:cNvPr id="25" name="svg path"/>
-          <p:cNvSpPr/>
-          <p:nvPr/>
-        </p:nvSpPr>
-        <p:spPr>
-          <a:xfrm>
-            <a:off x="6743700" y="2721074"/>
-            <a:ext cx="76200" cy="127000"/>
-          </a:xfrm>
-          <a:custGeom>
-            <a:avLst/>
-            <a:gdLst/>
-            <a:ahLst/>
-            <a:cxnLst/>
-            <a:rect l="0" t="0" r="r" b="b"/>
-            <a:pathLst>
-              <a:path w="76200" h="127000" fill="none">
-                <a:moveTo>
-                  <a:pt x="0" y="63500"/>
-                </a:moveTo>
-                <a:lnTo>
-                  <a:pt x="38100" y="63500"/>
-                </a:lnTo>
-                <a:moveTo>
-                  <a:pt x="38100" y="0"/>
-                </a:moveTo>
-                <a:lnTo>
-                  <a:pt x="38100" y="127000"/>
-                </a:lnTo>
-                <a:moveTo>
-                  <a:pt x="38100" y="0"/>
-                </a:moveTo>
-                <a:lnTo>
-                  <a:pt x="76200" y="0"/>
-                </a:lnTo>
-                <a:moveTo>
-                  <a:pt x="38100" y="127000"/>
-                </a:moveTo>
-                <a:lnTo>
-                  <a:pt x="76200" y="127000"/>
-                </a:lnTo>
-              </a:path>
-            </a:pathLst>
-          </a:custGeom>
-          <a:noFill/>
-          <a:ln w="12700" cap="rnd">
-            <a:solidFill>
-              <a:srgbClr val="2B4A78"/>
-            </a:solidFill>
-            <a:round/>
-          </a:ln>
-        </p:spPr>
-        <p:txBody>
-          <a:bodyPr rtlCol="0" anchor="ctr"/>
-          <a:lstStyle/>
-          <a:p>
-            <a:pPr algn="ctr"/>
-            <a:endParaRPr lang="ko-KR" dirty="0"/>
-          </a:p>
-        </p:txBody>
-      </p:sp>
-      <p:sp>
-        <p:nvSpPr>
-          <p:cNvPr id="26" name="bar"/>
-          <p:cNvSpPr/>
-          <p:nvPr/>
-        </p:nvSpPr>
-        <p:spPr>
-          <a:xfrm>
-            <a:off x="5308600" y="3267174"/>
-            <a:ext cx="203200" cy="19050"/>
-          </a:xfrm>
-          <a:prstGeom prst="roundRect">
-            <a:avLst>
-              <a:gd name="adj" fmla="val 50000"/>
-            </a:avLst>
-          </a:prstGeom>
-          <a:solidFill>
-            <a:srgbClr val="102A4C"/>
-          </a:solidFill>
-          <a:ln>
-            <a:noFill/>
-          </a:ln>
-        </p:spPr>
-        <p:txBody>
-          <a:bodyPr rtlCol="0" anchor="ctr"/>
-          <a:lstStyle/>
-          <a:p>
-            <a:pPr algn="ctr"/>
-            <a:endParaRPr lang="ko-KR" dirty="0"/>
-          </a:p>
-        </p:txBody>
-      </p:sp>
-      <p:sp>
-        <p:nvSpPr>
-          <p:cNvPr id="27" name="q"/>
-          <p:cNvSpPr/>
-          <p:nvPr/>
-        </p:nvSpPr>
-        <p:spPr>
-          <a:xfrm>
-            <a:off x="5105400" y="4410174"/>
-            <a:ext cx="1981200" cy="914400"/>
-          </a:xfrm>
-          <a:custGeom>
-            <a:avLst/>
-            <a:gdLst/>
-            <a:ahLst/>
-            <a:cxnLst/>
-            <a:rect l="0" t="0" r="r" b="b"/>
-            <a:pathLst>
-              <a:path w="1981200" h="914400" stroke="0">
-                <a:moveTo>
-                  <a:pt x="0" y="0"/>
-                </a:moveTo>
-                <a:lnTo>
-                  <a:pt x="1981200" y="0"/>
-                </a:lnTo>
-                <a:cubicBezTo>
-                  <a:pt x="1981200" y="0"/>
-                  <a:pt x="1981200" y="0"/>
-                  <a:pt x="1981200" y="0"/>
-                </a:cubicBezTo>
-                <a:lnTo>
-                  <a:pt x="1981200" y="787400"/>
-                </a:lnTo>
-                <a:cubicBezTo>
-                  <a:pt x="1981200" y="857542"/>
-                  <a:pt x="1924342" y="914400"/>
-                  <a:pt x="1854200" y="914400"/>
-                </a:cubicBezTo>
-                <a:lnTo>
-                  <a:pt x="127000" y="914400"/>
-                </a:lnTo>
-                <a:cubicBezTo>
-                  <a:pt x="56858" y="914400"/>
-                  <a:pt x="0" y="857542"/>
-                  <a:pt x="0" y="787400"/>
-                </a:cubicBezTo>
-                <a:lnTo>
-                  <a:pt x="0" y="0"/>
-                </a:lnTo>
-                <a:cubicBezTo>
-                  <a:pt x="0" y="0"/>
-                  <a:pt x="0" y="0"/>
-                  <a:pt x="0" y="0"/>
-                </a:cubicBezTo>
-                <a:close/>
-              </a:path>
-            </a:pathLst>
-          </a:custGeom>
-          <a:solidFill>
-            <a:srgbClr val="E8EEF6"/>
-          </a:solidFill>
-          <a:ln>
-            <a:noFill/>
-          </a:ln>
-        </p:spPr>
-        <p:txBody>
-          <a:bodyPr rtlCol="0" anchor="ctr"/>
-          <a:lstStyle/>
-          <a:p>
-            <a:pPr algn="ctr"/>
-            <a:endParaRPr lang="ko-KR" dirty="0"/>
-          </a:p>
-        </p:txBody>
-      </p:sp>
-      <p:sp>
-        <p:nvSpPr>
-          <p:cNvPr id="28" name="ch k4"/>
-          <p:cNvSpPr/>
-          <p:nvPr/>
-        </p:nvSpPr>
-        <p:spPr>
-          <a:xfrm>
-            <a:off x="7213600" y="2378174"/>
-            <a:ext cx="1981200" cy="2946400"/>
-          </a:xfrm>
-          <a:prstGeom prst="roundRect">
-            <a:avLst>
-              <a:gd name="adj" fmla="val 6410"/>
-            </a:avLst>
-          </a:prstGeom>
-          <a:solidFill>
-            <a:srgbClr val="F3F5F8"/>
-          </a:solidFill>
-          <a:ln>
-            <a:noFill/>
-          </a:ln>
-        </p:spPr>
-        <p:txBody>
-          <a:bodyPr rtlCol="0" anchor="ctr"/>
-          <a:lstStyle/>
-          <a:p>
-            <a:pPr algn="ctr"/>
-            <a:endParaRPr lang="ko-KR" dirty="0"/>
-          </a:p>
-        </p:txBody>
-      </p:sp>
-      <p:sp>
-        <p:nvSpPr>
-          <p:cNvPr id="29" name="svg path"/>
-          <p:cNvSpPr/>
-          <p:nvPr/>
-        </p:nvSpPr>
-        <p:spPr>
-          <a:xfrm>
-            <a:off x="8794750" y="2879824"/>
-            <a:ext cx="190500" cy="1"/>
-          </a:xfrm>
-          <a:custGeom>
-            <a:avLst/>
-            <a:gdLst/>
-            <a:ahLst/>
-            <a:cxnLst/>
-            <a:rect l="0" t="0" r="r" b="b"/>
-            <a:pathLst>
-              <a:path w="190500" h="1" fill="none">
-                <a:moveTo>
-                  <a:pt x="0" y="0"/>
-                </a:moveTo>
-                <a:lnTo>
-                  <a:pt x="190500" y="0"/>
-                </a:lnTo>
-              </a:path>
-            </a:pathLst>
-          </a:custGeom>
-          <a:noFill/>
-          <a:ln w="12700" cap="rnd">
-            <a:solidFill>
-              <a:srgbClr val="2B4A78"/>
-            </a:solidFill>
-            <a:round/>
-          </a:ln>
-        </p:spPr>
-        <p:txBody>
-          <a:bodyPr rtlCol="0" anchor="ctr"/>
-          <a:lstStyle/>
-          <a:p>
-            <a:pPr algn="ctr"/>
-            <a:endParaRPr lang="ko-KR" dirty="0"/>
-          </a:p>
-        </p:txBody>
-      </p:sp>
-      <p:sp>
-        <p:nvSpPr>
-          <p:cNvPr id="30" name="svg rect"/>
-          <p:cNvSpPr/>
-          <p:nvPr/>
-        </p:nvSpPr>
-        <p:spPr>
-          <a:xfrm>
-            <a:off x="8813800" y="2803624"/>
-            <a:ext cx="38100" cy="76200"/>
-          </a:xfrm>
-          <a:prstGeom prst="roundRect">
-            <a:avLst>
-              <a:gd name="adj" fmla="val 16667"/>
-            </a:avLst>
-          </a:prstGeom>
-          <a:noFill/>
-          <a:ln w="12700" cap="rnd">
-            <a:solidFill>
-              <a:srgbClr val="2B4A78"/>
-            </a:solidFill>
-            <a:round/>
-          </a:ln>
-        </p:spPr>
-        <p:txBody>
-          <a:bodyPr rtlCol="0" anchor="ctr"/>
-          <a:lstStyle/>
-          <a:p>
-            <a:pPr algn="ctr"/>
-            <a:endParaRPr lang="ko-KR" dirty="0"/>
-          </a:p>
-        </p:txBody>
-      </p:sp>
-      <p:sp>
-        <p:nvSpPr>
-          <p:cNvPr id="31" name="svg rect"/>
-          <p:cNvSpPr/>
-          <p:nvPr/>
-        </p:nvSpPr>
-        <p:spPr>
-          <a:xfrm>
-            <a:off x="8870950" y="2752824"/>
-            <a:ext cx="38100" cy="127000"/>
-          </a:xfrm>
-          <a:prstGeom prst="roundRect">
-            <a:avLst>
-              <a:gd name="adj" fmla="val 16667"/>
-            </a:avLst>
-          </a:prstGeom>
-          <a:noFill/>
-          <a:ln w="12700" cap="rnd">
-            <a:solidFill>
-              <a:srgbClr val="2B4A78"/>
-            </a:solidFill>
-            <a:round/>
-          </a:ln>
-        </p:spPr>
-        <p:txBody>
-          <a:bodyPr rtlCol="0" anchor="ctr"/>
-          <a:lstStyle/>
-          <a:p>
-            <a:pPr algn="ctr"/>
-            <a:endParaRPr lang="ko-KR" dirty="0"/>
-          </a:p>
-        </p:txBody>
-      </p:sp>
-      <p:sp>
-        <p:nvSpPr>
-          <p:cNvPr id="32" name="svg rect"/>
-          <p:cNvSpPr/>
-          <p:nvPr/>
-        </p:nvSpPr>
-        <p:spPr>
-          <a:xfrm>
-            <a:off x="8928100" y="2702024"/>
-            <a:ext cx="38100" cy="177800"/>
-          </a:xfrm>
-          <a:prstGeom prst="roundRect">
-            <a:avLst>
-              <a:gd name="adj" fmla="val 16667"/>
-            </a:avLst>
-          </a:prstGeom>
-          <a:noFill/>
-          <a:ln w="12700" cap="rnd">
-            <a:solidFill>
-              <a:srgbClr val="2B4A78"/>
-            </a:solidFill>
-            <a:round/>
-          </a:ln>
-        </p:spPr>
-        <p:txBody>
-          <a:bodyPr rtlCol="0" anchor="ctr"/>
-          <a:lstStyle/>
-          <a:p>
-            <a:pPr algn="ctr"/>
-            <a:endParaRPr lang="ko-KR" dirty="0"/>
-          </a:p>
-        </p:txBody>
-      </p:sp>
-      <p:sp>
-        <p:nvSpPr>
-          <p:cNvPr id="33" name="bar"/>
-          <p:cNvSpPr/>
-          <p:nvPr/>
-        </p:nvSpPr>
-        <p:spPr>
-          <a:xfrm>
-            <a:off x="7416800" y="3267174"/>
-            <a:ext cx="203200" cy="19050"/>
-          </a:xfrm>
-          <a:prstGeom prst="roundRect">
-            <a:avLst>
-              <a:gd name="adj" fmla="val 50000"/>
-            </a:avLst>
-          </a:prstGeom>
-          <a:solidFill>
-            <a:srgbClr val="102A4C"/>
-          </a:solidFill>
-          <a:ln>
-            <a:noFill/>
-          </a:ln>
-        </p:spPr>
-        <p:txBody>
-          <a:bodyPr rtlCol="0" anchor="ctr"/>
-          <a:lstStyle/>
-          <a:p>
-            <a:pPr algn="ctr"/>
-            <a:endParaRPr lang="ko-KR" dirty="0"/>
-          </a:p>
-        </p:txBody>
-      </p:sp>
-      <p:sp>
-        <p:nvSpPr>
-          <p:cNvPr id="34" name="q"/>
-          <p:cNvSpPr/>
-          <p:nvPr/>
-        </p:nvSpPr>
-        <p:spPr>
-          <a:xfrm>
-            <a:off x="7213600" y="4410174"/>
-            <a:ext cx="1981200" cy="914400"/>
-          </a:xfrm>
-          <a:custGeom>
-            <a:avLst/>
-            <a:gdLst/>
-            <a:ahLst/>
-            <a:cxnLst/>
-            <a:rect l="0" t="0" r="r" b="b"/>
-            <a:pathLst>
-              <a:path w="1981200" h="914400" stroke="0">
-                <a:moveTo>
-                  <a:pt x="0" y="0"/>
-                </a:moveTo>
-                <a:lnTo>
-                  <a:pt x="1981200" y="0"/>
-                </a:lnTo>
-                <a:cubicBezTo>
-                  <a:pt x="1981200" y="0"/>
-                  <a:pt x="1981200" y="0"/>
-                  <a:pt x="1981200" y="0"/>
-                </a:cubicBezTo>
-                <a:lnTo>
-                  <a:pt x="1981200" y="787400"/>
-                </a:lnTo>
-                <a:cubicBezTo>
-                  <a:pt x="1981200" y="857542"/>
-                  <a:pt x="1924342" y="914400"/>
-                  <a:pt x="1854200" y="914400"/>
-                </a:cubicBezTo>
-                <a:lnTo>
-                  <a:pt x="127000" y="914400"/>
-                </a:lnTo>
-                <a:cubicBezTo>
-                  <a:pt x="56858" y="914400"/>
-                  <a:pt x="0" y="857542"/>
-                  <a:pt x="0" y="787400"/>
-                </a:cubicBezTo>
-                <a:lnTo>
-                  <a:pt x="0" y="0"/>
-                </a:lnTo>
-                <a:cubicBezTo>
-                  <a:pt x="0" y="0"/>
-                  <a:pt x="0" y="0"/>
-                  <a:pt x="0" y="0"/>
-                </a:cubicBezTo>
-                <a:close/>
-              </a:path>
-            </a:pathLst>
-          </a:custGeom>
-          <a:solidFill>
-            <a:srgbClr val="E8EEF6"/>
-          </a:solidFill>
-          <a:ln>
-            <a:noFill/>
-          </a:ln>
-        </p:spPr>
-        <p:txBody>
-          <a:bodyPr rtlCol="0" anchor="ctr"/>
-          <a:lstStyle/>
-          <a:p>
-            <a:pPr algn="ctr"/>
-            <a:endParaRPr lang="ko-KR" dirty="0"/>
-          </a:p>
-        </p:txBody>
-      </p:sp>
-      <p:sp>
-        <p:nvSpPr>
-          <p:cNvPr id="35" name="ch k5"/>
-          <p:cNvSpPr/>
-          <p:nvPr/>
-        </p:nvSpPr>
-        <p:spPr>
-          <a:xfrm>
-            <a:off x="9601200" y="2378174"/>
-            <a:ext cx="1981200" cy="2946400"/>
-          </a:xfrm>
-          <a:prstGeom prst="roundRect">
-            <a:avLst>
-              <a:gd name="adj" fmla="val 6410"/>
-            </a:avLst>
-          </a:prstGeom>
-          <a:solidFill>
-            <a:srgbClr val="102A4C"/>
-          </a:solidFill>
-          <a:ln>
-            <a:noFill/>
-          </a:ln>
-        </p:spPr>
-        <p:txBody>
-          <a:bodyPr rtlCol="0" anchor="ctr"/>
-          <a:lstStyle/>
-          <a:p>
-            <a:pPr algn="ctr"/>
-            <a:endParaRPr lang="ko-KR" dirty="0"/>
-          </a:p>
-        </p:txBody>
-      </p:sp>
-      <p:sp>
-        <p:nvSpPr>
-          <p:cNvPr id="36" name="svg path"/>
-          <p:cNvSpPr/>
-          <p:nvPr/>
-        </p:nvSpPr>
-        <p:spPr>
-          <a:xfrm>
-            <a:off x="11169650" y="2879824"/>
-            <a:ext cx="215900" cy="1"/>
-          </a:xfrm>
-          <a:custGeom>
-            <a:avLst/>
-            <a:gdLst/>
-            <a:ahLst/>
-            <a:cxnLst/>
-            <a:rect l="0" t="0" r="r" b="b"/>
-            <a:pathLst>
-              <a:path w="215900" h="1" fill="none">
-                <a:moveTo>
-                  <a:pt x="0" y="0"/>
-                </a:moveTo>
-                <a:lnTo>
-                  <a:pt x="215900" y="0"/>
-                </a:lnTo>
-              </a:path>
-            </a:pathLst>
-          </a:custGeom>
-          <a:noFill/>
-          <a:ln w="12700" cap="rnd">
-            <a:solidFill>
-              <a:srgbClr val="9FB0C8"/>
-            </a:solidFill>
-            <a:round/>
-          </a:ln>
-        </p:spPr>
-        <p:txBody>
-          <a:bodyPr rtlCol="0" anchor="ctr"/>
-          <a:lstStyle/>
-          <a:p>
-            <a:pPr algn="ctr"/>
-            <a:endParaRPr lang="ko-KR" dirty="0"/>
-          </a:p>
-        </p:txBody>
-      </p:sp>
-      <p:sp>
-        <p:nvSpPr>
-          <p:cNvPr id="37" name="svg path"/>
-          <p:cNvSpPr/>
-          <p:nvPr/>
-        </p:nvSpPr>
-        <p:spPr>
-          <a:xfrm>
-            <a:off x="11188700" y="2702024"/>
-            <a:ext cx="171450" cy="177800"/>
-          </a:xfrm>
-          <a:custGeom>
-            <a:avLst/>
-            <a:gdLst/>
-            <a:ahLst/>
-            <a:cxnLst/>
-            <a:rect l="0" t="0" r="r" b="b"/>
-            <a:pathLst>
-              <a:path w="171450" h="177800" fill="none">
-                <a:moveTo>
-                  <a:pt x="0" y="177800"/>
-                </a:moveTo>
-                <a:lnTo>
-                  <a:pt x="0" y="82550"/>
-                </a:lnTo>
-                <a:lnTo>
-                  <a:pt x="57150" y="44450"/>
-                </a:lnTo>
-                <a:lnTo>
-                  <a:pt x="57150" y="82550"/>
-                </a:lnTo>
-                <a:lnTo>
-                  <a:pt x="114300" y="44450"/>
-                </a:lnTo>
-                <a:lnTo>
-                  <a:pt x="114300" y="82550"/>
-                </a:lnTo>
-                <a:lnTo>
-                  <a:pt x="133350" y="82550"/>
-                </a:lnTo>
-                <a:lnTo>
-                  <a:pt x="133350" y="0"/>
-                </a:lnTo>
-                <a:lnTo>
-                  <a:pt x="171450" y="0"/>
-                </a:lnTo>
-                <a:lnTo>
-                  <a:pt x="171450" y="177800"/>
-                </a:lnTo>
-              </a:path>
-            </a:pathLst>
-          </a:custGeom>
-          <a:noFill/>
-          <a:ln w="12700" cap="rnd">
-            <a:solidFill>
-              <a:srgbClr val="9FB0C8"/>
-            </a:solidFill>
-            <a:round/>
-          </a:ln>
-        </p:spPr>
-        <p:txBody>
-          <a:bodyPr rtlCol="0" anchor="ctr"/>
-          <a:lstStyle/>
-          <a:p>
-            <a:pPr algn="ctr"/>
-            <a:endParaRPr lang="ko-KR" dirty="0"/>
-          </a:p>
-        </p:txBody>
-      </p:sp>
-      <p:sp>
-        <p:nvSpPr>
-          <p:cNvPr id="38" name="svg path"/>
-          <p:cNvSpPr/>
-          <p:nvPr/>
-        </p:nvSpPr>
-        <p:spPr>
-          <a:xfrm>
-            <a:off x="11220450" y="2835374"/>
-            <a:ext cx="82550" cy="1"/>
-          </a:xfrm>
-          <a:custGeom>
-            <a:avLst/>
-            <a:gdLst/>
-            <a:ahLst/>
-            <a:cxnLst/>
-            <a:rect l="0" t="0" r="r" b="b"/>
-            <a:pathLst>
-              <a:path w="82550" h="1" fill="none">
-                <a:moveTo>
-                  <a:pt x="0" y="0"/>
-                </a:moveTo>
-                <a:lnTo>
-                  <a:pt x="25400" y="0"/>
-                </a:lnTo>
-                <a:moveTo>
-                  <a:pt x="57150" y="0"/>
-                </a:moveTo>
-                <a:lnTo>
-                  <a:pt x="82550" y="0"/>
-                </a:lnTo>
-              </a:path>
-            </a:pathLst>
-          </a:custGeom>
-          <a:noFill/>
-          <a:ln w="12700" cap="rnd">
-            <a:solidFill>
-              <a:srgbClr val="9FB0C8"/>
-            </a:solidFill>
-            <a:round/>
-          </a:ln>
-        </p:spPr>
-        <p:txBody>
-          <a:bodyPr rtlCol="0" anchor="ctr"/>
-          <a:lstStyle/>
-          <a:p>
-            <a:pPr algn="ctr"/>
-            <a:endParaRPr lang="ko-KR" dirty="0"/>
-          </a:p>
-        </p:txBody>
-      </p:sp>
-      <p:sp>
-        <p:nvSpPr>
-          <p:cNvPr id="39" name="bar"/>
-          <p:cNvSpPr/>
-          <p:nvPr/>
-        </p:nvSpPr>
-        <p:spPr>
-          <a:xfrm>
-            <a:off x="9804400" y="3267174"/>
-            <a:ext cx="203200" cy="19050"/>
-          </a:xfrm>
-          <a:prstGeom prst="roundRect">
-            <a:avLst>
-              <a:gd name="adj" fmla="val 50000"/>
-            </a:avLst>
-          </a:prstGeom>
-          <a:solidFill>
-            <a:srgbClr val="9FB0C8"/>
-          </a:solidFill>
-          <a:ln>
-            <a:noFill/>
-          </a:ln>
-        </p:spPr>
-        <p:txBody>
-          <a:bodyPr rtlCol="0" anchor="ctr"/>
-          <a:lstStyle/>
-          <a:p>
-            <a:pPr algn="ctr"/>
-            <a:endParaRPr lang="ko-KR" dirty="0"/>
-          </a:p>
-        </p:txBody>
-      </p:sp>
-      <p:sp>
-        <p:nvSpPr>
-          <p:cNvPr id="40" name="q"/>
-          <p:cNvSpPr/>
-          <p:nvPr/>
-        </p:nvSpPr>
-        <p:spPr>
-          <a:xfrm>
-            <a:off x="9601200" y="4410174"/>
-            <a:ext cx="1981200" cy="914400"/>
-          </a:xfrm>
-          <a:custGeom>
-            <a:avLst/>
-            <a:gdLst/>
-            <a:ahLst/>
-            <a:cxnLst/>
-            <a:rect l="0" t="0" r="r" b="b"/>
-            <a:pathLst>
-              <a:path w="1981200" h="914400" stroke="0">
-                <a:moveTo>
-                  <a:pt x="0" y="0"/>
-                </a:moveTo>
-                <a:lnTo>
-                  <a:pt x="1981200" y="0"/>
-                </a:lnTo>
-                <a:cubicBezTo>
-                  <a:pt x="1981200" y="0"/>
-                  <a:pt x="1981200" y="0"/>
-                  <a:pt x="1981200" y="0"/>
-                </a:cubicBezTo>
-                <a:lnTo>
-                  <a:pt x="1981200" y="787400"/>
-                </a:lnTo>
-                <a:cubicBezTo>
-                  <a:pt x="1981200" y="857542"/>
-                  <a:pt x="1924342" y="914400"/>
-                  <a:pt x="1854200" y="914400"/>
-                </a:cubicBezTo>
-                <a:lnTo>
-                  <a:pt x="127000" y="914400"/>
-                </a:lnTo>
-                <a:cubicBezTo>
-                  <a:pt x="56858" y="914400"/>
-                  <a:pt x="0" y="857542"/>
-                  <a:pt x="0" y="787400"/>
-                </a:cubicBezTo>
-                <a:lnTo>
-                  <a:pt x="0" y="0"/>
-                </a:lnTo>
-                <a:cubicBezTo>
-                  <a:pt x="0" y="0"/>
-                  <a:pt x="0" y="0"/>
-                  <a:pt x="0" y="0"/>
-                </a:cubicBezTo>
-                <a:close/>
-              </a:path>
-            </a:pathLst>
-          </a:custGeom>
-          <a:solidFill>
-            <a:srgbClr val="213D63"/>
-          </a:solidFill>
-          <a:ln>
-            <a:noFill/>
-          </a:ln>
-        </p:spPr>
-        <p:txBody>
-          <a:bodyPr rtlCol="0" anchor="ctr"/>
-          <a:lstStyle/>
-          <a:p>
-            <a:pPr algn="ctr"/>
-            <a:endParaRPr lang="ko-KR" dirty="0"/>
-          </a:p>
-        </p:txBody>
-      </p:sp>
-      <p:sp>
-        <p:nvSpPr>
-          <p:cNvPr id="41" name="00"/>
-          <p:cNvSpPr txBox="1"/>
-          <p:nvPr/>
-        </p:nvSpPr>
-        <p:spPr>
-          <a:xfrm>
-            <a:off x="609600" y="401439"/>
-            <a:ext cx="220166" cy="146050"/>
+          <p:cNvPr id="20" name="석사 연구 발표"/>
+          <p:cNvSpPr txBox="1"/>
+          <p:nvPr/>
+        </p:nvSpPr>
+        <p:spPr>
+          <a:xfrm>
+            <a:off x="876300" y="553839"/>
+            <a:ext cx="751384" cy="146050"/>
           </a:xfrm>
           <a:prstGeom prst="rect">
             <a:avLst/>
@@ -3306,30 +2336,162 @@
               <a:buNone/>
             </a:pPr>
             <a:r>
-              <a:rPr lang="ko-KR" altLang="en-US" sz="950" spc="19" kern="0" dirty="0">
-                <a:solidFill>
-                  <a:srgbClr val="EA002C"/>
+              <a:rPr lang="ko-KR" altLang="en-US" sz="950" b="1" spc="19" kern="0" dirty="0">
+                <a:solidFill>
+                  <a:srgbClr val="102A4C"/>
+                </a:solidFill>
+                <a:latin typeface="Pretendard" pitchFamily="34" charset="0"/>
+                <a:ea typeface="Pretendard" pitchFamily="34" charset="-127"/>
+                <a:cs typeface="Pretendard" pitchFamily="34" charset="-120"/>
+              </a:rPr>
+              <a:t>석사 연구 발표</a:t>
+            </a:r>
+            <a:endParaRPr lang="en-US" sz="950" dirty="0"/>
+          </a:p>
+        </p:txBody>
+      </p:sp>
+      <p:sp>
+        <p:nvSpPr>
+          <p:cNvPr id="21" name="평면도와 입면도 객체 인식 및 정보 통합을 통한"/>
+          <p:cNvSpPr txBox="1"/>
+          <p:nvPr/>
+        </p:nvSpPr>
+        <p:spPr>
+          <a:xfrm>
+            <a:off x="609600" y="2142728"/>
+            <a:ext cx="4610525" cy="304800"/>
+          </a:xfrm>
+          <a:prstGeom prst="rect">
+            <a:avLst/>
+          </a:prstGeom>
+          <a:noFill/>
+          <a:ln/>
+        </p:spPr>
+        <p:txBody>
+          <a:bodyPr wrap="none" lIns="0" tIns="0" rIns="0" bIns="0" rtlCol="0" anchor="ctr"/>
+          <a:lstStyle/>
+          <a:p>
+            <a:pPr algn="l" indent="0" marL="0">
+              <a:buNone/>
+            </a:pPr>
+            <a:r>
+              <a:rPr lang="ko-KR" altLang="en-US" sz="2000" b="1" spc="-70" kern="0" dirty="0">
+                <a:solidFill>
+                  <a:srgbClr val="3F4654"/>
+                </a:solidFill>
+                <a:latin typeface="Pretendard" pitchFamily="34" charset="0"/>
+                <a:ea typeface="Pretendard" pitchFamily="34" charset="-127"/>
+                <a:cs typeface="Pretendard" pitchFamily="34" charset="-120"/>
+              </a:rPr>
+              <a:t>평면도와 입면도 객체 인식 및 정보 통합을 통한</a:t>
+            </a:r>
+            <a:endParaRPr lang="en-US" sz="2000" dirty="0"/>
+          </a:p>
+        </p:txBody>
+      </p:sp>
+      <p:sp>
+        <p:nvSpPr>
+          <p:cNvPr id="22" name="3D BIM 자동 생성 연구"/>
+          <p:cNvSpPr txBox="1"/>
+          <p:nvPr/>
+        </p:nvSpPr>
+        <p:spPr>
+          <a:xfrm>
+            <a:off x="609600" y="2511028"/>
+            <a:ext cx="5304238" cy="698500"/>
+          </a:xfrm>
+          <a:prstGeom prst="rect">
+            <a:avLst/>
+          </a:prstGeom>
+          <a:noFill/>
+          <a:ln/>
+        </p:spPr>
+        <p:txBody>
+          <a:bodyPr wrap="none" lIns="0" tIns="0" rIns="0" bIns="0" rtlCol="0" anchor="ctr"/>
+          <a:lstStyle/>
+          <a:p>
+            <a:pPr algn="l" indent="0" marL="0">
+              <a:buNone/>
+            </a:pPr>
+            <a:r>
+              <a:rPr lang="ko-KR" altLang="en-US" sz="4600" spc="-207" kern="0" dirty="0">
+                <a:solidFill>
+                  <a:srgbClr val="102A4C"/>
                 </a:solidFill>
                 <a:latin typeface="Pretendard ExtraBold" pitchFamily="34" charset="0"/>
                 <a:ea typeface="Pretendard ExtraBold" pitchFamily="34" charset="-127"/>
                 <a:cs typeface="Pretendard ExtraBold" pitchFamily="34" charset="-120"/>
               </a:rPr>
-              <a:t>00</a:t>
-            </a:r>
-            <a:endParaRPr lang="en-US" sz="950" dirty="0"/>
-          </a:p>
-        </p:txBody>
-      </p:sp>
-      <p:sp>
-        <p:nvSpPr>
-          <p:cNvPr id="42" name="CONTENTS"/>
-          <p:cNvSpPr txBox="1"/>
-          <p:nvPr/>
-        </p:nvSpPr>
-        <p:spPr>
-          <a:xfrm>
-            <a:off x="867866" y="401439"/>
-            <a:ext cx="689967" cy="146050"/>
+              <a:t>3D BIM 자동 생성 연구</a:t>
+            </a:r>
+            <a:endParaRPr lang="en-US" sz="4600" dirty="0"/>
+          </a:p>
+        </p:txBody>
+      </p:sp>
+      <p:sp>
+        <p:nvSpPr>
+          <p:cNvPr id="23" name="Automated BIM generation from inconsiste"/>
+          <p:cNvSpPr txBox="1"/>
+          <p:nvPr/>
+        </p:nvSpPr>
+        <p:spPr>
+          <a:xfrm>
+            <a:off x="609600" y="3368477"/>
+            <a:ext cx="5610078" cy="419100"/>
+          </a:xfrm>
+          <a:prstGeom prst="rect">
+            <a:avLst/>
+          </a:prstGeom>
+          <a:noFill/>
+          <a:ln/>
+        </p:spPr>
+        <p:txBody>
+          <a:bodyPr wrap="none" lIns="0" tIns="0" rIns="0" bIns="0" rtlCol="0" anchor="t"/>
+          <a:lstStyle/>
+          <a:p>
+            <a:pPr algn="l" indent="0" marL="0">
+              <a:lnSpc>
+                <a:spcPts val="1650"/>
+              </a:lnSpc>
+              <a:buNone/>
+            </a:pPr>
+            <a:r>
+              <a:rPr lang="ko-KR" altLang="en-US" sz="1100" spc="-11" kern="0" dirty="0">
+                <a:solidFill>
+                  <a:srgbClr val="737C8B"/>
+                </a:solidFill>
+                <a:latin typeface="Pretendard Medium" pitchFamily="34" charset="0"/>
+                <a:ea typeface="Pretendard Medium" pitchFamily="34" charset="-127"/>
+                <a:cs typeface="Pretendard Medium" pitchFamily="34" charset="-120"/>
+              </a:rPr>
+              <a:t>Automated BIM generation from inconsistent multi-view raster architectural drawings</a:t>
+            </a:r>
+            <a:br/>
+            <a:r>
+              <a:rPr lang="ko-KR" altLang="en-US" sz="1100" spc="-11" kern="0" dirty="0">
+                <a:solidFill>
+                  <a:srgbClr val="737C8B"/>
+                </a:solidFill>
+                <a:latin typeface="Pretendard Medium" pitchFamily="34" charset="0"/>
+                <a:ea typeface="Pretendard Medium" pitchFamily="34" charset="-127"/>
+                <a:cs typeface="Pretendard Medium" pitchFamily="34" charset="-120"/>
+              </a:rPr>
+              <a:t>with missing dimensions</a:t>
+            </a:r>
+            <a:endParaRPr lang="en-US" sz="1100" dirty="0"/>
+          </a:p>
+        </p:txBody>
+      </p:sp>
+      <p:sp>
+        <p:nvSpPr>
+          <p:cNvPr id="24" name="Automation in Construction · Vol. 187 · "/>
+          <p:cNvSpPr txBox="1"/>
+          <p:nvPr/>
+        </p:nvSpPr>
+        <p:spPr>
+          <a:xfrm>
+            <a:off x="882650" y="4144566"/>
+            <a:ext cx="2824180" cy="146050"/>
           </a:xfrm>
           <a:prstGeom prst="rect">
             <a:avLst/>
@@ -3345,7 +2507,7 @@
               <a:buNone/>
             </a:pPr>
             <a:r>
-              <a:rPr lang="ko-KR" altLang="en-US" sz="950" b="1" spc="-12" kern="0" dirty="0">
+              <a:rPr lang="ko-KR" altLang="en-US" sz="950" b="1" spc="-10" kern="0" dirty="0">
                 <a:solidFill>
                   <a:srgbClr val="102A4C"/>
                 </a:solidFill>
@@ -3353,38 +2515,10 @@
                 <a:ea typeface="Pretendard" pitchFamily="34" charset="-127"/>
                 <a:cs typeface="Pretendard" pitchFamily="34" charset="-120"/>
               </a:rPr>
-              <a:t>CONTENTS</a:t>
-            </a:r>
-            <a:endParaRPr lang="en-US" sz="950" dirty="0"/>
-          </a:p>
-        </p:txBody>
-      </p:sp>
-      <p:sp>
-        <p:nvSpPr>
-          <p:cNvPr id="43" name="발표 순서"/>
-          <p:cNvSpPr txBox="1"/>
-          <p:nvPr/>
-        </p:nvSpPr>
-        <p:spPr>
-          <a:xfrm>
-            <a:off x="1691184" y="401439"/>
-            <a:ext cx="488950" cy="146050"/>
-          </a:xfrm>
-          <a:prstGeom prst="rect">
-            <a:avLst/>
-          </a:prstGeom>
-          <a:noFill/>
-          <a:ln/>
-        </p:spPr>
-        <p:txBody>
-          <a:bodyPr wrap="none" lIns="0" tIns="0" rIns="0" bIns="0" rtlCol="0" anchor="ctr"/>
-          <a:lstStyle/>
-          <a:p>
-            <a:pPr algn="l" indent="0" marL="0">
-              <a:buNone/>
-            </a:pPr>
-            <a:r>
-              <a:rPr lang="ko-KR" altLang="en-US" sz="950" spc="-12" kern="0" dirty="0">
+              <a:t>Automation in Construction </a:t>
+            </a:r>
+            <a:r>
+              <a:rPr lang="ko-KR" altLang="en-US" sz="950" spc="-10" kern="0" dirty="0">
                 <a:solidFill>
                   <a:srgbClr val="737C8B"/>
                 </a:solidFill>
@@ -3392,38 +2526,21 @@
                 <a:ea typeface="Pretendard SemiBold" pitchFamily="34" charset="-127"/>
                 <a:cs typeface="Pretendard SemiBold" pitchFamily="34" charset="-120"/>
               </a:rPr>
-              <a:t>발표 순서</a:t>
-            </a:r>
-            <a:endParaRPr lang="en-US" sz="950" dirty="0"/>
-          </a:p>
-        </p:txBody>
-      </p:sp>
-      <p:sp>
-        <p:nvSpPr>
-          <p:cNvPr id="44" name="어떤 문제를, 어떻게 해결했고, 그게 SK하이닉스에서 왜 의미 있는가"/>
-          <p:cNvSpPr txBox="1"/>
-          <p:nvPr/>
-        </p:nvSpPr>
-        <p:spPr>
-          <a:xfrm>
-            <a:off x="609600" y="666750"/>
-            <a:ext cx="7605820" cy="349250"/>
-          </a:xfrm>
-          <a:prstGeom prst="rect">
-            <a:avLst/>
-          </a:prstGeom>
-          <a:noFill/>
-          <a:ln/>
-        </p:spPr>
-        <p:txBody>
-          <a:bodyPr wrap="none" lIns="0" tIns="0" rIns="0" bIns="0" rtlCol="0" anchor="ctr"/>
-          <a:lstStyle/>
-          <a:p>
-            <a:pPr algn="l" indent="0" marL="0">
-              <a:buNone/>
-            </a:pPr>
-            <a:r>
-              <a:rPr lang="ko-KR" altLang="en-US" sz="2300" spc="-92" kern="0" dirty="0">
+              <a:t>· Vol. 187 · 2026</a:t>
+            </a:r>
+            <a:r>
+              <a:rPr lang="ko-KR" altLang="en-US" sz="950" b="1" spc="-10" kern="0" dirty="0">
+                <a:solidFill>
+                  <a:srgbClr val="102A4C"/>
+                </a:solidFill>
+                <a:latin typeface="Pretendard" pitchFamily="34" charset="0"/>
+                <a:ea typeface="Pretendard" pitchFamily="34" charset="-127"/>
+                <a:cs typeface="Pretendard" pitchFamily="34" charset="-120"/>
+              </a:rPr>
+              <a:t> </a:t>
+            </a:r>
+            <a:r>
+              <a:rPr lang="ko-KR" altLang="en-US" sz="950" spc="-10" kern="0" dirty="0">
                 <a:solidFill>
                   <a:srgbClr val="102A4C"/>
                 </a:solidFill>
@@ -3431,33 +2548,334 @@
                 <a:ea typeface="Pretendard ExtraBold" pitchFamily="34" charset="-127"/>
                 <a:cs typeface="Pretendard ExtraBold" pitchFamily="34" charset="-120"/>
               </a:rPr>
-              <a:t>어떤 문제를, 어떻게 해결했고, </a:t>
-            </a:r>
-            <a:r>
-              <a:rPr lang="ko-KR" altLang="en-US" sz="2300" spc="-92" kern="0" dirty="0">
-                <a:solidFill>
-                  <a:srgbClr val="EA002C"/>
+              <a:t>게재</a:t>
+            </a:r>
+            <a:endParaRPr lang="en-US" sz="950" dirty="0"/>
+          </a:p>
+        </p:txBody>
+      </p:sp>
+      <p:sp>
+        <p:nvSpPr>
+          <p:cNvPr id="25" name="지원 직무"/>
+          <p:cNvSpPr txBox="1"/>
+          <p:nvPr/>
+        </p:nvSpPr>
+        <p:spPr>
+          <a:xfrm>
+            <a:off x="609600" y="5949355"/>
+            <a:ext cx="435670" cy="120650"/>
+          </a:xfrm>
+          <a:prstGeom prst="rect">
+            <a:avLst/>
+          </a:prstGeom>
+          <a:noFill/>
+          <a:ln/>
+        </p:spPr>
+        <p:txBody>
+          <a:bodyPr wrap="none" lIns="0" tIns="0" rIns="0" bIns="0" rtlCol="0" anchor="ctr"/>
+          <a:lstStyle/>
+          <a:p>
+            <a:pPr algn="l" indent="0" marL="0">
+              <a:buNone/>
+            </a:pPr>
+            <a:r>
+              <a:rPr lang="ko-KR" altLang="en-US" sz="800" b="1" spc="16" kern="0" dirty="0">
+                <a:solidFill>
+                  <a:srgbClr val="737C8B"/>
+                </a:solidFill>
+                <a:latin typeface="Pretendard" pitchFamily="34" charset="0"/>
+                <a:ea typeface="Pretendard" pitchFamily="34" charset="-127"/>
+                <a:cs typeface="Pretendard" pitchFamily="34" charset="-120"/>
+              </a:rPr>
+              <a:t>지원 직무</a:t>
+            </a:r>
+            <a:endParaRPr lang="en-US" sz="800" dirty="0"/>
+          </a:p>
+        </p:txBody>
+      </p:sp>
+      <p:sp>
+        <p:nvSpPr>
+          <p:cNvPr id="26" name="Utility 기술 (건축, BIM/5D)"/>
+          <p:cNvSpPr txBox="1"/>
+          <p:nvPr/>
+        </p:nvSpPr>
+        <p:spPr>
+          <a:xfrm>
+            <a:off x="609600" y="6134695"/>
+            <a:ext cx="1657719" cy="165100"/>
+          </a:xfrm>
+          <a:prstGeom prst="rect">
+            <a:avLst/>
+          </a:prstGeom>
+          <a:noFill/>
+          <a:ln/>
+        </p:spPr>
+        <p:txBody>
+          <a:bodyPr wrap="none" lIns="0" tIns="0" rIns="0" bIns="0" rtlCol="0" anchor="ctr"/>
+          <a:lstStyle/>
+          <a:p>
+            <a:pPr algn="l" indent="0" marL="0">
+              <a:buNone/>
+            </a:pPr>
+            <a:r>
+              <a:rPr lang="ko-KR" altLang="en-US" sz="1100" b="1" spc="-12" kern="0" dirty="0">
+                <a:solidFill>
+                  <a:srgbClr val="102A4C"/>
+                </a:solidFill>
+                <a:latin typeface="Pretendard" pitchFamily="34" charset="0"/>
+                <a:ea typeface="Pretendard" pitchFamily="34" charset="-127"/>
+                <a:cs typeface="Pretendard" pitchFamily="34" charset="-120"/>
+              </a:rPr>
+              <a:t>Utility 기술 (건축, BIM/5D)</a:t>
+            </a:r>
+            <a:endParaRPr lang="en-US" sz="1100" dirty="0"/>
+          </a:p>
+        </p:txBody>
+      </p:sp>
+      <p:sp>
+        <p:nvSpPr>
+          <p:cNvPr id="27" name="발표일"/>
+          <p:cNvSpPr txBox="1"/>
+          <p:nvPr/>
+        </p:nvSpPr>
+        <p:spPr>
+          <a:xfrm>
+            <a:off x="2687836" y="5949355"/>
+            <a:ext cx="320377" cy="120650"/>
+          </a:xfrm>
+          <a:prstGeom prst="rect">
+            <a:avLst/>
+          </a:prstGeom>
+          <a:noFill/>
+          <a:ln/>
+        </p:spPr>
+        <p:txBody>
+          <a:bodyPr wrap="none" lIns="0" tIns="0" rIns="0" bIns="0" rtlCol="0" anchor="ctr"/>
+          <a:lstStyle/>
+          <a:p>
+            <a:pPr algn="l" indent="0" marL="0">
+              <a:buNone/>
+            </a:pPr>
+            <a:r>
+              <a:rPr lang="ko-KR" altLang="en-US" sz="800" b="1" spc="16" kern="0" dirty="0">
+                <a:solidFill>
+                  <a:srgbClr val="737C8B"/>
+                </a:solidFill>
+                <a:latin typeface="Pretendard" pitchFamily="34" charset="0"/>
+                <a:ea typeface="Pretendard" pitchFamily="34" charset="-127"/>
+                <a:cs typeface="Pretendard" pitchFamily="34" charset="-120"/>
+              </a:rPr>
+              <a:t>발표일</a:t>
+            </a:r>
+            <a:endParaRPr lang="en-US" sz="800" dirty="0"/>
+          </a:p>
+        </p:txBody>
+      </p:sp>
+      <p:sp>
+        <p:nvSpPr>
+          <p:cNvPr id="28" name="2026. 12. 3."/>
+          <p:cNvSpPr txBox="1"/>
+          <p:nvPr/>
+        </p:nvSpPr>
+        <p:spPr>
+          <a:xfrm>
+            <a:off x="2687836" y="6134695"/>
+            <a:ext cx="855067" cy="165100"/>
+          </a:xfrm>
+          <a:prstGeom prst="rect">
+            <a:avLst/>
+          </a:prstGeom>
+          <a:noFill/>
+          <a:ln/>
+        </p:spPr>
+        <p:txBody>
+          <a:bodyPr wrap="none" lIns="0" tIns="0" rIns="0" bIns="0" rtlCol="0" anchor="ctr"/>
+          <a:lstStyle/>
+          <a:p>
+            <a:pPr algn="l" indent="0" marL="0">
+              <a:buNone/>
+            </a:pPr>
+            <a:r>
+              <a:rPr lang="ko-KR" altLang="en-US" sz="1100" b="1" spc="29" kern="0" dirty="0">
+                <a:solidFill>
+                  <a:srgbClr val="102A4C"/>
+                </a:solidFill>
+                <a:latin typeface="Pretendard" pitchFamily="34" charset="0"/>
+                <a:ea typeface="Pretendard" pitchFamily="34" charset="-127"/>
+                <a:cs typeface="Pretendard" pitchFamily="34" charset="-120"/>
+              </a:rPr>
+              <a:t>2026. 12. 3.</a:t>
+            </a:r>
+            <a:endParaRPr lang="en-US" sz="1100" dirty="0"/>
+          </a:p>
+        </p:txBody>
+      </p:sp>
+      <p:sp>
+        <p:nvSpPr>
+          <p:cNvPr id="29" name="지원자"/>
+          <p:cNvSpPr txBox="1"/>
+          <p:nvPr/>
+        </p:nvSpPr>
+        <p:spPr>
+          <a:xfrm>
+            <a:off x="4006453" y="5949355"/>
+            <a:ext cx="320377" cy="120650"/>
+          </a:xfrm>
+          <a:prstGeom prst="rect">
+            <a:avLst/>
+          </a:prstGeom>
+          <a:noFill/>
+          <a:ln/>
+        </p:spPr>
+        <p:txBody>
+          <a:bodyPr wrap="none" lIns="0" tIns="0" rIns="0" bIns="0" rtlCol="0" anchor="ctr"/>
+          <a:lstStyle/>
+          <a:p>
+            <a:pPr algn="l" indent="0" marL="0">
+              <a:buNone/>
+            </a:pPr>
+            <a:r>
+              <a:rPr lang="ko-KR" altLang="en-US" sz="800" b="1" spc="16" kern="0" dirty="0">
+                <a:solidFill>
+                  <a:srgbClr val="737C8B"/>
+                </a:solidFill>
+                <a:latin typeface="Pretendard" pitchFamily="34" charset="0"/>
+                <a:ea typeface="Pretendard" pitchFamily="34" charset="-127"/>
+                <a:cs typeface="Pretendard" pitchFamily="34" charset="-120"/>
+              </a:rPr>
+              <a:t>지원자</a:t>
+            </a:r>
+            <a:endParaRPr lang="en-US" sz="800" dirty="0"/>
+          </a:p>
+        </p:txBody>
+      </p:sp>
+      <p:sp>
+        <p:nvSpPr>
+          <p:cNvPr id="30" name="○○○"/>
+          <p:cNvSpPr txBox="1"/>
+          <p:nvPr/>
+        </p:nvSpPr>
+        <p:spPr>
+          <a:xfrm>
+            <a:off x="4006453" y="6134695"/>
+            <a:ext cx="421184" cy="165100"/>
+          </a:xfrm>
+          <a:prstGeom prst="rect">
+            <a:avLst/>
+          </a:prstGeom>
+          <a:noFill/>
+          <a:ln/>
+        </p:spPr>
+        <p:txBody>
+          <a:bodyPr wrap="none" lIns="0" tIns="0" rIns="0" bIns="0" rtlCol="0" anchor="ctr"/>
+          <a:lstStyle/>
+          <a:p>
+            <a:pPr algn="l" indent="0" marL="0">
+              <a:buNone/>
+            </a:pPr>
+            <a:r>
+              <a:rPr lang="ko-KR" altLang="en-US" sz="1100" b="1" spc="-12" kern="0" dirty="0">
+                <a:solidFill>
+                  <a:srgbClr val="102A4C"/>
+                </a:solidFill>
+                <a:latin typeface="Pretendard" pitchFamily="34" charset="0"/>
+                <a:ea typeface="Pretendard" pitchFamily="34" charset="-127"/>
+                <a:cs typeface="Pretendard" pitchFamily="34" charset="-120"/>
+              </a:rPr>
+              <a:t>○○○</a:t>
+            </a:r>
+            <a:endParaRPr lang="en-US" sz="1100" dirty="0"/>
+          </a:p>
+        </p:txBody>
+      </p:sp>
+      <p:sp>
+        <p:nvSpPr>
+          <p:cNvPr id="31" name="자동 생성"/>
+          <p:cNvSpPr txBox="1"/>
+          <p:nvPr/>
+        </p:nvSpPr>
+        <p:spPr>
+          <a:xfrm>
+            <a:off x="10154245" y="1590080"/>
+            <a:ext cx="417909" cy="120650"/>
+          </a:xfrm>
+          <a:prstGeom prst="rect">
+            <a:avLst/>
+          </a:prstGeom>
+          <a:noFill/>
+          <a:ln/>
+        </p:spPr>
+        <p:txBody>
+          <a:bodyPr wrap="none" lIns="0" tIns="0" rIns="0" bIns="0" rtlCol="0" anchor="ctr"/>
+          <a:lstStyle/>
+          <a:p>
+            <a:pPr algn="l" indent="0" marL="0">
+              <a:buNone/>
+            </a:pPr>
+            <a:r>
+              <a:rPr lang="ko-KR" altLang="en-US" sz="800" b="1" spc="-12" kern="0" dirty="0">
+                <a:solidFill>
+                  <a:srgbClr val="102A4C"/>
+                </a:solidFill>
+                <a:latin typeface="Pretendard" pitchFamily="34" charset="0"/>
+                <a:ea typeface="Pretendard" pitchFamily="34" charset="-127"/>
+                <a:cs typeface="Pretendard" pitchFamily="34" charset="-120"/>
+              </a:rPr>
+              <a:t>자동 생성</a:t>
+            </a:r>
+            <a:endParaRPr lang="en-US" sz="800" dirty="0"/>
+          </a:p>
+        </p:txBody>
+      </p:sp>
+      <p:sp>
+        <p:nvSpPr>
+          <p:cNvPr id="32" name="2D"/>
+          <p:cNvSpPr txBox="1"/>
+          <p:nvPr/>
+        </p:nvSpPr>
+        <p:spPr>
+          <a:xfrm>
+            <a:off x="7467600" y="2926358"/>
+            <a:ext cx="172145" cy="101600"/>
+          </a:xfrm>
+          <a:prstGeom prst="rect">
+            <a:avLst/>
+          </a:prstGeom>
+          <a:noFill/>
+          <a:ln/>
+        </p:spPr>
+        <p:txBody>
+          <a:bodyPr wrap="none" lIns="0" tIns="0" rIns="0" bIns="0" rtlCol="0" anchor="ctr"/>
+          <a:lstStyle/>
+          <a:p>
+            <a:pPr algn="l" indent="0" marL="0">
+              <a:buNone/>
+            </a:pPr>
+            <a:r>
+              <a:rPr lang="ko-KR" altLang="en-US" sz="700" spc="14" kern="0" dirty="0">
+                <a:solidFill>
+                  <a:srgbClr val="FFFFFF"/>
                 </a:solidFill>
                 <a:latin typeface="Pretendard ExtraBold" pitchFamily="34" charset="0"/>
                 <a:ea typeface="Pretendard ExtraBold" pitchFamily="34" charset="-127"/>
                 <a:cs typeface="Pretendard ExtraBold" pitchFamily="34" charset="-120"/>
               </a:rPr>
-              <a:t>그게 SK하이닉스에서 왜 의미 있는가</a:t>
-            </a:r>
-            <a:endParaRPr lang="en-US" sz="2300" dirty="0"/>
-          </a:p>
-        </p:txBody>
-      </p:sp>
-      <p:sp>
-        <p:nvSpPr>
-          <p:cNvPr id="45" name="문제"/>
-          <p:cNvSpPr txBox="1"/>
-          <p:nvPr/>
-        </p:nvSpPr>
-        <p:spPr>
-          <a:xfrm>
-            <a:off x="609600" y="1975545"/>
-            <a:ext cx="308173" cy="184150"/>
+              <a:t>2D</a:t>
+            </a:r>
+            <a:endParaRPr lang="en-US" sz="700" dirty="0"/>
+          </a:p>
+        </p:txBody>
+      </p:sp>
+      <p:sp>
+        <p:nvSpPr>
+          <p:cNvPr id="33" name="평면도 · 입면도 이미지"/>
+          <p:cNvSpPr txBox="1"/>
+          <p:nvPr/>
+        </p:nvSpPr>
+        <p:spPr>
+          <a:xfrm>
+            <a:off x="7703245" y="2917230"/>
+            <a:ext cx="922778" cy="120650"/>
           </a:xfrm>
           <a:prstGeom prst="rect">
             <a:avLst/>
@@ -3473,30 +2891,69 @@
               <a:buNone/>
             </a:pPr>
             <a:r>
-              <a:rPr lang="ko-KR" altLang="en-US" sz="1200" spc="-24" kern="0" dirty="0">
-                <a:solidFill>
-                  <a:srgbClr val="102A4C"/>
+              <a:rPr lang="ko-KR" altLang="en-US" sz="800" spc="-12" kern="0" dirty="0">
+                <a:solidFill>
+                  <a:srgbClr val="3F4654"/>
+                </a:solidFill>
+                <a:latin typeface="Pretendard SemiBold" pitchFamily="34" charset="0"/>
+                <a:ea typeface="Pretendard SemiBold" pitchFamily="34" charset="-127"/>
+                <a:cs typeface="Pretendard SemiBold" pitchFamily="34" charset="-120"/>
+              </a:rPr>
+              <a:t>평면도 · 입면도 이미지</a:t>
+            </a:r>
+            <a:endParaRPr lang="en-US" sz="800" dirty="0"/>
+          </a:p>
+        </p:txBody>
+      </p:sp>
+      <p:sp>
+        <p:nvSpPr>
+          <p:cNvPr id="34" name="3D"/>
+          <p:cNvSpPr txBox="1"/>
+          <p:nvPr/>
+        </p:nvSpPr>
+        <p:spPr>
+          <a:xfrm>
+            <a:off x="7467600" y="6139458"/>
+            <a:ext cx="174625" cy="101600"/>
+          </a:xfrm>
+          <a:prstGeom prst="rect">
+            <a:avLst/>
+          </a:prstGeom>
+          <a:noFill/>
+          <a:ln/>
+        </p:spPr>
+        <p:txBody>
+          <a:bodyPr wrap="none" lIns="0" tIns="0" rIns="0" bIns="0" rtlCol="0" anchor="ctr"/>
+          <a:lstStyle/>
+          <a:p>
+            <a:pPr algn="l" indent="0" marL="0">
+              <a:buNone/>
+            </a:pPr>
+            <a:r>
+              <a:rPr lang="ko-KR" altLang="en-US" sz="700" spc="14" kern="0" dirty="0">
+                <a:solidFill>
+                  <a:srgbClr val="FFFFFF"/>
                 </a:solidFill>
                 <a:latin typeface="Pretendard ExtraBold" pitchFamily="34" charset="0"/>
                 <a:ea typeface="Pretendard ExtraBold" pitchFamily="34" charset="-127"/>
                 <a:cs typeface="Pretendard ExtraBold" pitchFamily="34" charset="-120"/>
               </a:rPr>
-              <a:t>문제</a:t>
-            </a:r>
-            <a:endParaRPr lang="en-US" sz="1200" dirty="0"/>
-          </a:p>
-        </p:txBody>
-      </p:sp>
-      <p:sp>
-        <p:nvSpPr>
-          <p:cNvPr id="46" name="해결"/>
-          <p:cNvSpPr txBox="1"/>
-          <p:nvPr/>
-        </p:nvSpPr>
-        <p:spPr>
-          <a:xfrm>
-            <a:off x="5105400" y="1975545"/>
-            <a:ext cx="308173" cy="184150"/>
+              <a:t>3D</a:t>
+            </a:r>
+            <a:endParaRPr lang="en-US" sz="700" dirty="0"/>
+          </a:p>
+        </p:txBody>
+      </p:sp>
+      <p:sp>
+        <p:nvSpPr>
+          <p:cNvPr id="35" name="BIM 모델"/>
+          <p:cNvSpPr txBox="1"/>
+          <p:nvPr/>
+        </p:nvSpPr>
+        <p:spPr>
+          <a:xfrm>
+            <a:off x="7705725" y="6130330"/>
+            <a:ext cx="420390" cy="120650"/>
           </a:xfrm>
           <a:prstGeom prst="rect">
             <a:avLst/>
@@ -3512,178 +2969,7 @@
               <a:buNone/>
             </a:pPr>
             <a:r>
-              <a:rPr lang="ko-KR" altLang="en-US" sz="1200" spc="-24" kern="0" dirty="0">
-                <a:solidFill>
-                  <a:srgbClr val="102A4C"/>
-                </a:solidFill>
-                <a:latin typeface="Pretendard ExtraBold" pitchFamily="34" charset="0"/>
-                <a:ea typeface="Pretendard ExtraBold" pitchFamily="34" charset="-127"/>
-                <a:cs typeface="Pretendard ExtraBold" pitchFamily="34" charset="-120"/>
-              </a:rPr>
-              <a:t>해결</a:t>
-            </a:r>
-            <a:endParaRPr lang="en-US" sz="1200" dirty="0"/>
-          </a:p>
-        </p:txBody>
-      </p:sp>
-      <p:sp>
-        <p:nvSpPr>
-          <p:cNvPr id="47" name="의미"/>
-          <p:cNvSpPr txBox="1"/>
-          <p:nvPr/>
-        </p:nvSpPr>
-        <p:spPr>
-          <a:xfrm>
-            <a:off x="9601200" y="1975545"/>
-            <a:ext cx="308173" cy="184150"/>
-          </a:xfrm>
-          <a:prstGeom prst="rect">
-            <a:avLst/>
-          </a:prstGeom>
-          <a:noFill/>
-          <a:ln/>
-        </p:spPr>
-        <p:txBody>
-          <a:bodyPr wrap="none" lIns="0" tIns="0" rIns="0" bIns="0" rtlCol="0" anchor="ctr"/>
-          <a:lstStyle/>
-          <a:p>
-            <a:pPr algn="l" indent="0" marL="0">
-              <a:buNone/>
-            </a:pPr>
-            <a:r>
-              <a:rPr lang="ko-KR" altLang="en-US" sz="1200" spc="-24" kern="0" dirty="0">
-                <a:solidFill>
-                  <a:srgbClr val="102A4C"/>
-                </a:solidFill>
-                <a:latin typeface="Pretendard ExtraBold" pitchFamily="34" charset="0"/>
-                <a:ea typeface="Pretendard ExtraBold" pitchFamily="34" charset="-127"/>
-                <a:cs typeface="Pretendard ExtraBold" pitchFamily="34" charset="-120"/>
-              </a:rPr>
-              <a:t>의미</a:t>
-            </a:r>
-            <a:endParaRPr lang="en-US" sz="1200" dirty="0"/>
-          </a:p>
-        </p:txBody>
-      </p:sp>
-      <p:sp>
-        <p:nvSpPr>
-          <p:cNvPr id="48" name="01"/>
-          <p:cNvSpPr txBox="1"/>
-          <p:nvPr/>
-        </p:nvSpPr>
-        <p:spPr>
-          <a:xfrm>
-            <a:off x="812800" y="2619474"/>
-            <a:ext cx="569416" cy="482600"/>
-          </a:xfrm>
-          <a:prstGeom prst="rect">
-            <a:avLst/>
-          </a:prstGeom>
-          <a:noFill/>
-          <a:ln/>
-        </p:spPr>
-        <p:txBody>
-          <a:bodyPr wrap="none" lIns="0" tIns="0" rIns="0" bIns="0" rtlCol="0" anchor="ctr"/>
-          <a:lstStyle/>
-          <a:p>
-            <a:pPr algn="l" indent="0" marL="0">
-              <a:buNone/>
-            </a:pPr>
-            <a:r>
-              <a:rPr lang="ko-KR" altLang="en-US" sz="3200" spc="185" kern="0" dirty="0">
-                <a:solidFill>
-                  <a:srgbClr val="102A4C"/>
-                </a:solidFill>
-                <a:latin typeface="Pretendard ExtraBold" pitchFamily="34" charset="0"/>
-                <a:ea typeface="Pretendard ExtraBold" pitchFamily="34" charset="-127"/>
-                <a:cs typeface="Pretendard ExtraBold" pitchFamily="34" charset="-120"/>
-              </a:rPr>
-              <a:t>01</a:t>
-            </a:r>
-            <a:endParaRPr lang="en-US" sz="3200" dirty="0"/>
-          </a:p>
-        </p:txBody>
-      </p:sp>
-      <p:sp>
-        <p:nvSpPr>
-          <p:cNvPr id="49" name="연구 배경 및문제 정의"/>
-          <p:cNvSpPr txBox="1"/>
-          <p:nvPr/>
-        </p:nvSpPr>
-        <p:spPr>
-          <a:xfrm>
-            <a:off x="812800" y="3422154"/>
-            <a:ext cx="913523" cy="502841"/>
-          </a:xfrm>
-          <a:prstGeom prst="rect">
-            <a:avLst/>
-          </a:prstGeom>
-          <a:noFill/>
-          <a:ln/>
-        </p:spPr>
-        <p:txBody>
-          <a:bodyPr wrap="none" lIns="0" tIns="0" rIns="0" bIns="0" rtlCol="0" anchor="t"/>
-          <a:lstStyle/>
-          <a:p>
-            <a:pPr algn="l" indent="0" marL="0">
-              <a:lnSpc>
-                <a:spcPts val="1980"/>
-              </a:lnSpc>
-              <a:buNone/>
-            </a:pPr>
-            <a:r>
-              <a:rPr lang="ko-KR" altLang="en-US" sz="1500" spc="-53" kern="0" dirty="0">
-                <a:solidFill>
-                  <a:srgbClr val="102A4C"/>
-                </a:solidFill>
-                <a:latin typeface="Pretendard ExtraBold" pitchFamily="34" charset="0"/>
-                <a:ea typeface="Pretendard ExtraBold" pitchFamily="34" charset="-127"/>
-                <a:cs typeface="Pretendard ExtraBold" pitchFamily="34" charset="-120"/>
-              </a:rPr>
-              <a:t>연구 배경 및</a:t>
-            </a:r>
-            <a:br/>
-            <a:r>
-              <a:rPr lang="ko-KR" altLang="en-US" sz="1500" spc="-53" kern="0" dirty="0">
-                <a:solidFill>
-                  <a:srgbClr val="102A4C"/>
-                </a:solidFill>
-                <a:latin typeface="Pretendard ExtraBold" pitchFamily="34" charset="0"/>
-                <a:ea typeface="Pretendard ExtraBold" pitchFamily="34" charset="-127"/>
-                <a:cs typeface="Pretendard ExtraBold" pitchFamily="34" charset="-120"/>
-              </a:rPr>
-              <a:t>문제 정의</a:t>
-            </a:r>
-            <a:endParaRPr lang="en-US" sz="1500" dirty="0"/>
-          </a:p>
-        </p:txBody>
-      </p:sp>
-      <p:sp>
-        <p:nvSpPr>
-          <p:cNvPr id="50" name="왜 이 연구가 필요한가"/>
-          <p:cNvSpPr txBox="1"/>
-          <p:nvPr/>
-        </p:nvSpPr>
-        <p:spPr>
-          <a:xfrm>
-            <a:off x="812800" y="4626074"/>
-            <a:ext cx="1221782" cy="165100"/>
-          </a:xfrm>
-          <a:prstGeom prst="rect">
-            <a:avLst/>
-          </a:prstGeom>
-          <a:noFill/>
-          <a:ln/>
-        </p:spPr>
-        <p:txBody>
-          <a:bodyPr wrap="none" lIns="0" tIns="0" rIns="0" bIns="0" rtlCol="0" anchor="ctr"/>
-          <a:lstStyle/>
-          <a:p>
-            <a:pPr algn="l" indent="0" marL="0">
-              <a:buNone/>
-            </a:pPr>
-            <a:r>
-              <a:rPr lang="ko-KR" altLang="en-US" sz="1100" spc="-22" kern="0" dirty="0">
+              <a:rPr lang="ko-KR" altLang="en-US" sz="800" spc="-12" kern="0" dirty="0">
                 <a:solidFill>
                   <a:srgbClr val="3F4654"/>
                 </a:solidFill>
@@ -3691,653 +2977,9 @@
                 <a:ea typeface="Pretendard SemiBold" pitchFamily="34" charset="-127"/>
                 <a:cs typeface="Pretendard SemiBold" pitchFamily="34" charset="-120"/>
               </a:rPr>
-              <a:t>왜 이 연구가 필요한가</a:t>
-            </a:r>
-            <a:endParaRPr lang="en-US" sz="1100" dirty="0"/>
-          </a:p>
-        </p:txBody>
-      </p:sp>
-      <p:sp>
-        <p:nvSpPr>
-          <p:cNvPr id="51" name="02"/>
-          <p:cNvSpPr txBox="1"/>
-          <p:nvPr/>
-        </p:nvSpPr>
-        <p:spPr>
-          <a:xfrm>
-            <a:off x="2921000" y="2619474"/>
-            <a:ext cx="569416" cy="482600"/>
-          </a:xfrm>
-          <a:prstGeom prst="rect">
-            <a:avLst/>
-          </a:prstGeom>
-          <a:noFill/>
-          <a:ln/>
-        </p:spPr>
-        <p:txBody>
-          <a:bodyPr wrap="none" lIns="0" tIns="0" rIns="0" bIns="0" rtlCol="0" anchor="ctr"/>
-          <a:lstStyle/>
-          <a:p>
-            <a:pPr algn="l" indent="0" marL="0">
-              <a:buNone/>
-            </a:pPr>
-            <a:r>
-              <a:rPr lang="ko-KR" altLang="en-US" sz="3200" spc="-38" kern="0" dirty="0">
-                <a:solidFill>
-                  <a:srgbClr val="102A4C"/>
-                </a:solidFill>
-                <a:latin typeface="Pretendard ExtraBold" pitchFamily="34" charset="0"/>
-                <a:ea typeface="Pretendard ExtraBold" pitchFamily="34" charset="-127"/>
-                <a:cs typeface="Pretendard ExtraBold" pitchFamily="34" charset="-120"/>
-              </a:rPr>
-              <a:t>02</a:t>
-            </a:r>
-            <a:endParaRPr lang="en-US" sz="3200" dirty="0"/>
-          </a:p>
-        </p:txBody>
-      </p:sp>
-      <p:sp>
-        <p:nvSpPr>
-          <p:cNvPr id="52" name="기존 연구 한계 및연구 목표"/>
-          <p:cNvSpPr txBox="1"/>
-          <p:nvPr/>
-        </p:nvSpPr>
-        <p:spPr>
-          <a:xfrm>
-            <a:off x="2921000" y="3422154"/>
-            <a:ext cx="1286462" cy="502841"/>
-          </a:xfrm>
-          <a:prstGeom prst="rect">
-            <a:avLst/>
-          </a:prstGeom>
-          <a:noFill/>
-          <a:ln/>
-        </p:spPr>
-        <p:txBody>
-          <a:bodyPr wrap="none" lIns="0" tIns="0" rIns="0" bIns="0" rtlCol="0" anchor="t"/>
-          <a:lstStyle/>
-          <a:p>
-            <a:pPr algn="l" indent="0" marL="0">
-              <a:lnSpc>
-                <a:spcPts val="1980"/>
-              </a:lnSpc>
-              <a:buNone/>
-            </a:pPr>
-            <a:r>
-              <a:rPr lang="ko-KR" altLang="en-US" sz="1500" spc="-53" kern="0" dirty="0">
-                <a:solidFill>
-                  <a:srgbClr val="102A4C"/>
-                </a:solidFill>
-                <a:latin typeface="Pretendard ExtraBold" pitchFamily="34" charset="0"/>
-                <a:ea typeface="Pretendard ExtraBold" pitchFamily="34" charset="-127"/>
-                <a:cs typeface="Pretendard ExtraBold" pitchFamily="34" charset="-120"/>
-              </a:rPr>
-              <a:t>기존 연구 한계 및</a:t>
-            </a:r>
-            <a:br/>
-            <a:r>
-              <a:rPr lang="ko-KR" altLang="en-US" sz="1500" spc="-53" kern="0" dirty="0">
-                <a:solidFill>
-                  <a:srgbClr val="102A4C"/>
-                </a:solidFill>
-                <a:latin typeface="Pretendard ExtraBold" pitchFamily="34" charset="0"/>
-                <a:ea typeface="Pretendard ExtraBold" pitchFamily="34" charset="-127"/>
-                <a:cs typeface="Pretendard ExtraBold" pitchFamily="34" charset="-120"/>
-              </a:rPr>
-              <a:t>연구 목표</a:t>
-            </a:r>
-            <a:endParaRPr lang="en-US" sz="1500" dirty="0"/>
-          </a:p>
-        </p:txBody>
-      </p:sp>
-      <p:sp>
-        <p:nvSpPr>
-          <p:cNvPr id="53" name="기존 연구로는 왜 안 되는가,그래서 무엇을 목표로 했는가"/>
-          <p:cNvSpPr txBox="1"/>
-          <p:nvPr/>
-        </p:nvSpPr>
-        <p:spPr>
-          <a:xfrm>
-            <a:off x="2921000" y="4588669"/>
-            <a:ext cx="1596825" cy="405011"/>
-          </a:xfrm>
-          <a:prstGeom prst="rect">
-            <a:avLst/>
-          </a:prstGeom>
-          <a:noFill/>
-          <a:ln/>
-        </p:spPr>
-        <p:txBody>
-          <a:bodyPr wrap="none" lIns="0" tIns="0" rIns="0" bIns="0" rtlCol="0" anchor="t"/>
-          <a:lstStyle/>
-          <a:p>
-            <a:pPr algn="l" indent="0" marL="0">
-              <a:lnSpc>
-                <a:spcPts val="1595"/>
-              </a:lnSpc>
-              <a:buNone/>
-            </a:pPr>
-            <a:r>
-              <a:rPr lang="ko-KR" altLang="en-US" sz="1100" spc="-22" kern="0" dirty="0">
-                <a:solidFill>
-                  <a:srgbClr val="3F4654"/>
-                </a:solidFill>
-                <a:latin typeface="Pretendard SemiBold" pitchFamily="34" charset="0"/>
-                <a:ea typeface="Pretendard SemiBold" pitchFamily="34" charset="-127"/>
-                <a:cs typeface="Pretendard SemiBold" pitchFamily="34" charset="-120"/>
-              </a:rPr>
-              <a:t>기존 연구로는 왜 안 되는가,</a:t>
-            </a:r>
-            <a:br/>
-            <a:r>
-              <a:rPr lang="ko-KR" altLang="en-US" sz="1100" spc="-22" kern="0" dirty="0">
-                <a:solidFill>
-                  <a:srgbClr val="3F4654"/>
-                </a:solidFill>
-                <a:latin typeface="Pretendard SemiBold" pitchFamily="34" charset="0"/>
-                <a:ea typeface="Pretendard SemiBold" pitchFamily="34" charset="-127"/>
-                <a:cs typeface="Pretendard SemiBold" pitchFamily="34" charset="-120"/>
-              </a:rPr>
-              <a:t>그래서 무엇을 목표로 했는가</a:t>
-            </a:r>
-            <a:endParaRPr lang="en-US" sz="1100" dirty="0"/>
-          </a:p>
-        </p:txBody>
-      </p:sp>
-      <p:sp>
-        <p:nvSpPr>
-          <p:cNvPr id="54" name="03"/>
-          <p:cNvSpPr txBox="1"/>
-          <p:nvPr/>
-        </p:nvSpPr>
-        <p:spPr>
-          <a:xfrm>
-            <a:off x="5308600" y="2619474"/>
-            <a:ext cx="569416" cy="482600"/>
-          </a:xfrm>
-          <a:prstGeom prst="rect">
-            <a:avLst/>
-          </a:prstGeom>
-          <a:noFill/>
-          <a:ln/>
-        </p:spPr>
-        <p:txBody>
-          <a:bodyPr wrap="none" lIns="0" tIns="0" rIns="0" bIns="0" rtlCol="0" anchor="ctr"/>
-          <a:lstStyle/>
-          <a:p>
-            <a:pPr algn="l" indent="0" marL="0">
-              <a:buNone/>
-            </a:pPr>
-            <a:r>
-              <a:rPr lang="ko-KR" altLang="en-US" sz="3200" spc="-83" kern="0" dirty="0">
-                <a:solidFill>
-                  <a:srgbClr val="102A4C"/>
-                </a:solidFill>
-                <a:latin typeface="Pretendard ExtraBold" pitchFamily="34" charset="0"/>
-                <a:ea typeface="Pretendard ExtraBold" pitchFamily="34" charset="-127"/>
-                <a:cs typeface="Pretendard ExtraBold" pitchFamily="34" charset="-120"/>
-              </a:rPr>
-              <a:t>03</a:t>
-            </a:r>
-            <a:endParaRPr lang="en-US" sz="3200" dirty="0"/>
-          </a:p>
-        </p:txBody>
-      </p:sp>
-      <p:sp>
-        <p:nvSpPr>
-          <p:cNvPr id="55" name="연구 방법"/>
-          <p:cNvSpPr txBox="1"/>
-          <p:nvPr/>
-        </p:nvSpPr>
-        <p:spPr>
-          <a:xfrm>
-            <a:off x="5308600" y="3444974"/>
-            <a:ext cx="718641" cy="228600"/>
-          </a:xfrm>
-          <a:prstGeom prst="rect">
-            <a:avLst/>
-          </a:prstGeom>
-          <a:noFill/>
-          <a:ln/>
-        </p:spPr>
-        <p:txBody>
-          <a:bodyPr wrap="none" lIns="0" tIns="0" rIns="0" bIns="0" rtlCol="0" anchor="ctr"/>
-          <a:lstStyle/>
-          <a:p>
-            <a:pPr algn="l" indent="0" marL="0">
-              <a:buNone/>
-            </a:pPr>
-            <a:r>
-              <a:rPr lang="ko-KR" altLang="en-US" sz="1500" spc="-53" kern="0" dirty="0">
-                <a:solidFill>
-                  <a:srgbClr val="102A4C"/>
-                </a:solidFill>
-                <a:latin typeface="Pretendard ExtraBold" pitchFamily="34" charset="0"/>
-                <a:ea typeface="Pretendard ExtraBold" pitchFamily="34" charset="-127"/>
-                <a:cs typeface="Pretendard ExtraBold" pitchFamily="34" charset="-120"/>
-              </a:rPr>
-              <a:t>연구 방법</a:t>
-            </a:r>
-            <a:endParaRPr lang="en-US" sz="1500" dirty="0"/>
-          </a:p>
-        </p:txBody>
-      </p:sp>
-      <p:sp>
-        <p:nvSpPr>
-          <p:cNvPr id="56" name="어떻게 해결했는가"/>
-          <p:cNvSpPr txBox="1"/>
-          <p:nvPr/>
-        </p:nvSpPr>
-        <p:spPr>
-          <a:xfrm>
-            <a:off x="5308600" y="4626074"/>
-            <a:ext cx="1032367" cy="165100"/>
-          </a:xfrm>
-          <a:prstGeom prst="rect">
-            <a:avLst/>
-          </a:prstGeom>
-          <a:noFill/>
-          <a:ln/>
-        </p:spPr>
-        <p:txBody>
-          <a:bodyPr wrap="none" lIns="0" tIns="0" rIns="0" bIns="0" rtlCol="0" anchor="ctr"/>
-          <a:lstStyle/>
-          <a:p>
-            <a:pPr algn="l" indent="0" marL="0">
-              <a:buNone/>
-            </a:pPr>
-            <a:r>
-              <a:rPr lang="ko-KR" altLang="en-US" sz="1100" spc="-22" kern="0" dirty="0">
-                <a:solidFill>
-                  <a:srgbClr val="3F4654"/>
-                </a:solidFill>
-                <a:latin typeface="Pretendard SemiBold" pitchFamily="34" charset="0"/>
-                <a:ea typeface="Pretendard SemiBold" pitchFamily="34" charset="-127"/>
-                <a:cs typeface="Pretendard SemiBold" pitchFamily="34" charset="-120"/>
-              </a:rPr>
-              <a:t>어떻게 해결했는가</a:t>
-            </a:r>
-            <a:endParaRPr lang="en-US" sz="1100" dirty="0"/>
-          </a:p>
-        </p:txBody>
-      </p:sp>
-      <p:sp>
-        <p:nvSpPr>
-          <p:cNvPr id="57" name="04"/>
-          <p:cNvSpPr txBox="1"/>
-          <p:nvPr/>
-        </p:nvSpPr>
-        <p:spPr>
-          <a:xfrm>
-            <a:off x="7416800" y="2619474"/>
-            <a:ext cx="569416" cy="482600"/>
-          </a:xfrm>
-          <a:prstGeom prst="rect">
-            <a:avLst/>
-          </a:prstGeom>
-          <a:noFill/>
-          <a:ln/>
-        </p:spPr>
-        <p:txBody>
-          <a:bodyPr wrap="none" lIns="0" tIns="0" rIns="0" bIns="0" rtlCol="0" anchor="ctr"/>
-          <a:lstStyle/>
-          <a:p>
-            <a:pPr algn="l" indent="0" marL="0">
-              <a:buNone/>
-            </a:pPr>
-            <a:r>
-              <a:rPr lang="ko-KR" altLang="en-US" sz="3200" spc="-118" kern="0" dirty="0">
-                <a:solidFill>
-                  <a:srgbClr val="102A4C"/>
-                </a:solidFill>
-                <a:latin typeface="Pretendard ExtraBold" pitchFamily="34" charset="0"/>
-                <a:ea typeface="Pretendard ExtraBold" pitchFamily="34" charset="-127"/>
-                <a:cs typeface="Pretendard ExtraBold" pitchFamily="34" charset="-120"/>
-              </a:rPr>
-              <a:t>04</a:t>
-            </a:r>
-            <a:endParaRPr lang="en-US" sz="3200" dirty="0"/>
-          </a:p>
-        </p:txBody>
-      </p:sp>
-      <p:sp>
-        <p:nvSpPr>
-          <p:cNvPr id="58" name="연구 결과 및 기여"/>
-          <p:cNvSpPr txBox="1"/>
-          <p:nvPr/>
-        </p:nvSpPr>
-        <p:spPr>
-          <a:xfrm>
-            <a:off x="7416800" y="3444974"/>
-            <a:ext cx="1286462" cy="228600"/>
-          </a:xfrm>
-          <a:prstGeom prst="rect">
-            <a:avLst/>
-          </a:prstGeom>
-          <a:noFill/>
-          <a:ln/>
-        </p:spPr>
-        <p:txBody>
-          <a:bodyPr wrap="none" lIns="0" tIns="0" rIns="0" bIns="0" rtlCol="0" anchor="ctr"/>
-          <a:lstStyle/>
-          <a:p>
-            <a:pPr algn="l" indent="0" marL="0">
-              <a:buNone/>
-            </a:pPr>
-            <a:r>
-              <a:rPr lang="ko-KR" altLang="en-US" sz="1500" spc="-53" kern="0" dirty="0">
-                <a:solidFill>
-                  <a:srgbClr val="102A4C"/>
-                </a:solidFill>
-                <a:latin typeface="Pretendard ExtraBold" pitchFamily="34" charset="0"/>
-                <a:ea typeface="Pretendard ExtraBold" pitchFamily="34" charset="-127"/>
-                <a:cs typeface="Pretendard ExtraBold" pitchFamily="34" charset="-120"/>
-              </a:rPr>
-              <a:t>연구 결과 및 기여</a:t>
-            </a:r>
-            <a:endParaRPr lang="en-US" sz="1500" dirty="0"/>
-          </a:p>
-        </p:txBody>
-      </p:sp>
-      <p:sp>
-        <p:nvSpPr>
-          <p:cNvPr id="59" name="얼마나 잘 됐고,어떤 의미가 있는가"/>
-          <p:cNvSpPr txBox="1"/>
-          <p:nvPr/>
-        </p:nvSpPr>
-        <p:spPr>
-          <a:xfrm>
-            <a:off x="7416800" y="4588669"/>
-            <a:ext cx="1064550" cy="405011"/>
-          </a:xfrm>
-          <a:prstGeom prst="rect">
-            <a:avLst/>
-          </a:prstGeom>
-          <a:noFill/>
-          <a:ln/>
-        </p:spPr>
-        <p:txBody>
-          <a:bodyPr wrap="none" lIns="0" tIns="0" rIns="0" bIns="0" rtlCol="0" anchor="t"/>
-          <a:lstStyle/>
-          <a:p>
-            <a:pPr algn="l" indent="0" marL="0">
-              <a:lnSpc>
-                <a:spcPts val="1595"/>
-              </a:lnSpc>
-              <a:buNone/>
-            </a:pPr>
-            <a:r>
-              <a:rPr lang="ko-KR" altLang="en-US" sz="1100" spc="-22" kern="0" dirty="0">
-                <a:solidFill>
-                  <a:srgbClr val="3F4654"/>
-                </a:solidFill>
-                <a:latin typeface="Pretendard SemiBold" pitchFamily="34" charset="0"/>
-                <a:ea typeface="Pretendard SemiBold" pitchFamily="34" charset="-127"/>
-                <a:cs typeface="Pretendard SemiBold" pitchFamily="34" charset="-120"/>
-              </a:rPr>
-              <a:t>얼마나 잘 됐고,</a:t>
-            </a:r>
-            <a:br/>
-            <a:r>
-              <a:rPr lang="ko-KR" altLang="en-US" sz="1100" spc="-22" kern="0" dirty="0">
-                <a:solidFill>
-                  <a:srgbClr val="3F4654"/>
-                </a:solidFill>
-                <a:latin typeface="Pretendard SemiBold" pitchFamily="34" charset="0"/>
-                <a:ea typeface="Pretendard SemiBold" pitchFamily="34" charset="-127"/>
-                <a:cs typeface="Pretendard SemiBold" pitchFamily="34" charset="-120"/>
-              </a:rPr>
-              <a:t>어떤 의미가 있는가</a:t>
-            </a:r>
-            <a:endParaRPr lang="en-US" sz="1100" dirty="0"/>
-          </a:p>
-        </p:txBody>
-      </p:sp>
-      <p:sp>
-        <p:nvSpPr>
-          <p:cNvPr id="60" name="05"/>
-          <p:cNvSpPr txBox="1"/>
-          <p:nvPr/>
-        </p:nvSpPr>
-        <p:spPr>
-          <a:xfrm>
-            <a:off x="9804400" y="2619474"/>
-            <a:ext cx="569416" cy="482600"/>
-          </a:xfrm>
-          <a:prstGeom prst="rect">
-            <a:avLst/>
-          </a:prstGeom>
-          <a:noFill/>
-          <a:ln/>
-        </p:spPr>
-        <p:txBody>
-          <a:bodyPr wrap="none" lIns="0" tIns="0" rIns="0" bIns="0" rtlCol="0" anchor="ctr"/>
-          <a:lstStyle/>
-          <a:p>
-            <a:pPr algn="l" indent="0" marL="0">
-              <a:buNone/>
-            </a:pPr>
-            <a:r>
-              <a:rPr lang="ko-KR" altLang="en-US" sz="3200" spc="-69" kern="0" dirty="0">
-                <a:solidFill>
-                  <a:srgbClr val="FFFFFF"/>
-                </a:solidFill>
-                <a:latin typeface="Pretendard ExtraBold" pitchFamily="34" charset="0"/>
-                <a:ea typeface="Pretendard ExtraBold" pitchFamily="34" charset="-127"/>
-                <a:cs typeface="Pretendard ExtraBold" pitchFamily="34" charset="-120"/>
-              </a:rPr>
-              <a:t>05</a:t>
-            </a:r>
-            <a:endParaRPr lang="en-US" sz="3200" dirty="0"/>
-          </a:p>
-        </p:txBody>
-      </p:sp>
-      <p:sp>
-        <p:nvSpPr>
-          <p:cNvPr id="61" name="Utility 기술(건축, BIM/5D)직무와의 연관성"/>
-          <p:cNvSpPr txBox="1"/>
-          <p:nvPr/>
-        </p:nvSpPr>
-        <p:spPr>
-          <a:xfrm>
-            <a:off x="9804400" y="3422154"/>
-            <a:ext cx="1238820" cy="754261"/>
-          </a:xfrm>
-          <a:prstGeom prst="rect">
-            <a:avLst/>
-          </a:prstGeom>
-          <a:noFill/>
-          <a:ln/>
-        </p:spPr>
-        <p:txBody>
-          <a:bodyPr wrap="none" lIns="0" tIns="0" rIns="0" bIns="0" rtlCol="0" anchor="t"/>
-          <a:lstStyle/>
-          <a:p>
-            <a:pPr algn="l" indent="0" marL="0">
-              <a:lnSpc>
-                <a:spcPts val="1980"/>
-              </a:lnSpc>
-              <a:buNone/>
-            </a:pPr>
-            <a:r>
-              <a:rPr lang="ko-KR" altLang="en-US" sz="1500" spc="-53" kern="0" dirty="0">
-                <a:solidFill>
-                  <a:srgbClr val="FFFFFF"/>
-                </a:solidFill>
-                <a:latin typeface="Pretendard ExtraBold" pitchFamily="34" charset="0"/>
-                <a:ea typeface="Pretendard ExtraBold" pitchFamily="34" charset="-127"/>
-                <a:cs typeface="Pretendard ExtraBold" pitchFamily="34" charset="-120"/>
-              </a:rPr>
-              <a:t>Utility 기술</a:t>
-            </a:r>
-            <a:br/>
-            <a:r>
-              <a:rPr lang="ko-KR" altLang="en-US" sz="1500" spc="-53" kern="0" dirty="0">
-                <a:solidFill>
-                  <a:srgbClr val="FFFFFF"/>
-                </a:solidFill>
-                <a:latin typeface="Pretendard ExtraBold" pitchFamily="34" charset="0"/>
-                <a:ea typeface="Pretendard ExtraBold" pitchFamily="34" charset="-127"/>
-                <a:cs typeface="Pretendard ExtraBold" pitchFamily="34" charset="-120"/>
-              </a:rPr>
-              <a:t>(건축, BIM/5D)</a:t>
-            </a:r>
-            <a:br/>
-            <a:r>
-              <a:rPr lang="ko-KR" altLang="en-US" sz="1500" spc="-53" kern="0" dirty="0">
-                <a:solidFill>
-                  <a:srgbClr val="FFFFFF"/>
-                </a:solidFill>
-                <a:latin typeface="Pretendard ExtraBold" pitchFamily="34" charset="0"/>
-                <a:ea typeface="Pretendard ExtraBold" pitchFamily="34" charset="-127"/>
-                <a:cs typeface="Pretendard ExtraBold" pitchFamily="34" charset="-120"/>
-              </a:rPr>
-              <a:t>직무와의 연관성</a:t>
-            </a:r>
-            <a:endParaRPr lang="en-US" sz="1500" dirty="0"/>
-          </a:p>
-        </p:txBody>
-      </p:sp>
-      <p:sp>
-        <p:nvSpPr>
-          <p:cNvPr id="62" name="SK하이닉스 직무에서왜 중요한가"/>
-          <p:cNvSpPr txBox="1"/>
-          <p:nvPr/>
-        </p:nvSpPr>
-        <p:spPr>
-          <a:xfrm>
-            <a:off x="9804400" y="4588669"/>
-            <a:ext cx="1214735" cy="405011"/>
-          </a:xfrm>
-          <a:prstGeom prst="rect">
-            <a:avLst/>
-          </a:prstGeom>
-          <a:noFill/>
-          <a:ln/>
-        </p:spPr>
-        <p:txBody>
-          <a:bodyPr wrap="none" lIns="0" tIns="0" rIns="0" bIns="0" rtlCol="0" anchor="t"/>
-          <a:lstStyle/>
-          <a:p>
-            <a:pPr algn="l" indent="0" marL="0">
-              <a:lnSpc>
-                <a:spcPts val="1595"/>
-              </a:lnSpc>
-              <a:buNone/>
-            </a:pPr>
-            <a:r>
-              <a:rPr lang="ko-KR" altLang="en-US" sz="1100" spc="-22" kern="0" dirty="0">
-                <a:solidFill>
-                  <a:srgbClr val="E3E9F2"/>
-                </a:solidFill>
-                <a:latin typeface="Pretendard SemiBold" pitchFamily="34" charset="0"/>
-                <a:ea typeface="Pretendard SemiBold" pitchFamily="34" charset="-127"/>
-                <a:cs typeface="Pretendard SemiBold" pitchFamily="34" charset="-120"/>
-              </a:rPr>
-              <a:t>SK하이닉스 직무에서</a:t>
-            </a:r>
-            <a:br/>
-            <a:r>
-              <a:rPr lang="ko-KR" altLang="en-US" sz="1100" spc="-22" kern="0" dirty="0">
-                <a:solidFill>
-                  <a:srgbClr val="E3E9F2"/>
-                </a:solidFill>
-                <a:latin typeface="Pretendard SemiBold" pitchFamily="34" charset="0"/>
-                <a:ea typeface="Pretendard SemiBold" pitchFamily="34" charset="-127"/>
-                <a:cs typeface="Pretendard SemiBold" pitchFamily="34" charset="-120"/>
-              </a:rPr>
-              <a:t>왜 중요한가</a:t>
-            </a:r>
-            <a:endParaRPr lang="en-US" sz="1100" dirty="0"/>
-          </a:p>
-        </p:txBody>
-      </p:sp>
-      <p:sp>
-        <p:nvSpPr>
-          <p:cNvPr id="63" name="석사 연구 발표  ·  평면도와 입면도 객체 인식 및 정보 통합을 통한 "/>
-          <p:cNvSpPr txBox="1"/>
-          <p:nvPr/>
-        </p:nvSpPr>
-        <p:spPr>
-          <a:xfrm>
-            <a:off x="609600" y="6472238"/>
-            <a:ext cx="5145113" cy="114300"/>
-          </a:xfrm>
-          <a:prstGeom prst="rect">
-            <a:avLst/>
-          </a:prstGeom>
-          <a:noFill/>
-          <a:ln/>
-        </p:spPr>
-        <p:txBody>
-          <a:bodyPr wrap="none" lIns="0" tIns="0" rIns="0" bIns="0" rtlCol="0" anchor="ctr"/>
-          <a:lstStyle/>
-          <a:p>
-            <a:pPr algn="l" indent="0" marL="0">
-              <a:buNone/>
-            </a:pPr>
-            <a:r>
-              <a:rPr lang="ko-KR" altLang="en-US" sz="750" spc="-12" kern="0" dirty="0">
-                <a:solidFill>
-                  <a:srgbClr val="737C8B"/>
-                </a:solidFill>
-                <a:latin typeface="Pretendard Medium" pitchFamily="34" charset="0"/>
-                <a:ea typeface="Pretendard Medium" pitchFamily="34" charset="-127"/>
-                <a:cs typeface="Pretendard Medium" pitchFamily="34" charset="-120"/>
-              </a:rPr>
-              <a:t>석사 연구 발표  ·  평면도와 입면도 객체 인식 및 정보 통합을 통한 3D BIM 자동 생성 연구  ·  Utility 기술(건축, BIM/5D) 지원자 ○○○</a:t>
-            </a:r>
-            <a:endParaRPr lang="en-US" sz="750" dirty="0"/>
-          </a:p>
-        </p:txBody>
-      </p:sp>
-      <p:sp>
-        <p:nvSpPr>
-          <p:cNvPr id="64" name="01 / 10"/>
-          <p:cNvSpPr txBox="1"/>
-          <p:nvPr/>
-        </p:nvSpPr>
-        <p:spPr>
-          <a:xfrm>
-            <a:off x="11247934" y="6472238"/>
-            <a:ext cx="385266" cy="114300"/>
-          </a:xfrm>
-          <a:prstGeom prst="rect">
-            <a:avLst/>
-          </a:prstGeom>
-          <a:noFill/>
-          <a:ln/>
-        </p:spPr>
-        <p:txBody>
-          <a:bodyPr wrap="none" lIns="0" tIns="0" rIns="0" bIns="0" rtlCol="0" anchor="ctr"/>
-          <a:lstStyle/>
-          <a:p>
-            <a:pPr algn="l" indent="0" marL="0">
-              <a:buNone/>
-            </a:pPr>
-            <a:r>
-              <a:rPr lang="ko-KR" altLang="en-US" sz="750" spc="45" kern="0" dirty="0">
-                <a:solidFill>
-                  <a:srgbClr val="102A4C"/>
-                </a:solidFill>
-                <a:latin typeface="Pretendard ExtraBold" pitchFamily="34" charset="0"/>
-                <a:ea typeface="Pretendard ExtraBold" pitchFamily="34" charset="-127"/>
-                <a:cs typeface="Pretendard ExtraBold" pitchFamily="34" charset="-120"/>
-              </a:rPr>
-              <a:t>01</a:t>
-            </a:r>
-            <a:r>
-              <a:rPr lang="ko-KR" altLang="en-US" sz="750" spc="45" kern="0" dirty="0">
-                <a:solidFill>
-                  <a:srgbClr val="737C8B"/>
-                </a:solidFill>
-                <a:latin typeface="Pretendard SemiBold" pitchFamily="34" charset="0"/>
-                <a:ea typeface="Pretendard SemiBold" pitchFamily="34" charset="-127"/>
-                <a:cs typeface="Pretendard SemiBold" pitchFamily="34" charset="-120"/>
-              </a:rPr>
-              <a:t> / 10</a:t>
-            </a:r>
-            <a:endParaRPr lang="en-US" sz="750" dirty="0"/>
+              <a:t>BIM 모델</a:t>
+            </a:r>
+            <a:endParaRPr lang="en-US" sz="800" dirty="0"/>
           </a:p>
         </p:txBody>
       </p:sp>
